--- a/deck/incident-agent-ablation_5min_canva.pptx
+++ b/deck/incident-agent-ablation_5min_canva.pptx
@@ -3629,10 +3629,12 @@
           <a:lstStyle>
             <a:lvl1pPr algn="l" indent="0" marL="0">
               <a:buNone/>
-              <a:defRPr lang="en-US" sz="4000" b="1" dirty="0">
+              <a:defRPr lang="ko-KR" sz="4000" b="1" dirty="0">
                 <a:solidFill>
                   <a:schemeClr val="bg1"/>
                 </a:solidFill>
+                <a:latin typeface="Noto Sans KR"/>
+                <a:ea typeface="Noto Sans KR"/>
               </a:defRPr>
             </a:lvl1pPr>
           </a:lstStyle>
@@ -3640,7 +3642,10 @@
             <a:pPr algn="l" indent="0" marL="0">
               <a:buNone/>
             </a:pPr>
-            <a:endParaRPr lang="en-US" sz="4000" dirty="0"/>
+            <a:endParaRPr lang="ko-KR" sz="4000" dirty="0">
+              <a:latin typeface="Noto Sans KR"/>
+              <a:ea typeface="Noto Sans KR"/>
+            </a:endParaRPr>
           </a:p>
         </p:txBody>
       </p:sp>
@@ -3668,10 +3673,12 @@
           <a:lstStyle>
             <a:lvl1pPr algn="l" indent="0" marL="0">
               <a:buNone/>
-              <a:defRPr lang="en-US" sz="1800" dirty="0">
+              <a:defRPr lang="ko-KR" sz="1800" dirty="0">
                 <a:solidFill>
                   <a:schemeClr val="bg2"/>
                 </a:solidFill>
+                <a:latin typeface="Noto Sans KR"/>
+                <a:ea typeface="Noto Sans KR"/>
               </a:defRPr>
             </a:lvl1pPr>
           </a:lstStyle>
@@ -3679,7 +3686,10 @@
             <a:pPr algn="l" indent="0" marL="0">
               <a:buNone/>
             </a:pPr>
-            <a:endParaRPr lang="en-US" sz="1800" dirty="0"/>
+            <a:endParaRPr lang="ko-KR" sz="1800" dirty="0">
+              <a:latin typeface="Noto Sans KR"/>
+              <a:ea typeface="Noto Sans KR"/>
+            </a:endParaRPr>
           </a:p>
         </p:txBody>
       </p:sp>
@@ -3739,10 +3749,12 @@
           <a:lstStyle>
             <a:lvl1pPr algn="l" indent="0" marL="0">
               <a:buNone/>
-              <a:defRPr lang="en-US" sz="2800" b="1" dirty="0">
+              <a:defRPr lang="ko-KR" sz="2800" b="1" dirty="0">
                 <a:solidFill>
                   <a:schemeClr val="tx2"/>
                 </a:solidFill>
+                <a:latin typeface="Noto Sans KR"/>
+                <a:ea typeface="Noto Sans KR"/>
               </a:defRPr>
             </a:lvl1pPr>
           </a:lstStyle>
@@ -3750,7 +3762,10 @@
             <a:pPr algn="l" indent="0" marL="0">
               <a:buNone/>
             </a:pPr>
-            <a:endParaRPr lang="en-US" sz="2800" dirty="0"/>
+            <a:endParaRPr lang="ko-KR" sz="2800" dirty="0">
+              <a:latin typeface="Noto Sans KR"/>
+              <a:ea typeface="Noto Sans KR"/>
+            </a:endParaRPr>
           </a:p>
         </p:txBody>
       </p:sp>
@@ -3779,14 +3794,19 @@
               <a:buNone/>
             </a:pPr>
             <a:r>
-              <a:rPr lang="en-US" sz="1000" dirty="0">
+              <a:rPr lang="ko-KR" sz="1000" dirty="0">
                 <a:solidFill>
                   <a:schemeClr val="accent3"/>
                 </a:solidFill>
+                <a:latin typeface="Noto Sans KR"/>
+                <a:ea typeface="Noto Sans KR"/>
               </a:rPr>
               <a:t>SKALA 4기 AI Mini-Project · 과제1 · 장병헌</a:t>
             </a:r>
-            <a:endParaRPr lang="en-US" sz="1000" dirty="0"/>
+            <a:endParaRPr lang="ko-KR" sz="1000" dirty="0">
+              <a:latin typeface="Noto Sans KR"/>
+              <a:ea typeface="Noto Sans KR"/>
+            </a:endParaRPr>
           </a:p>
         </p:txBody>
       </p:sp>
@@ -3822,16 +3842,24 @@
                 <a:solidFill>
                   <a:schemeClr val="accent3"/>
                 </a:solidFill>
+                <a:latin typeface="Noto Sans KR"/>
+                <a:ea typeface="Noto Sans KR"/>
               </a:defRPr>
             </a:lvl1pPr>
           </a:lstStyle>
           <a:p>
             <a:pPr algn="r"/>
             <a:fld id="{F7021451-1387-4CA6-816F-3879F97B5CBC}" type="slidenum">
-              <a:rPr b="0" lang="en-US"/>
+              <a:rPr b="0" lang="ko-KR">
+                <a:latin typeface="Noto Sans KR"/>
+                <a:ea typeface="Noto Sans KR"/>
+              </a:rPr>
               <a:t>1003</a:t>
             </a:fld>
-            <a:endParaRPr lang="en-US"/>
+            <a:endParaRPr lang="ko-KR">
+              <a:latin typeface="Noto Sans KR"/>
+              <a:ea typeface="Noto Sans KR"/>
+            </a:endParaRPr>
           </a:p>
         </p:txBody>
       </p:sp>
@@ -3892,16 +3920,24 @@
                 <a:solidFill>
                   <a:schemeClr val="accent3"/>
                 </a:solidFill>
+                <a:latin typeface="Noto Sans KR"/>
+                <a:ea typeface="Noto Sans KR"/>
               </a:defRPr>
             </a:lvl1pPr>
           </a:lstStyle>
           <a:p>
             <a:pPr algn="r"/>
             <a:fld id="{F7021451-1387-4CA6-816F-3879F97B5CBC}" type="slidenum">
-              <a:rPr b="0" lang="en-US"/>
+              <a:rPr b="0" lang="ko-KR">
+                <a:latin typeface="Noto Sans KR"/>
+                <a:ea typeface="Noto Sans KR"/>
+              </a:rPr>
               <a:t>null</a:t>
             </a:fld>
-            <a:endParaRPr lang="en-US"/>
+            <a:endParaRPr lang="ko-KR">
+              <a:latin typeface="Noto Sans KR"/>
+              <a:ea typeface="Noto Sans KR"/>
+            </a:endParaRPr>
           </a:p>
         </p:txBody>
       </p:sp>
@@ -4070,7 +4106,10 @@
     </p:bodyStyle>
     <p:otherStyle>
       <a:defPPr>
-        <a:defRPr lang="en-US"/>
+        <a:defRPr lang="ko-KR">
+          <a:latin typeface="Noto Sans KR"/>
+          <a:ea typeface="Noto Sans KR"/>
+        </a:defRPr>
       </a:defPPr>
       <a:lvl1pPr marL="0" algn="l" defTabSz="914400" rtl="0" eaLnBrk="1" latinLnBrk="0" hangingPunct="1">
         <a:defRPr sz="1800" kern="1200">
@@ -4211,14 +4250,19 @@
               <a:buNone/>
             </a:pPr>
             <a:r>
-              <a:rPr lang="en-US" sz="4000" b="1" dirty="0">
+              <a:rPr lang="ko-KR" sz="4000" b="1" dirty="0">
                 <a:solidFill>
                   <a:schemeClr val="bg1"/>
                 </a:solidFill>
+                <a:latin typeface="Noto Sans KR"/>
+                <a:ea typeface="Noto Sans KR"/>
               </a:rPr>
               <a:t>개선 효과를 통계로 분리하고, AI 평가자의 관대함까지 쟀다</a:t>
             </a:r>
-            <a:endParaRPr lang="en-US" sz="4000" dirty="0"/>
+            <a:endParaRPr lang="ko-KR" sz="4000" dirty="0">
+              <a:latin typeface="Noto Sans KR"/>
+              <a:ea typeface="Noto Sans KR"/>
+            </a:endParaRPr>
           </a:p>
         </p:txBody>
       </p:sp>
@@ -4249,28 +4293,38 @@
               <a:buNone/>
             </a:pPr>
             <a:r>
-              <a:rPr lang="en-US" sz="1800" dirty="0">
+              <a:rPr lang="ko-KR" sz="1800" dirty="0">
                 <a:solidFill>
                   <a:schemeClr val="bg2"/>
                 </a:solidFill>
+                <a:latin typeface="Noto Sans KR"/>
+                <a:ea typeface="Noto Sans KR"/>
               </a:rPr>
               <a:t>인시던트 대응 에이전트 개선을 하나씩 켠 7구성 Ablation · 조정에 쓰지 않은 holdout 36건 · 3회 반복</a:t>
             </a:r>
-            <a:endParaRPr lang="en-US" sz="1800" dirty="0"/>
+            <a:endParaRPr lang="ko-KR" sz="1800" dirty="0">
+              <a:latin typeface="Noto Sans KR"/>
+              <a:ea typeface="Noto Sans KR"/>
+            </a:endParaRPr>
           </a:p>
           <a:p>
             <a:pPr algn="l" indent="0" marL="0">
               <a:buNone/>
             </a:pPr>
             <a:r>
-              <a:rPr lang="en-US" sz="1400" dirty="0">
+              <a:rPr lang="ko-KR" sz="1400" dirty="0">
                 <a:solidFill>
                   <a:schemeClr val="accent3"/>
                 </a:solidFill>
+                <a:latin typeface="Noto Sans KR"/>
+                <a:ea typeface="Noto Sans KR"/>
               </a:rPr>
               <a:t>SKALA 4기 AI Mini-Project 과제1 · 광주 2반 장병헌 (G062)</a:t>
             </a:r>
-            <a:endParaRPr lang="en-US" sz="1800" dirty="0"/>
+            <a:endParaRPr lang="ko-KR" sz="1800" dirty="0">
+              <a:latin typeface="Noto Sans KR"/>
+              <a:ea typeface="Noto Sans KR"/>
+            </a:endParaRPr>
           </a:p>
         </p:txBody>
       </p:sp>
@@ -4326,14 +4380,19 @@
               <a:buNone/>
             </a:pPr>
             <a:r>
-              <a:rPr lang="en-US" sz="2800" b="1" dirty="0">
+              <a:rPr lang="ko-KR" sz="2800" b="1" dirty="0">
                 <a:solidFill>
                   <a:schemeClr val="tx2"/>
                 </a:solidFill>
+                <a:latin typeface="Noto Sans KR"/>
+                <a:ea typeface="Noto Sans KR"/>
               </a:rPr>
               <a:t>Before/After 1: 누락은 RAG가, 무관 런북 혼입은 v2가 줄였다</a:t>
             </a:r>
-            <a:endParaRPr lang="en-US" sz="2800" dirty="0"/>
+            <a:endParaRPr lang="ko-KR" sz="2800" dirty="0">
+              <a:latin typeface="Noto Sans KR"/>
+              <a:ea typeface="Noto Sans KR"/>
+            </a:endParaRPr>
           </a:p>
         </p:txBody>
       </p:sp>
@@ -4394,14 +4453,19 @@
               <a:buNone/>
             </a:pPr>
             <a:r>
-              <a:rPr lang="en-US" sz="1050" dirty="0">
+              <a:rPr lang="ko-KR" sz="1050" dirty="0">
                 <a:solidFill>
                   <a:schemeClr val="accent3"/>
                 </a:solidFill>
+                <a:latin typeface="Noto Sans KR"/>
+                <a:ea typeface="Noto Sans KR"/>
               </a:rPr>
               <a:t>holdout, 3회 평균. 누락·혼입은 장애 경로 질의 기준. Recall@1·MRR은 gold 있는 holdout 질의 전체 기준: 33% → 52%, MRR 0.37 → 0.68. 누락 = 맞는 조치를 못 줄 위험, 혼입 = 잘못된 조치를 섞을 위험</a:t>
             </a:r>
-            <a:endParaRPr lang="en-US" sz="1050" dirty="0"/>
+            <a:endParaRPr lang="ko-KR" sz="1050" dirty="0">
+              <a:latin typeface="Noto Sans KR"/>
+              <a:ea typeface="Noto Sans KR"/>
+            </a:endParaRPr>
           </a:p>
         </p:txBody>
       </p:sp>
@@ -4437,16 +4501,24 @@
                 <a:solidFill>
                   <a:schemeClr val="accent3"/>
                 </a:solidFill>
+                <a:latin typeface="Noto Sans KR"/>
+                <a:ea typeface="Noto Sans KR"/>
               </a:defRPr>
             </a:lvl1pPr>
           </a:lstStyle>
           <a:p>
             <a:pPr algn="r"/>
             <a:fld id="{F7021451-1387-4CA6-816F-3879F97B5CBC}" type="slidenum">
-              <a:rPr b="0" lang="en-US"/>
+              <a:rPr b="0" lang="ko-KR">
+                <a:latin typeface="Noto Sans KR"/>
+                <a:ea typeface="Noto Sans KR"/>
+              </a:rPr>
               <a:t>10</a:t>
             </a:fld>
-            <a:endParaRPr lang="en-US"/>
+            <a:endParaRPr lang="ko-KR">
+              <a:latin typeface="Noto Sans KR"/>
+              <a:ea typeface="Noto Sans KR"/>
+            </a:endParaRPr>
           </a:p>
         </p:txBody>
       </p:sp>
@@ -4502,14 +4574,19 @@
               <a:buNone/>
             </a:pPr>
             <a:r>
-              <a:rPr lang="en-US" sz="2800" b="1" dirty="0">
+              <a:rPr lang="ko-KR" sz="2800" b="1" dirty="0">
                 <a:solidFill>
                   <a:schemeClr val="tx2"/>
                 </a:solidFill>
+                <a:latin typeface="Noto Sans KR"/>
+                <a:ea typeface="Noto Sans KR"/>
               </a:rPr>
               <a:t>Before/After 2: 개선별 기여도 — 같은 질의끼리 짝지어 비교했다</a:t>
             </a:r>
-            <a:endParaRPr lang="en-US" sz="2800" dirty="0"/>
+            <a:endParaRPr lang="ko-KR" sz="2800" dirty="0">
+              <a:latin typeface="Noto Sans KR"/>
+              <a:ea typeface="Noto Sans KR"/>
+            </a:endParaRPr>
           </a:p>
         </p:txBody>
       </p:sp>
@@ -4554,14 +4631,19 @@
                         <a:buNone/>
                       </a:pPr>
                       <a:r>
-                        <a:rPr lang="en-US" sz="1250" b="1" dirty="0">
+                        <a:rPr lang="ko-KR" sz="1250" b="1" dirty="0">
                           <a:solidFill>
                             <a:srgbClr val="FFFFFF"/>
                           </a:solidFill>
+                          <a:latin typeface="Noto Sans KR"/>
+                          <a:ea typeface="Noto Sans KR"/>
                         </a:rPr>
                         <a:t>켠 것</a:t>
                       </a:r>
-                      <a:endParaRPr lang="en-US" sz="1250" dirty="0"/>
+                      <a:endParaRPr lang="ko-KR" sz="1250" dirty="0">
+                        <a:latin typeface="Noto Sans KR"/>
+                        <a:ea typeface="Noto Sans KR"/>
+                      </a:endParaRPr>
                     </a:p>
                   </a:txBody>
                   <a:tcPr marL="91440" marR="91440" marT="45720" marB="45720" anchor="ctr">
@@ -4615,14 +4697,19 @@
                         <a:buNone/>
                       </a:pPr>
                       <a:r>
-                        <a:rPr lang="en-US" sz="1250" b="1" dirty="0">
+                        <a:rPr lang="ko-KR" sz="1250" b="1" dirty="0">
                           <a:solidFill>
                             <a:srgbClr val="FFFFFF"/>
                           </a:solidFill>
+                          <a:latin typeface="Noto Sans KR"/>
+                          <a:ea typeface="Noto Sans KR"/>
                         </a:rPr>
                         <a:t>정답 누락</a:t>
                       </a:r>
-                      <a:endParaRPr lang="en-US" sz="1250" dirty="0"/>
+                      <a:endParaRPr lang="ko-KR" sz="1250" dirty="0">
+                        <a:latin typeface="Noto Sans KR"/>
+                        <a:ea typeface="Noto Sans KR"/>
+                      </a:endParaRPr>
                     </a:p>
                   </a:txBody>
                   <a:tcPr marL="91440" marR="91440" marT="45720" marB="45720" anchor="ctr">
@@ -4676,14 +4763,19 @@
                         <a:buNone/>
                       </a:pPr>
                       <a:r>
-                        <a:rPr lang="en-US" sz="1250" b="1" dirty="0">
+                        <a:rPr lang="ko-KR" sz="1250" b="1" dirty="0">
                           <a:solidFill>
                             <a:srgbClr val="FFFFFF"/>
                           </a:solidFill>
+                          <a:latin typeface="Noto Sans KR"/>
+                          <a:ea typeface="Noto Sans KR"/>
                         </a:rPr>
                         <a:t>무관 혼입</a:t>
                       </a:r>
-                      <a:endParaRPr lang="en-US" sz="1250" dirty="0"/>
+                      <a:endParaRPr lang="ko-KR" sz="1250" dirty="0">
+                        <a:latin typeface="Noto Sans KR"/>
+                        <a:ea typeface="Noto Sans KR"/>
+                      </a:endParaRPr>
                     </a:p>
                   </a:txBody>
                   <a:tcPr marL="91440" marR="91440" marT="45720" marB="45720" anchor="ctr">
@@ -4737,14 +4829,19 @@
                         <a:buNone/>
                       </a:pPr>
                       <a:r>
-                        <a:rPr lang="en-US" sz="1250" b="1" dirty="0">
+                        <a:rPr lang="ko-KR" sz="1250" b="1" dirty="0">
                           <a:solidFill>
                             <a:srgbClr val="FFFFFF"/>
                           </a:solidFill>
+                          <a:latin typeface="Noto Sans KR"/>
+                          <a:ea typeface="Noto Sans KR"/>
                         </a:rPr>
                         <a:t>어구 포함</a:t>
                       </a:r>
-                      <a:endParaRPr lang="en-US" sz="1250" dirty="0"/>
+                      <a:endParaRPr lang="ko-KR" sz="1250" dirty="0">
+                        <a:latin typeface="Noto Sans KR"/>
+                        <a:ea typeface="Noto Sans KR"/>
+                      </a:endParaRPr>
                     </a:p>
                   </a:txBody>
                   <a:tcPr marL="91440" marR="91440" marT="45720" marB="45720" anchor="ctr">
@@ -4798,14 +4895,19 @@
                         <a:buNone/>
                       </a:pPr>
                       <a:r>
-                        <a:rPr lang="en-US" sz="1250" b="1" dirty="0">
+                        <a:rPr lang="ko-KR" sz="1250" b="1" dirty="0">
                           <a:solidFill>
                             <a:srgbClr val="FFFFFF"/>
                           </a:solidFill>
+                          <a:latin typeface="Noto Sans KR"/>
+                          <a:ea typeface="Noto Sans KR"/>
                         </a:rPr>
                         <a:t>Judge 통과</a:t>
                       </a:r>
-                      <a:endParaRPr lang="en-US" sz="1250" dirty="0"/>
+                      <a:endParaRPr lang="ko-KR" sz="1250" dirty="0">
+                        <a:latin typeface="Noto Sans KR"/>
+                        <a:ea typeface="Noto Sans KR"/>
+                      </a:endParaRPr>
                     </a:p>
                   </a:txBody>
                   <a:tcPr marL="91440" marR="91440" marT="45720" marB="45720" anchor="ctr">
@@ -4859,14 +4961,19 @@
                         <a:buNone/>
                       </a:pPr>
                       <a:r>
-                        <a:rPr lang="en-US" sz="1250" b="1" dirty="0">
+                        <a:rPr lang="ko-KR" sz="1250" b="1" dirty="0">
                           <a:solidFill>
                             <a:srgbClr val="FFFFFF"/>
                           </a:solidFill>
+                          <a:latin typeface="Noto Sans KR"/>
+                          <a:ea typeface="Noto Sans KR"/>
                         </a:rPr>
                         <a:t>질의당 비용</a:t>
                       </a:r>
-                      <a:endParaRPr lang="en-US" sz="1250" dirty="0"/>
+                      <a:endParaRPr lang="ko-KR" sz="1250" dirty="0">
+                        <a:latin typeface="Noto Sans KR"/>
+                        <a:ea typeface="Noto Sans KR"/>
+                      </a:endParaRPr>
                     </a:p>
                   </a:txBody>
                   <a:tcPr marL="91440" marR="91440" marT="45720" marB="45720" anchor="ctr">
@@ -4920,14 +5027,19 @@
                         <a:buNone/>
                       </a:pPr>
                       <a:r>
-                        <a:rPr lang="en-US" sz="1250" b="1" dirty="0">
+                        <a:rPr lang="ko-KR" sz="1250" b="1" dirty="0">
                           <a:solidFill>
                             <a:srgbClr val="FFFFFF"/>
                           </a:solidFill>
+                          <a:latin typeface="Noto Sans KR"/>
+                          <a:ea typeface="Noto Sans KR"/>
                         </a:rPr>
                         <a:t>질의당 지연</a:t>
                       </a:r>
-                      <a:endParaRPr lang="en-US" sz="1250" dirty="0"/>
+                      <a:endParaRPr lang="ko-KR" sz="1250" dirty="0">
+                        <a:latin typeface="Noto Sans KR"/>
+                        <a:ea typeface="Noto Sans KR"/>
+                      </a:endParaRPr>
                     </a:p>
                   </a:txBody>
                   <a:tcPr marL="91440" marR="91440" marT="45720" marB="45720" anchor="ctr">
@@ -4983,14 +5095,19 @@
                         <a:buNone/>
                       </a:pPr>
                       <a:r>
-                        <a:rPr lang="en-US" sz="1250" dirty="0">
+                        <a:rPr lang="ko-KR" sz="1250" dirty="0">
                           <a:solidFill>
                             <a:srgbClr val="1A2230"/>
                           </a:solidFill>
+                          <a:latin typeface="Noto Sans KR"/>
+                          <a:ea typeface="Noto Sans KR"/>
                         </a:rPr>
                         <a:t>RAG 단독</a:t>
                       </a:r>
-                      <a:endParaRPr lang="en-US" sz="1250" dirty="0"/>
+                      <a:endParaRPr lang="ko-KR" sz="1250" dirty="0">
+                        <a:latin typeface="Noto Sans KR"/>
+                        <a:ea typeface="Noto Sans KR"/>
+                      </a:endParaRPr>
                     </a:p>
                   </a:txBody>
                   <a:tcPr marL="91440" marR="91440" marT="45720" marB="45720" anchor="ctr">
@@ -5041,14 +5158,19 @@
                         <a:buNone/>
                       </a:pPr>
                       <a:r>
-                        <a:rPr lang="en-US" sz="1250" b="1" dirty="0">
+                        <a:rPr lang="ko-KR" sz="1250" b="1" dirty="0">
                           <a:solidFill>
                             <a:srgbClr val="1A2230"/>
                           </a:solidFill>
+                          <a:latin typeface="Noto Sans KR"/>
+                          <a:ea typeface="Noto Sans KR"/>
                         </a:rPr>
                         <a:t>-46%p ★</a:t>
                       </a:r>
-                      <a:endParaRPr lang="en-US" sz="1250" dirty="0"/>
+                      <a:endParaRPr lang="ko-KR" sz="1250" dirty="0">
+                        <a:latin typeface="Noto Sans KR"/>
+                        <a:ea typeface="Noto Sans KR"/>
+                      </a:endParaRPr>
                     </a:p>
                   </a:txBody>
                   <a:tcPr marL="91440" marR="91440" marT="45720" marB="45720" anchor="ctr">
@@ -5102,14 +5224,19 @@
                         <a:buNone/>
                       </a:pPr>
                       <a:r>
-                        <a:rPr lang="en-US" sz="1250" dirty="0">
+                        <a:rPr lang="ko-KR" sz="1250" dirty="0">
                           <a:solidFill>
                             <a:srgbClr val="1A2230"/>
                           </a:solidFill>
+                          <a:latin typeface="Noto Sans KR"/>
+                          <a:ea typeface="Noto Sans KR"/>
                         </a:rPr>
                         <a:t>-6%p</a:t>
                       </a:r>
-                      <a:endParaRPr lang="en-US" sz="1250" dirty="0"/>
+                      <a:endParaRPr lang="ko-KR" sz="1250" dirty="0">
+                        <a:latin typeface="Noto Sans KR"/>
+                        <a:ea typeface="Noto Sans KR"/>
+                      </a:endParaRPr>
                     </a:p>
                   </a:txBody>
                   <a:tcPr marL="91440" marR="91440" marT="45720" marB="45720" anchor="ctr">
@@ -5160,14 +5287,19 @@
                         <a:buNone/>
                       </a:pPr>
                       <a:r>
-                        <a:rPr lang="en-US" sz="1250" b="1" dirty="0">
+                        <a:rPr lang="ko-KR" sz="1250" b="1" dirty="0">
                           <a:solidFill>
                             <a:srgbClr val="1A2230"/>
                           </a:solidFill>
+                          <a:latin typeface="Noto Sans KR"/>
+                          <a:ea typeface="Noto Sans KR"/>
                         </a:rPr>
                         <a:t>+37%p ★</a:t>
                       </a:r>
-                      <a:endParaRPr lang="en-US" sz="1250" dirty="0"/>
+                      <a:endParaRPr lang="ko-KR" sz="1250" dirty="0">
+                        <a:latin typeface="Noto Sans KR"/>
+                        <a:ea typeface="Noto Sans KR"/>
+                      </a:endParaRPr>
                     </a:p>
                   </a:txBody>
                   <a:tcPr marL="91440" marR="91440" marT="45720" marB="45720" anchor="ctr">
@@ -5221,14 +5353,19 @@
                         <a:buNone/>
                       </a:pPr>
                       <a:r>
-                        <a:rPr lang="en-US" sz="1250" b="1" dirty="0">
+                        <a:rPr lang="ko-KR" sz="1250" b="1" dirty="0">
                           <a:solidFill>
                             <a:srgbClr val="1A2230"/>
                           </a:solidFill>
+                          <a:latin typeface="Noto Sans KR"/>
+                          <a:ea typeface="Noto Sans KR"/>
                         </a:rPr>
                         <a:t>+20%p ★</a:t>
                       </a:r>
-                      <a:endParaRPr lang="en-US" sz="1250" dirty="0"/>
+                      <a:endParaRPr lang="ko-KR" sz="1250" dirty="0">
+                        <a:latin typeface="Noto Sans KR"/>
+                        <a:ea typeface="Noto Sans KR"/>
+                      </a:endParaRPr>
                     </a:p>
                   </a:txBody>
                   <a:tcPr marL="91440" marR="91440" marT="45720" marB="45720" anchor="ctr">
@@ -5282,14 +5419,19 @@
                         <a:buNone/>
                       </a:pPr>
                       <a:r>
-                        <a:rPr lang="en-US" sz="1250" b="1" dirty="0">
+                        <a:rPr lang="ko-KR" sz="1250" b="1" dirty="0">
                           <a:solidFill>
                             <a:srgbClr val="1A2230"/>
                           </a:solidFill>
+                          <a:latin typeface="Noto Sans KR"/>
+                          <a:ea typeface="Noto Sans KR"/>
                         </a:rPr>
                         <a:t>+0.0004 ★</a:t>
                       </a:r>
-                      <a:endParaRPr lang="en-US" sz="1250" dirty="0"/>
+                      <a:endParaRPr lang="ko-KR" sz="1250" dirty="0">
+                        <a:latin typeface="Noto Sans KR"/>
+                        <a:ea typeface="Noto Sans KR"/>
+                      </a:endParaRPr>
                     </a:p>
                   </a:txBody>
                   <a:tcPr marL="91440" marR="91440" marT="45720" marB="45720" anchor="ctr">
@@ -5343,14 +5485,19 @@
                         <a:buNone/>
                       </a:pPr>
                       <a:r>
-                        <a:rPr lang="en-US" sz="1250" b="1" dirty="0">
+                        <a:rPr lang="ko-KR" sz="1250" b="1" dirty="0">
                           <a:solidFill>
                             <a:srgbClr val="1A2230"/>
                           </a:solidFill>
+                          <a:latin typeface="Noto Sans KR"/>
+                          <a:ea typeface="Noto Sans KR"/>
                         </a:rPr>
                         <a:t>+0.4초 ★</a:t>
                       </a:r>
-                      <a:endParaRPr lang="en-US" sz="1250" dirty="0"/>
+                      <a:endParaRPr lang="ko-KR" sz="1250" dirty="0">
+                        <a:latin typeface="Noto Sans KR"/>
+                        <a:ea typeface="Noto Sans KR"/>
+                      </a:endParaRPr>
                     </a:p>
                   </a:txBody>
                   <a:tcPr marL="91440" marR="91440" marT="45720" marB="45720" anchor="ctr">
@@ -5406,14 +5553,19 @@
                         <a:buNone/>
                       </a:pPr>
                       <a:r>
-                        <a:rPr lang="en-US" sz="1250" dirty="0">
+                        <a:rPr lang="ko-KR" sz="1250" dirty="0">
                           <a:solidFill>
                             <a:srgbClr val="1A2230"/>
                           </a:solidFill>
+                          <a:latin typeface="Noto Sans KR"/>
+                          <a:ea typeface="Noto Sans KR"/>
                         </a:rPr>
                         <a:t>Judge 단독</a:t>
                       </a:r>
-                      <a:endParaRPr lang="en-US" sz="1250" dirty="0"/>
+                      <a:endParaRPr lang="ko-KR" sz="1250" dirty="0">
+                        <a:latin typeface="Noto Sans KR"/>
+                        <a:ea typeface="Noto Sans KR"/>
+                      </a:endParaRPr>
                     </a:p>
                   </a:txBody>
                   <a:tcPr marL="91440" marR="91440" marT="45720" marB="45720" anchor="ctr">
@@ -5464,14 +5616,19 @@
                         <a:buNone/>
                       </a:pPr>
                       <a:r>
-                        <a:rPr lang="en-US" sz="1250" dirty="0">
+                        <a:rPr lang="ko-KR" sz="1250" dirty="0">
                           <a:solidFill>
                             <a:srgbClr val="1A2230"/>
                           </a:solidFill>
+                          <a:latin typeface="Noto Sans KR"/>
+                          <a:ea typeface="Noto Sans KR"/>
                         </a:rPr>
                         <a:t>-1%p</a:t>
                       </a:r>
-                      <a:endParaRPr lang="en-US" sz="1250" dirty="0"/>
+                      <a:endParaRPr lang="ko-KR" sz="1250" dirty="0">
+                        <a:latin typeface="Noto Sans KR"/>
+                        <a:ea typeface="Noto Sans KR"/>
+                      </a:endParaRPr>
                     </a:p>
                   </a:txBody>
                   <a:tcPr marL="91440" marR="91440" marT="45720" marB="45720" anchor="ctr">
@@ -5522,14 +5679,19 @@
                         <a:buNone/>
                       </a:pPr>
                       <a:r>
-                        <a:rPr lang="en-US" sz="1250" dirty="0">
+                        <a:rPr lang="ko-KR" sz="1250" dirty="0">
                           <a:solidFill>
                             <a:srgbClr val="1A2230"/>
                           </a:solidFill>
+                          <a:latin typeface="Noto Sans KR"/>
+                          <a:ea typeface="Noto Sans KR"/>
                         </a:rPr>
                         <a:t>-1%p</a:t>
                       </a:r>
-                      <a:endParaRPr lang="en-US" sz="1250" dirty="0"/>
+                      <a:endParaRPr lang="ko-KR" sz="1250" dirty="0">
+                        <a:latin typeface="Noto Sans KR"/>
+                        <a:ea typeface="Noto Sans KR"/>
+                      </a:endParaRPr>
                     </a:p>
                   </a:txBody>
                   <a:tcPr marL="91440" marR="91440" marT="45720" marB="45720" anchor="ctr">
@@ -5580,14 +5742,19 @@
                         <a:buNone/>
                       </a:pPr>
                       <a:r>
-                        <a:rPr lang="en-US" sz="1250" dirty="0">
+                        <a:rPr lang="ko-KR" sz="1250" dirty="0">
                           <a:solidFill>
                             <a:srgbClr val="1A2230"/>
                           </a:solidFill>
+                          <a:latin typeface="Noto Sans KR"/>
+                          <a:ea typeface="Noto Sans KR"/>
                         </a:rPr>
                         <a:t>+2%p</a:t>
                       </a:r>
-                      <a:endParaRPr lang="en-US" sz="1250" dirty="0"/>
+                      <a:endParaRPr lang="ko-KR" sz="1250" dirty="0">
+                        <a:latin typeface="Noto Sans KR"/>
+                        <a:ea typeface="Noto Sans KR"/>
+                      </a:endParaRPr>
                     </a:p>
                   </a:txBody>
                   <a:tcPr marL="91440" marR="91440" marT="45720" marB="45720" anchor="ctr">
@@ -5638,14 +5805,19 @@
                         <a:buNone/>
                       </a:pPr>
                       <a:r>
-                        <a:rPr lang="en-US" sz="1250" dirty="0">
+                        <a:rPr lang="ko-KR" sz="1250" dirty="0">
                           <a:solidFill>
                             <a:srgbClr val="1A2230"/>
                           </a:solidFill>
+                          <a:latin typeface="Noto Sans KR"/>
+                          <a:ea typeface="Noto Sans KR"/>
                         </a:rPr>
                         <a:t>+3%p</a:t>
                       </a:r>
-                      <a:endParaRPr lang="en-US" sz="1250" dirty="0"/>
+                      <a:endParaRPr lang="ko-KR" sz="1250" dirty="0">
+                        <a:latin typeface="Noto Sans KR"/>
+                        <a:ea typeface="Noto Sans KR"/>
+                      </a:endParaRPr>
                     </a:p>
                   </a:txBody>
                   <a:tcPr marL="91440" marR="91440" marT="45720" marB="45720" anchor="ctr">
@@ -5696,14 +5868,19 @@
                         <a:buNone/>
                       </a:pPr>
                       <a:r>
-                        <a:rPr lang="en-US" sz="1250" b="1" dirty="0">
+                        <a:rPr lang="ko-KR" sz="1250" b="1" dirty="0">
                           <a:solidFill>
                             <a:srgbClr val="1A2230"/>
                           </a:solidFill>
+                          <a:latin typeface="Noto Sans KR"/>
+                          <a:ea typeface="Noto Sans KR"/>
                         </a:rPr>
                         <a:t>+0.0009 ★</a:t>
                       </a:r>
-                      <a:endParaRPr lang="en-US" sz="1250" dirty="0"/>
+                      <a:endParaRPr lang="ko-KR" sz="1250" dirty="0">
+                        <a:latin typeface="Noto Sans KR"/>
+                        <a:ea typeface="Noto Sans KR"/>
+                      </a:endParaRPr>
                     </a:p>
                   </a:txBody>
                   <a:tcPr marL="91440" marR="91440" marT="45720" marB="45720" anchor="ctr">
@@ -5757,14 +5934,19 @@
                         <a:buNone/>
                       </a:pPr>
                       <a:r>
-                        <a:rPr lang="en-US" sz="1250" b="1" dirty="0">
+                        <a:rPr lang="ko-KR" sz="1250" b="1" dirty="0">
                           <a:solidFill>
                             <a:srgbClr val="1A2230"/>
                           </a:solidFill>
+                          <a:latin typeface="Noto Sans KR"/>
+                          <a:ea typeface="Noto Sans KR"/>
                         </a:rPr>
                         <a:t>+2.3초 ★</a:t>
                       </a:r>
-                      <a:endParaRPr lang="en-US" sz="1250" dirty="0"/>
+                      <a:endParaRPr lang="ko-KR" sz="1250" dirty="0">
+                        <a:latin typeface="Noto Sans KR"/>
+                        <a:ea typeface="Noto Sans KR"/>
+                      </a:endParaRPr>
                     </a:p>
                   </a:txBody>
                   <a:tcPr marL="91440" marR="91440" marT="45720" marB="45720" anchor="ctr">
@@ -5820,14 +6002,19 @@
                         <a:buNone/>
                       </a:pPr>
                       <a:r>
-                        <a:rPr lang="en-US" sz="1250" dirty="0">
+                        <a:rPr lang="ko-KR" sz="1250" dirty="0">
                           <a:solidFill>
                             <a:srgbClr val="1A2230"/>
                           </a:solidFill>
+                          <a:latin typeface="Noto Sans KR"/>
+                          <a:ea typeface="Noto Sans KR"/>
                         </a:rPr>
                         <a:t>RAG 위에 Judge</a:t>
                       </a:r>
-                      <a:endParaRPr lang="en-US" sz="1250" dirty="0"/>
+                      <a:endParaRPr lang="ko-KR" sz="1250" dirty="0">
+                        <a:latin typeface="Noto Sans KR"/>
+                        <a:ea typeface="Noto Sans KR"/>
+                      </a:endParaRPr>
                     </a:p>
                   </a:txBody>
                   <a:tcPr marL="91440" marR="91440" marT="45720" marB="45720" anchor="ctr">
@@ -5878,14 +6065,19 @@
                         <a:buNone/>
                       </a:pPr>
                       <a:r>
-                        <a:rPr lang="en-US" sz="1250" dirty="0">
+                        <a:rPr lang="ko-KR" sz="1250" dirty="0">
                           <a:solidFill>
                             <a:srgbClr val="1A2230"/>
                           </a:solidFill>
+                          <a:latin typeface="Noto Sans KR"/>
+                          <a:ea typeface="Noto Sans KR"/>
                         </a:rPr>
                         <a:t>+0%p</a:t>
                       </a:r>
-                      <a:endParaRPr lang="en-US" sz="1250" dirty="0"/>
+                      <a:endParaRPr lang="ko-KR" sz="1250" dirty="0">
+                        <a:latin typeface="Noto Sans KR"/>
+                        <a:ea typeface="Noto Sans KR"/>
+                      </a:endParaRPr>
                     </a:p>
                   </a:txBody>
                   <a:tcPr marL="91440" marR="91440" marT="45720" marB="45720" anchor="ctr">
@@ -5936,14 +6128,19 @@
                         <a:buNone/>
                       </a:pPr>
                       <a:r>
-                        <a:rPr lang="en-US" sz="1250" dirty="0">
+                        <a:rPr lang="ko-KR" sz="1250" dirty="0">
                           <a:solidFill>
                             <a:srgbClr val="1A2230"/>
                           </a:solidFill>
+                          <a:latin typeface="Noto Sans KR"/>
+                          <a:ea typeface="Noto Sans KR"/>
                         </a:rPr>
                         <a:t>+0%p</a:t>
                       </a:r>
-                      <a:endParaRPr lang="en-US" sz="1250" dirty="0"/>
+                      <a:endParaRPr lang="ko-KR" sz="1250" dirty="0">
+                        <a:latin typeface="Noto Sans KR"/>
+                        <a:ea typeface="Noto Sans KR"/>
+                      </a:endParaRPr>
                     </a:p>
                   </a:txBody>
                   <a:tcPr marL="91440" marR="91440" marT="45720" marB="45720" anchor="ctr">
@@ -5994,14 +6191,19 @@
                         <a:buNone/>
                       </a:pPr>
                       <a:r>
-                        <a:rPr lang="en-US" sz="1250" dirty="0">
+                        <a:rPr lang="ko-KR" sz="1250" dirty="0">
                           <a:solidFill>
                             <a:srgbClr val="1A2230"/>
                           </a:solidFill>
+                          <a:latin typeface="Noto Sans KR"/>
+                          <a:ea typeface="Noto Sans KR"/>
                         </a:rPr>
                         <a:t>-3%p</a:t>
                       </a:r>
-                      <a:endParaRPr lang="en-US" sz="1250" dirty="0"/>
+                      <a:endParaRPr lang="ko-KR" sz="1250" dirty="0">
+                        <a:latin typeface="Noto Sans KR"/>
+                        <a:ea typeface="Noto Sans KR"/>
+                      </a:endParaRPr>
                     </a:p>
                   </a:txBody>
                   <a:tcPr marL="91440" marR="91440" marT="45720" marB="45720" anchor="ctr">
@@ -6052,14 +6254,19 @@
                         <a:buNone/>
                       </a:pPr>
                       <a:r>
-                        <a:rPr lang="en-US" sz="1250" dirty="0">
+                        <a:rPr lang="ko-KR" sz="1250" dirty="0">
                           <a:solidFill>
                             <a:srgbClr val="1A2230"/>
                           </a:solidFill>
+                          <a:latin typeface="Noto Sans KR"/>
+                          <a:ea typeface="Noto Sans KR"/>
                         </a:rPr>
                         <a:t>0%p</a:t>
                       </a:r>
-                      <a:endParaRPr lang="en-US" sz="1250" dirty="0"/>
+                      <a:endParaRPr lang="ko-KR" sz="1250" dirty="0">
+                        <a:latin typeface="Noto Sans KR"/>
+                        <a:ea typeface="Noto Sans KR"/>
+                      </a:endParaRPr>
                     </a:p>
                   </a:txBody>
                   <a:tcPr marL="91440" marR="91440" marT="45720" marB="45720" anchor="ctr">
@@ -6110,14 +6317,19 @@
                         <a:buNone/>
                       </a:pPr>
                       <a:r>
-                        <a:rPr lang="en-US" sz="1250" b="1" dirty="0">
+                        <a:rPr lang="ko-KR" sz="1250" b="1" dirty="0">
                           <a:solidFill>
                             <a:srgbClr val="1A2230"/>
                           </a:solidFill>
+                          <a:latin typeface="Noto Sans KR"/>
+                          <a:ea typeface="Noto Sans KR"/>
                         </a:rPr>
                         <a:t>+0.0005 ★</a:t>
                       </a:r>
-                      <a:endParaRPr lang="en-US" sz="1250" dirty="0"/>
+                      <a:endParaRPr lang="ko-KR" sz="1250" dirty="0">
+                        <a:latin typeface="Noto Sans KR"/>
+                        <a:ea typeface="Noto Sans KR"/>
+                      </a:endParaRPr>
                     </a:p>
                   </a:txBody>
                   <a:tcPr marL="91440" marR="91440" marT="45720" marB="45720" anchor="ctr">
@@ -6171,14 +6383,19 @@
                         <a:buNone/>
                       </a:pPr>
                       <a:r>
-                        <a:rPr lang="en-US" sz="1250" b="1" dirty="0">
+                        <a:rPr lang="ko-KR" sz="1250" b="1" dirty="0">
                           <a:solidFill>
                             <a:srgbClr val="1A2230"/>
                           </a:solidFill>
+                          <a:latin typeface="Noto Sans KR"/>
+                          <a:ea typeface="Noto Sans KR"/>
                         </a:rPr>
                         <a:t>+1.8초 ★</a:t>
                       </a:r>
-                      <a:endParaRPr lang="en-US" sz="1250" dirty="0"/>
+                      <a:endParaRPr lang="ko-KR" sz="1250" dirty="0">
+                        <a:latin typeface="Noto Sans KR"/>
+                        <a:ea typeface="Noto Sans KR"/>
+                      </a:endParaRPr>
                     </a:p>
                   </a:txBody>
                   <a:tcPr marL="91440" marR="91440" marT="45720" marB="45720" anchor="ctr">
@@ -6234,14 +6451,19 @@
                         <a:buNone/>
                       </a:pPr>
                       <a:r>
-                        <a:rPr lang="en-US" sz="1250" dirty="0">
+                        <a:rPr lang="ko-KR" sz="1250" dirty="0">
                           <a:solidFill>
                             <a:srgbClr val="1A2230"/>
                           </a:solidFill>
+                          <a:latin typeface="Noto Sans KR"/>
+                          <a:ea typeface="Noto Sans KR"/>
                         </a:rPr>
                         <a:t>캐스케이드+캐시</a:t>
                       </a:r>
-                      <a:endParaRPr lang="en-US" sz="1250" dirty="0"/>
+                      <a:endParaRPr lang="ko-KR" sz="1250" dirty="0">
+                        <a:latin typeface="Noto Sans KR"/>
+                        <a:ea typeface="Noto Sans KR"/>
+                      </a:endParaRPr>
                     </a:p>
                   </a:txBody>
                   <a:tcPr marL="91440" marR="91440" marT="45720" marB="45720" anchor="ctr">
@@ -6292,14 +6514,19 @@
                         <a:buNone/>
                       </a:pPr>
                       <a:r>
-                        <a:rPr lang="en-US" sz="1250" dirty="0">
+                        <a:rPr lang="ko-KR" sz="1250" dirty="0">
                           <a:solidFill>
                             <a:srgbClr val="1A2230"/>
                           </a:solidFill>
+                          <a:latin typeface="Noto Sans KR"/>
+                          <a:ea typeface="Noto Sans KR"/>
                         </a:rPr>
                         <a:t>+0%p</a:t>
                       </a:r>
-                      <a:endParaRPr lang="en-US" sz="1250" dirty="0"/>
+                      <a:endParaRPr lang="ko-KR" sz="1250" dirty="0">
+                        <a:latin typeface="Noto Sans KR"/>
+                        <a:ea typeface="Noto Sans KR"/>
+                      </a:endParaRPr>
                     </a:p>
                   </a:txBody>
                   <a:tcPr marL="91440" marR="91440" marT="45720" marB="45720" anchor="ctr">
@@ -6350,14 +6577,19 @@
                         <a:buNone/>
                       </a:pPr>
                       <a:r>
-                        <a:rPr lang="en-US" sz="1250" dirty="0">
+                        <a:rPr lang="ko-KR" sz="1250" dirty="0">
                           <a:solidFill>
                             <a:srgbClr val="1A2230"/>
                           </a:solidFill>
+                          <a:latin typeface="Noto Sans KR"/>
+                          <a:ea typeface="Noto Sans KR"/>
                         </a:rPr>
                         <a:t>+0%p</a:t>
                       </a:r>
-                      <a:endParaRPr lang="en-US" sz="1250" dirty="0"/>
+                      <a:endParaRPr lang="ko-KR" sz="1250" dirty="0">
+                        <a:latin typeface="Noto Sans KR"/>
+                        <a:ea typeface="Noto Sans KR"/>
+                      </a:endParaRPr>
                     </a:p>
                   </a:txBody>
                   <a:tcPr marL="91440" marR="91440" marT="45720" marB="45720" anchor="ctr">
@@ -6408,14 +6640,19 @@
                         <a:buNone/>
                       </a:pPr>
                       <a:r>
-                        <a:rPr lang="en-US" sz="1250" dirty="0">
+                        <a:rPr lang="ko-KR" sz="1250" dirty="0">
                           <a:solidFill>
                             <a:srgbClr val="1A2230"/>
                           </a:solidFill>
+                          <a:latin typeface="Noto Sans KR"/>
+                          <a:ea typeface="Noto Sans KR"/>
                         </a:rPr>
                         <a:t>-5%p</a:t>
                       </a:r>
-                      <a:endParaRPr lang="en-US" sz="1250" dirty="0"/>
+                      <a:endParaRPr lang="ko-KR" sz="1250" dirty="0">
+                        <a:latin typeface="Noto Sans KR"/>
+                        <a:ea typeface="Noto Sans KR"/>
+                      </a:endParaRPr>
                     </a:p>
                   </a:txBody>
                   <a:tcPr marL="91440" marR="91440" marT="45720" marB="45720" anchor="ctr">
@@ -6466,14 +6703,19 @@
                         <a:buNone/>
                       </a:pPr>
                       <a:r>
-                        <a:rPr lang="en-US" sz="1250" dirty="0">
+                        <a:rPr lang="ko-KR" sz="1250" dirty="0">
                           <a:solidFill>
                             <a:srgbClr val="1A2230"/>
                           </a:solidFill>
+                          <a:latin typeface="Noto Sans KR"/>
+                          <a:ea typeface="Noto Sans KR"/>
                         </a:rPr>
                         <a:t>-2%p</a:t>
                       </a:r>
-                      <a:endParaRPr lang="en-US" sz="1250" dirty="0"/>
+                      <a:endParaRPr lang="ko-KR" sz="1250" dirty="0">
+                        <a:latin typeface="Noto Sans KR"/>
+                        <a:ea typeface="Noto Sans KR"/>
+                      </a:endParaRPr>
                     </a:p>
                   </a:txBody>
                   <a:tcPr marL="91440" marR="91440" marT="45720" marB="45720" anchor="ctr">
@@ -6524,14 +6766,19 @@
                         <a:buNone/>
                       </a:pPr>
                       <a:r>
-                        <a:rPr lang="en-US" sz="1250" b="1" dirty="0">
+                        <a:rPr lang="ko-KR" sz="1250" b="1" dirty="0">
                           <a:solidFill>
                             <a:srgbClr val="1A2230"/>
                           </a:solidFill>
+                          <a:latin typeface="Noto Sans KR"/>
+                          <a:ea typeface="Noto Sans KR"/>
                         </a:rPr>
                         <a:t>-0.0030 ★</a:t>
                       </a:r>
-                      <a:endParaRPr lang="en-US" sz="1250" dirty="0"/>
+                      <a:endParaRPr lang="ko-KR" sz="1250" dirty="0">
+                        <a:latin typeface="Noto Sans KR"/>
+                        <a:ea typeface="Noto Sans KR"/>
+                      </a:endParaRPr>
                     </a:p>
                   </a:txBody>
                   <a:tcPr marL="91440" marR="91440" marT="45720" marB="45720" anchor="ctr">
@@ -6585,14 +6832,19 @@
                         <a:buNone/>
                       </a:pPr>
                       <a:r>
-                        <a:rPr lang="en-US" sz="1250" b="1" dirty="0">
+                        <a:rPr lang="ko-KR" sz="1250" b="1" dirty="0">
                           <a:solidFill>
                             <a:srgbClr val="1A2230"/>
                           </a:solidFill>
+                          <a:latin typeface="Noto Sans KR"/>
+                          <a:ea typeface="Noto Sans KR"/>
                         </a:rPr>
                         <a:t>-0.7초 ★</a:t>
                       </a:r>
-                      <a:endParaRPr lang="en-US" sz="1250" dirty="0"/>
+                      <a:endParaRPr lang="ko-KR" sz="1250" dirty="0">
+                        <a:latin typeface="Noto Sans KR"/>
+                        <a:ea typeface="Noto Sans KR"/>
+                      </a:endParaRPr>
                     </a:p>
                   </a:txBody>
                   <a:tcPr marL="91440" marR="91440" marT="45720" marB="45720" anchor="ctr">
@@ -6648,14 +6900,19 @@
                         <a:buNone/>
                       </a:pPr>
                       <a:r>
-                        <a:rPr lang="en-US" sz="1250" dirty="0">
+                        <a:rPr lang="ko-KR" sz="1250" dirty="0">
                           <a:solidFill>
                             <a:srgbClr val="1A2230"/>
                           </a:solidFill>
+                          <a:latin typeface="Noto Sans KR"/>
+                          <a:ea typeface="Noto Sans KR"/>
                         </a:rPr>
                         <a:t>v2 보완</a:t>
                       </a:r>
-                      <a:endParaRPr lang="en-US" sz="1250" dirty="0"/>
+                      <a:endParaRPr lang="ko-KR" sz="1250" dirty="0">
+                        <a:latin typeface="Noto Sans KR"/>
+                        <a:ea typeface="Noto Sans KR"/>
+                      </a:endParaRPr>
                     </a:p>
                   </a:txBody>
                   <a:tcPr marL="91440" marR="91440" marT="45720" marB="45720" anchor="ctr">
@@ -6706,14 +6963,19 @@
                         <a:buNone/>
                       </a:pPr>
                       <a:r>
-                        <a:rPr lang="en-US" sz="1250" dirty="0">
+                        <a:rPr lang="ko-KR" sz="1250" dirty="0">
                           <a:solidFill>
                             <a:srgbClr val="1A2230"/>
                           </a:solidFill>
+                          <a:latin typeface="Noto Sans KR"/>
+                          <a:ea typeface="Noto Sans KR"/>
                         </a:rPr>
                         <a:t>+0%p</a:t>
                       </a:r>
-                      <a:endParaRPr lang="en-US" sz="1250" dirty="0"/>
+                      <a:endParaRPr lang="ko-KR" sz="1250" dirty="0">
+                        <a:latin typeface="Noto Sans KR"/>
+                        <a:ea typeface="Noto Sans KR"/>
+                      </a:endParaRPr>
                     </a:p>
                   </a:txBody>
                   <a:tcPr marL="91440" marR="91440" marT="45720" marB="45720" anchor="ctr">
@@ -6764,14 +7026,19 @@
                         <a:buNone/>
                       </a:pPr>
                       <a:r>
-                        <a:rPr lang="en-US" sz="1250" b="1" dirty="0">
+                        <a:rPr lang="ko-KR" sz="1250" b="1" dirty="0">
                           <a:solidFill>
                             <a:srgbClr val="1A2230"/>
                           </a:solidFill>
+                          <a:latin typeface="Noto Sans KR"/>
+                          <a:ea typeface="Noto Sans KR"/>
                         </a:rPr>
                         <a:t>-24%p ★</a:t>
                       </a:r>
-                      <a:endParaRPr lang="en-US" sz="1250" dirty="0"/>
+                      <a:endParaRPr lang="ko-KR" sz="1250" dirty="0">
+                        <a:latin typeface="Noto Sans KR"/>
+                        <a:ea typeface="Noto Sans KR"/>
+                      </a:endParaRPr>
                     </a:p>
                   </a:txBody>
                   <a:tcPr marL="91440" marR="91440" marT="45720" marB="45720" anchor="ctr">
@@ -6825,14 +7092,19 @@
                         <a:buNone/>
                       </a:pPr>
                       <a:r>
-                        <a:rPr lang="en-US" sz="1250" dirty="0">
+                        <a:rPr lang="ko-KR" sz="1250" dirty="0">
                           <a:solidFill>
                             <a:srgbClr val="1A2230"/>
                           </a:solidFill>
+                          <a:latin typeface="Noto Sans KR"/>
+                          <a:ea typeface="Noto Sans KR"/>
                         </a:rPr>
                         <a:t>-3%p</a:t>
                       </a:r>
-                      <a:endParaRPr lang="en-US" sz="1250" dirty="0"/>
+                      <a:endParaRPr lang="ko-KR" sz="1250" dirty="0">
+                        <a:latin typeface="Noto Sans KR"/>
+                        <a:ea typeface="Noto Sans KR"/>
+                      </a:endParaRPr>
                     </a:p>
                   </a:txBody>
                   <a:tcPr marL="91440" marR="91440" marT="45720" marB="45720" anchor="ctr">
@@ -6883,14 +7155,19 @@
                         <a:buNone/>
                       </a:pPr>
                       <a:r>
-                        <a:rPr lang="en-US" sz="1250" dirty="0">
+                        <a:rPr lang="ko-KR" sz="1250" dirty="0">
                           <a:solidFill>
                             <a:srgbClr val="1A2230"/>
                           </a:solidFill>
+                          <a:latin typeface="Noto Sans KR"/>
+                          <a:ea typeface="Noto Sans KR"/>
                         </a:rPr>
                         <a:t>+2%p</a:t>
                       </a:r>
-                      <a:endParaRPr lang="en-US" sz="1250" dirty="0"/>
+                      <a:endParaRPr lang="ko-KR" sz="1250" dirty="0">
+                        <a:latin typeface="Noto Sans KR"/>
+                        <a:ea typeface="Noto Sans KR"/>
+                      </a:endParaRPr>
                     </a:p>
                   </a:txBody>
                   <a:tcPr marL="91440" marR="91440" marT="45720" marB="45720" anchor="ctr">
@@ -6941,14 +7218,19 @@
                         <a:buNone/>
                       </a:pPr>
                       <a:r>
-                        <a:rPr lang="en-US" sz="1250" dirty="0">
+                        <a:rPr lang="ko-KR" sz="1250" dirty="0">
                           <a:solidFill>
                             <a:srgbClr val="1A2230"/>
                           </a:solidFill>
+                          <a:latin typeface="Noto Sans KR"/>
+                          <a:ea typeface="Noto Sans KR"/>
                         </a:rPr>
                         <a:t>-0.0003</a:t>
                       </a:r>
-                      <a:endParaRPr lang="en-US" sz="1250" dirty="0"/>
+                      <a:endParaRPr lang="ko-KR" sz="1250" dirty="0">
+                        <a:latin typeface="Noto Sans KR"/>
+                        <a:ea typeface="Noto Sans KR"/>
+                      </a:endParaRPr>
                     </a:p>
                   </a:txBody>
                   <a:tcPr marL="91440" marR="91440" marT="45720" marB="45720" anchor="ctr">
@@ -6999,14 +7281,19 @@
                         <a:buNone/>
                       </a:pPr>
                       <a:r>
-                        <a:rPr lang="en-US" sz="1250" dirty="0">
+                        <a:rPr lang="ko-KR" sz="1250" dirty="0">
                           <a:solidFill>
                             <a:srgbClr val="1A2230"/>
                           </a:solidFill>
+                          <a:latin typeface="Noto Sans KR"/>
+                          <a:ea typeface="Noto Sans KR"/>
                         </a:rPr>
                         <a:t>+0.1초</a:t>
                       </a:r>
-                      <a:endParaRPr lang="en-US" sz="1250" dirty="0"/>
+                      <a:endParaRPr lang="ko-KR" sz="1250" dirty="0">
+                        <a:latin typeface="Noto Sans KR"/>
+                        <a:ea typeface="Noto Sans KR"/>
+                      </a:endParaRPr>
                     </a:p>
                   </a:txBody>
                   <a:tcPr marL="91440" marR="91440" marT="45720" marB="45720" anchor="ctr">
@@ -7059,14 +7346,19 @@
                         <a:buNone/>
                       </a:pPr>
                       <a:r>
-                        <a:rPr lang="en-US" sz="1250" dirty="0">
+                        <a:rPr lang="ko-KR" sz="1250" dirty="0">
                           <a:solidFill>
                             <a:srgbClr val="1A2230"/>
                           </a:solidFill>
+                          <a:latin typeface="Noto Sans KR"/>
+                          <a:ea typeface="Noto Sans KR"/>
                         </a:rPr>
                         <a:t>v2 위에 비용·런타임</a:t>
                       </a:r>
-                      <a:endParaRPr lang="en-US" sz="1250" dirty="0"/>
+                      <a:endParaRPr lang="ko-KR" sz="1250" dirty="0">
+                        <a:latin typeface="Noto Sans KR"/>
+                        <a:ea typeface="Noto Sans KR"/>
+                      </a:endParaRPr>
                     </a:p>
                   </a:txBody>
                   <a:tcPr marL="91440" marR="91440" marT="45720" marB="45720" anchor="ctr">
@@ -7117,14 +7409,19 @@
                         <a:buNone/>
                       </a:pPr>
                       <a:r>
-                        <a:rPr lang="en-US" sz="1250" dirty="0">
+                        <a:rPr lang="ko-KR" sz="1250" dirty="0">
                           <a:solidFill>
                             <a:srgbClr val="1A2230"/>
                           </a:solidFill>
+                          <a:latin typeface="Noto Sans KR"/>
+                          <a:ea typeface="Noto Sans KR"/>
                         </a:rPr>
                         <a:t>+0%p</a:t>
                       </a:r>
-                      <a:endParaRPr lang="en-US" sz="1250" dirty="0"/>
+                      <a:endParaRPr lang="ko-KR" sz="1250" dirty="0">
+                        <a:latin typeface="Noto Sans KR"/>
+                        <a:ea typeface="Noto Sans KR"/>
+                      </a:endParaRPr>
                     </a:p>
                   </a:txBody>
                   <a:tcPr marL="91440" marR="91440" marT="45720" marB="45720" anchor="ctr">
@@ -7175,14 +7472,19 @@
                         <a:buNone/>
                       </a:pPr>
                       <a:r>
-                        <a:rPr lang="en-US" sz="1250" dirty="0">
+                        <a:rPr lang="ko-KR" sz="1250" dirty="0">
                           <a:solidFill>
                             <a:srgbClr val="1A2230"/>
                           </a:solidFill>
+                          <a:latin typeface="Noto Sans KR"/>
+                          <a:ea typeface="Noto Sans KR"/>
                         </a:rPr>
                         <a:t>+1%p</a:t>
                       </a:r>
-                      <a:endParaRPr lang="en-US" sz="1250" dirty="0"/>
+                      <a:endParaRPr lang="ko-KR" sz="1250" dirty="0">
+                        <a:latin typeface="Noto Sans KR"/>
+                        <a:ea typeface="Noto Sans KR"/>
+                      </a:endParaRPr>
                     </a:p>
                   </a:txBody>
                   <a:tcPr marL="91440" marR="91440" marT="45720" marB="45720" anchor="ctr">
@@ -7233,14 +7535,19 @@
                         <a:buNone/>
                       </a:pPr>
                       <a:r>
-                        <a:rPr lang="en-US" sz="1250" dirty="0">
+                        <a:rPr lang="ko-KR" sz="1250" dirty="0">
                           <a:solidFill>
                             <a:srgbClr val="1A2230"/>
                           </a:solidFill>
+                          <a:latin typeface="Noto Sans KR"/>
+                          <a:ea typeface="Noto Sans KR"/>
                         </a:rPr>
                         <a:t>-2%p</a:t>
                       </a:r>
-                      <a:endParaRPr lang="en-US" sz="1250" dirty="0"/>
+                      <a:endParaRPr lang="ko-KR" sz="1250" dirty="0">
+                        <a:latin typeface="Noto Sans KR"/>
+                        <a:ea typeface="Noto Sans KR"/>
+                      </a:endParaRPr>
                     </a:p>
                   </a:txBody>
                   <a:tcPr marL="91440" marR="91440" marT="45720" marB="45720" anchor="ctr">
@@ -7291,14 +7598,19 @@
                         <a:buNone/>
                       </a:pPr>
                       <a:r>
-                        <a:rPr lang="en-US" sz="1250" dirty="0">
+                        <a:rPr lang="ko-KR" sz="1250" dirty="0">
                           <a:solidFill>
                             <a:srgbClr val="1A2230"/>
                           </a:solidFill>
+                          <a:latin typeface="Noto Sans KR"/>
+                          <a:ea typeface="Noto Sans KR"/>
                         </a:rPr>
                         <a:t>-1%p</a:t>
                       </a:r>
-                      <a:endParaRPr lang="en-US" sz="1250" dirty="0"/>
+                      <a:endParaRPr lang="ko-KR" sz="1250" dirty="0">
+                        <a:latin typeface="Noto Sans KR"/>
+                        <a:ea typeface="Noto Sans KR"/>
+                      </a:endParaRPr>
                     </a:p>
                   </a:txBody>
                   <a:tcPr marL="91440" marR="91440" marT="45720" marB="45720" anchor="ctr">
@@ -7349,14 +7661,19 @@
                         <a:buNone/>
                       </a:pPr>
                       <a:r>
-                        <a:rPr lang="en-US" sz="1250" b="1" dirty="0">
+                        <a:rPr lang="ko-KR" sz="1250" b="1" dirty="0">
                           <a:solidFill>
                             <a:srgbClr val="1A2230"/>
                           </a:solidFill>
+                          <a:latin typeface="Noto Sans KR"/>
+                          <a:ea typeface="Noto Sans KR"/>
                         </a:rPr>
                         <a:t>-0.0030 ★</a:t>
                       </a:r>
-                      <a:endParaRPr lang="en-US" sz="1250" dirty="0"/>
+                      <a:endParaRPr lang="ko-KR" sz="1250" dirty="0">
+                        <a:latin typeface="Noto Sans KR"/>
+                        <a:ea typeface="Noto Sans KR"/>
+                      </a:endParaRPr>
                     </a:p>
                   </a:txBody>
                   <a:tcPr marL="91440" marR="91440" marT="45720" marB="45720" anchor="ctr">
@@ -7410,14 +7727,19 @@
                         <a:buNone/>
                       </a:pPr>
                       <a:r>
-                        <a:rPr lang="en-US" sz="1250" b="1" dirty="0">
+                        <a:rPr lang="ko-KR" sz="1250" b="1" dirty="0">
                           <a:solidFill>
                             <a:srgbClr val="1A2230"/>
                           </a:solidFill>
+                          <a:latin typeface="Noto Sans KR"/>
+                          <a:ea typeface="Noto Sans KR"/>
                         </a:rPr>
                         <a:t>-0.9초 ★</a:t>
                       </a:r>
-                      <a:endParaRPr lang="en-US" sz="1250" dirty="0"/>
+                      <a:endParaRPr lang="ko-KR" sz="1250" dirty="0">
+                        <a:latin typeface="Noto Sans KR"/>
+                        <a:ea typeface="Noto Sans KR"/>
+                      </a:endParaRPr>
                     </a:p>
                   </a:txBody>
                   <a:tcPr marL="91440" marR="91440" marT="45720" marB="45720" anchor="ctr">
@@ -7473,14 +7795,19 @@
                         <a:buNone/>
                       </a:pPr>
                       <a:r>
-                        <a:rPr lang="en-US" sz="1250" b="1" dirty="0">
+                        <a:rPr lang="ko-KR" sz="1250" b="1" dirty="0">
                           <a:solidFill>
                             <a:srgbClr val="1A2230"/>
                           </a:solidFill>
+                          <a:latin typeface="Noto Sans KR"/>
+                          <a:ea typeface="Noto Sans KR"/>
                         </a:rPr>
                         <a:t>전체 (Before→After)</a:t>
                       </a:r>
-                      <a:endParaRPr lang="en-US" sz="1250" dirty="0"/>
+                      <a:endParaRPr lang="ko-KR" sz="1250" dirty="0">
+                        <a:latin typeface="Noto Sans KR"/>
+                        <a:ea typeface="Noto Sans KR"/>
+                      </a:endParaRPr>
                     </a:p>
                   </a:txBody>
                   <a:tcPr marL="91440" marR="91440" marT="45720" marB="45720" anchor="ctr">
@@ -7531,14 +7858,19 @@
                         <a:buNone/>
                       </a:pPr>
                       <a:r>
-                        <a:rPr lang="en-US" sz="1250" b="1" dirty="0">
+                        <a:rPr lang="ko-KR" sz="1250" b="1" dirty="0">
                           <a:solidFill>
                             <a:srgbClr val="1A2230"/>
                           </a:solidFill>
+                          <a:latin typeface="Noto Sans KR"/>
+                          <a:ea typeface="Noto Sans KR"/>
                         </a:rPr>
                         <a:t>-46%p ★</a:t>
                       </a:r>
-                      <a:endParaRPr lang="en-US" sz="1250" dirty="0"/>
+                      <a:endParaRPr lang="ko-KR" sz="1250" dirty="0">
+                        <a:latin typeface="Noto Sans KR"/>
+                        <a:ea typeface="Noto Sans KR"/>
+                      </a:endParaRPr>
                     </a:p>
                   </a:txBody>
                   <a:tcPr marL="91440" marR="91440" marT="45720" marB="45720" anchor="ctr">
@@ -7592,14 +7924,19 @@
                         <a:buNone/>
                       </a:pPr>
                       <a:r>
-                        <a:rPr lang="en-US" sz="1250" b="1" dirty="0">
+                        <a:rPr lang="ko-KR" sz="1250" b="1" dirty="0">
                           <a:solidFill>
                             <a:srgbClr val="1A2230"/>
                           </a:solidFill>
+                          <a:latin typeface="Noto Sans KR"/>
+                          <a:ea typeface="Noto Sans KR"/>
                         </a:rPr>
                         <a:t>-29%p ★</a:t>
                       </a:r>
-                      <a:endParaRPr lang="en-US" sz="1250" dirty="0"/>
+                      <a:endParaRPr lang="ko-KR" sz="1250" dirty="0">
+                        <a:latin typeface="Noto Sans KR"/>
+                        <a:ea typeface="Noto Sans KR"/>
+                      </a:endParaRPr>
                     </a:p>
                   </a:txBody>
                   <a:tcPr marL="91440" marR="91440" marT="45720" marB="45720" anchor="ctr">
@@ -7653,14 +7990,19 @@
                         <a:buNone/>
                       </a:pPr>
                       <a:r>
-                        <a:rPr lang="en-US" sz="1250" b="1" dirty="0">
+                        <a:rPr lang="ko-KR" sz="1250" b="1" dirty="0">
                           <a:solidFill>
                             <a:srgbClr val="1A2230"/>
                           </a:solidFill>
+                          <a:latin typeface="Noto Sans KR"/>
+                          <a:ea typeface="Noto Sans KR"/>
                         </a:rPr>
                         <a:t>+30%p ★</a:t>
                       </a:r>
-                      <a:endParaRPr lang="en-US" sz="1250" dirty="0"/>
+                      <a:endParaRPr lang="ko-KR" sz="1250" dirty="0">
+                        <a:latin typeface="Noto Sans KR"/>
+                        <a:ea typeface="Noto Sans KR"/>
+                      </a:endParaRPr>
                     </a:p>
                   </a:txBody>
                   <a:tcPr marL="91440" marR="91440" marT="45720" marB="45720" anchor="ctr">
@@ -7714,14 +8056,19 @@
                         <a:buNone/>
                       </a:pPr>
                       <a:r>
-                        <a:rPr lang="en-US" sz="1250" b="1" dirty="0">
+                        <a:rPr lang="ko-KR" sz="1250" b="1" dirty="0">
                           <a:solidFill>
                             <a:srgbClr val="1A2230"/>
                           </a:solidFill>
+                          <a:latin typeface="Noto Sans KR"/>
+                          <a:ea typeface="Noto Sans KR"/>
                         </a:rPr>
                         <a:t>+21%p ★</a:t>
                       </a:r>
-                      <a:endParaRPr lang="en-US" sz="1250" dirty="0"/>
+                      <a:endParaRPr lang="ko-KR" sz="1250" dirty="0">
+                        <a:latin typeface="Noto Sans KR"/>
+                        <a:ea typeface="Noto Sans KR"/>
+                      </a:endParaRPr>
                     </a:p>
                   </a:txBody>
                   <a:tcPr marL="91440" marR="91440" marT="45720" marB="45720" anchor="ctr">
@@ -7775,14 +8122,19 @@
                         <a:buNone/>
                       </a:pPr>
                       <a:r>
-                        <a:rPr lang="en-US" sz="1250" b="1" dirty="0">
+                        <a:rPr lang="ko-KR" sz="1250" b="1" dirty="0">
                           <a:solidFill>
                             <a:srgbClr val="1A2230"/>
                           </a:solidFill>
+                          <a:latin typeface="Noto Sans KR"/>
+                          <a:ea typeface="Noto Sans KR"/>
                         </a:rPr>
                         <a:t>-0.0024 ★</a:t>
                       </a:r>
-                      <a:endParaRPr lang="en-US" sz="1250" dirty="0"/>
+                      <a:endParaRPr lang="ko-KR" sz="1250" dirty="0">
+                        <a:latin typeface="Noto Sans KR"/>
+                        <a:ea typeface="Noto Sans KR"/>
+                      </a:endParaRPr>
                     </a:p>
                   </a:txBody>
                   <a:tcPr marL="91440" marR="91440" marT="45720" marB="45720" anchor="ctr">
@@ -7836,14 +8188,19 @@
                         <a:buNone/>
                       </a:pPr>
                       <a:r>
-                        <a:rPr lang="en-US" sz="1250" b="1" dirty="0">
+                        <a:rPr lang="ko-KR" sz="1250" b="1" dirty="0">
                           <a:solidFill>
                             <a:srgbClr val="1A2230"/>
                           </a:solidFill>
+                          <a:latin typeface="Noto Sans KR"/>
+                          <a:ea typeface="Noto Sans KR"/>
                         </a:rPr>
                         <a:t>+1.4초 ★</a:t>
                       </a:r>
-                      <a:endParaRPr lang="en-US" sz="1250" dirty="0"/>
+                      <a:endParaRPr lang="ko-KR" sz="1250" dirty="0">
+                        <a:latin typeface="Noto Sans KR"/>
+                        <a:ea typeface="Noto Sans KR"/>
+                      </a:endParaRPr>
                     </a:p>
                   </a:txBody>
                   <a:tcPr marL="91440" marR="91440" marT="45720" marB="45720" anchor="ctr">
@@ -7918,14 +8275,19 @@
               <a:buNone/>
             </a:pPr>
             <a:r>
-              <a:rPr lang="en-US" sz="1150" dirty="0">
+              <a:rPr lang="ko-KR" sz="1150" dirty="0">
                 <a:solidFill>
                   <a:schemeClr val="tx1"/>
                 </a:solidFill>
+                <a:latin typeface="Noto Sans KR"/>
+                <a:ea typeface="Noto Sans KR"/>
               </a:rPr>
               <a:t>★ = 95% 신뢰구간이 0을 포함하지 않음 (holdout 36건, 질의 단위 paired bootstrap 2,000회). 초록 = 좋아짐, 주황 = 나빠짐. 표시 없는 칸은 차이가 있다고 말할 수 없음. 캐스케이드·v2 위 비용·전체 행의 지연은 재측정 부하(2프로세스 vs 7프로세스) 차이가 섞였을 수 있음.</a:t>
             </a:r>
-            <a:endParaRPr lang="en-US" sz="1150" dirty="0"/>
+            <a:endParaRPr lang="ko-KR" sz="1150" dirty="0">
+              <a:latin typeface="Noto Sans KR"/>
+              <a:ea typeface="Noto Sans KR"/>
+            </a:endParaRPr>
           </a:p>
         </p:txBody>
       </p:sp>
@@ -7954,14 +8316,19 @@
               <a:buNone/>
             </a:pPr>
             <a:r>
-              <a:rPr lang="en-US" sz="1050" dirty="0">
+              <a:rPr lang="ko-KR" sz="1050" dirty="0">
                 <a:solidFill>
                   <a:schemeClr val="accent3"/>
                 </a:solidFill>
+                <a:latin typeface="Noto Sans KR"/>
+                <a:ea typeface="Noto Sans KR"/>
               </a:rPr>
               <a:t>results/stats_holdout.json · eval/stats.py</a:t>
             </a:r>
-            <a:endParaRPr lang="en-US" sz="1050" dirty="0"/>
+            <a:endParaRPr lang="ko-KR" sz="1050" dirty="0">
+              <a:latin typeface="Noto Sans KR"/>
+              <a:ea typeface="Noto Sans KR"/>
+            </a:endParaRPr>
           </a:p>
         </p:txBody>
       </p:sp>
@@ -7997,16 +8364,24 @@
                 <a:solidFill>
                   <a:schemeClr val="accent3"/>
                 </a:solidFill>
+                <a:latin typeface="Noto Sans KR"/>
+                <a:ea typeface="Noto Sans KR"/>
               </a:defRPr>
             </a:lvl1pPr>
           </a:lstStyle>
           <a:p>
             <a:pPr algn="r"/>
             <a:fld id="{F7021451-1387-4CA6-816F-3879F97B5CBC}" type="slidenum">
-              <a:rPr b="0" lang="en-US"/>
+              <a:rPr b="0" lang="ko-KR">
+                <a:latin typeface="Noto Sans KR"/>
+                <a:ea typeface="Noto Sans KR"/>
+              </a:rPr>
               <a:t>11</a:t>
             </a:fld>
-            <a:endParaRPr lang="en-US"/>
+            <a:endParaRPr lang="ko-KR">
+              <a:latin typeface="Noto Sans KR"/>
+              <a:ea typeface="Noto Sans KR"/>
+            </a:endParaRPr>
           </a:p>
         </p:txBody>
       </p:sp>
@@ -8062,14 +8437,19 @@
               <a:buNone/>
             </a:pPr>
             <a:r>
-              <a:rPr lang="en-US" sz="2800" b="1" dirty="0">
+              <a:rPr lang="ko-KR" sz="2800" b="1" dirty="0">
                 <a:solidFill>
                   <a:schemeClr val="tx2"/>
                 </a:solidFill>
+                <a:latin typeface="Noto Sans KR"/>
+                <a:ea typeface="Noto Sans KR"/>
               </a:rPr>
               <a:t>Before/After 3: 품질을 얻은 대가 — 트레이드오프 한 장</a:t>
             </a:r>
-            <a:endParaRPr lang="en-US" sz="2800" dirty="0"/>
+            <a:endParaRPr lang="ko-KR" sz="2800" dirty="0">
+              <a:latin typeface="Noto Sans KR"/>
+              <a:ea typeface="Noto Sans KR"/>
+            </a:endParaRPr>
           </a:p>
         </p:txBody>
       </p:sp>
@@ -8115,14 +8495,19 @@
                         <a:buNone/>
                       </a:pPr>
                       <a:r>
-                        <a:rPr lang="en-US" sz="1300" b="1" dirty="0">
+                        <a:rPr lang="ko-KR" sz="1300" b="1" dirty="0">
                           <a:solidFill>
                             <a:srgbClr val="FFFFFF"/>
                           </a:solidFill>
+                          <a:latin typeface="Noto Sans KR"/>
+                          <a:ea typeface="Noto Sans KR"/>
                         </a:rPr>
                         <a:t>구성</a:t>
                       </a:r>
-                      <a:endParaRPr lang="en-US" sz="1300" dirty="0"/>
+                      <a:endParaRPr lang="ko-KR" sz="1300" dirty="0">
+                        <a:latin typeface="Noto Sans KR"/>
+                        <a:ea typeface="Noto Sans KR"/>
+                      </a:endParaRPr>
                     </a:p>
                   </a:txBody>
                   <a:tcPr marL="91440" marR="91440" marT="45720" marB="45720" anchor="ctr">
@@ -8176,14 +8561,19 @@
                         <a:buNone/>
                       </a:pPr>
                       <a:r>
-                        <a:rPr lang="en-US" sz="1300" b="1" dirty="0">
+                        <a:rPr lang="ko-KR" sz="1300" b="1" dirty="0">
                           <a:solidFill>
                             <a:srgbClr val="FFFFFF"/>
                           </a:solidFill>
+                          <a:latin typeface="Noto Sans KR"/>
+                          <a:ea typeface="Noto Sans KR"/>
                         </a:rPr>
                         <a:t>정답 누락</a:t>
                       </a:r>
-                      <a:endParaRPr lang="en-US" sz="1300" dirty="0"/>
+                      <a:endParaRPr lang="ko-KR" sz="1300" dirty="0">
+                        <a:latin typeface="Noto Sans KR"/>
+                        <a:ea typeface="Noto Sans KR"/>
+                      </a:endParaRPr>
                     </a:p>
                   </a:txBody>
                   <a:tcPr marL="91440" marR="91440" marT="45720" marB="45720" anchor="ctr">
@@ -8237,14 +8627,19 @@
                         <a:buNone/>
                       </a:pPr>
                       <a:r>
-                        <a:rPr lang="en-US" sz="1300" b="1" dirty="0">
+                        <a:rPr lang="ko-KR" sz="1300" b="1" dirty="0">
                           <a:solidFill>
                             <a:srgbClr val="FFFFFF"/>
                           </a:solidFill>
+                          <a:latin typeface="Noto Sans KR"/>
+                          <a:ea typeface="Noto Sans KR"/>
                         </a:rPr>
                         <a:t>무관 혼입</a:t>
                       </a:r>
-                      <a:endParaRPr lang="en-US" sz="1300" dirty="0"/>
+                      <a:endParaRPr lang="ko-KR" sz="1300" dirty="0">
+                        <a:latin typeface="Noto Sans KR"/>
+                        <a:ea typeface="Noto Sans KR"/>
+                      </a:endParaRPr>
                     </a:p>
                   </a:txBody>
                   <a:tcPr marL="91440" marR="91440" marT="45720" marB="45720" anchor="ctr">
@@ -8298,14 +8693,19 @@
                         <a:buNone/>
                       </a:pPr>
                       <a:r>
-                        <a:rPr lang="en-US" sz="1300" b="1" dirty="0">
+                        <a:rPr lang="ko-KR" sz="1300" b="1" dirty="0">
                           <a:solidFill>
                             <a:srgbClr val="FFFFFF"/>
                           </a:solidFill>
+                          <a:latin typeface="Noto Sans KR"/>
+                          <a:ea typeface="Noto Sans KR"/>
                         </a:rPr>
                         <a:t>어구 포함</a:t>
                       </a:r>
-                      <a:endParaRPr lang="en-US" sz="1300" dirty="0"/>
+                      <a:endParaRPr lang="ko-KR" sz="1300" dirty="0">
+                        <a:latin typeface="Noto Sans KR"/>
+                        <a:ea typeface="Noto Sans KR"/>
+                      </a:endParaRPr>
                     </a:p>
                   </a:txBody>
                   <a:tcPr marL="91440" marR="91440" marT="45720" marB="45720" anchor="ctr">
@@ -8359,14 +8759,19 @@
                         <a:buNone/>
                       </a:pPr>
                       <a:r>
-                        <a:rPr lang="en-US" sz="1300" b="1" dirty="0">
+                        <a:rPr lang="ko-KR" sz="1300" b="1" dirty="0">
                           <a:solidFill>
                             <a:srgbClr val="FFFFFF"/>
                           </a:solidFill>
+                          <a:latin typeface="Noto Sans KR"/>
+                          <a:ea typeface="Noto Sans KR"/>
                         </a:rPr>
                         <a:t>Judge 통과</a:t>
                       </a:r>
-                      <a:endParaRPr lang="en-US" sz="1300" dirty="0"/>
+                      <a:endParaRPr lang="ko-KR" sz="1300" dirty="0">
+                        <a:latin typeface="Noto Sans KR"/>
+                        <a:ea typeface="Noto Sans KR"/>
+                      </a:endParaRPr>
                     </a:p>
                   </a:txBody>
                   <a:tcPr marL="91440" marR="91440" marT="45720" marB="45720" anchor="ctr">
@@ -8420,14 +8825,19 @@
                         <a:buNone/>
                       </a:pPr>
                       <a:r>
-                        <a:rPr lang="en-US" sz="1300" b="1" dirty="0">
+                        <a:rPr lang="ko-KR" sz="1300" b="1" dirty="0">
                           <a:solidFill>
                             <a:srgbClr val="FFFFFF"/>
                           </a:solidFill>
+                          <a:latin typeface="Noto Sans KR"/>
+                          <a:ea typeface="Noto Sans KR"/>
                         </a:rPr>
                         <a:t>장애 1건당 비용</a:t>
                       </a:r>
-                      <a:endParaRPr lang="en-US" sz="1300" dirty="0"/>
+                      <a:endParaRPr lang="ko-KR" sz="1300" dirty="0">
+                        <a:latin typeface="Noto Sans KR"/>
+                        <a:ea typeface="Noto Sans KR"/>
+                      </a:endParaRPr>
                     </a:p>
                   </a:txBody>
                   <a:tcPr marL="91440" marR="91440" marT="45720" marB="45720" anchor="ctr">
@@ -8481,14 +8891,19 @@
                         <a:buNone/>
                       </a:pPr>
                       <a:r>
-                        <a:rPr lang="en-US" sz="1300" b="1" dirty="0">
+                        <a:rPr lang="ko-KR" sz="1300" b="1" dirty="0">
                           <a:solidFill>
                             <a:srgbClr val="FFFFFF"/>
                           </a:solidFill>
+                          <a:latin typeface="Noto Sans KR"/>
+                          <a:ea typeface="Noto Sans KR"/>
                         </a:rPr>
                         <a:t>p95 지연</a:t>
                       </a:r>
-                      <a:endParaRPr lang="en-US" sz="1300" dirty="0"/>
+                      <a:endParaRPr lang="ko-KR" sz="1300" dirty="0">
+                        <a:latin typeface="Noto Sans KR"/>
+                        <a:ea typeface="Noto Sans KR"/>
+                      </a:endParaRPr>
                     </a:p>
                   </a:txBody>
                   <a:tcPr marL="91440" marR="91440" marT="45720" marB="45720" anchor="ctr">
@@ -8542,14 +8957,19 @@
                         <a:buNone/>
                       </a:pPr>
                       <a:r>
-                        <a:rPr lang="en-US" sz="1300" b="1" dirty="0">
+                        <a:rPr lang="ko-KR" sz="1300" b="1" dirty="0">
                           <a:solidFill>
                             <a:srgbClr val="FFFFFF"/>
                           </a:solidFill>
+                          <a:latin typeface="Noto Sans KR"/>
+                          <a:ea typeface="Noto Sans KR"/>
                         </a:rPr>
                         <a:t>재작성</a:t>
                       </a:r>
-                      <a:endParaRPr lang="en-US" sz="1300" dirty="0"/>
+                      <a:endParaRPr lang="ko-KR" sz="1300" dirty="0">
+                        <a:latin typeface="Noto Sans KR"/>
+                        <a:ea typeface="Noto Sans KR"/>
+                      </a:endParaRPr>
                     </a:p>
                   </a:txBody>
                   <a:tcPr marL="91440" marR="91440" marT="45720" marB="45720" anchor="ctr">
@@ -8605,14 +9025,19 @@
                         <a:buNone/>
                       </a:pPr>
                       <a:r>
-                        <a:rPr lang="en-US" sz="1300" b="1" dirty="0">
+                        <a:rPr lang="ko-KR" sz="1300" b="1" dirty="0">
                           <a:solidFill>
                             <a:srgbClr val="1A2230"/>
                           </a:solidFill>
+                          <a:latin typeface="Noto Sans KR"/>
+                          <a:ea typeface="Noto Sans KR"/>
                         </a:rPr>
                         <a:t>base</a:t>
                       </a:r>
-                      <a:endParaRPr lang="en-US" sz="1300" dirty="0"/>
+                      <a:endParaRPr lang="ko-KR" sz="1300" dirty="0">
+                        <a:latin typeface="Noto Sans KR"/>
+                        <a:ea typeface="Noto Sans KR"/>
+                      </a:endParaRPr>
                     </a:p>
                   </a:txBody>
                   <a:tcPr marL="91440" marR="91440" marT="45720" marB="45720" anchor="ctr">
@@ -8663,14 +9088,19 @@
                         <a:buNone/>
                       </a:pPr>
                       <a:r>
-                        <a:rPr lang="en-US" sz="1300" dirty="0">
+                        <a:rPr lang="ko-KR" sz="1300" dirty="0">
                           <a:solidFill>
                             <a:srgbClr val="1A2230"/>
                           </a:solidFill>
+                          <a:latin typeface="Noto Sans KR"/>
+                          <a:ea typeface="Noto Sans KR"/>
                         </a:rPr>
                         <a:t>56%</a:t>
                       </a:r>
-                      <a:endParaRPr lang="en-US" sz="1300" dirty="0"/>
+                      <a:endParaRPr lang="ko-KR" sz="1300" dirty="0">
+                        <a:latin typeface="Noto Sans KR"/>
+                        <a:ea typeface="Noto Sans KR"/>
+                      </a:endParaRPr>
                     </a:p>
                   </a:txBody>
                   <a:tcPr marL="91440" marR="91440" marT="45720" marB="45720" anchor="ctr">
@@ -8721,14 +9151,19 @@
                         <a:buNone/>
                       </a:pPr>
                       <a:r>
-                        <a:rPr lang="en-US" sz="1300" dirty="0">
+                        <a:rPr lang="ko-KR" sz="1300" dirty="0">
                           <a:solidFill>
                             <a:srgbClr val="1A2230"/>
                           </a:solidFill>
+                          <a:latin typeface="Noto Sans KR"/>
+                          <a:ea typeface="Noto Sans KR"/>
                         </a:rPr>
                         <a:t>65%</a:t>
                       </a:r>
-                      <a:endParaRPr lang="en-US" sz="1300" dirty="0"/>
+                      <a:endParaRPr lang="ko-KR" sz="1300" dirty="0">
+                        <a:latin typeface="Noto Sans KR"/>
+                        <a:ea typeface="Noto Sans KR"/>
+                      </a:endParaRPr>
                     </a:p>
                   </a:txBody>
                   <a:tcPr marL="91440" marR="91440" marT="45720" marB="45720" anchor="ctr">
@@ -8779,14 +9214,19 @@
                         <a:buNone/>
                       </a:pPr>
                       <a:r>
-                        <a:rPr lang="en-US" sz="1300" dirty="0">
+                        <a:rPr lang="ko-KR" sz="1300" dirty="0">
                           <a:solidFill>
                             <a:srgbClr val="1A2230"/>
                           </a:solidFill>
+                          <a:latin typeface="Noto Sans KR"/>
+                          <a:ea typeface="Noto Sans KR"/>
                         </a:rPr>
                         <a:t>45%</a:t>
                       </a:r>
-                      <a:endParaRPr lang="en-US" sz="1300" dirty="0"/>
+                      <a:endParaRPr lang="ko-KR" sz="1300" dirty="0">
+                        <a:latin typeface="Noto Sans KR"/>
+                        <a:ea typeface="Noto Sans KR"/>
+                      </a:endParaRPr>
                     </a:p>
                   </a:txBody>
                   <a:tcPr marL="91440" marR="91440" marT="45720" marB="45720" anchor="ctr">
@@ -8837,14 +9277,19 @@
                         <a:buNone/>
                       </a:pPr>
                       <a:r>
-                        <a:rPr lang="en-US" sz="1300" dirty="0">
+                        <a:rPr lang="ko-KR" sz="1300" dirty="0">
                           <a:solidFill>
                             <a:srgbClr val="1A2230"/>
                           </a:solidFill>
+                          <a:latin typeface="Noto Sans KR"/>
+                          <a:ea typeface="Noto Sans KR"/>
                         </a:rPr>
                         <a:t>77%</a:t>
                       </a:r>
-                      <a:endParaRPr lang="en-US" sz="1300" dirty="0"/>
+                      <a:endParaRPr lang="ko-KR" sz="1300" dirty="0">
+                        <a:latin typeface="Noto Sans KR"/>
+                        <a:ea typeface="Noto Sans KR"/>
+                      </a:endParaRPr>
                     </a:p>
                   </a:txBody>
                   <a:tcPr marL="91440" marR="91440" marT="45720" marB="45720" anchor="ctr">
@@ -8895,14 +9340,19 @@
                         <a:buNone/>
                       </a:pPr>
                       <a:r>
-                        <a:rPr lang="en-US" sz="1300" dirty="0">
+                        <a:rPr lang="ko-KR" sz="1300" dirty="0">
                           <a:solidFill>
                             <a:srgbClr val="1A2230"/>
                           </a:solidFill>
+                          <a:latin typeface="Noto Sans KR"/>
+                          <a:ea typeface="Noto Sans KR"/>
                         </a:rPr>
                         <a:t>$0.00343</a:t>
                       </a:r>
-                      <a:endParaRPr lang="en-US" sz="1300" dirty="0"/>
+                      <a:endParaRPr lang="ko-KR" sz="1300" dirty="0">
+                        <a:latin typeface="Noto Sans KR"/>
+                        <a:ea typeface="Noto Sans KR"/>
+                      </a:endParaRPr>
                     </a:p>
                   </a:txBody>
                   <a:tcPr marL="91440" marR="91440" marT="45720" marB="45720" anchor="ctr">
@@ -8953,14 +9403,19 @@
                         <a:buNone/>
                       </a:pPr>
                       <a:r>
-                        <a:rPr lang="en-US" sz="1300" dirty="0">
+                        <a:rPr lang="ko-KR" sz="1300" dirty="0">
                           <a:solidFill>
                             <a:srgbClr val="1A2230"/>
                           </a:solidFill>
+                          <a:latin typeface="Noto Sans KR"/>
+                          <a:ea typeface="Noto Sans KR"/>
                         </a:rPr>
                         <a:t>8.3초</a:t>
                       </a:r>
-                      <a:endParaRPr lang="en-US" sz="1300" dirty="0"/>
+                      <a:endParaRPr lang="ko-KR" sz="1300" dirty="0">
+                        <a:latin typeface="Noto Sans KR"/>
+                        <a:ea typeface="Noto Sans KR"/>
+                      </a:endParaRPr>
                     </a:p>
                   </a:txBody>
                   <a:tcPr marL="91440" marR="91440" marT="45720" marB="45720" anchor="ctr">
@@ -9011,14 +9466,19 @@
                         <a:buNone/>
                       </a:pPr>
                       <a:r>
-                        <a:rPr lang="en-US" sz="1300" dirty="0">
+                        <a:rPr lang="ko-KR" sz="1300" dirty="0">
                           <a:solidFill>
                             <a:srgbClr val="1A2230"/>
                           </a:solidFill>
+                          <a:latin typeface="Noto Sans KR"/>
+                          <a:ea typeface="Noto Sans KR"/>
                         </a:rPr>
                         <a:t>0.0</a:t>
                       </a:r>
-                      <a:endParaRPr lang="en-US" sz="1300" dirty="0"/>
+                      <a:endParaRPr lang="ko-KR" sz="1300" dirty="0">
+                        <a:latin typeface="Noto Sans KR"/>
+                        <a:ea typeface="Noto Sans KR"/>
+                      </a:endParaRPr>
                     </a:p>
                   </a:txBody>
                   <a:tcPr marL="91440" marR="91440" marT="45720" marB="45720" anchor="ctr">
@@ -9071,14 +9531,19 @@
                         <a:buNone/>
                       </a:pPr>
                       <a:r>
-                        <a:rPr lang="en-US" sz="1300" dirty="0">
+                        <a:rPr lang="ko-KR" sz="1300" dirty="0">
                           <a:solidFill>
                             <a:srgbClr val="1A2230"/>
                           </a:solidFill>
+                          <a:latin typeface="Noto Sans KR"/>
+                          <a:ea typeface="Noto Sans KR"/>
                         </a:rPr>
                         <a:t>+RAG</a:t>
                       </a:r>
-                      <a:endParaRPr lang="en-US" sz="1300" dirty="0"/>
+                      <a:endParaRPr lang="ko-KR" sz="1300" dirty="0">
+                        <a:latin typeface="Noto Sans KR"/>
+                        <a:ea typeface="Noto Sans KR"/>
+                      </a:endParaRPr>
                     </a:p>
                   </a:txBody>
                   <a:tcPr marL="91440" marR="91440" marT="45720" marB="45720" anchor="ctr">
@@ -9129,14 +9594,19 @@
                         <a:buNone/>
                       </a:pPr>
                       <a:r>
-                        <a:rPr lang="en-US" sz="1300" dirty="0">
+                        <a:rPr lang="ko-KR" sz="1300" dirty="0">
                           <a:solidFill>
                             <a:srgbClr val="1A2230"/>
                           </a:solidFill>
+                          <a:latin typeface="Noto Sans KR"/>
+                          <a:ea typeface="Noto Sans KR"/>
                         </a:rPr>
                         <a:t>9%</a:t>
                       </a:r>
-                      <a:endParaRPr lang="en-US" sz="1300" dirty="0"/>
+                      <a:endParaRPr lang="ko-KR" sz="1300" dirty="0">
+                        <a:latin typeface="Noto Sans KR"/>
+                        <a:ea typeface="Noto Sans KR"/>
+                      </a:endParaRPr>
                     </a:p>
                   </a:txBody>
                   <a:tcPr marL="91440" marR="91440" marT="45720" marB="45720" anchor="ctr">
@@ -9187,14 +9657,19 @@
                         <a:buNone/>
                       </a:pPr>
                       <a:r>
-                        <a:rPr lang="en-US" sz="1300" dirty="0">
+                        <a:rPr lang="ko-KR" sz="1300" dirty="0">
                           <a:solidFill>
                             <a:srgbClr val="1A2230"/>
                           </a:solidFill>
+                          <a:latin typeface="Noto Sans KR"/>
+                          <a:ea typeface="Noto Sans KR"/>
                         </a:rPr>
                         <a:t>59%</a:t>
                       </a:r>
-                      <a:endParaRPr lang="en-US" sz="1300" dirty="0"/>
+                      <a:endParaRPr lang="ko-KR" sz="1300" dirty="0">
+                        <a:latin typeface="Noto Sans KR"/>
+                        <a:ea typeface="Noto Sans KR"/>
+                      </a:endParaRPr>
                     </a:p>
                   </a:txBody>
                   <a:tcPr marL="91440" marR="91440" marT="45720" marB="45720" anchor="ctr">
@@ -9245,14 +9720,19 @@
                         <a:buNone/>
                       </a:pPr>
                       <a:r>
-                        <a:rPr lang="en-US" sz="1300" dirty="0">
+                        <a:rPr lang="ko-KR" sz="1300" dirty="0">
                           <a:solidFill>
                             <a:srgbClr val="1A2230"/>
                           </a:solidFill>
+                          <a:latin typeface="Noto Sans KR"/>
+                          <a:ea typeface="Noto Sans KR"/>
                         </a:rPr>
                         <a:t>81%</a:t>
                       </a:r>
-                      <a:endParaRPr lang="en-US" sz="1300" dirty="0"/>
+                      <a:endParaRPr lang="ko-KR" sz="1300" dirty="0">
+                        <a:latin typeface="Noto Sans KR"/>
+                        <a:ea typeface="Noto Sans KR"/>
+                      </a:endParaRPr>
                     </a:p>
                   </a:txBody>
                   <a:tcPr marL="91440" marR="91440" marT="45720" marB="45720" anchor="ctr">
@@ -9303,14 +9783,19 @@
                         <a:buNone/>
                       </a:pPr>
                       <a:r>
-                        <a:rPr lang="en-US" sz="1300" dirty="0">
+                        <a:rPr lang="ko-KR" sz="1300" dirty="0">
                           <a:solidFill>
                             <a:srgbClr val="1A2230"/>
                           </a:solidFill>
+                          <a:latin typeface="Noto Sans KR"/>
+                          <a:ea typeface="Noto Sans KR"/>
                         </a:rPr>
                         <a:t>97%</a:t>
                       </a:r>
-                      <a:endParaRPr lang="en-US" sz="1300" dirty="0"/>
+                      <a:endParaRPr lang="ko-KR" sz="1300" dirty="0">
+                        <a:latin typeface="Noto Sans KR"/>
+                        <a:ea typeface="Noto Sans KR"/>
+                      </a:endParaRPr>
                     </a:p>
                   </a:txBody>
                   <a:tcPr marL="91440" marR="91440" marT="45720" marB="45720" anchor="ctr">
@@ -9361,14 +9846,19 @@
                         <a:buNone/>
                       </a:pPr>
                       <a:r>
-                        <a:rPr lang="en-US" sz="1300" dirty="0">
+                        <a:rPr lang="ko-KR" sz="1300" dirty="0">
                           <a:solidFill>
                             <a:srgbClr val="1A2230"/>
                           </a:solidFill>
+                          <a:latin typeface="Noto Sans KR"/>
+                          <a:ea typeface="Noto Sans KR"/>
                         </a:rPr>
                         <a:t>$0.00397</a:t>
                       </a:r>
-                      <a:endParaRPr lang="en-US" sz="1300" dirty="0"/>
+                      <a:endParaRPr lang="ko-KR" sz="1300" dirty="0">
+                        <a:latin typeface="Noto Sans KR"/>
+                        <a:ea typeface="Noto Sans KR"/>
+                      </a:endParaRPr>
                     </a:p>
                   </a:txBody>
                   <a:tcPr marL="91440" marR="91440" marT="45720" marB="45720" anchor="ctr">
@@ -9419,14 +9909,19 @@
                         <a:buNone/>
                       </a:pPr>
                       <a:r>
-                        <a:rPr lang="en-US" sz="1300" dirty="0">
+                        <a:rPr lang="ko-KR" sz="1300" dirty="0">
                           <a:solidFill>
                             <a:srgbClr val="1A2230"/>
                           </a:solidFill>
+                          <a:latin typeface="Noto Sans KR"/>
+                          <a:ea typeface="Noto Sans KR"/>
                         </a:rPr>
                         <a:t>8.9초</a:t>
                       </a:r>
-                      <a:endParaRPr lang="en-US" sz="1300" dirty="0"/>
+                      <a:endParaRPr lang="ko-KR" sz="1300" dirty="0">
+                        <a:latin typeface="Noto Sans KR"/>
+                        <a:ea typeface="Noto Sans KR"/>
+                      </a:endParaRPr>
                     </a:p>
                   </a:txBody>
                   <a:tcPr marL="91440" marR="91440" marT="45720" marB="45720" anchor="ctr">
@@ -9477,14 +9972,19 @@
                         <a:buNone/>
                       </a:pPr>
                       <a:r>
-                        <a:rPr lang="en-US" sz="1300" dirty="0">
+                        <a:rPr lang="ko-KR" sz="1300" dirty="0">
                           <a:solidFill>
                             <a:srgbClr val="1A2230"/>
                           </a:solidFill>
+                          <a:latin typeface="Noto Sans KR"/>
+                          <a:ea typeface="Noto Sans KR"/>
                         </a:rPr>
                         <a:t>0.0</a:t>
                       </a:r>
-                      <a:endParaRPr lang="en-US" sz="1300" dirty="0"/>
+                      <a:endParaRPr lang="ko-KR" sz="1300" dirty="0">
+                        <a:latin typeface="Noto Sans KR"/>
+                        <a:ea typeface="Noto Sans KR"/>
+                      </a:endParaRPr>
                     </a:p>
                   </a:txBody>
                   <a:tcPr marL="91440" marR="91440" marT="45720" marB="45720" anchor="ctr">
@@ -9537,14 +10037,19 @@
                         <a:buNone/>
                       </a:pPr>
                       <a:r>
-                        <a:rPr lang="en-US" sz="1300" dirty="0">
+                        <a:rPr lang="ko-KR" sz="1300" dirty="0">
                           <a:solidFill>
                             <a:srgbClr val="1A2230"/>
                           </a:solidFill>
+                          <a:latin typeface="Noto Sans KR"/>
+                          <a:ea typeface="Noto Sans KR"/>
                         </a:rPr>
                         <a:t>+Judge만</a:t>
                       </a:r>
-                      <a:endParaRPr lang="en-US" sz="1300" dirty="0"/>
+                      <a:endParaRPr lang="ko-KR" sz="1300" dirty="0">
+                        <a:latin typeface="Noto Sans KR"/>
+                        <a:ea typeface="Noto Sans KR"/>
+                      </a:endParaRPr>
                     </a:p>
                   </a:txBody>
                   <a:tcPr marL="91440" marR="91440" marT="45720" marB="45720" anchor="ctr">
@@ -9595,14 +10100,19 @@
                         <a:buNone/>
                       </a:pPr>
                       <a:r>
-                        <a:rPr lang="en-US" sz="1300" dirty="0">
+                        <a:rPr lang="ko-KR" sz="1300" dirty="0">
                           <a:solidFill>
                             <a:srgbClr val="1A2230"/>
                           </a:solidFill>
+                          <a:latin typeface="Noto Sans KR"/>
+                          <a:ea typeface="Noto Sans KR"/>
                         </a:rPr>
                         <a:t>54%</a:t>
                       </a:r>
-                      <a:endParaRPr lang="en-US" sz="1300" dirty="0"/>
+                      <a:endParaRPr lang="ko-KR" sz="1300" dirty="0">
+                        <a:latin typeface="Noto Sans KR"/>
+                        <a:ea typeface="Noto Sans KR"/>
+                      </a:endParaRPr>
                     </a:p>
                   </a:txBody>
                   <a:tcPr marL="91440" marR="91440" marT="45720" marB="45720" anchor="ctr">
@@ -9653,14 +10163,19 @@
                         <a:buNone/>
                       </a:pPr>
                       <a:r>
-                        <a:rPr lang="en-US" sz="1300" dirty="0">
+                        <a:rPr lang="ko-KR" sz="1300" dirty="0">
                           <a:solidFill>
                             <a:srgbClr val="1A2230"/>
                           </a:solidFill>
+                          <a:latin typeface="Noto Sans KR"/>
+                          <a:ea typeface="Noto Sans KR"/>
                         </a:rPr>
                         <a:t>63%</a:t>
                       </a:r>
-                      <a:endParaRPr lang="en-US" sz="1300" dirty="0"/>
+                      <a:endParaRPr lang="ko-KR" sz="1300" dirty="0">
+                        <a:latin typeface="Noto Sans KR"/>
+                        <a:ea typeface="Noto Sans KR"/>
+                      </a:endParaRPr>
                     </a:p>
                   </a:txBody>
                   <a:tcPr marL="91440" marR="91440" marT="45720" marB="45720" anchor="ctr">
@@ -9711,14 +10226,19 @@
                         <a:buNone/>
                       </a:pPr>
                       <a:r>
-                        <a:rPr lang="en-US" sz="1300" dirty="0">
+                        <a:rPr lang="ko-KR" sz="1300" dirty="0">
                           <a:solidFill>
                             <a:srgbClr val="1A2230"/>
                           </a:solidFill>
+                          <a:latin typeface="Noto Sans KR"/>
+                          <a:ea typeface="Noto Sans KR"/>
                         </a:rPr>
                         <a:t>46%</a:t>
                       </a:r>
-                      <a:endParaRPr lang="en-US" sz="1300" dirty="0"/>
+                      <a:endParaRPr lang="ko-KR" sz="1300" dirty="0">
+                        <a:latin typeface="Noto Sans KR"/>
+                        <a:ea typeface="Noto Sans KR"/>
+                      </a:endParaRPr>
                     </a:p>
                   </a:txBody>
                   <a:tcPr marL="91440" marR="91440" marT="45720" marB="45720" anchor="ctr">
@@ -9769,14 +10289,19 @@
                         <a:buNone/>
                       </a:pPr>
                       <a:r>
-                        <a:rPr lang="en-US" sz="1300" dirty="0">
+                        <a:rPr lang="ko-KR" sz="1300" dirty="0">
                           <a:solidFill>
                             <a:srgbClr val="1A2230"/>
                           </a:solidFill>
+                          <a:latin typeface="Noto Sans KR"/>
+                          <a:ea typeface="Noto Sans KR"/>
                         </a:rPr>
                         <a:t>80%</a:t>
                       </a:r>
-                      <a:endParaRPr lang="en-US" sz="1300" dirty="0"/>
+                      <a:endParaRPr lang="ko-KR" sz="1300" dirty="0">
+                        <a:latin typeface="Noto Sans KR"/>
+                        <a:ea typeface="Noto Sans KR"/>
+                      </a:endParaRPr>
                     </a:p>
                   </a:txBody>
                   <a:tcPr marL="91440" marR="91440" marT="45720" marB="45720" anchor="ctr">
@@ -9827,14 +10352,19 @@
                         <a:buNone/>
                       </a:pPr>
                       <a:r>
-                        <a:rPr lang="en-US" sz="1300" dirty="0">
+                        <a:rPr lang="ko-KR" sz="1300" dirty="0">
                           <a:solidFill>
                             <a:srgbClr val="1A2230"/>
                           </a:solidFill>
+                          <a:latin typeface="Noto Sans KR"/>
+                          <a:ea typeface="Noto Sans KR"/>
                         </a:rPr>
                         <a:t>$0.00460</a:t>
                       </a:r>
-                      <a:endParaRPr lang="en-US" sz="1300" dirty="0"/>
+                      <a:endParaRPr lang="ko-KR" sz="1300" dirty="0">
+                        <a:latin typeface="Noto Sans KR"/>
+                        <a:ea typeface="Noto Sans KR"/>
+                      </a:endParaRPr>
                     </a:p>
                   </a:txBody>
                   <a:tcPr marL="91440" marR="91440" marT="45720" marB="45720" anchor="ctr">
@@ -9885,14 +10415,19 @@
                         <a:buNone/>
                       </a:pPr>
                       <a:r>
-                        <a:rPr lang="en-US" sz="1300" dirty="0">
+                        <a:rPr lang="ko-KR" sz="1300" dirty="0">
                           <a:solidFill>
                             <a:srgbClr val="1A2230"/>
                           </a:solidFill>
+                          <a:latin typeface="Noto Sans KR"/>
+                          <a:ea typeface="Noto Sans KR"/>
                         </a:rPr>
                         <a:t>17.1초</a:t>
                       </a:r>
-                      <a:endParaRPr lang="en-US" sz="1300" dirty="0"/>
+                      <a:endParaRPr lang="ko-KR" sz="1300" dirty="0">
+                        <a:latin typeface="Noto Sans KR"/>
+                        <a:ea typeface="Noto Sans KR"/>
+                      </a:endParaRPr>
                     </a:p>
                   </a:txBody>
                   <a:tcPr marL="91440" marR="91440" marT="45720" marB="45720" anchor="ctr">
@@ -9943,14 +10478,19 @@
                         <a:buNone/>
                       </a:pPr>
                       <a:r>
-                        <a:rPr lang="en-US" sz="1300" dirty="0">
+                        <a:rPr lang="ko-KR" sz="1300" dirty="0">
                           <a:solidFill>
                             <a:srgbClr val="1A2230"/>
                           </a:solidFill>
+                          <a:latin typeface="Noto Sans KR"/>
+                          <a:ea typeface="Noto Sans KR"/>
                         </a:rPr>
                         <a:t>7.0</a:t>
                       </a:r>
-                      <a:endParaRPr lang="en-US" sz="1300" dirty="0"/>
+                      <a:endParaRPr lang="ko-KR" sz="1300" dirty="0">
+                        <a:latin typeface="Noto Sans KR"/>
+                        <a:ea typeface="Noto Sans KR"/>
+                      </a:endParaRPr>
                     </a:p>
                   </a:txBody>
                   <a:tcPr marL="91440" marR="91440" marT="45720" marB="45720" anchor="ctr">
@@ -10003,14 +10543,19 @@
                         <a:buNone/>
                       </a:pPr>
                       <a:r>
-                        <a:rPr lang="en-US" sz="1300" dirty="0">
+                        <a:rPr lang="ko-KR" sz="1300" dirty="0">
                           <a:solidFill>
                             <a:srgbClr val="1A2230"/>
                           </a:solidFill>
+                          <a:latin typeface="Noto Sans KR"/>
+                          <a:ea typeface="Noto Sans KR"/>
                         </a:rPr>
                         <a:t>RAG+Judge</a:t>
                       </a:r>
-                      <a:endParaRPr lang="en-US" sz="1300" dirty="0"/>
+                      <a:endParaRPr lang="ko-KR" sz="1300" dirty="0">
+                        <a:latin typeface="Noto Sans KR"/>
+                        <a:ea typeface="Noto Sans KR"/>
+                      </a:endParaRPr>
                     </a:p>
                   </a:txBody>
                   <a:tcPr marL="91440" marR="91440" marT="45720" marB="45720" anchor="ctr">
@@ -10061,14 +10606,19 @@
                         <a:buNone/>
                       </a:pPr>
                       <a:r>
-                        <a:rPr lang="en-US" sz="1300" dirty="0">
+                        <a:rPr lang="ko-KR" sz="1300" dirty="0">
                           <a:solidFill>
                             <a:srgbClr val="1A2230"/>
                           </a:solidFill>
+                          <a:latin typeface="Noto Sans KR"/>
+                          <a:ea typeface="Noto Sans KR"/>
                         </a:rPr>
                         <a:t>9%</a:t>
                       </a:r>
-                      <a:endParaRPr lang="en-US" sz="1300" dirty="0"/>
+                      <a:endParaRPr lang="ko-KR" sz="1300" dirty="0">
+                        <a:latin typeface="Noto Sans KR"/>
+                        <a:ea typeface="Noto Sans KR"/>
+                      </a:endParaRPr>
                     </a:p>
                   </a:txBody>
                   <a:tcPr marL="91440" marR="91440" marT="45720" marB="45720" anchor="ctr">
@@ -10119,14 +10669,19 @@
                         <a:buNone/>
                       </a:pPr>
                       <a:r>
-                        <a:rPr lang="en-US" sz="1300" dirty="0">
+                        <a:rPr lang="ko-KR" sz="1300" dirty="0">
                           <a:solidFill>
                             <a:srgbClr val="1A2230"/>
                           </a:solidFill>
+                          <a:latin typeface="Noto Sans KR"/>
+                          <a:ea typeface="Noto Sans KR"/>
                         </a:rPr>
                         <a:t>59%</a:t>
                       </a:r>
-                      <a:endParaRPr lang="en-US" sz="1300" dirty="0"/>
+                      <a:endParaRPr lang="ko-KR" sz="1300" dirty="0">
+                        <a:latin typeface="Noto Sans KR"/>
+                        <a:ea typeface="Noto Sans KR"/>
+                      </a:endParaRPr>
                     </a:p>
                   </a:txBody>
                   <a:tcPr marL="91440" marR="91440" marT="45720" marB="45720" anchor="ctr">
@@ -10177,14 +10732,19 @@
                         <a:buNone/>
                       </a:pPr>
                       <a:r>
-                        <a:rPr lang="en-US" sz="1300" dirty="0">
+                        <a:rPr lang="ko-KR" sz="1300" dirty="0">
                           <a:solidFill>
                             <a:srgbClr val="1A2230"/>
                           </a:solidFill>
+                          <a:latin typeface="Noto Sans KR"/>
+                          <a:ea typeface="Noto Sans KR"/>
                         </a:rPr>
                         <a:t>78%</a:t>
                       </a:r>
-                      <a:endParaRPr lang="en-US" sz="1300" dirty="0"/>
+                      <a:endParaRPr lang="ko-KR" sz="1300" dirty="0">
+                        <a:latin typeface="Noto Sans KR"/>
+                        <a:ea typeface="Noto Sans KR"/>
+                      </a:endParaRPr>
                     </a:p>
                   </a:txBody>
                   <a:tcPr marL="91440" marR="91440" marT="45720" marB="45720" anchor="ctr">
@@ -10235,14 +10795,19 @@
                         <a:buNone/>
                       </a:pPr>
                       <a:r>
-                        <a:rPr lang="en-US" sz="1300" dirty="0">
+                        <a:rPr lang="ko-KR" sz="1300" dirty="0">
                           <a:solidFill>
                             <a:srgbClr val="1A2230"/>
                           </a:solidFill>
+                          <a:latin typeface="Noto Sans KR"/>
+                          <a:ea typeface="Noto Sans KR"/>
                         </a:rPr>
                         <a:t>97%</a:t>
                       </a:r>
-                      <a:endParaRPr lang="en-US" sz="1300" dirty="0"/>
+                      <a:endParaRPr lang="ko-KR" sz="1300" dirty="0">
+                        <a:latin typeface="Noto Sans KR"/>
+                        <a:ea typeface="Noto Sans KR"/>
+                      </a:endParaRPr>
                     </a:p>
                   </a:txBody>
                   <a:tcPr marL="91440" marR="91440" marT="45720" marB="45720" anchor="ctr">
@@ -10293,14 +10858,19 @@
                         <a:buNone/>
                       </a:pPr>
                       <a:r>
-                        <a:rPr lang="en-US" sz="1300" dirty="0">
+                        <a:rPr lang="ko-KR" sz="1300" dirty="0">
                           <a:solidFill>
                             <a:srgbClr val="1A2230"/>
                           </a:solidFill>
+                          <a:latin typeface="Noto Sans KR"/>
+                          <a:ea typeface="Noto Sans KR"/>
                         </a:rPr>
                         <a:t>$0.00464</a:t>
                       </a:r>
-                      <a:endParaRPr lang="en-US" sz="1300" dirty="0"/>
+                      <a:endParaRPr lang="ko-KR" sz="1300" dirty="0">
+                        <a:latin typeface="Noto Sans KR"/>
+                        <a:ea typeface="Noto Sans KR"/>
+                      </a:endParaRPr>
                     </a:p>
                   </a:txBody>
                   <a:tcPr marL="91440" marR="91440" marT="45720" marB="45720" anchor="ctr">
@@ -10351,14 +10921,19 @@
                         <a:buNone/>
                       </a:pPr>
                       <a:r>
-                        <a:rPr lang="en-US" sz="1300" dirty="0">
+                        <a:rPr lang="ko-KR" sz="1300" dirty="0">
                           <a:solidFill>
                             <a:srgbClr val="1A2230"/>
                           </a:solidFill>
+                          <a:latin typeface="Noto Sans KR"/>
+                          <a:ea typeface="Noto Sans KR"/>
                         </a:rPr>
                         <a:t>12.0초</a:t>
                       </a:r>
-                      <a:endParaRPr lang="en-US" sz="1300" dirty="0"/>
+                      <a:endParaRPr lang="ko-KR" sz="1300" dirty="0">
+                        <a:latin typeface="Noto Sans KR"/>
+                        <a:ea typeface="Noto Sans KR"/>
+                      </a:endParaRPr>
                     </a:p>
                   </a:txBody>
                   <a:tcPr marL="91440" marR="91440" marT="45720" marB="45720" anchor="ctr">
@@ -10409,14 +10984,19 @@
                         <a:buNone/>
                       </a:pPr>
                       <a:r>
-                        <a:rPr lang="en-US" sz="1300" dirty="0">
+                        <a:rPr lang="ko-KR" sz="1300" dirty="0">
                           <a:solidFill>
                             <a:srgbClr val="1A2230"/>
                           </a:solidFill>
+                          <a:latin typeface="Noto Sans KR"/>
+                          <a:ea typeface="Noto Sans KR"/>
                         </a:rPr>
                         <a:t>2.0</a:t>
                       </a:r>
-                      <a:endParaRPr lang="en-US" sz="1300" dirty="0"/>
+                      <a:endParaRPr lang="ko-KR" sz="1300" dirty="0">
+                        <a:latin typeface="Noto Sans KR"/>
+                        <a:ea typeface="Noto Sans KR"/>
+                      </a:endParaRPr>
                     </a:p>
                   </a:txBody>
                   <a:tcPr marL="91440" marR="91440" marT="45720" marB="45720" anchor="ctr">
@@ -10469,14 +11049,19 @@
                         <a:buNone/>
                       </a:pPr>
                       <a:r>
-                        <a:rPr lang="en-US" sz="1300" dirty="0">
+                        <a:rPr lang="ko-KR" sz="1300" dirty="0">
                           <a:solidFill>
                             <a:srgbClr val="1A2230"/>
                           </a:solidFill>
+                          <a:latin typeface="Noto Sans KR"/>
+                          <a:ea typeface="Noto Sans KR"/>
                         </a:rPr>
                         <a:t>+비용</a:t>
                       </a:r>
-                      <a:endParaRPr lang="en-US" sz="1300" dirty="0"/>
+                      <a:endParaRPr lang="ko-KR" sz="1300" dirty="0">
+                        <a:latin typeface="Noto Sans KR"/>
+                        <a:ea typeface="Noto Sans KR"/>
+                      </a:endParaRPr>
                     </a:p>
                   </a:txBody>
                   <a:tcPr marL="91440" marR="91440" marT="45720" marB="45720" anchor="ctr">
@@ -10527,14 +11112,19 @@
                         <a:buNone/>
                       </a:pPr>
                       <a:r>
-                        <a:rPr lang="en-US" sz="1300" dirty="0">
+                        <a:rPr lang="ko-KR" sz="1300" dirty="0">
                           <a:solidFill>
                             <a:srgbClr val="1A2230"/>
                           </a:solidFill>
+                          <a:latin typeface="Noto Sans KR"/>
+                          <a:ea typeface="Noto Sans KR"/>
                         </a:rPr>
                         <a:t>9%</a:t>
                       </a:r>
-                      <a:endParaRPr lang="en-US" sz="1300" dirty="0"/>
+                      <a:endParaRPr lang="ko-KR" sz="1300" dirty="0">
+                        <a:latin typeface="Noto Sans KR"/>
+                        <a:ea typeface="Noto Sans KR"/>
+                      </a:endParaRPr>
                     </a:p>
                   </a:txBody>
                   <a:tcPr marL="91440" marR="91440" marT="45720" marB="45720" anchor="ctr">
@@ -10585,14 +11175,19 @@
                         <a:buNone/>
                       </a:pPr>
                       <a:r>
-                        <a:rPr lang="en-US" sz="1300" dirty="0">
+                        <a:rPr lang="ko-KR" sz="1300" dirty="0">
                           <a:solidFill>
                             <a:srgbClr val="1A2230"/>
                           </a:solidFill>
+                          <a:latin typeface="Noto Sans KR"/>
+                          <a:ea typeface="Noto Sans KR"/>
                         </a:rPr>
                         <a:t>59%</a:t>
                       </a:r>
-                      <a:endParaRPr lang="en-US" sz="1300" dirty="0"/>
+                      <a:endParaRPr lang="ko-KR" sz="1300" dirty="0">
+                        <a:latin typeface="Noto Sans KR"/>
+                        <a:ea typeface="Noto Sans KR"/>
+                      </a:endParaRPr>
                     </a:p>
                   </a:txBody>
                   <a:tcPr marL="91440" marR="91440" marT="45720" marB="45720" anchor="ctr">
@@ -10643,14 +11238,19 @@
                         <a:buNone/>
                       </a:pPr>
                       <a:r>
-                        <a:rPr lang="en-US" sz="1300" dirty="0">
+                        <a:rPr lang="ko-KR" sz="1300" dirty="0">
                           <a:solidFill>
                             <a:srgbClr val="1A2230"/>
                           </a:solidFill>
+                          <a:latin typeface="Noto Sans KR"/>
+                          <a:ea typeface="Noto Sans KR"/>
                         </a:rPr>
                         <a:t>72%</a:t>
                       </a:r>
-                      <a:endParaRPr lang="en-US" sz="1300" dirty="0"/>
+                      <a:endParaRPr lang="ko-KR" sz="1300" dirty="0">
+                        <a:latin typeface="Noto Sans KR"/>
+                        <a:ea typeface="Noto Sans KR"/>
+                      </a:endParaRPr>
                     </a:p>
                   </a:txBody>
                   <a:tcPr marL="91440" marR="91440" marT="45720" marB="45720" anchor="ctr">
@@ -10701,14 +11301,19 @@
                         <a:buNone/>
                       </a:pPr>
                       <a:r>
-                        <a:rPr lang="en-US" sz="1300" dirty="0">
+                        <a:rPr lang="ko-KR" sz="1300" dirty="0">
                           <a:solidFill>
                             <a:srgbClr val="1A2230"/>
                           </a:solidFill>
+                          <a:latin typeface="Noto Sans KR"/>
+                          <a:ea typeface="Noto Sans KR"/>
                         </a:rPr>
                         <a:t>95%</a:t>
                       </a:r>
-                      <a:endParaRPr lang="en-US" sz="1300" dirty="0"/>
+                      <a:endParaRPr lang="ko-KR" sz="1300" dirty="0">
+                        <a:latin typeface="Noto Sans KR"/>
+                        <a:ea typeface="Noto Sans KR"/>
+                      </a:endParaRPr>
                     </a:p>
                   </a:txBody>
                   <a:tcPr marL="91440" marR="91440" marT="45720" marB="45720" anchor="ctr">
@@ -10759,14 +11364,19 @@
                         <a:buNone/>
                       </a:pPr>
                       <a:r>
-                        <a:rPr lang="en-US" sz="1300" dirty="0">
+                        <a:rPr lang="ko-KR" sz="1300" dirty="0">
                           <a:solidFill>
                             <a:srgbClr val="1A2230"/>
                           </a:solidFill>
+                          <a:latin typeface="Noto Sans KR"/>
+                          <a:ea typeface="Noto Sans KR"/>
                         </a:rPr>
                         <a:t>$0.00093</a:t>
                       </a:r>
-                      <a:endParaRPr lang="en-US" sz="1300" dirty="0"/>
+                      <a:endParaRPr lang="ko-KR" sz="1300" dirty="0">
+                        <a:latin typeface="Noto Sans KR"/>
+                        <a:ea typeface="Noto Sans KR"/>
+                      </a:endParaRPr>
                     </a:p>
                   </a:txBody>
                   <a:tcPr marL="91440" marR="91440" marT="45720" marB="45720" anchor="ctr">
@@ -10817,14 +11427,19 @@
                         <a:buNone/>
                       </a:pPr>
                       <a:r>
-                        <a:rPr lang="en-US" sz="1300" dirty="0">
+                        <a:rPr lang="ko-KR" sz="1300" dirty="0">
                           <a:solidFill>
                             <a:srgbClr val="1A2230"/>
                           </a:solidFill>
+                          <a:latin typeface="Noto Sans KR"/>
+                          <a:ea typeface="Noto Sans KR"/>
                         </a:rPr>
                         <a:t>10.6초</a:t>
                       </a:r>
-                      <a:endParaRPr lang="en-US" sz="1300" dirty="0"/>
+                      <a:endParaRPr lang="ko-KR" sz="1300" dirty="0">
+                        <a:latin typeface="Noto Sans KR"/>
+                        <a:ea typeface="Noto Sans KR"/>
+                      </a:endParaRPr>
                     </a:p>
                   </a:txBody>
                   <a:tcPr marL="91440" marR="91440" marT="45720" marB="45720" anchor="ctr">
@@ -10875,14 +11490,19 @@
                         <a:buNone/>
                       </a:pPr>
                       <a:r>
-                        <a:rPr lang="en-US" sz="1300" dirty="0">
+                        <a:rPr lang="ko-KR" sz="1300" dirty="0">
                           <a:solidFill>
                             <a:srgbClr val="1A2230"/>
                           </a:solidFill>
+                          <a:latin typeface="Noto Sans KR"/>
+                          <a:ea typeface="Noto Sans KR"/>
                         </a:rPr>
                         <a:t>2.3</a:t>
                       </a:r>
-                      <a:endParaRPr lang="en-US" sz="1300" dirty="0"/>
+                      <a:endParaRPr lang="ko-KR" sz="1300" dirty="0">
+                        <a:latin typeface="Noto Sans KR"/>
+                        <a:ea typeface="Noto Sans KR"/>
+                      </a:endParaRPr>
                     </a:p>
                   </a:txBody>
                   <a:tcPr marL="91440" marR="91440" marT="45720" marB="45720" anchor="ctr">
@@ -10935,14 +11555,19 @@
                         <a:buNone/>
                       </a:pPr>
                       <a:r>
-                        <a:rPr lang="en-US" sz="1300" dirty="0">
+                        <a:rPr lang="ko-KR" sz="1300" dirty="0">
                           <a:solidFill>
                             <a:srgbClr val="1A2230"/>
                           </a:solidFill>
+                          <a:latin typeface="Noto Sans KR"/>
+                          <a:ea typeface="Noto Sans KR"/>
                         </a:rPr>
                         <a:t>+v2 보완</a:t>
                       </a:r>
-                      <a:endParaRPr lang="en-US" sz="1300" dirty="0"/>
+                      <a:endParaRPr lang="ko-KR" sz="1300" dirty="0">
+                        <a:latin typeface="Noto Sans KR"/>
+                        <a:ea typeface="Noto Sans KR"/>
+                      </a:endParaRPr>
                     </a:p>
                   </a:txBody>
                   <a:tcPr marL="91440" marR="91440" marT="45720" marB="45720" anchor="ctr">
@@ -10993,14 +11618,19 @@
                         <a:buNone/>
                       </a:pPr>
                       <a:r>
-                        <a:rPr lang="en-US" sz="1300" dirty="0">
+                        <a:rPr lang="ko-KR" sz="1300" dirty="0">
                           <a:solidFill>
                             <a:srgbClr val="1A2230"/>
                           </a:solidFill>
+                          <a:latin typeface="Noto Sans KR"/>
+                          <a:ea typeface="Noto Sans KR"/>
                         </a:rPr>
                         <a:t>10%</a:t>
                       </a:r>
-                      <a:endParaRPr lang="en-US" sz="1300" dirty="0"/>
+                      <a:endParaRPr lang="ko-KR" sz="1300" dirty="0">
+                        <a:latin typeface="Noto Sans KR"/>
+                        <a:ea typeface="Noto Sans KR"/>
+                      </a:endParaRPr>
                     </a:p>
                   </a:txBody>
                   <a:tcPr marL="91440" marR="91440" marT="45720" marB="45720" anchor="ctr">
@@ -11051,14 +11681,19 @@
                         <a:buNone/>
                       </a:pPr>
                       <a:r>
-                        <a:rPr lang="en-US" sz="1300" dirty="0">
+                        <a:rPr lang="ko-KR" sz="1300" dirty="0">
                           <a:solidFill>
                             <a:srgbClr val="1A2230"/>
                           </a:solidFill>
+                          <a:latin typeface="Noto Sans KR"/>
+                          <a:ea typeface="Noto Sans KR"/>
                         </a:rPr>
                         <a:t>35%</a:t>
                       </a:r>
-                      <a:endParaRPr lang="en-US" sz="1300" dirty="0"/>
+                      <a:endParaRPr lang="ko-KR" sz="1300" dirty="0">
+                        <a:latin typeface="Noto Sans KR"/>
+                        <a:ea typeface="Noto Sans KR"/>
+                      </a:endParaRPr>
                     </a:p>
                   </a:txBody>
                   <a:tcPr marL="91440" marR="91440" marT="45720" marB="45720" anchor="ctr">
@@ -11109,14 +11744,19 @@
                         <a:buNone/>
                       </a:pPr>
                       <a:r>
-                        <a:rPr lang="en-US" sz="1300" dirty="0">
+                        <a:rPr lang="ko-KR" sz="1300" dirty="0">
                           <a:solidFill>
                             <a:srgbClr val="1A2230"/>
                           </a:solidFill>
+                          <a:latin typeface="Noto Sans KR"/>
+                          <a:ea typeface="Noto Sans KR"/>
                         </a:rPr>
                         <a:t>75%</a:t>
                       </a:r>
-                      <a:endParaRPr lang="en-US" sz="1300" dirty="0"/>
+                      <a:endParaRPr lang="ko-KR" sz="1300" dirty="0">
+                        <a:latin typeface="Noto Sans KR"/>
+                        <a:ea typeface="Noto Sans KR"/>
+                      </a:endParaRPr>
                     </a:p>
                   </a:txBody>
                   <a:tcPr marL="91440" marR="91440" marT="45720" marB="45720" anchor="ctr">
@@ -11167,14 +11807,19 @@
                         <a:buNone/>
                       </a:pPr>
                       <a:r>
-                        <a:rPr lang="en-US" sz="1300" dirty="0">
+                        <a:rPr lang="ko-KR" sz="1300" dirty="0">
                           <a:solidFill>
                             <a:srgbClr val="1A2230"/>
                           </a:solidFill>
+                          <a:latin typeface="Noto Sans KR"/>
+                          <a:ea typeface="Noto Sans KR"/>
                         </a:rPr>
                         <a:t>99%</a:t>
                       </a:r>
-                      <a:endParaRPr lang="en-US" sz="1300" dirty="0"/>
+                      <a:endParaRPr lang="ko-KR" sz="1300" dirty="0">
+                        <a:latin typeface="Noto Sans KR"/>
+                        <a:ea typeface="Noto Sans KR"/>
+                      </a:endParaRPr>
                     </a:p>
                   </a:txBody>
                   <a:tcPr marL="91440" marR="91440" marT="45720" marB="45720" anchor="ctr">
@@ -11225,14 +11870,19 @@
                         <a:buNone/>
                       </a:pPr>
                       <a:r>
-                        <a:rPr lang="en-US" sz="1300" dirty="0">
+                        <a:rPr lang="ko-KR" sz="1300" dirty="0">
                           <a:solidFill>
                             <a:srgbClr val="1A2230"/>
                           </a:solidFill>
+                          <a:latin typeface="Noto Sans KR"/>
+                          <a:ea typeface="Noto Sans KR"/>
                         </a:rPr>
                         <a:t>$0.00415</a:t>
                       </a:r>
-                      <a:endParaRPr lang="en-US" sz="1300" dirty="0"/>
+                      <a:endParaRPr lang="ko-KR" sz="1300" dirty="0">
+                        <a:latin typeface="Noto Sans KR"/>
+                        <a:ea typeface="Noto Sans KR"/>
+                      </a:endParaRPr>
                     </a:p>
                   </a:txBody>
                   <a:tcPr marL="91440" marR="91440" marT="45720" marB="45720" anchor="ctr">
@@ -11283,14 +11933,19 @@
                         <a:buNone/>
                       </a:pPr>
                       <a:r>
-                        <a:rPr lang="en-US" sz="1300" dirty="0">
+                        <a:rPr lang="ko-KR" sz="1300" dirty="0">
                           <a:solidFill>
                             <a:srgbClr val="1A2230"/>
                           </a:solidFill>
+                          <a:latin typeface="Noto Sans KR"/>
+                          <a:ea typeface="Noto Sans KR"/>
                         </a:rPr>
                         <a:t>11.8초</a:t>
                       </a:r>
-                      <a:endParaRPr lang="en-US" sz="1300" dirty="0"/>
+                      <a:endParaRPr lang="ko-KR" sz="1300" dirty="0">
+                        <a:latin typeface="Noto Sans KR"/>
+                        <a:ea typeface="Noto Sans KR"/>
+                      </a:endParaRPr>
                     </a:p>
                   </a:txBody>
                   <a:tcPr marL="91440" marR="91440" marT="45720" marB="45720" anchor="ctr">
@@ -11341,14 +11996,19 @@
                         <a:buNone/>
                       </a:pPr>
                       <a:r>
-                        <a:rPr lang="en-US" sz="1300" dirty="0">
+                        <a:rPr lang="ko-KR" sz="1300" dirty="0">
                           <a:solidFill>
                             <a:srgbClr val="1A2230"/>
                           </a:solidFill>
+                          <a:latin typeface="Noto Sans KR"/>
+                          <a:ea typeface="Noto Sans KR"/>
                         </a:rPr>
                         <a:t>0.0</a:t>
                       </a:r>
-                      <a:endParaRPr lang="en-US" sz="1300" dirty="0"/>
+                      <a:endParaRPr lang="ko-KR" sz="1300" dirty="0">
+                        <a:latin typeface="Noto Sans KR"/>
+                        <a:ea typeface="Noto Sans KR"/>
+                      </a:endParaRPr>
                     </a:p>
                   </a:txBody>
                   <a:tcPr marL="91440" marR="91440" marT="45720" marB="45720" anchor="ctr">
@@ -11401,14 +12061,19 @@
                         <a:buNone/>
                       </a:pPr>
                       <a:r>
-                        <a:rPr lang="en-US" sz="1300" b="1" dirty="0">
+                        <a:rPr lang="ko-KR" sz="1300" b="1" dirty="0">
                           <a:solidFill>
                             <a:srgbClr val="1A2230"/>
                           </a:solidFill>
+                          <a:latin typeface="Noto Sans KR"/>
+                          <a:ea typeface="Noto Sans KR"/>
                         </a:rPr>
                         <a:t>final</a:t>
                       </a:r>
-                      <a:endParaRPr lang="en-US" sz="1300" dirty="0"/>
+                      <a:endParaRPr lang="ko-KR" sz="1300" dirty="0">
+                        <a:latin typeface="Noto Sans KR"/>
+                        <a:ea typeface="Noto Sans KR"/>
+                      </a:endParaRPr>
                     </a:p>
                   </a:txBody>
                   <a:tcPr marL="91440" marR="91440" marT="45720" marB="45720" anchor="ctr">
@@ -11459,14 +12124,19 @@
                         <a:buNone/>
                       </a:pPr>
                       <a:r>
-                        <a:rPr lang="en-US" sz="1300" dirty="0">
+                        <a:rPr lang="ko-KR" sz="1300" dirty="0">
                           <a:solidFill>
                             <a:srgbClr val="1A2230"/>
                           </a:solidFill>
+                          <a:latin typeface="Noto Sans KR"/>
+                          <a:ea typeface="Noto Sans KR"/>
                         </a:rPr>
                         <a:t>9%</a:t>
                       </a:r>
-                      <a:endParaRPr lang="en-US" sz="1300" dirty="0"/>
+                      <a:endParaRPr lang="ko-KR" sz="1300" dirty="0">
+                        <a:latin typeface="Noto Sans KR"/>
+                        <a:ea typeface="Noto Sans KR"/>
+                      </a:endParaRPr>
                     </a:p>
                   </a:txBody>
                   <a:tcPr marL="91440" marR="91440" marT="45720" marB="45720" anchor="ctr">
@@ -11517,14 +12187,19 @@
                         <a:buNone/>
                       </a:pPr>
                       <a:r>
-                        <a:rPr lang="en-US" sz="1300" dirty="0">
+                        <a:rPr lang="ko-KR" sz="1300" dirty="0">
                           <a:solidFill>
                             <a:srgbClr val="1A2230"/>
                           </a:solidFill>
+                          <a:latin typeface="Noto Sans KR"/>
+                          <a:ea typeface="Noto Sans KR"/>
                         </a:rPr>
                         <a:t>35%</a:t>
                       </a:r>
-                      <a:endParaRPr lang="en-US" sz="1300" dirty="0"/>
+                      <a:endParaRPr lang="ko-KR" sz="1300" dirty="0">
+                        <a:latin typeface="Noto Sans KR"/>
+                        <a:ea typeface="Noto Sans KR"/>
+                      </a:endParaRPr>
                     </a:p>
                   </a:txBody>
                   <a:tcPr marL="91440" marR="91440" marT="45720" marB="45720" anchor="ctr">
@@ -11575,14 +12250,19 @@
                         <a:buNone/>
                       </a:pPr>
                       <a:r>
-                        <a:rPr lang="en-US" sz="1300" dirty="0">
+                        <a:rPr lang="ko-KR" sz="1300" dirty="0">
                           <a:solidFill>
                             <a:srgbClr val="1A2230"/>
                           </a:solidFill>
+                          <a:latin typeface="Noto Sans KR"/>
+                          <a:ea typeface="Noto Sans KR"/>
                         </a:rPr>
                         <a:t>73%</a:t>
                       </a:r>
-                      <a:endParaRPr lang="en-US" sz="1300" dirty="0"/>
+                      <a:endParaRPr lang="ko-KR" sz="1300" dirty="0">
+                        <a:latin typeface="Noto Sans KR"/>
+                        <a:ea typeface="Noto Sans KR"/>
+                      </a:endParaRPr>
                     </a:p>
                   </a:txBody>
                   <a:tcPr marL="91440" marR="91440" marT="45720" marB="45720" anchor="ctr">
@@ -11633,14 +12313,19 @@
                         <a:buNone/>
                       </a:pPr>
                       <a:r>
-                        <a:rPr lang="en-US" sz="1300" dirty="0">
+                        <a:rPr lang="ko-KR" sz="1300" dirty="0">
                           <a:solidFill>
                             <a:srgbClr val="1A2230"/>
                           </a:solidFill>
+                          <a:latin typeface="Noto Sans KR"/>
+                          <a:ea typeface="Noto Sans KR"/>
                         </a:rPr>
                         <a:t>98%</a:t>
                       </a:r>
-                      <a:endParaRPr lang="en-US" sz="1300" dirty="0"/>
+                      <a:endParaRPr lang="ko-KR" sz="1300" dirty="0">
+                        <a:latin typeface="Noto Sans KR"/>
+                        <a:ea typeface="Noto Sans KR"/>
+                      </a:endParaRPr>
                     </a:p>
                   </a:txBody>
                   <a:tcPr marL="91440" marR="91440" marT="45720" marB="45720" anchor="ctr">
@@ -11691,14 +12376,19 @@
                         <a:buNone/>
                       </a:pPr>
                       <a:r>
-                        <a:rPr lang="en-US" sz="1300" dirty="0">
+                        <a:rPr lang="ko-KR" sz="1300" dirty="0">
                           <a:solidFill>
                             <a:srgbClr val="1A2230"/>
                           </a:solidFill>
+                          <a:latin typeface="Noto Sans KR"/>
+                          <a:ea typeface="Noto Sans KR"/>
                         </a:rPr>
                         <a:t>$0.00057</a:t>
                       </a:r>
-                      <a:endParaRPr lang="en-US" sz="1300" dirty="0"/>
+                      <a:endParaRPr lang="ko-KR" sz="1300" dirty="0">
+                        <a:latin typeface="Noto Sans KR"/>
+                        <a:ea typeface="Noto Sans KR"/>
+                      </a:endParaRPr>
                     </a:p>
                   </a:txBody>
                   <a:tcPr marL="91440" marR="91440" marT="45720" marB="45720" anchor="ctr">
@@ -11749,14 +12439,19 @@
                         <a:buNone/>
                       </a:pPr>
                       <a:r>
-                        <a:rPr lang="en-US" sz="1300" dirty="0">
+                        <a:rPr lang="ko-KR" sz="1300" dirty="0">
                           <a:solidFill>
                             <a:srgbClr val="1A2230"/>
                           </a:solidFill>
+                          <a:latin typeface="Noto Sans KR"/>
+                          <a:ea typeface="Noto Sans KR"/>
                         </a:rPr>
                         <a:t>9.8초</a:t>
                       </a:r>
-                      <a:endParaRPr lang="en-US" sz="1300" dirty="0"/>
+                      <a:endParaRPr lang="ko-KR" sz="1300" dirty="0">
+                        <a:latin typeface="Noto Sans KR"/>
+                        <a:ea typeface="Noto Sans KR"/>
+                      </a:endParaRPr>
                     </a:p>
                   </a:txBody>
                   <a:tcPr marL="91440" marR="91440" marT="45720" marB="45720" anchor="ctr">
@@ -11807,14 +12502,19 @@
                         <a:buNone/>
                       </a:pPr>
                       <a:r>
-                        <a:rPr lang="en-US" sz="1300" dirty="0">
+                        <a:rPr lang="ko-KR" sz="1300" dirty="0">
                           <a:solidFill>
                             <a:srgbClr val="1A2230"/>
                           </a:solidFill>
+                          <a:latin typeface="Noto Sans KR"/>
+                          <a:ea typeface="Noto Sans KR"/>
                         </a:rPr>
                         <a:t>0.0</a:t>
                       </a:r>
-                      <a:endParaRPr lang="en-US" sz="1300" dirty="0"/>
+                      <a:endParaRPr lang="ko-KR" sz="1300" dirty="0">
+                        <a:latin typeface="Noto Sans KR"/>
+                        <a:ea typeface="Noto Sans KR"/>
+                      </a:endParaRPr>
                     </a:p>
                   </a:txBody>
                   <a:tcPr marL="91440" marR="91440" marT="45720" marB="45720" anchor="ctr">
@@ -11889,14 +12589,19 @@
               <a:buNone/>
             </a:pPr>
             <a:r>
-              <a:rPr lang="en-US" sz="1350" b="1" dirty="0">
+              <a:rPr lang="ko-KR" sz="1350" b="1" dirty="0">
                 <a:solidFill>
                   <a:schemeClr val="tx1"/>
                 </a:solidFill>
+                <a:latin typeface="Noto Sans KR"/>
+                <a:ea typeface="Noto Sans KR"/>
               </a:rPr>
               <a:t>읽는 법</a:t>
             </a:r>
-            <a:endParaRPr lang="en-US" sz="1350" dirty="0"/>
+            <a:endParaRPr lang="ko-KR" sz="1350" dirty="0">
+              <a:latin typeface="Noto Sans KR"/>
+              <a:ea typeface="Noto Sans KR"/>
+            </a:endParaRPr>
           </a:p>
           <a:p>
             <a:pPr marL="342900" indent="-342900">
@@ -11907,14 +12612,19 @@
               <a:buChar char="•"/>
             </a:pPr>
             <a:r>
-              <a:rPr lang="en-US" sz="1350" dirty="0">
+              <a:rPr lang="ko-KR" sz="1350" dirty="0">
                 <a:solidFill>
                   <a:schemeClr val="tx1"/>
                 </a:solidFill>
+                <a:latin typeface="Noto Sans KR"/>
+                <a:ea typeface="Noto Sans KR"/>
               </a:rPr>
               <a:t>Judge를 붙이면 비용과 지연이 오르지만, 품질 지표는 신뢰구간 안에서 움직이지 않았다.</a:t>
             </a:r>
-            <a:endParaRPr lang="en-US" sz="1350" dirty="0"/>
+            <a:endParaRPr lang="ko-KR" sz="1350" dirty="0">
+              <a:latin typeface="Noto Sans KR"/>
+              <a:ea typeface="Noto Sans KR"/>
+            </a:endParaRPr>
           </a:p>
           <a:p>
             <a:pPr marL="342900" indent="-342900">
@@ -11925,14 +12635,19 @@
               <a:buChar char="•"/>
             </a:pPr>
             <a:r>
-              <a:rPr lang="en-US" sz="1350" dirty="0">
+              <a:rPr lang="ko-KR" sz="1350" dirty="0">
                 <a:solidFill>
                   <a:schemeClr val="tx1"/>
                 </a:solidFill>
+                <a:latin typeface="Noto Sans KR"/>
+                <a:ea typeface="Noto Sans KR"/>
               </a:rPr>
               <a:t>캐스케이드는 장애 1건당 비용을 크게 줄이는 대신 런북 어구 포함이 내려갔다 (-5%p, 유의하지 않음). 이 대가를 받아들일지는 운영 정책의 선택이다.</a:t>
             </a:r>
-            <a:endParaRPr lang="en-US" sz="1350" dirty="0"/>
+            <a:endParaRPr lang="ko-KR" sz="1350" dirty="0">
+              <a:latin typeface="Noto Sans KR"/>
+              <a:ea typeface="Noto Sans KR"/>
+            </a:endParaRPr>
           </a:p>
         </p:txBody>
       </p:sp>
@@ -11961,14 +12676,19 @@
               <a:buNone/>
             </a:pPr>
             <a:r>
-              <a:rPr lang="en-US" sz="1050" dirty="0">
+              <a:rPr lang="ko-KR" sz="1050" dirty="0">
                 <a:solidFill>
                   <a:schemeClr val="accent3"/>
                 </a:solidFill>
+                <a:latin typeface="Noto Sans KR"/>
+                <a:ea typeface="Noto Sans KR"/>
               </a:rPr>
               <a:t>holdout 36건, 3회 평균. 비용은 OpenAI 공개 단가 x 실측 토큰 추정치 (평가 Judge 제외). 지연: 5구성은 7프로세스 동시 부하, +비용·final은 캐시 버그 수정 뒤 2프로세스로 재측정 → 두 구성의 지연 차이엔 부하 차이가 섞였을 수 있음</a:t>
             </a:r>
-            <a:endParaRPr lang="en-US" sz="1050" dirty="0"/>
+            <a:endParaRPr lang="ko-KR" sz="1050" dirty="0">
+              <a:latin typeface="Noto Sans KR"/>
+              <a:ea typeface="Noto Sans KR"/>
+            </a:endParaRPr>
           </a:p>
         </p:txBody>
       </p:sp>
@@ -12004,16 +12724,24 @@
                 <a:solidFill>
                   <a:schemeClr val="accent3"/>
                 </a:solidFill>
+                <a:latin typeface="Noto Sans KR"/>
+                <a:ea typeface="Noto Sans KR"/>
               </a:defRPr>
             </a:lvl1pPr>
           </a:lstStyle>
           <a:p>
             <a:pPr algn="r"/>
             <a:fld id="{F7021451-1387-4CA6-816F-3879F97B5CBC}" type="slidenum">
-              <a:rPr b="0" lang="en-US"/>
+              <a:rPr b="0" lang="ko-KR">
+                <a:latin typeface="Noto Sans KR"/>
+                <a:ea typeface="Noto Sans KR"/>
+              </a:rPr>
               <a:t>12</a:t>
             </a:fld>
-            <a:endParaRPr lang="en-US"/>
+            <a:endParaRPr lang="ko-KR">
+              <a:latin typeface="Noto Sans KR"/>
+              <a:ea typeface="Noto Sans KR"/>
+            </a:endParaRPr>
           </a:p>
         </p:txBody>
       </p:sp>
@@ -12069,14 +12797,19 @@
               <a:buNone/>
             </a:pPr>
             <a:r>
-              <a:rPr lang="en-US" sz="2800" b="1" dirty="0">
+              <a:rPr lang="ko-KR" sz="2800" b="1" dirty="0">
                 <a:solidFill>
                   <a:schemeClr val="tx2"/>
                 </a:solidFill>
+                <a:latin typeface="Noto Sans KR"/>
+                <a:ea typeface="Noto Sans KR"/>
               </a:rPr>
               <a:t>1차 실측이 찾은 약점을 v2가 고쳤고, holdout에서 확인했다</a:t>
             </a:r>
-            <a:endParaRPr lang="en-US" sz="2800" dirty="0"/>
+            <a:endParaRPr lang="ko-KR" sz="2800" dirty="0">
+              <a:latin typeface="Noto Sans KR"/>
+              <a:ea typeface="Noto Sans KR"/>
+            </a:endParaRPr>
           </a:p>
         </p:txBody>
       </p:sp>
@@ -12132,14 +12865,19 @@
               <a:buNone/>
             </a:pPr>
             <a:r>
-              <a:rPr lang="en-US" sz="3600" b="1" dirty="0">
+              <a:rPr lang="ko-KR" sz="3600" b="1" dirty="0">
                 <a:solidFill>
                   <a:schemeClr val="accent2"/>
                 </a:solidFill>
+                <a:latin typeface="Noto Sans KR"/>
+                <a:ea typeface="Noto Sans KR"/>
               </a:rPr>
               <a:t>83% → 100%</a:t>
             </a:r>
-            <a:endParaRPr lang="en-US" sz="3600" dirty="0"/>
+            <a:endParaRPr lang="ko-KR" sz="3600" dirty="0">
+              <a:latin typeface="Noto Sans KR"/>
+              <a:ea typeface="Noto Sans KR"/>
+            </a:endParaRPr>
           </a:p>
         </p:txBody>
       </p:sp>
@@ -12168,28 +12906,38 @@
               <a:buNone/>
             </a:pPr>
             <a:r>
-              <a:rPr lang="en-US" sz="1350" dirty="0">
+              <a:rPr lang="ko-KR" sz="1350" dirty="0">
                 <a:solidFill>
                   <a:schemeClr val="tx1"/>
                 </a:solidFill>
+                <a:latin typeface="Noto Sans KR"/>
+                <a:ea typeface="Noto Sans KR"/>
               </a:rPr>
               <a:t>미등록 질의 평가 통과율 (4건 x 3회)</a:t>
             </a:r>
-            <a:endParaRPr lang="en-US" sz="1350" dirty="0"/>
+            <a:endParaRPr lang="ko-KR" sz="1350" dirty="0">
+              <a:latin typeface="Noto Sans KR"/>
+              <a:ea typeface="Noto Sans KR"/>
+            </a:endParaRPr>
           </a:p>
           <a:p>
             <a:pPr indent="0" marL="0">
               <a:buNone/>
             </a:pPr>
             <a:r>
-              <a:rPr lang="en-US" sz="1350" dirty="0">
+              <a:rPr lang="ko-KR" sz="1350" dirty="0">
                 <a:solidFill>
                   <a:schemeClr val="tx1"/>
                 </a:solidFill>
+                <a:latin typeface="Noto Sans KR"/>
+                <a:ea typeface="Noto Sans KR"/>
               </a:rPr>
               <a:t>전체 통과율 차이는 유의하지 않음</a:t>
             </a:r>
-            <a:endParaRPr lang="en-US" sz="1350" dirty="0"/>
+            <a:endParaRPr lang="ko-KR" sz="1350" dirty="0">
+              <a:latin typeface="Noto Sans KR"/>
+              <a:ea typeface="Noto Sans KR"/>
+            </a:endParaRPr>
           </a:p>
         </p:txBody>
       </p:sp>
@@ -12245,14 +12993,19 @@
               <a:buNone/>
             </a:pPr>
             <a:r>
-              <a:rPr lang="en-US" sz="3600" b="1" dirty="0">
+              <a:rPr lang="ko-KR" sz="3600" b="1" dirty="0">
                 <a:solidFill>
                   <a:schemeClr val="accent2"/>
                 </a:solidFill>
+                <a:latin typeface="Noto Sans KR"/>
+                <a:ea typeface="Noto Sans KR"/>
               </a:rPr>
               <a:t>59% → 35%</a:t>
             </a:r>
-            <a:endParaRPr lang="en-US" sz="3600" dirty="0"/>
+            <a:endParaRPr lang="ko-KR" sz="3600" dirty="0">
+              <a:latin typeface="Noto Sans KR"/>
+              <a:ea typeface="Noto Sans KR"/>
+            </a:endParaRPr>
           </a:p>
         </p:txBody>
       </p:sp>
@@ -12281,28 +13034,38 @@
               <a:buNone/>
             </a:pPr>
             <a:r>
-              <a:rPr lang="en-US" sz="1350" dirty="0">
+              <a:rPr lang="ko-KR" sz="1350" dirty="0">
                 <a:solidFill>
                   <a:schemeClr val="tx1"/>
                 </a:solidFill>
+                <a:latin typeface="Noto Sans KR"/>
+                <a:ea typeface="Noto Sans KR"/>
               </a:rPr>
               <a:t>무관 런북 혼입률</a:t>
             </a:r>
-            <a:endParaRPr lang="en-US" sz="1350" dirty="0"/>
+            <a:endParaRPr lang="ko-KR" sz="1350" dirty="0">
+              <a:latin typeface="Noto Sans KR"/>
+              <a:ea typeface="Noto Sans KR"/>
+            </a:endParaRPr>
           </a:p>
           <a:p>
             <a:pPr indent="0" marL="0">
               <a:buNone/>
             </a:pPr>
             <a:r>
-              <a:rPr lang="en-US" sz="1350" dirty="0">
+              <a:rPr lang="ko-KR" sz="1350" dirty="0">
                 <a:solidFill>
                   <a:schemeClr val="tx1"/>
                 </a:solidFill>
+                <a:latin typeface="Noto Sans KR"/>
+                <a:ea typeface="Noto Sans KR"/>
               </a:rPr>
               <a:t>최소 유사도 기준 (dev로만 정함)</a:t>
             </a:r>
-            <a:endParaRPr lang="en-US" sz="1350" dirty="0"/>
+            <a:endParaRPr lang="ko-KR" sz="1350" dirty="0">
+              <a:latin typeface="Noto Sans KR"/>
+              <a:ea typeface="Noto Sans KR"/>
+            </a:endParaRPr>
           </a:p>
         </p:txBody>
       </p:sp>
@@ -12358,14 +13121,19 @@
               <a:buNone/>
             </a:pPr>
             <a:r>
-              <a:rPr lang="en-US" sz="3600" b="1" dirty="0">
+              <a:rPr lang="ko-KR" sz="3600" b="1" dirty="0">
                 <a:solidFill>
                   <a:schemeClr val="accent2"/>
                 </a:solidFill>
+                <a:latin typeface="Noto Sans KR"/>
+                <a:ea typeface="Noto Sans KR"/>
               </a:rPr>
               <a:t>2.0 → 0.0</a:t>
             </a:r>
-            <a:endParaRPr lang="en-US" sz="3600" dirty="0"/>
+            <a:endParaRPr lang="ko-KR" sz="3600" dirty="0">
+              <a:latin typeface="Noto Sans KR"/>
+              <a:ea typeface="Noto Sans KR"/>
+            </a:endParaRPr>
           </a:p>
         </p:txBody>
       </p:sp>
@@ -12394,28 +13162,38 @@
               <a:buNone/>
             </a:pPr>
             <a:r>
-              <a:rPr lang="en-US" sz="1350" dirty="0">
+              <a:rPr lang="ko-KR" sz="1350" dirty="0">
                 <a:solidFill>
                   <a:schemeClr val="tx1"/>
                 </a:solidFill>
+                <a:latin typeface="Noto Sans KR"/>
+                <a:ea typeface="Noto Sans KR"/>
               </a:rPr>
               <a:t>Judge 재작성 (holdout 36건, 회당)</a:t>
             </a:r>
-            <a:endParaRPr lang="en-US" sz="1350" dirty="0"/>
+            <a:endParaRPr lang="ko-KR" sz="1350" dirty="0">
+              <a:latin typeface="Noto Sans KR"/>
+              <a:ea typeface="Noto Sans KR"/>
+            </a:endParaRPr>
           </a:p>
           <a:p>
             <a:pPr indent="0" marL="0">
               <a:buNone/>
             </a:pPr>
             <a:r>
-              <a:rPr lang="en-US" sz="1350" dirty="0">
+              <a:rPr lang="ko-KR" sz="1350" dirty="0">
                 <a:solidFill>
                   <a:schemeClr val="tx1"/>
                 </a:solidFill>
+                <a:latin typeface="Noto Sans KR"/>
+                <a:ea typeface="Noto Sans KR"/>
               </a:rPr>
               <a:t>근거 밖 요구를 하지 않게 함</a:t>
             </a:r>
-            <a:endParaRPr lang="en-US" sz="1350" dirty="0"/>
+            <a:endParaRPr lang="ko-KR" sz="1350" dirty="0">
+              <a:latin typeface="Noto Sans KR"/>
+              <a:ea typeface="Noto Sans KR"/>
+            </a:endParaRPr>
           </a:p>
         </p:txBody>
       </p:sp>
@@ -12447,14 +13225,19 @@
               <a:buNone/>
             </a:pPr>
             <a:r>
-              <a:rPr lang="en-US" sz="1400" b="1" dirty="0">
+              <a:rPr lang="ko-KR" sz="1400" b="1" dirty="0">
                 <a:solidFill>
                   <a:schemeClr val="tx1"/>
                 </a:solidFill>
+                <a:latin typeface="Noto Sans KR"/>
+                <a:ea typeface="Noto Sans KR"/>
               </a:rPr>
               <a:t>1차 실측(dev 24건)에서 본 문제</a:t>
             </a:r>
-            <a:endParaRPr lang="en-US" sz="1400" dirty="0"/>
+            <a:endParaRPr lang="ko-KR" sz="1400" dirty="0">
+              <a:latin typeface="Noto Sans KR"/>
+              <a:ea typeface="Noto Sans KR"/>
+            </a:endParaRPr>
           </a:p>
           <a:p>
             <a:pPr marL="342900" indent="-342900">
@@ -12465,14 +13248,19 @@
               <a:buChar char="•"/>
             </a:pPr>
             <a:r>
-              <a:rPr lang="en-US" sz="1400" dirty="0">
+              <a:rPr lang="ko-KR" sz="1400" dirty="0">
                 <a:solidFill>
                   <a:schemeClr val="tx1"/>
                 </a:solidFill>
+                <a:latin typeface="Noto Sans KR"/>
+                <a:ea typeface="Noto Sans KR"/>
               </a:rPr>
               <a:t>Kafka처럼 런북이 없는 질문에 Judge가 '런북 절차를 반영하라'며 반려 → 답이 무관한 절차를 섞는 쪽으로 바뀜</a:t>
             </a:r>
-            <a:endParaRPr lang="en-US" sz="1400" dirty="0"/>
+            <a:endParaRPr lang="ko-KR" sz="1400" dirty="0">
+              <a:latin typeface="Noto Sans KR"/>
+              <a:ea typeface="Noto Sans KR"/>
+            </a:endParaRPr>
           </a:p>
           <a:p>
             <a:pPr marL="342900" indent="-342900">
@@ -12483,14 +13271,19 @@
               <a:buChar char="•"/>
             </a:pPr>
             <a:r>
-              <a:rPr lang="en-US" sz="1400" dirty="0">
+              <a:rPr lang="ko-KR" sz="1400" dirty="0">
                 <a:solidFill>
                   <a:schemeClr val="tx1"/>
                 </a:solidFill>
+                <a:latin typeface="Noto Sans KR"/>
+                <a:ea typeface="Noto Sans KR"/>
               </a:rPr>
               <a:t>RAG가 유사도와 상관없이 늘 런북을 넣음</a:t>
             </a:r>
-            <a:endParaRPr lang="en-US" sz="1400" dirty="0"/>
+            <a:endParaRPr lang="ko-KR" sz="1400" dirty="0">
+              <a:latin typeface="Noto Sans KR"/>
+              <a:ea typeface="Noto Sans KR"/>
+            </a:endParaRPr>
           </a:p>
           <a:p>
             <a:pPr indent="0" marL="0">
@@ -12500,14 +13293,19 @@
               <a:buNone/>
             </a:pPr>
             <a:r>
-              <a:rPr lang="en-US" sz="600" dirty="0">
+              <a:rPr lang="ko-KR" sz="600" dirty="0">
                 <a:solidFill>
                   <a:schemeClr val="tx1"/>
                 </a:solidFill>
+                <a:latin typeface="Noto Sans KR"/>
+                <a:ea typeface="Noto Sans KR"/>
               </a:rPr>
               <a:t> </a:t>
             </a:r>
-            <a:endParaRPr lang="en-US" sz="1400" dirty="0"/>
+            <a:endParaRPr lang="ko-KR" sz="1400" dirty="0">
+              <a:latin typeface="Noto Sans KR"/>
+              <a:ea typeface="Noto Sans KR"/>
+            </a:endParaRPr>
           </a:p>
           <a:p>
             <a:pPr marL="342900" indent="-342900">
@@ -12518,14 +13316,19 @@
               <a:buChar char="•"/>
             </a:pPr>
             <a:r>
-              <a:rPr lang="en-US" sz="1400" dirty="0">
+              <a:rPr lang="ko-KR" sz="1400" dirty="0">
                 <a:solidFill>
                   <a:srgbClr val="E8833A"/>
                 </a:solidFill>
+                <a:latin typeface="Noto Sans KR"/>
+                <a:ea typeface="Noto Sans KR"/>
               </a:rPr>
               <a:t>주의: 최소 유사도 0.3236는 dev에서 정답 있는 질의와 없는 질의의 간격이 0.0023뿐인 경계값이다. holdout에서 정답 누락은 9% → 10%로 거의 늘지 않았다.</a:t>
             </a:r>
-            <a:endParaRPr lang="en-US" sz="1400" dirty="0"/>
+            <a:endParaRPr lang="ko-KR" sz="1400" dirty="0">
+              <a:latin typeface="Noto Sans KR"/>
+              <a:ea typeface="Noto Sans KR"/>
+            </a:endParaRPr>
           </a:p>
         </p:txBody>
       </p:sp>
@@ -12561,16 +13364,24 @@
                 <a:solidFill>
                   <a:schemeClr val="accent3"/>
                 </a:solidFill>
+                <a:latin typeface="Noto Sans KR"/>
+                <a:ea typeface="Noto Sans KR"/>
               </a:defRPr>
             </a:lvl1pPr>
           </a:lstStyle>
           <a:p>
             <a:pPr algn="r"/>
             <a:fld id="{F7021451-1387-4CA6-816F-3879F97B5CBC}" type="slidenum">
-              <a:rPr b="0" lang="en-US"/>
+              <a:rPr b="0" lang="ko-KR">
+                <a:latin typeface="Noto Sans KR"/>
+                <a:ea typeface="Noto Sans KR"/>
+              </a:rPr>
               <a:t>13</a:t>
             </a:fld>
-            <a:endParaRPr lang="en-US"/>
+            <a:endParaRPr lang="ko-KR">
+              <a:latin typeface="Noto Sans KR"/>
+              <a:ea typeface="Noto Sans KR"/>
+            </a:endParaRPr>
           </a:p>
         </p:txBody>
       </p:sp>
@@ -12626,14 +13437,19 @@
               <a:buNone/>
             </a:pPr>
             <a:r>
-              <a:rPr lang="en-US" sz="2800" b="1" dirty="0">
+              <a:rPr lang="ko-KR" sz="2800" b="1" dirty="0">
                 <a:solidFill>
                   <a:schemeClr val="tx2"/>
                 </a:solidFill>
+                <a:latin typeface="Noto Sans KR"/>
+                <a:ea typeface="Noto Sans KR"/>
               </a:rPr>
               <a:t>운영 안정성: 동시 요청, 도구 장애, 반복 질문</a:t>
             </a:r>
-            <a:endParaRPr lang="en-US" sz="2800" dirty="0"/>
+            <a:endParaRPr lang="ko-KR" sz="2800" dirty="0">
+              <a:latin typeface="Noto Sans KR"/>
+              <a:ea typeface="Noto Sans KR"/>
+            </a:endParaRPr>
           </a:p>
         </p:txBody>
       </p:sp>
@@ -12705,42 +13521,57 @@
               <a:buNone/>
             </a:pPr>
             <a:r>
-              <a:rPr lang="en-US" sz="1400" b="1" dirty="0">
+              <a:rPr lang="ko-KR" sz="1400" b="1" dirty="0">
                 <a:solidFill>
                   <a:srgbClr val="16202C"/>
                 </a:solidFill>
+                <a:latin typeface="Noto Sans KR"/>
+                <a:ea typeface="Noto Sans KR"/>
               </a:rPr>
               <a:t>도구 장애 주입 (모니터링 호출 30% 실패)</a:t>
             </a:r>
-            <a:endParaRPr lang="en-US" sz="1400" dirty="0"/>
+            <a:endParaRPr lang="ko-KR" sz="1400" dirty="0">
+              <a:latin typeface="Noto Sans KR"/>
+              <a:ea typeface="Noto Sans KR"/>
+            </a:endParaRPr>
           </a:p>
           <a:p>
             <a:pPr indent="0" marL="0">
               <a:buNone/>
             </a:pPr>
             <a:r>
-              <a:rPr lang="en-US" sz="1200" dirty="0">
+              <a:rPr lang="ko-KR" sz="1200" dirty="0">
                 <a:solidFill>
                   <a:srgbClr val="8A94A3"/>
                 </a:solidFill>
+                <a:latin typeface="Noto Sans KR"/>
+                <a:ea typeface="Noto Sans KR"/>
               </a:rPr>
               <a:t>장애를 맞은 질의 중 끝까지 답한 건수</a:t>
             </a:r>
-            <a:endParaRPr lang="en-US" sz="1400" dirty="0"/>
+            <a:endParaRPr lang="ko-KR" sz="1400" dirty="0">
+              <a:latin typeface="Noto Sans KR"/>
+              <a:ea typeface="Noto Sans KR"/>
+            </a:endParaRPr>
           </a:p>
           <a:p>
             <a:pPr indent="0" marL="0">
               <a:buNone/>
             </a:pPr>
             <a:r>
-              <a:rPr lang="en-US" sz="1700" b="1" dirty="0">
+              <a:rPr lang="ko-KR" sz="1700" b="1" dirty="0">
                 <a:solidFill>
                   <a:srgbClr val="155E4B"/>
                 </a:solidFill>
+                <a:latin typeface="Noto Sans KR"/>
+                <a:ea typeface="Noto Sans KR"/>
               </a:rPr>
               <a:t>base 0/19 · 허용 끔 0/18 · final 18/18</a:t>
             </a:r>
-            <a:endParaRPr lang="en-US" sz="1400" dirty="0"/>
+            <a:endParaRPr lang="ko-KR" sz="1400" dirty="0">
+              <a:latin typeface="Noto Sans KR"/>
+              <a:ea typeface="Noto Sans KR"/>
+            </a:endParaRPr>
           </a:p>
         </p:txBody>
       </p:sp>
@@ -12796,42 +13627,57 @@
               <a:buNone/>
             </a:pPr>
             <a:r>
-              <a:rPr lang="en-US" sz="1400" b="1" dirty="0">
+              <a:rPr lang="ko-KR" sz="1400" b="1" dirty="0">
                 <a:solidFill>
                   <a:srgbClr val="16202C"/>
                 </a:solidFill>
+                <a:latin typeface="Noto Sans KR"/>
+                <a:ea typeface="Noto Sans KR"/>
               </a:rPr>
               <a:t>반복 질문 캐시 (같은 60건 2회, 실제 API)</a:t>
             </a:r>
-            <a:endParaRPr lang="en-US" sz="1400" dirty="0"/>
+            <a:endParaRPr lang="ko-KR" sz="1400" dirty="0">
+              <a:latin typeface="Noto Sans KR"/>
+              <a:ea typeface="Noto Sans KR"/>
+            </a:endParaRPr>
           </a:p>
           <a:p>
             <a:pPr indent="0" marL="0">
               <a:buNone/>
             </a:pPr>
             <a:r>
-              <a:rPr lang="en-US" sz="1600" b="1" dirty="0">
+              <a:rPr lang="ko-KR" sz="1600" b="1" dirty="0">
                 <a:solidFill>
                   <a:srgbClr val="155E4B"/>
                 </a:solidFill>
+                <a:latin typeface="Noto Sans KR"/>
+                <a:ea typeface="Noto Sans KR"/>
               </a:rPr>
               <a:t>2회차 적중 112/160, 지연 p50 7.9초 → 5.6초</a:t>
             </a:r>
-            <a:endParaRPr lang="en-US" sz="1400" dirty="0"/>
+            <a:endParaRPr lang="ko-KR" sz="1400" dirty="0">
+              <a:latin typeface="Noto Sans KR"/>
+              <a:ea typeface="Noto Sans KR"/>
+            </a:endParaRPr>
           </a:p>
           <a:p>
             <a:pPr indent="0" marL="0">
               <a:buNone/>
             </a:pPr>
             <a:r>
-              <a:rPr lang="en-US" sz="1200" dirty="0">
+              <a:rPr lang="ko-KR" sz="1200" dirty="0">
                 <a:solidFill>
                   <a:schemeClr val="tx1"/>
                 </a:solidFill>
+                <a:latin typeface="Noto Sans KR"/>
+                <a:ea typeface="Noto Sans KR"/>
               </a:rPr>
               <a:t>route·plan·임베딩만 캐시 (final 비용의 21%). 1회차 → 2회차 비용 $0.0272 → $0.0233. 모니터링·답변은 캐시하지 않음.</a:t>
             </a:r>
-            <a:endParaRPr lang="en-US" sz="1400" dirty="0"/>
+            <a:endParaRPr lang="ko-KR" sz="1400" dirty="0">
+              <a:latin typeface="Noto Sans KR"/>
+              <a:ea typeface="Noto Sans KR"/>
+            </a:endParaRPr>
           </a:p>
         </p:txBody>
       </p:sp>
@@ -12860,14 +13706,19 @@
               <a:buNone/>
             </a:pPr>
             <a:r>
-              <a:rPr lang="en-US" sz="1050" dirty="0">
+              <a:rPr lang="ko-KR" sz="1050" dirty="0">
                 <a:solidFill>
                   <a:schemeClr val="accent3"/>
                 </a:solidFill>
+                <a:latin typeface="Noto Sans KR"/>
+                <a:ea typeface="Noto Sans KR"/>
               </a:rPr>
               <a:t>동시성·장애 주입·캐시 모두 실제 API (results/concurrency_bench_latest.json · fault_bench_latest.json · cache_bench_latest.json). 동시성은 N마다 1회 측정</a:t>
             </a:r>
-            <a:endParaRPr lang="en-US" sz="1050" dirty="0"/>
+            <a:endParaRPr lang="ko-KR" sz="1050" dirty="0">
+              <a:latin typeface="Noto Sans KR"/>
+              <a:ea typeface="Noto Sans KR"/>
+            </a:endParaRPr>
           </a:p>
         </p:txBody>
       </p:sp>
@@ -12903,16 +13754,24 @@
                 <a:solidFill>
                   <a:schemeClr val="accent3"/>
                 </a:solidFill>
+                <a:latin typeface="Noto Sans KR"/>
+                <a:ea typeface="Noto Sans KR"/>
               </a:defRPr>
             </a:lvl1pPr>
           </a:lstStyle>
           <a:p>
             <a:pPr algn="r"/>
             <a:fld id="{F7021451-1387-4CA6-816F-3879F97B5CBC}" type="slidenum">
-              <a:rPr b="0" lang="en-US"/>
+              <a:rPr b="0" lang="ko-KR">
+                <a:latin typeface="Noto Sans KR"/>
+                <a:ea typeface="Noto Sans KR"/>
+              </a:rPr>
               <a:t>14</a:t>
             </a:fld>
-            <a:endParaRPr lang="en-US"/>
+            <a:endParaRPr lang="ko-KR">
+              <a:latin typeface="Noto Sans KR"/>
+              <a:ea typeface="Noto Sans KR"/>
+            </a:endParaRPr>
           </a:p>
         </p:txBody>
       </p:sp>
@@ -12968,14 +13827,19 @@
               <a:buNone/>
             </a:pPr>
             <a:r>
-              <a:rPr lang="en-US" sz="2800" b="1" dirty="0">
+              <a:rPr lang="ko-KR" sz="2800" b="1" dirty="0">
                 <a:solidFill>
                   <a:schemeClr val="tx2"/>
                 </a:solidFill>
+                <a:latin typeface="Noto Sans KR"/>
+                <a:ea typeface="Noto Sans KR"/>
               </a:rPr>
               <a:t>평가자 검증: AI 채점을 그대로 믿지 않았다</a:t>
             </a:r>
-            <a:endParaRPr lang="en-US" sz="2800" dirty="0"/>
+            <a:endParaRPr lang="ko-KR" sz="2800" dirty="0">
+              <a:latin typeface="Noto Sans KR"/>
+              <a:ea typeface="Noto Sans KR"/>
+            </a:endParaRPr>
           </a:p>
         </p:txBody>
       </p:sp>
@@ -13033,14 +13897,19 @@
                         <a:buNone/>
                       </a:pPr>
                       <a:r>
-                        <a:rPr lang="en-US" sz="1300" b="1" dirty="0">
+                        <a:rPr lang="ko-KR" sz="1300" b="1" dirty="0">
                           <a:solidFill>
                             <a:srgbClr val="FFFFFF"/>
                           </a:solidFill>
+                          <a:latin typeface="Noto Sans KR"/>
+                          <a:ea typeface="Noto Sans KR"/>
                         </a:rPr>
                         <a:t>지표</a:t>
                       </a:r>
-                      <a:endParaRPr lang="en-US" sz="1300" dirty="0"/>
+                      <a:endParaRPr lang="ko-KR" sz="1300" dirty="0">
+                        <a:latin typeface="Noto Sans KR"/>
+                        <a:ea typeface="Noto Sans KR"/>
+                      </a:endParaRPr>
                     </a:p>
                   </a:txBody>
                   <a:tcPr marL="91440" marR="91440" marT="45720" marB="45720" anchor="ctr">
@@ -13094,14 +13963,19 @@
                         <a:buNone/>
                       </a:pPr>
                       <a:r>
-                        <a:rPr lang="en-US" sz="1300" b="1" dirty="0">
+                        <a:rPr lang="ko-KR" sz="1300" b="1" dirty="0">
                           <a:solidFill>
                             <a:srgbClr val="FFFFFF"/>
                           </a:solidFill>
+                          <a:latin typeface="Noto Sans KR"/>
+                          <a:ea typeface="Noto Sans KR"/>
                         </a:rPr>
                         <a:t>일치율</a:t>
                       </a:r>
-                      <a:endParaRPr lang="en-US" sz="1300" dirty="0"/>
+                      <a:endParaRPr lang="ko-KR" sz="1300" dirty="0">
+                        <a:latin typeface="Noto Sans KR"/>
+                        <a:ea typeface="Noto Sans KR"/>
+                      </a:endParaRPr>
                     </a:p>
                   </a:txBody>
                   <a:tcPr marL="91440" marR="91440" marT="45720" marB="45720" anchor="ctr">
@@ -13155,14 +14029,19 @@
                         <a:buNone/>
                       </a:pPr>
                       <a:r>
-                        <a:rPr lang="en-US" sz="1300" b="1" dirty="0">
+                        <a:rPr lang="ko-KR" sz="1300" b="1" dirty="0">
                           <a:solidFill>
                             <a:srgbClr val="FFFFFF"/>
                           </a:solidFill>
+                          <a:latin typeface="Noto Sans KR"/>
+                          <a:ea typeface="Noto Sans KR"/>
                         </a:rPr>
                         <a:t>kappa</a:t>
                       </a:r>
-                      <a:endParaRPr lang="en-US" sz="1300" dirty="0"/>
+                      <a:endParaRPr lang="ko-KR" sz="1300" dirty="0">
+                        <a:latin typeface="Noto Sans KR"/>
+                        <a:ea typeface="Noto Sans KR"/>
+                      </a:endParaRPr>
                     </a:p>
                   </a:txBody>
                   <a:tcPr marL="91440" marR="91440" marT="45720" marB="45720" anchor="ctr">
@@ -13216,14 +14095,19 @@
                         <a:buNone/>
                       </a:pPr>
                       <a:r>
-                        <a:rPr lang="en-US" sz="1300" b="1" dirty="0">
+                        <a:rPr lang="ko-KR" sz="1300" b="1" dirty="0">
                           <a:solidFill>
                             <a:srgbClr val="FFFFFF"/>
                           </a:solidFill>
+                          <a:latin typeface="Noto Sans KR"/>
+                          <a:ea typeface="Noto Sans KR"/>
                         </a:rPr>
                         <a:t>Judge 관대도*</a:t>
                       </a:r>
-                      <a:endParaRPr lang="en-US" sz="1300" dirty="0"/>
+                      <a:endParaRPr lang="ko-KR" sz="1300" dirty="0">
+                        <a:latin typeface="Noto Sans KR"/>
+                        <a:ea typeface="Noto Sans KR"/>
+                      </a:endParaRPr>
                     </a:p>
                   </a:txBody>
                   <a:tcPr marL="91440" marR="91440" marT="45720" marB="45720" anchor="ctr">
@@ -13279,14 +14163,19 @@
                         <a:buNone/>
                       </a:pPr>
                       <a:r>
-                        <a:rPr lang="en-US" sz="1300" dirty="0">
+                        <a:rPr lang="ko-KR" sz="1300" dirty="0">
                           <a:solidFill>
                             <a:srgbClr val="1A2230"/>
                           </a:solidFill>
+                          <a:latin typeface="Noto Sans KR"/>
+                          <a:ea typeface="Noto Sans KR"/>
                         </a:rPr>
                         <a:t>관련성</a:t>
                       </a:r>
-                      <a:endParaRPr lang="en-US" sz="1300" dirty="0"/>
+                      <a:endParaRPr lang="ko-KR" sz="1300" dirty="0">
+                        <a:latin typeface="Noto Sans KR"/>
+                        <a:ea typeface="Noto Sans KR"/>
+                      </a:endParaRPr>
                     </a:p>
                   </a:txBody>
                   <a:tcPr marL="91440" marR="91440" marT="45720" marB="45720" anchor="ctr">
@@ -13337,14 +14226,19 @@
                         <a:buNone/>
                       </a:pPr>
                       <a:r>
-                        <a:rPr lang="en-US" sz="1300" dirty="0">
+                        <a:rPr lang="ko-KR" sz="1300" dirty="0">
                           <a:solidFill>
                             <a:srgbClr val="1A2230"/>
                           </a:solidFill>
+                          <a:latin typeface="Noto Sans KR"/>
+                          <a:ea typeface="Noto Sans KR"/>
                         </a:rPr>
                         <a:t>73%</a:t>
                       </a:r>
-                      <a:endParaRPr lang="en-US" sz="1300" dirty="0"/>
+                      <a:endParaRPr lang="ko-KR" sz="1300" dirty="0">
+                        <a:latin typeface="Noto Sans KR"/>
+                        <a:ea typeface="Noto Sans KR"/>
+                      </a:endParaRPr>
                     </a:p>
                   </a:txBody>
                   <a:tcPr marL="91440" marR="91440" marT="45720" marB="45720" anchor="ctr">
@@ -13395,14 +14289,19 @@
                         <a:buNone/>
                       </a:pPr>
                       <a:r>
-                        <a:rPr lang="en-US" sz="1300" dirty="0">
+                        <a:rPr lang="ko-KR" sz="1300" dirty="0">
                           <a:solidFill>
                             <a:srgbClr val="1A2230"/>
                           </a:solidFill>
+                          <a:latin typeface="Noto Sans KR"/>
+                          <a:ea typeface="Noto Sans KR"/>
                         </a:rPr>
                         <a:t>0.44</a:t>
                       </a:r>
-                      <a:endParaRPr lang="en-US" sz="1300" dirty="0"/>
+                      <a:endParaRPr lang="ko-KR" sz="1300" dirty="0">
+                        <a:latin typeface="Noto Sans KR"/>
+                        <a:ea typeface="Noto Sans KR"/>
+                      </a:endParaRPr>
                     </a:p>
                   </a:txBody>
                   <a:tcPr marL="91440" marR="91440" marT="45720" marB="45720" anchor="ctr">
@@ -13453,14 +14352,19 @@
                         <a:buNone/>
                       </a:pPr>
                       <a:r>
-                        <a:rPr lang="en-US" sz="1300" dirty="0">
+                        <a:rPr lang="ko-KR" sz="1300" dirty="0">
                           <a:solidFill>
                             <a:srgbClr val="1A2230"/>
                           </a:solidFill>
+                          <a:latin typeface="Noto Sans KR"/>
+                          <a:ea typeface="Noto Sans KR"/>
                         </a:rPr>
                         <a:t>57%</a:t>
                       </a:r>
-                      <a:endParaRPr lang="en-US" sz="1300" dirty="0"/>
+                      <a:endParaRPr lang="ko-KR" sz="1300" dirty="0">
+                        <a:latin typeface="Noto Sans KR"/>
+                        <a:ea typeface="Noto Sans KR"/>
+                      </a:endParaRPr>
                     </a:p>
                   </a:txBody>
                   <a:tcPr marL="91440" marR="91440" marT="45720" marB="45720" anchor="ctr">
@@ -13513,14 +14417,19 @@
                         <a:buNone/>
                       </a:pPr>
                       <a:r>
-                        <a:rPr lang="en-US" sz="1300" dirty="0">
+                        <a:rPr lang="ko-KR" sz="1300" dirty="0">
                           <a:solidFill>
                             <a:srgbClr val="1A2230"/>
                           </a:solidFill>
+                          <a:latin typeface="Noto Sans KR"/>
+                          <a:ea typeface="Noto Sans KR"/>
                         </a:rPr>
                         <a:t>완전성</a:t>
                       </a:r>
-                      <a:endParaRPr lang="en-US" sz="1300" dirty="0"/>
+                      <a:endParaRPr lang="ko-KR" sz="1300" dirty="0">
+                        <a:latin typeface="Noto Sans KR"/>
+                        <a:ea typeface="Noto Sans KR"/>
+                      </a:endParaRPr>
                     </a:p>
                   </a:txBody>
                   <a:tcPr marL="91440" marR="91440" marT="45720" marB="45720" anchor="ctr">
@@ -13571,14 +14480,19 @@
                         <a:buNone/>
                       </a:pPr>
                       <a:r>
-                        <a:rPr lang="en-US" sz="1300" dirty="0">
+                        <a:rPr lang="ko-KR" sz="1300" dirty="0">
                           <a:solidFill>
                             <a:srgbClr val="1A2230"/>
                           </a:solidFill>
+                          <a:latin typeface="Noto Sans KR"/>
+                          <a:ea typeface="Noto Sans KR"/>
                         </a:rPr>
                         <a:t>78%</a:t>
                       </a:r>
-                      <a:endParaRPr lang="en-US" sz="1300" dirty="0"/>
+                      <a:endParaRPr lang="ko-KR" sz="1300" dirty="0">
+                        <a:latin typeface="Noto Sans KR"/>
+                        <a:ea typeface="Noto Sans KR"/>
+                      </a:endParaRPr>
                     </a:p>
                   </a:txBody>
                   <a:tcPr marL="91440" marR="91440" marT="45720" marB="45720" anchor="ctr">
@@ -13629,14 +14543,19 @@
                         <a:buNone/>
                       </a:pPr>
                       <a:r>
-                        <a:rPr lang="en-US" sz="1300" dirty="0">
+                        <a:rPr lang="ko-KR" sz="1300" dirty="0">
                           <a:solidFill>
                             <a:srgbClr val="1A2230"/>
                           </a:solidFill>
+                          <a:latin typeface="Noto Sans KR"/>
+                          <a:ea typeface="Noto Sans KR"/>
                         </a:rPr>
                         <a:t>0.02</a:t>
                       </a:r>
-                      <a:endParaRPr lang="en-US" sz="1300" dirty="0"/>
+                      <a:endParaRPr lang="ko-KR" sz="1300" dirty="0">
+                        <a:latin typeface="Noto Sans KR"/>
+                        <a:ea typeface="Noto Sans KR"/>
+                      </a:endParaRPr>
                     </a:p>
                   </a:txBody>
                   <a:tcPr marL="91440" marR="91440" marT="45720" marB="45720" anchor="ctr">
@@ -13687,14 +14606,19 @@
                         <a:buNone/>
                       </a:pPr>
                       <a:r>
-                        <a:rPr lang="en-US" sz="1300" dirty="0">
+                        <a:rPr lang="ko-KR" sz="1300" dirty="0">
                           <a:solidFill>
                             <a:srgbClr val="1A2230"/>
                           </a:solidFill>
+                          <a:latin typeface="Noto Sans KR"/>
+                          <a:ea typeface="Noto Sans KR"/>
                         </a:rPr>
                         <a:t>83%</a:t>
                       </a:r>
-                      <a:endParaRPr lang="en-US" sz="1300" dirty="0"/>
+                      <a:endParaRPr lang="ko-KR" sz="1300" dirty="0">
+                        <a:latin typeface="Noto Sans KR"/>
+                        <a:ea typeface="Noto Sans KR"/>
+                      </a:endParaRPr>
                     </a:p>
                   </a:txBody>
                   <a:tcPr marL="91440" marR="91440" marT="45720" marB="45720" anchor="ctr">
@@ -13747,14 +14671,19 @@
                         <a:buNone/>
                       </a:pPr>
                       <a:r>
-                        <a:rPr lang="en-US" sz="1300" dirty="0">
+                        <a:rPr lang="ko-KR" sz="1300" dirty="0">
                           <a:solidFill>
                             <a:srgbClr val="1A2230"/>
                           </a:solidFill>
+                          <a:latin typeface="Noto Sans KR"/>
+                          <a:ea typeface="Noto Sans KR"/>
                         </a:rPr>
                         <a:t>도메인 적합성</a:t>
                       </a:r>
-                      <a:endParaRPr lang="en-US" sz="1300" dirty="0"/>
+                      <a:endParaRPr lang="ko-KR" sz="1300" dirty="0">
+                        <a:latin typeface="Noto Sans KR"/>
+                        <a:ea typeface="Noto Sans KR"/>
+                      </a:endParaRPr>
                     </a:p>
                   </a:txBody>
                   <a:tcPr marL="91440" marR="91440" marT="45720" marB="45720" anchor="ctr">
@@ -13805,14 +14734,19 @@
                         <a:buNone/>
                       </a:pPr>
                       <a:r>
-                        <a:rPr lang="en-US" sz="1300" dirty="0">
+                        <a:rPr lang="ko-KR" sz="1300" dirty="0">
                           <a:solidFill>
                             <a:srgbClr val="1A2230"/>
                           </a:solidFill>
+                          <a:latin typeface="Noto Sans KR"/>
+                          <a:ea typeface="Noto Sans KR"/>
                         </a:rPr>
                         <a:t>55%</a:t>
                       </a:r>
-                      <a:endParaRPr lang="en-US" sz="1300" dirty="0"/>
+                      <a:endParaRPr lang="ko-KR" sz="1300" dirty="0">
+                        <a:latin typeface="Noto Sans KR"/>
+                        <a:ea typeface="Noto Sans KR"/>
+                      </a:endParaRPr>
                     </a:p>
                   </a:txBody>
                   <a:tcPr marL="91440" marR="91440" marT="45720" marB="45720" anchor="ctr">
@@ -13863,14 +14797,19 @@
                         <a:buNone/>
                       </a:pPr>
                       <a:r>
-                        <a:rPr lang="en-US" sz="1300" dirty="0">
+                        <a:rPr lang="ko-KR" sz="1300" dirty="0">
                           <a:solidFill>
                             <a:srgbClr val="1A2230"/>
                           </a:solidFill>
+                          <a:latin typeface="Noto Sans KR"/>
+                          <a:ea typeface="Noto Sans KR"/>
                         </a:rPr>
                         <a:t>0.25</a:t>
                       </a:r>
-                      <a:endParaRPr lang="en-US" sz="1300" dirty="0"/>
+                      <a:endParaRPr lang="ko-KR" sz="1300" dirty="0">
+                        <a:latin typeface="Noto Sans KR"/>
+                        <a:ea typeface="Noto Sans KR"/>
+                      </a:endParaRPr>
                     </a:p>
                   </a:txBody>
                   <a:tcPr marL="91440" marR="91440" marT="45720" marB="45720" anchor="ctr">
@@ -13921,14 +14860,19 @@
                         <a:buNone/>
                       </a:pPr>
                       <a:r>
-                        <a:rPr lang="en-US" sz="1300" dirty="0">
+                        <a:rPr lang="ko-KR" sz="1300" dirty="0">
                           <a:solidFill>
                             <a:srgbClr val="1A2230"/>
                           </a:solidFill>
+                          <a:latin typeface="Noto Sans KR"/>
+                          <a:ea typeface="Noto Sans KR"/>
                         </a:rPr>
                         <a:t>63%</a:t>
                       </a:r>
-                      <a:endParaRPr lang="en-US" sz="1300" dirty="0"/>
+                      <a:endParaRPr lang="ko-KR" sz="1300" dirty="0">
+                        <a:latin typeface="Noto Sans KR"/>
+                        <a:ea typeface="Noto Sans KR"/>
+                      </a:endParaRPr>
                     </a:p>
                   </a:txBody>
                   <a:tcPr marL="91440" marR="91440" marT="45720" marB="45720" anchor="ctr">
@@ -13981,14 +14925,19 @@
                         <a:buNone/>
                       </a:pPr>
                       <a:r>
-                        <a:rPr lang="en-US" sz="1300" dirty="0">
+                        <a:rPr lang="ko-KR" sz="1300" dirty="0">
                           <a:solidFill>
                             <a:srgbClr val="1A2230"/>
                           </a:solidFill>
+                          <a:latin typeface="Noto Sans KR"/>
+                          <a:ea typeface="Noto Sans KR"/>
                         </a:rPr>
                         <a:t>명확성</a:t>
                       </a:r>
-                      <a:endParaRPr lang="en-US" sz="1300" dirty="0"/>
+                      <a:endParaRPr lang="ko-KR" sz="1300" dirty="0">
+                        <a:latin typeface="Noto Sans KR"/>
+                        <a:ea typeface="Noto Sans KR"/>
+                      </a:endParaRPr>
                     </a:p>
                   </a:txBody>
                   <a:tcPr marL="91440" marR="91440" marT="45720" marB="45720" anchor="ctr">
@@ -14039,14 +14988,19 @@
                         <a:buNone/>
                       </a:pPr>
                       <a:r>
-                        <a:rPr lang="en-US" sz="1300" dirty="0">
+                        <a:rPr lang="ko-KR" sz="1300" dirty="0">
                           <a:solidFill>
                             <a:srgbClr val="1A2230"/>
                           </a:solidFill>
+                          <a:latin typeface="Noto Sans KR"/>
+                          <a:ea typeface="Noto Sans KR"/>
                         </a:rPr>
                         <a:t>95%</a:t>
                       </a:r>
-                      <a:endParaRPr lang="en-US" sz="1300" dirty="0"/>
+                      <a:endParaRPr lang="ko-KR" sz="1300" dirty="0">
+                        <a:latin typeface="Noto Sans KR"/>
+                        <a:ea typeface="Noto Sans KR"/>
+                      </a:endParaRPr>
                     </a:p>
                   </a:txBody>
                   <a:tcPr marL="91440" marR="91440" marT="45720" marB="45720" anchor="ctr">
@@ -14097,14 +15051,19 @@
                         <a:buNone/>
                       </a:pPr>
                       <a:r>
-                        <a:rPr lang="en-US" sz="1300" dirty="0">
+                        <a:rPr lang="ko-KR" sz="1300" dirty="0">
                           <a:solidFill>
                             <a:srgbClr val="1A2230"/>
                           </a:solidFill>
+                          <a:latin typeface="Noto Sans KR"/>
+                          <a:ea typeface="Noto Sans KR"/>
                         </a:rPr>
                         <a:t>0.37</a:t>
                       </a:r>
-                      <a:endParaRPr lang="en-US" sz="1300" dirty="0"/>
+                      <a:endParaRPr lang="ko-KR" sz="1300" dirty="0">
+                        <a:latin typeface="Noto Sans KR"/>
+                        <a:ea typeface="Noto Sans KR"/>
+                      </a:endParaRPr>
                     </a:p>
                   </a:txBody>
                   <a:tcPr marL="91440" marR="91440" marT="45720" marB="45720" anchor="ctr">
@@ -14155,14 +15114,19 @@
                         <a:buNone/>
                       </a:pPr>
                       <a:r>
-                        <a:rPr lang="en-US" sz="1300" dirty="0">
+                        <a:rPr lang="ko-KR" sz="1300" dirty="0">
                           <a:solidFill>
                             <a:srgbClr val="1A2230"/>
                           </a:solidFill>
+                          <a:latin typeface="Noto Sans KR"/>
+                          <a:ea typeface="Noto Sans KR"/>
                         </a:rPr>
                         <a:t>67%</a:t>
                       </a:r>
-                      <a:endParaRPr lang="en-US" sz="1300" dirty="0"/>
+                      <a:endParaRPr lang="ko-KR" sz="1300" dirty="0">
+                        <a:latin typeface="Noto Sans KR"/>
+                        <a:ea typeface="Noto Sans KR"/>
+                      </a:endParaRPr>
                     </a:p>
                   </a:txBody>
                   <a:tcPr marL="91440" marR="91440" marT="45720" marB="45720" anchor="ctr">
@@ -14215,14 +15179,19 @@
                         <a:buNone/>
                       </a:pPr>
                       <a:r>
-                        <a:rPr lang="en-US" sz="1300" b="1" dirty="0">
+                        <a:rPr lang="ko-KR" sz="1300" b="1" dirty="0">
                           <a:solidFill>
                             <a:srgbClr val="1A2230"/>
                           </a:solidFill>
+                          <a:latin typeface="Noto Sans KR"/>
+                          <a:ea typeface="Noto Sans KR"/>
                         </a:rPr>
                         <a:t>종합 (3/4)</a:t>
                       </a:r>
-                      <a:endParaRPr lang="en-US" sz="1300" dirty="0"/>
+                      <a:endParaRPr lang="ko-KR" sz="1300" dirty="0">
+                        <a:latin typeface="Noto Sans KR"/>
+                        <a:ea typeface="Noto Sans KR"/>
+                      </a:endParaRPr>
                     </a:p>
                   </a:txBody>
                   <a:tcPr marL="91440" marR="91440" marT="45720" marB="45720" anchor="ctr">
@@ -14273,14 +15242,19 @@
                         <a:buNone/>
                       </a:pPr>
                       <a:r>
-                        <a:rPr lang="en-US" sz="1300" dirty="0">
+                        <a:rPr lang="ko-KR" sz="1300" dirty="0">
                           <a:solidFill>
                             <a:srgbClr val="1A2230"/>
                           </a:solidFill>
+                          <a:latin typeface="Noto Sans KR"/>
+                          <a:ea typeface="Noto Sans KR"/>
                         </a:rPr>
                         <a:t>70%</a:t>
                       </a:r>
-                      <a:endParaRPr lang="en-US" sz="1300" dirty="0"/>
+                      <a:endParaRPr lang="ko-KR" sz="1300" dirty="0">
+                        <a:latin typeface="Noto Sans KR"/>
+                        <a:ea typeface="Noto Sans KR"/>
+                      </a:endParaRPr>
                     </a:p>
                   </a:txBody>
                   <a:tcPr marL="91440" marR="91440" marT="45720" marB="45720" anchor="ctr">
@@ -14331,14 +15305,19 @@
                         <a:buNone/>
                       </a:pPr>
                       <a:r>
-                        <a:rPr lang="en-US" sz="1300" dirty="0">
+                        <a:rPr lang="ko-KR" sz="1300" dirty="0">
                           <a:solidFill>
                             <a:srgbClr val="1A2230"/>
                           </a:solidFill>
+                          <a:latin typeface="Noto Sans KR"/>
+                          <a:ea typeface="Noto Sans KR"/>
                         </a:rPr>
                         <a:t>0.39</a:t>
                       </a:r>
-                      <a:endParaRPr lang="en-US" sz="1300" dirty="0"/>
+                      <a:endParaRPr lang="ko-KR" sz="1300" dirty="0">
+                        <a:latin typeface="Noto Sans KR"/>
+                        <a:ea typeface="Noto Sans KR"/>
+                      </a:endParaRPr>
                     </a:p>
                   </a:txBody>
                   <a:tcPr marL="91440" marR="91440" marT="45720" marB="45720" anchor="ctr">
@@ -14389,14 +15368,19 @@
                         <a:buNone/>
                       </a:pPr>
                       <a:r>
-                        <a:rPr lang="en-US" sz="1300" dirty="0">
+                        <a:rPr lang="ko-KR" sz="1300" dirty="0">
                           <a:solidFill>
                             <a:srgbClr val="1A2230"/>
                           </a:solidFill>
+                          <a:latin typeface="Noto Sans KR"/>
+                          <a:ea typeface="Noto Sans KR"/>
                         </a:rPr>
                         <a:t>59%</a:t>
                       </a:r>
-                      <a:endParaRPr lang="en-US" sz="1300" dirty="0"/>
+                      <a:endParaRPr lang="ko-KR" sz="1300" dirty="0">
+                        <a:latin typeface="Noto Sans KR"/>
+                        <a:ea typeface="Noto Sans KR"/>
+                      </a:endParaRPr>
                     </a:p>
                   </a:txBody>
                   <a:tcPr marL="91440" marR="91440" marT="45720" marB="45720" anchor="ctr">
@@ -14468,14 +15452,19 @@
               <a:buNone/>
             </a:pPr>
             <a:r>
-              <a:rPr lang="en-US" sz="1150" dirty="0">
+              <a:rPr lang="ko-KR" sz="1150" dirty="0">
                 <a:solidFill>
                   <a:schemeClr val="accent3"/>
                 </a:solidFill>
+                <a:latin typeface="Noto Sans KR"/>
+                <a:ea typeface="Noto Sans KR"/>
               </a:rPr>
               <a:t>평가 Judge vs 독립 평가자(Claude, Judge 판정을 가린 블라인드 채점) base 답변 60건. 사람 라벨이 아니다. * 독립 평가자가 Fail로 본 답을 Judge가 Pass로 준 비율. 사람 표본 라벨은 아직 없다.</a:t>
             </a:r>
-            <a:endParaRPr lang="en-US" sz="1150" dirty="0"/>
+            <a:endParaRPr lang="ko-KR" sz="1150" dirty="0">
+              <a:latin typeface="Noto Sans KR"/>
+              <a:ea typeface="Noto Sans KR"/>
+            </a:endParaRPr>
           </a:p>
         </p:txBody>
       </p:sp>
@@ -14504,14 +15493,19 @@
               <a:buNone/>
             </a:pPr>
             <a:r>
-              <a:rPr lang="en-US" sz="1350" dirty="0">
+              <a:rPr lang="ko-KR" sz="1350" dirty="0">
                 <a:solidFill>
                   <a:schemeClr val="tx1"/>
                 </a:solidFill>
+                <a:latin typeface="Noto Sans KR"/>
+                <a:ea typeface="Noto Sans KR"/>
               </a:rPr>
               <a:t>평가 Judge는 RAG가 들어간 구성에서 95%~99%로 포화돼 구성 차이를 잘 보지 못했다. 그래서 Judge 무관 지표(정답 누락·혼입, 런북 어구 포함)로 결론을 냈다.</a:t>
             </a:r>
-            <a:endParaRPr lang="en-US" sz="1350" dirty="0"/>
+            <a:endParaRPr lang="ko-KR" sz="1350" dirty="0">
+              <a:latin typeface="Noto Sans KR"/>
+              <a:ea typeface="Noto Sans KR"/>
+            </a:endParaRPr>
           </a:p>
         </p:txBody>
       </p:sp>
@@ -14547,16 +15541,24 @@
                 <a:solidFill>
                   <a:schemeClr val="accent3"/>
                 </a:solidFill>
+                <a:latin typeface="Noto Sans KR"/>
+                <a:ea typeface="Noto Sans KR"/>
               </a:defRPr>
             </a:lvl1pPr>
           </a:lstStyle>
           <a:p>
             <a:pPr algn="r"/>
             <a:fld id="{F7021451-1387-4CA6-816F-3879F97B5CBC}" type="slidenum">
-              <a:rPr b="0" lang="en-US"/>
+              <a:rPr b="0" lang="ko-KR">
+                <a:latin typeface="Noto Sans KR"/>
+                <a:ea typeface="Noto Sans KR"/>
+              </a:rPr>
               <a:t>15</a:t>
             </a:fld>
-            <a:endParaRPr lang="en-US"/>
+            <a:endParaRPr lang="ko-KR">
+              <a:latin typeface="Noto Sans KR"/>
+              <a:ea typeface="Noto Sans KR"/>
+            </a:endParaRPr>
           </a:p>
         </p:txBody>
       </p:sp>
@@ -14612,14 +15614,19 @@
               <a:buNone/>
             </a:pPr>
             <a:r>
-              <a:rPr lang="en-US" sz="2800" b="1" dirty="0">
+              <a:rPr lang="ko-KR" sz="2800" b="1" dirty="0">
                 <a:solidFill>
                   <a:schemeClr val="tx2"/>
                 </a:solidFill>
+                <a:latin typeface="Noto Sans KR"/>
+                <a:ea typeface="Noto Sans KR"/>
               </a:rPr>
               <a:t>시연: 같은 질문, base와 final을 나란히</a:t>
             </a:r>
-            <a:endParaRPr lang="en-US" sz="2800" dirty="0"/>
+            <a:endParaRPr lang="ko-KR" sz="2800" dirty="0">
+              <a:latin typeface="Noto Sans KR"/>
+              <a:ea typeface="Noto Sans KR"/>
+            </a:endParaRPr>
           </a:p>
         </p:txBody>
       </p:sp>
@@ -14675,7 +15682,7 @@
               <a:buNone/>
             </a:pPr>
             <a:r>
-              <a:rPr lang="en-US" sz="1600" dirty="0">
+              <a:rPr lang="ko-KR" sz="1600" dirty="0">
                 <a:solidFill>
                   <a:schemeClr val="bg1"/>
                 </a:solidFill>
@@ -14685,7 +15692,10 @@
               </a:rPr>
               <a:t>.venv/bin/python scripts/demo_side_by_side.py --id Q01</a:t>
             </a:r>
-            <a:endParaRPr lang="en-US" sz="1600" dirty="0"/>
+            <a:endParaRPr lang="ko-KR" sz="1600" dirty="0">
+              <a:latin typeface="Noto Sans KR"/>
+              <a:ea typeface="Noto Sans KR"/>
+            </a:endParaRPr>
           </a:p>
         </p:txBody>
       </p:sp>
@@ -14741,14 +15751,19 @@
               <a:buNone/>
             </a:pPr>
             <a:r>
-              <a:rPr lang="en-US" sz="1800" b="1" dirty="0">
+              <a:rPr lang="ko-KR" sz="1800" b="1" dirty="0">
                 <a:solidFill>
                   <a:schemeClr val="tx2"/>
                 </a:solidFill>
+                <a:latin typeface="Noto Sans KR"/>
+                <a:ea typeface="Noto Sans KR"/>
               </a:rPr>
               <a:t>[base]</a:t>
             </a:r>
-            <a:endParaRPr lang="en-US" sz="1800" dirty="0"/>
+            <a:endParaRPr lang="ko-KR" sz="1800" dirty="0">
+              <a:latin typeface="Noto Sans KR"/>
+              <a:ea typeface="Noto Sans KR"/>
+            </a:endParaRPr>
           </a:p>
         </p:txBody>
       </p:sp>
@@ -14777,14 +15792,19 @@
               <a:buNone/>
             </a:pPr>
             <a:r>
-              <a:rPr lang="en-US" sz="1600" b="1" dirty="0">
+              <a:rPr lang="ko-KR" sz="1600" b="1" dirty="0">
                 <a:solidFill>
                   <a:schemeClr val="accent1"/>
                 </a:solidFill>
+                <a:latin typeface="Noto Sans KR"/>
+                <a:ea typeface="Noto Sans KR"/>
               </a:rPr>
               <a:t>오답</a:t>
             </a:r>
-            <a:endParaRPr lang="en-US" sz="1600" dirty="0"/>
+            <a:endParaRPr lang="ko-KR" sz="1600" dirty="0">
+              <a:latin typeface="Noto Sans KR"/>
+              <a:ea typeface="Noto Sans KR"/>
+            </a:endParaRPr>
           </a:p>
         </p:txBody>
       </p:sp>
@@ -14816,10 +15836,12 @@
               <a:buNone/>
             </a:pPr>
             <a:r>
-              <a:rPr lang="en-US" sz="1450" dirty="0">
+              <a:rPr lang="ko-KR" sz="1450" dirty="0">
                 <a:solidFill>
                   <a:srgbClr val="8A94A3"/>
                 </a:solidFill>
+                <a:latin typeface="Noto Sans KR"/>
+                <a:ea typeface="Noto Sans KR"/>
               </a:rPr>
               <a:t>고른 런북  </a:t>
             </a:r>
@@ -14830,14 +15852,19 @@
               <a:buNone/>
             </a:pPr>
             <a:r>
-              <a:rPr lang="en-US" sz="1450" b="1" dirty="0">
+              <a:rPr lang="ko-KR" sz="1450" b="1" dirty="0">
                 <a:solidFill>
                   <a:schemeClr val="tx1"/>
                 </a:solidFill>
+                <a:latin typeface="Noto Sans KR"/>
+                <a:ea typeface="Noto Sans KR"/>
               </a:rPr>
               <a:t>high-latency (응답 지연 절차)</a:t>
             </a:r>
-            <a:endParaRPr lang="en-US" sz="1450" dirty="0"/>
+            <a:endParaRPr lang="ko-KR" sz="1450" dirty="0">
+              <a:latin typeface="Noto Sans KR"/>
+              <a:ea typeface="Noto Sans KR"/>
+            </a:endParaRPr>
           </a:p>
           <a:p>
             <a:pPr indent="0" marL="0">
@@ -14847,10 +15874,12 @@
               <a:buNone/>
             </a:pPr>
             <a:r>
-              <a:rPr lang="en-US" sz="1450" dirty="0">
+              <a:rPr lang="ko-KR" sz="1450" dirty="0">
                 <a:solidFill>
                   <a:srgbClr val="8A94A3"/>
                 </a:solidFill>
+                <a:latin typeface="Noto Sans KR"/>
+                <a:ea typeface="Noto Sans KR"/>
               </a:rPr>
               <a:t>답의 핵심  </a:t>
             </a:r>
@@ -14861,14 +15890,19 @@
               <a:buNone/>
             </a:pPr>
             <a:r>
-              <a:rPr lang="en-US" sz="1450" dirty="0">
+              <a:rPr lang="ko-KR" sz="1450" dirty="0">
                 <a:solidFill>
                   <a:schemeClr val="tx1"/>
                 </a:solidFill>
+                <a:latin typeface="Noto Sans KR"/>
+                <a:ea typeface="Noto Sans KR"/>
               </a:rPr>
               <a:t>커넥션 풀 늘리기, 트래픽 분산…</a:t>
             </a:r>
-            <a:endParaRPr lang="en-US" sz="1450" dirty="0"/>
+            <a:endParaRPr lang="ko-KR" sz="1450" dirty="0">
+              <a:latin typeface="Noto Sans KR"/>
+              <a:ea typeface="Noto Sans KR"/>
+            </a:endParaRPr>
           </a:p>
         </p:txBody>
       </p:sp>
@@ -14924,14 +15958,19 @@
               <a:buNone/>
             </a:pPr>
             <a:r>
-              <a:rPr lang="en-US" sz="1800" b="1" dirty="0">
+              <a:rPr lang="ko-KR" sz="1800" b="1" dirty="0">
                 <a:solidFill>
                   <a:schemeClr val="tx2"/>
                 </a:solidFill>
+                <a:latin typeface="Noto Sans KR"/>
+                <a:ea typeface="Noto Sans KR"/>
               </a:rPr>
               <a:t>[final]</a:t>
             </a:r>
-            <a:endParaRPr lang="en-US" sz="1800" dirty="0"/>
+            <a:endParaRPr lang="ko-KR" sz="1800" dirty="0">
+              <a:latin typeface="Noto Sans KR"/>
+              <a:ea typeface="Noto Sans KR"/>
+            </a:endParaRPr>
           </a:p>
         </p:txBody>
       </p:sp>
@@ -14960,14 +15999,19 @@
               <a:buNone/>
             </a:pPr>
             <a:r>
-              <a:rPr lang="en-US" sz="1600" b="1" dirty="0">
+              <a:rPr lang="ko-KR" sz="1600" b="1" dirty="0">
                 <a:solidFill>
                   <a:schemeClr val="accent2"/>
                 </a:solidFill>
+                <a:latin typeface="Noto Sans KR"/>
+                <a:ea typeface="Noto Sans KR"/>
               </a:rPr>
               <a:t>정답 포함</a:t>
             </a:r>
-            <a:endParaRPr lang="en-US" sz="1600" dirty="0"/>
+            <a:endParaRPr lang="ko-KR" sz="1600" dirty="0">
+              <a:latin typeface="Noto Sans KR"/>
+              <a:ea typeface="Noto Sans KR"/>
+            </a:endParaRPr>
           </a:p>
         </p:txBody>
       </p:sp>
@@ -14999,10 +16043,12 @@
               <a:buNone/>
             </a:pPr>
             <a:r>
-              <a:rPr lang="en-US" sz="1450" dirty="0">
+              <a:rPr lang="ko-KR" sz="1450" dirty="0">
                 <a:solidFill>
                   <a:srgbClr val="8A94A3"/>
                 </a:solidFill>
+                <a:latin typeface="Noto Sans KR"/>
+                <a:ea typeface="Noto Sans KR"/>
               </a:rPr>
               <a:t>고른 런북  </a:t>
             </a:r>
@@ -15013,14 +16059,19 @@
               <a:buNone/>
             </a:pPr>
             <a:r>
-              <a:rPr lang="en-US" sz="1450" b="1" dirty="0">
+              <a:rPr lang="ko-KR" sz="1450" b="1" dirty="0">
                 <a:solidFill>
                   <a:schemeClr val="tx1"/>
                 </a:solidFill>
+                <a:latin typeface="Noto Sans KR"/>
+                <a:ea typeface="Noto Sans KR"/>
               </a:rPr>
               <a:t>db-down (+disk-full 혼입)</a:t>
             </a:r>
-            <a:endParaRPr lang="en-US" sz="1450" dirty="0"/>
+            <a:endParaRPr lang="ko-KR" sz="1450" dirty="0">
+              <a:latin typeface="Noto Sans KR"/>
+              <a:ea typeface="Noto Sans KR"/>
+            </a:endParaRPr>
           </a:p>
           <a:p>
             <a:pPr indent="0" marL="0">
@@ -15030,10 +16081,12 @@
               <a:buNone/>
             </a:pPr>
             <a:r>
-              <a:rPr lang="en-US" sz="1450" dirty="0">
+              <a:rPr lang="ko-KR" sz="1450" dirty="0">
                 <a:solidFill>
                   <a:srgbClr val="8A94A3"/>
                 </a:solidFill>
+                <a:latin typeface="Noto Sans KR"/>
+                <a:ea typeface="Noto Sans KR"/>
               </a:rPr>
               <a:t>답의 핵심  </a:t>
             </a:r>
@@ -15044,14 +16097,19 @@
               <a:buNone/>
             </a:pPr>
             <a:r>
-              <a:rPr lang="en-US" sz="1450" dirty="0">
+              <a:rPr lang="ko-KR" sz="1450" dirty="0">
                 <a:solidFill>
                   <a:schemeClr val="tx1"/>
                 </a:solidFill>
+                <a:latin typeface="Noto Sans KR"/>
+                <a:ea typeface="Noto Sans KR"/>
               </a:rPr>
               <a:t>커넥션 풀 점검, 필요 시 failover 노드로 전환…</a:t>
             </a:r>
-            <a:endParaRPr lang="en-US" sz="1450" dirty="0"/>
+            <a:endParaRPr lang="ko-KR" sz="1450" dirty="0">
+              <a:latin typeface="Noto Sans KR"/>
+              <a:ea typeface="Noto Sans KR"/>
+            </a:endParaRPr>
           </a:p>
         </p:txBody>
       </p:sp>
@@ -15080,14 +16138,19 @@
               <a:buNone/>
             </a:pPr>
             <a:r>
-              <a:rPr lang="en-US" sz="1050" dirty="0">
+              <a:rPr lang="ko-KR" sz="1050" dirty="0">
                 <a:solidFill>
                   <a:schemeClr val="accent3"/>
                 </a:solidFill>
+                <a:latin typeface="Noto Sans KR"/>
+                <a:ea typeface="Noto Sans KR"/>
               </a:rPr>
               <a:t>질문: "DB 프라이머리가 다운됐습니다. 대응 절차를 알려주세요." 화면 하나에 런북 정오·답변·지연·비용·근거 없는 수치. 기록 results/raw/demo_*.json</a:t>
             </a:r>
-            <a:endParaRPr lang="en-US" sz="1050" dirty="0"/>
+            <a:endParaRPr lang="ko-KR" sz="1050" dirty="0">
+              <a:latin typeface="Noto Sans KR"/>
+              <a:ea typeface="Noto Sans KR"/>
+            </a:endParaRPr>
           </a:p>
         </p:txBody>
       </p:sp>
@@ -15123,16 +16186,24 @@
                 <a:solidFill>
                   <a:schemeClr val="accent3"/>
                 </a:solidFill>
+                <a:latin typeface="Noto Sans KR"/>
+                <a:ea typeface="Noto Sans KR"/>
               </a:defRPr>
             </a:lvl1pPr>
           </a:lstStyle>
           <a:p>
             <a:pPr algn="r"/>
             <a:fld id="{F7021451-1387-4CA6-816F-3879F97B5CBC}" type="slidenum">
-              <a:rPr b="0" lang="en-US"/>
+              <a:rPr b="0" lang="ko-KR">
+                <a:latin typeface="Noto Sans KR"/>
+                <a:ea typeface="Noto Sans KR"/>
+              </a:rPr>
               <a:t>16</a:t>
             </a:fld>
-            <a:endParaRPr lang="en-US"/>
+            <a:endParaRPr lang="ko-KR">
+              <a:latin typeface="Noto Sans KR"/>
+              <a:ea typeface="Noto Sans KR"/>
+            </a:endParaRPr>
           </a:p>
         </p:txBody>
       </p:sp>
@@ -15188,14 +16259,19 @@
               <a:buNone/>
             </a:pPr>
             <a:r>
-              <a:rPr lang="en-US" sz="2800" b="1" dirty="0">
+              <a:rPr lang="ko-KR" sz="2800" b="1" dirty="0">
                 <a:solidFill>
                   <a:schemeClr val="tx2"/>
                 </a:solidFill>
+                <a:latin typeface="Noto Sans KR"/>
+                <a:ea typeface="Noto Sans KR"/>
               </a:rPr>
               <a:t>한계와 다음 개선</a:t>
             </a:r>
-            <a:endParaRPr lang="en-US" sz="2800" dirty="0"/>
+            <a:endParaRPr lang="ko-KR" sz="2800" dirty="0">
+              <a:latin typeface="Noto Sans KR"/>
+              <a:ea typeface="Noto Sans KR"/>
+            </a:endParaRPr>
           </a:p>
         </p:txBody>
       </p:sp>
@@ -15276,14 +16352,19 @@
               <a:buNone/>
             </a:pPr>
             <a:r>
-              <a:rPr lang="en-US" sz="1600" b="1" dirty="0">
+              <a:rPr lang="ko-KR" sz="1600" b="1" dirty="0">
                 <a:solidFill>
                   <a:schemeClr val="bg1"/>
                 </a:solidFill>
+                <a:latin typeface="Noto Sans KR"/>
+                <a:ea typeface="Noto Sans KR"/>
               </a:rPr>
               <a:t>!</a:t>
             </a:r>
-            <a:endParaRPr lang="en-US" sz="1600" dirty="0"/>
+            <a:endParaRPr lang="ko-KR" sz="1600" dirty="0">
+              <a:latin typeface="Noto Sans KR"/>
+              <a:ea typeface="Noto Sans KR"/>
+            </a:endParaRPr>
           </a:p>
         </p:txBody>
       </p:sp>
@@ -15312,14 +16393,19 @@
               <a:buNone/>
             </a:pPr>
             <a:r>
-              <a:rPr lang="en-US" sz="1600" b="1" dirty="0">
+              <a:rPr lang="ko-KR" sz="1600" b="1" dirty="0">
                 <a:solidFill>
                   <a:schemeClr val="tx2"/>
                 </a:solidFill>
+                <a:latin typeface="Noto Sans KR"/>
+                <a:ea typeface="Noto Sans KR"/>
               </a:rPr>
               <a:t>일반화 격차</a:t>
             </a:r>
-            <a:endParaRPr lang="en-US" sz="1600" dirty="0"/>
+            <a:endParaRPr lang="ko-KR" sz="1600" dirty="0">
+              <a:latin typeface="Noto Sans KR"/>
+              <a:ea typeface="Noto Sans KR"/>
+            </a:endParaRPr>
           </a:p>
         </p:txBody>
       </p:sp>
@@ -15348,14 +16434,19 @@
               <a:buNone/>
             </a:pPr>
             <a:r>
-              <a:rPr lang="en-US" sz="1250" dirty="0">
+              <a:rPr lang="ko-KR" sz="1250" dirty="0">
                 <a:solidFill>
                   <a:schemeClr val="tx1"/>
                 </a:solidFill>
+                <a:latin typeface="Noto Sans KR"/>
+                <a:ea typeface="Noto Sans KR"/>
               </a:rPr>
               <a:t>RAG Recall@1이 dev 72% → holdout 52%. 자기 말로 묻는 holdout 질의는 33%</a:t>
             </a:r>
-            <a:endParaRPr lang="en-US" sz="1250" dirty="0"/>
+            <a:endParaRPr lang="ko-KR" sz="1250" dirty="0">
+              <a:latin typeface="Noto Sans KR"/>
+              <a:ea typeface="Noto Sans KR"/>
+            </a:endParaRPr>
           </a:p>
         </p:txBody>
       </p:sp>
@@ -15384,14 +16475,19 @@
               <a:buNone/>
             </a:pPr>
             <a:r>
-              <a:rPr lang="en-US" sz="1350" dirty="0">
+              <a:rPr lang="ko-KR" sz="1350" dirty="0">
                 <a:solidFill>
                   <a:schemeClr val="accent6"/>
                 </a:solidFill>
+                <a:latin typeface="Noto Sans KR"/>
+                <a:ea typeface="Noto Sans KR"/>
               </a:rPr>
               <a:t>다음: 런북 본문 외에 증상 예시 문장을 색인해 질문과 문서의 표현 차이를 줄임</a:t>
             </a:r>
-            <a:endParaRPr lang="en-US" sz="1350" dirty="0"/>
+            <a:endParaRPr lang="ko-KR" sz="1350" dirty="0">
+              <a:latin typeface="Noto Sans KR"/>
+              <a:ea typeface="Noto Sans KR"/>
+            </a:endParaRPr>
           </a:p>
         </p:txBody>
       </p:sp>
@@ -15472,14 +16568,19 @@
               <a:buNone/>
             </a:pPr>
             <a:r>
-              <a:rPr lang="en-US" sz="1600" b="1" dirty="0">
+              <a:rPr lang="ko-KR" sz="1600" b="1" dirty="0">
                 <a:solidFill>
                   <a:schemeClr val="bg1"/>
                 </a:solidFill>
+                <a:latin typeface="Noto Sans KR"/>
+                <a:ea typeface="Noto Sans KR"/>
               </a:rPr>
               <a:t>!</a:t>
             </a:r>
-            <a:endParaRPr lang="en-US" sz="1600" dirty="0"/>
+            <a:endParaRPr lang="ko-KR" sz="1600" dirty="0">
+              <a:latin typeface="Noto Sans KR"/>
+              <a:ea typeface="Noto Sans KR"/>
+            </a:endParaRPr>
           </a:p>
         </p:txBody>
       </p:sp>
@@ -15508,14 +16609,19 @@
               <a:buNone/>
             </a:pPr>
             <a:r>
-              <a:rPr lang="en-US" sz="1600" b="1" dirty="0">
+              <a:rPr lang="ko-KR" sz="1600" b="1" dirty="0">
                 <a:solidFill>
                   <a:schemeClr val="tx2"/>
                 </a:solidFill>
+                <a:latin typeface="Noto Sans KR"/>
+                <a:ea typeface="Noto Sans KR"/>
               </a:rPr>
               <a:t>무관 런북 혼입이 남음</a:t>
             </a:r>
-            <a:endParaRPr lang="en-US" sz="1600" dirty="0"/>
+            <a:endParaRPr lang="ko-KR" sz="1600" dirty="0">
+              <a:latin typeface="Noto Sans KR"/>
+              <a:ea typeface="Noto Sans KR"/>
+            </a:endParaRPr>
           </a:p>
         </p:txBody>
       </p:sp>
@@ -15544,14 +16650,19 @@
               <a:buNone/>
             </a:pPr>
             <a:r>
-              <a:rPr lang="en-US" sz="1250" dirty="0">
+              <a:rPr lang="ko-KR" sz="1250" dirty="0">
                 <a:solidFill>
                   <a:schemeClr val="tx1"/>
                 </a:solidFill>
+                <a:latin typeface="Noto Sans KR"/>
+                <a:ea typeface="Noto Sans KR"/>
               </a:rPr>
               <a:t>final 혼입 35%. 1위와 점수가 가까운 런북을 함께 넣는 규칙, 맞는 런북이 없는 질문에도 런북이 들어가는 경우</a:t>
             </a:r>
-            <a:endParaRPr lang="en-US" sz="1250" dirty="0"/>
+            <a:endParaRPr lang="ko-KR" sz="1250" dirty="0">
+              <a:latin typeface="Noto Sans KR"/>
+              <a:ea typeface="Noto Sans KR"/>
+            </a:endParaRPr>
           </a:p>
         </p:txBody>
       </p:sp>
@@ -15580,14 +16691,19 @@
               <a:buNone/>
             </a:pPr>
             <a:r>
-              <a:rPr lang="en-US" sz="1350" dirty="0">
+              <a:rPr lang="ko-KR" sz="1350" dirty="0">
                 <a:solidFill>
                   <a:schemeClr val="accent6"/>
                 </a:solidFill>
+                <a:latin typeface="Noto Sans KR"/>
+                <a:ea typeface="Noto Sans KR"/>
               </a:rPr>
               <a:t>다음: 재순위(reranker), 질문 속 증상 수에 맞춘 투입 개수</a:t>
             </a:r>
-            <a:endParaRPr lang="en-US" sz="1350" dirty="0"/>
+            <a:endParaRPr lang="ko-KR" sz="1350" dirty="0">
+              <a:latin typeface="Noto Sans KR"/>
+              <a:ea typeface="Noto Sans KR"/>
+            </a:endParaRPr>
           </a:p>
         </p:txBody>
       </p:sp>
@@ -15668,14 +16784,19 @@
               <a:buNone/>
             </a:pPr>
             <a:r>
-              <a:rPr lang="en-US" sz="1600" b="1" dirty="0">
+              <a:rPr lang="ko-KR" sz="1600" b="1" dirty="0">
                 <a:solidFill>
                   <a:schemeClr val="bg1"/>
                 </a:solidFill>
+                <a:latin typeface="Noto Sans KR"/>
+                <a:ea typeface="Noto Sans KR"/>
               </a:rPr>
               <a:t>!</a:t>
             </a:r>
-            <a:endParaRPr lang="en-US" sz="1600" dirty="0"/>
+            <a:endParaRPr lang="ko-KR" sz="1600" dirty="0">
+              <a:latin typeface="Noto Sans KR"/>
+              <a:ea typeface="Noto Sans KR"/>
+            </a:endParaRPr>
           </a:p>
         </p:txBody>
       </p:sp>
@@ -15704,14 +16825,19 @@
               <a:buNone/>
             </a:pPr>
             <a:r>
-              <a:rPr lang="en-US" sz="1600" b="1" dirty="0">
+              <a:rPr lang="ko-KR" sz="1600" b="1" dirty="0">
                 <a:solidFill>
                   <a:schemeClr val="tx2"/>
                 </a:solidFill>
+                <a:latin typeface="Noto Sans KR"/>
+                <a:ea typeface="Noto Sans KR"/>
               </a:rPr>
               <a:t>캐스케이드의 품질 대가</a:t>
             </a:r>
-            <a:endParaRPr lang="en-US" sz="1600" dirty="0"/>
+            <a:endParaRPr lang="ko-KR" sz="1600" dirty="0">
+              <a:latin typeface="Noto Sans KR"/>
+              <a:ea typeface="Noto Sans KR"/>
+            </a:endParaRPr>
           </a:p>
         </p:txBody>
       </p:sp>
@@ -15740,14 +16866,19 @@
               <a:buNone/>
             </a:pPr>
             <a:r>
-              <a:rPr lang="en-US" sz="1250" dirty="0">
+              <a:rPr lang="ko-KR" sz="1250" dirty="0">
                 <a:solidFill>
                   <a:schemeClr val="tx1"/>
                 </a:solidFill>
+                <a:latin typeface="Noto Sans KR"/>
+                <a:ea typeface="Noto Sans KR"/>
               </a:rPr>
               <a:t>어구 포함 -5%p (유의하지 않음). 저가 초안이 런북 문구를 덜 인용하는 것으로 추정 (미검증)</a:t>
             </a:r>
-            <a:endParaRPr lang="en-US" sz="1250" dirty="0"/>
+            <a:endParaRPr lang="ko-KR" sz="1250" dirty="0">
+              <a:latin typeface="Noto Sans KR"/>
+              <a:ea typeface="Noto Sans KR"/>
+            </a:endParaRPr>
           </a:p>
         </p:txBody>
       </p:sp>
@@ -15776,14 +16907,19 @@
               <a:buNone/>
             </a:pPr>
             <a:r>
-              <a:rPr lang="en-US" sz="1350" dirty="0">
+              <a:rPr lang="ko-KR" sz="1350" dirty="0">
                 <a:solidFill>
                   <a:schemeClr val="accent6"/>
                 </a:solidFill>
+                <a:latin typeface="Noto Sans KR"/>
+                <a:ea typeface="Noto Sans KR"/>
               </a:rPr>
               <a:t>다음: Judge 대신 결정적 어구 대조로 승급 기준을 정함</a:t>
             </a:r>
-            <a:endParaRPr lang="en-US" sz="1350" dirty="0"/>
+            <a:endParaRPr lang="ko-KR" sz="1350" dirty="0">
+              <a:latin typeface="Noto Sans KR"/>
+              <a:ea typeface="Noto Sans KR"/>
+            </a:endParaRPr>
           </a:p>
         </p:txBody>
       </p:sp>
@@ -15864,14 +17000,19 @@
               <a:buNone/>
             </a:pPr>
             <a:r>
-              <a:rPr lang="en-US" sz="1600" b="1" dirty="0">
+              <a:rPr lang="ko-KR" sz="1600" b="1" dirty="0">
                 <a:solidFill>
                   <a:schemeClr val="bg1"/>
                 </a:solidFill>
+                <a:latin typeface="Noto Sans KR"/>
+                <a:ea typeface="Noto Sans KR"/>
               </a:rPr>
               <a:t>!</a:t>
             </a:r>
-            <a:endParaRPr lang="en-US" sz="1600" dirty="0"/>
+            <a:endParaRPr lang="ko-KR" sz="1600" dirty="0">
+              <a:latin typeface="Noto Sans KR"/>
+              <a:ea typeface="Noto Sans KR"/>
+            </a:endParaRPr>
           </a:p>
         </p:txBody>
       </p:sp>
@@ -15900,14 +17041,19 @@
               <a:buNone/>
             </a:pPr>
             <a:r>
-              <a:rPr lang="en-US" sz="1600" b="1" dirty="0">
+              <a:rPr lang="ko-KR" sz="1600" b="1" dirty="0">
                 <a:solidFill>
                   <a:schemeClr val="tx2"/>
                 </a:solidFill>
+                <a:latin typeface="Noto Sans KR"/>
+                <a:ea typeface="Noto Sans KR"/>
               </a:rPr>
               <a:t>평가 규모와 범위</a:t>
             </a:r>
-            <a:endParaRPr lang="en-US" sz="1600" dirty="0"/>
+            <a:endParaRPr lang="ko-KR" sz="1600" dirty="0">
+              <a:latin typeface="Noto Sans KR"/>
+              <a:ea typeface="Noto Sans KR"/>
+            </a:endParaRPr>
           </a:p>
         </p:txBody>
       </p:sp>
@@ -15936,14 +17082,19 @@
               <a:buNone/>
             </a:pPr>
             <a:r>
-              <a:rPr lang="en-US" sz="1250" dirty="0">
+              <a:rPr lang="ko-KR" sz="1250" dirty="0">
                 <a:solidFill>
                   <a:schemeClr val="tx1"/>
                 </a:solidFill>
+                <a:latin typeface="Noto Sans KR"/>
+                <a:ea typeface="Noto Sans KR"/>
               </a:rPr>
               <a:t>holdout 36건 x 3회 (1건 = 2.8%p). 평가 Judge 포화. 라우터는 개선 범위 밖</a:t>
             </a:r>
-            <a:endParaRPr lang="en-US" sz="1250" dirty="0"/>
+            <a:endParaRPr lang="ko-KR" sz="1250" dirty="0">
+              <a:latin typeface="Noto Sans KR"/>
+              <a:ea typeface="Noto Sans KR"/>
+            </a:endParaRPr>
           </a:p>
         </p:txBody>
       </p:sp>
@@ -15972,14 +17123,19 @@
               <a:buNone/>
             </a:pPr>
             <a:r>
-              <a:rPr lang="en-US" sz="1350" dirty="0">
+              <a:rPr lang="ko-KR" sz="1350" dirty="0">
                 <a:solidFill>
                   <a:schemeClr val="accent6"/>
                 </a:solidFill>
+                <a:latin typeface="Noto Sans KR"/>
+                <a:ea typeface="Noto Sans KR"/>
               </a:rPr>
               <a:t>다음: 질의 확대, 라우팅 개선을 같은 체계로 재측정</a:t>
             </a:r>
-            <a:endParaRPr lang="en-US" sz="1350" dirty="0"/>
+            <a:endParaRPr lang="ko-KR" sz="1350" dirty="0">
+              <a:latin typeface="Noto Sans KR"/>
+              <a:ea typeface="Noto Sans KR"/>
+            </a:endParaRPr>
           </a:p>
         </p:txBody>
       </p:sp>
@@ -16015,16 +17171,24 @@
                 <a:solidFill>
                   <a:schemeClr val="accent3"/>
                 </a:solidFill>
+                <a:latin typeface="Noto Sans KR"/>
+                <a:ea typeface="Noto Sans KR"/>
               </a:defRPr>
             </a:lvl1pPr>
           </a:lstStyle>
           <a:p>
             <a:pPr algn="r"/>
             <a:fld id="{F7021451-1387-4CA6-816F-3879F97B5CBC}" type="slidenum">
-              <a:rPr b="0" lang="en-US"/>
+              <a:rPr b="0" lang="ko-KR">
+                <a:latin typeface="Noto Sans KR"/>
+                <a:ea typeface="Noto Sans KR"/>
+              </a:rPr>
               <a:t>17</a:t>
             </a:fld>
-            <a:endParaRPr lang="en-US"/>
+            <a:endParaRPr lang="ko-KR">
+              <a:latin typeface="Noto Sans KR"/>
+              <a:ea typeface="Noto Sans KR"/>
+            </a:endParaRPr>
           </a:p>
         </p:txBody>
       </p:sp>
@@ -16080,14 +17244,19 @@
               <a:buNone/>
             </a:pPr>
             <a:r>
-              <a:rPr lang="en-US" sz="4000" b="1" dirty="0">
+              <a:rPr lang="ko-KR" sz="4000" b="1" dirty="0">
                 <a:solidFill>
                   <a:schemeClr val="bg1"/>
                 </a:solidFill>
+                <a:latin typeface="Noto Sans KR"/>
+                <a:ea typeface="Noto Sans KR"/>
               </a:rPr>
               <a:t>기능을 더하기 전에, 효과를 재는 법부터</a:t>
             </a:r>
-            <a:endParaRPr lang="en-US" sz="4000" dirty="0"/>
+            <a:endParaRPr lang="ko-KR" sz="4000" dirty="0">
+              <a:latin typeface="Noto Sans KR"/>
+              <a:ea typeface="Noto Sans KR"/>
+            </a:endParaRPr>
           </a:p>
         </p:txBody>
       </p:sp>
@@ -16118,28 +17287,38 @@
               <a:buNone/>
             </a:pPr>
             <a:r>
-              <a:rPr lang="en-US" sz="1800" dirty="0">
+              <a:rPr lang="ko-KR" sz="1800" dirty="0">
                 <a:solidFill>
                   <a:schemeClr val="bg2"/>
                 </a:solidFill>
+                <a:latin typeface="Noto Sans KR"/>
+                <a:ea typeface="Noto Sans KR"/>
               </a:rPr>
               <a:t>RAG가 조치 정확도를 올렸고, Judge는 품질 향상이 확인되지 않은 채 비용·지연만 늘렸으며, 캐스케이드로 장애 1건당 비용을 낮췄다. 모두 holdout에서, 반복과 짝지은 비교로 확인했다.</a:t>
             </a:r>
-            <a:endParaRPr lang="en-US" sz="1800" dirty="0"/>
+            <a:endParaRPr lang="ko-KR" sz="1800" dirty="0">
+              <a:latin typeface="Noto Sans KR"/>
+              <a:ea typeface="Noto Sans KR"/>
+            </a:endParaRPr>
           </a:p>
           <a:p>
             <a:pPr algn="l" indent="0" marL="0">
               <a:buNone/>
             </a:pPr>
             <a:r>
-              <a:rPr lang="en-US" sz="1400" dirty="0">
+              <a:rPr lang="ko-KR" sz="1400" dirty="0">
                 <a:solidFill>
                   <a:schemeClr val="accent3"/>
                 </a:solidFill>
+                <a:latin typeface="Noto Sans KR"/>
+                <a:ea typeface="Noto Sans KR"/>
               </a:rPr>
               <a:t>github.com/jang961111-hash/incident-agent-ablation</a:t>
             </a:r>
-            <a:endParaRPr lang="en-US" sz="1800" dirty="0"/>
+            <a:endParaRPr lang="ko-KR" sz="1800" dirty="0">
+              <a:latin typeface="Noto Sans KR"/>
+              <a:ea typeface="Noto Sans KR"/>
+            </a:endParaRPr>
           </a:p>
         </p:txBody>
       </p:sp>
@@ -16195,14 +17374,19 @@
               <a:buNone/>
             </a:pPr>
             <a:r>
-              <a:rPr lang="en-US" sz="2800" b="1" dirty="0">
+              <a:rPr lang="ko-KR" sz="2800" b="1" dirty="0">
                 <a:solidFill>
                   <a:schemeClr val="tx2"/>
                 </a:solidFill>
+                <a:latin typeface="Noto Sans KR"/>
+                <a:ea typeface="Noto Sans KR"/>
               </a:rPr>
               <a:t>한 장 요약: 무엇을 고쳤고, 무엇이 효과였나</a:t>
             </a:r>
-            <a:endParaRPr lang="en-US" sz="2800" dirty="0"/>
+            <a:endParaRPr lang="ko-KR" sz="2800" dirty="0">
+              <a:latin typeface="Noto Sans KR"/>
+              <a:ea typeface="Noto Sans KR"/>
+            </a:endParaRPr>
           </a:p>
         </p:txBody>
       </p:sp>
@@ -16279,14 +17463,19 @@
               <a:buNone/>
             </a:pPr>
             <a:r>
-              <a:rPr lang="en-US" sz="1050" dirty="0">
+              <a:rPr lang="ko-KR" sz="1050" dirty="0">
                 <a:solidFill>
                   <a:schemeClr val="accent3"/>
                 </a:solidFill>
+                <a:latin typeface="Noto Sans KR"/>
+                <a:ea typeface="Noto Sans KR"/>
               </a:rPr>
               <a:t>그림은 ChatGPT로 생성 · 그림 속 숫자는 results/*_latest.json, 실제 API 벤치 실측값</a:t>
             </a:r>
-            <a:endParaRPr lang="en-US" sz="1050" dirty="0"/>
+            <a:endParaRPr lang="ko-KR" sz="1050" dirty="0">
+              <a:latin typeface="Noto Sans KR"/>
+              <a:ea typeface="Noto Sans KR"/>
+            </a:endParaRPr>
           </a:p>
         </p:txBody>
       </p:sp>
@@ -16322,16 +17511,24 @@
                 <a:solidFill>
                   <a:schemeClr val="accent3"/>
                 </a:solidFill>
+                <a:latin typeface="Noto Sans KR"/>
+                <a:ea typeface="Noto Sans KR"/>
               </a:defRPr>
             </a:lvl1pPr>
           </a:lstStyle>
           <a:p>
             <a:pPr algn="r"/>
             <a:fld id="{F7021451-1387-4CA6-816F-3879F97B5CBC}" type="slidenum">
-              <a:rPr b="0" lang="en-US"/>
+              <a:rPr b="0" lang="ko-KR">
+                <a:latin typeface="Noto Sans KR"/>
+                <a:ea typeface="Noto Sans KR"/>
+              </a:rPr>
               <a:t>2</a:t>
             </a:fld>
-            <a:endParaRPr lang="en-US"/>
+            <a:endParaRPr lang="ko-KR">
+              <a:latin typeface="Noto Sans KR"/>
+              <a:ea typeface="Noto Sans KR"/>
+            </a:endParaRPr>
           </a:p>
         </p:txBody>
       </p:sp>
@@ -16387,14 +17584,19 @@
               <a:buNone/>
             </a:pPr>
             <a:r>
-              <a:rPr lang="en-US" sz="2800" b="1" dirty="0">
+              <a:rPr lang="ko-KR" sz="2800" b="1" dirty="0">
                 <a:solidFill>
                   <a:schemeClr val="tx2"/>
                 </a:solidFill>
+                <a:latin typeface="Noto Sans KR"/>
+                <a:ea typeface="Noto Sans KR"/>
               </a:rPr>
               <a:t>실태 현황: 시장은 AI SRE로 가는데, 효과를 잰 곳은 드물다</a:t>
             </a:r>
-            <a:endParaRPr lang="en-US" sz="2800" dirty="0"/>
+            <a:endParaRPr lang="ko-KR" sz="2800" dirty="0">
+              <a:latin typeface="Noto Sans KR"/>
+              <a:ea typeface="Noto Sans KR"/>
+            </a:endParaRPr>
           </a:p>
         </p:txBody>
       </p:sp>
@@ -16450,14 +17652,19 @@
               <a:buNone/>
             </a:pPr>
             <a:r>
-              <a:rPr lang="en-US" sz="3600" b="1" dirty="0">
+              <a:rPr lang="ko-KR" sz="3600" b="1" dirty="0">
                 <a:solidFill>
                   <a:schemeClr val="accent1"/>
                 </a:solidFill>
+                <a:latin typeface="Noto Sans KR"/>
+                <a:ea typeface="Noto Sans KR"/>
               </a:rPr>
               <a:t>54%</a:t>
             </a:r>
-            <a:endParaRPr lang="en-US" sz="3600" dirty="0"/>
+            <a:endParaRPr lang="ko-KR" sz="3600" dirty="0">
+              <a:latin typeface="Noto Sans KR"/>
+              <a:ea typeface="Noto Sans KR"/>
+            </a:endParaRPr>
           </a:p>
         </p:txBody>
       </p:sp>
@@ -16486,14 +17693,19 @@
               <a:buNone/>
             </a:pPr>
             <a:r>
-              <a:rPr lang="en-US" sz="1350" dirty="0">
+              <a:rPr lang="ko-KR" sz="1350" dirty="0">
                 <a:solidFill>
                   <a:schemeClr val="tx1"/>
                 </a:solidFill>
+                <a:latin typeface="Noto Sans KR"/>
+                <a:ea typeface="Noto Sans KR"/>
               </a:rPr>
               <a:t>최근 중대 장애 비용이 10만 달러를 넘었다는 응답 (Uptime Institute 2025). 절차 미준수 장애도 늘었다</a:t>
             </a:r>
-            <a:endParaRPr lang="en-US" sz="1350" dirty="0"/>
+            <a:endParaRPr lang="ko-KR" sz="1350" dirty="0">
+              <a:latin typeface="Noto Sans KR"/>
+              <a:ea typeface="Noto Sans KR"/>
+            </a:endParaRPr>
           </a:p>
         </p:txBody>
       </p:sp>
@@ -16549,14 +17761,19 @@
               <a:buNone/>
             </a:pPr>
             <a:r>
-              <a:rPr lang="en-US" sz="3600" b="1" dirty="0">
+              <a:rPr lang="ko-KR" sz="3600" b="1" dirty="0">
                 <a:solidFill>
                   <a:schemeClr val="accent2"/>
                 </a:solidFill>
+                <a:latin typeface="Noto Sans KR"/>
+                <a:ea typeface="Noto Sans KR"/>
               </a:rPr>
               <a:t>5개</a:t>
             </a:r>
-            <a:endParaRPr lang="en-US" sz="3600" dirty="0"/>
+            <a:endParaRPr lang="ko-KR" sz="3600" dirty="0">
+              <a:latin typeface="Noto Sans KR"/>
+              <a:ea typeface="Noto Sans KR"/>
+            </a:endParaRPr>
           </a:p>
         </p:txBody>
       </p:sp>
@@ -16585,14 +17802,19 @@
               <a:buNone/>
             </a:pPr>
             <a:r>
-              <a:rPr lang="en-US" sz="1350" dirty="0">
+              <a:rPr lang="ko-KR" sz="1350" dirty="0">
                 <a:solidFill>
                   <a:schemeClr val="tx1"/>
                 </a:solidFill>
+                <a:latin typeface="Noto Sans KR"/>
+                <a:ea typeface="Noto Sans KR"/>
               </a:rPr>
               <a:t>국외 정식 출시 AI SRE: PagerDuty·Datadog·Azure·AWS·Grafana. 국내도 SK AX·삼성계정·롯데ON·현대오토에버·GS리테일</a:t>
             </a:r>
-            <a:endParaRPr lang="en-US" sz="1350" dirty="0"/>
+            <a:endParaRPr lang="ko-KR" sz="1350" dirty="0">
+              <a:latin typeface="Noto Sans KR"/>
+              <a:ea typeface="Noto Sans KR"/>
+            </a:endParaRPr>
           </a:p>
         </p:txBody>
       </p:sp>
@@ -16648,14 +17870,19 @@
               <a:buNone/>
             </a:pPr>
             <a:r>
-              <a:rPr lang="en-US" sz="3600" b="1" dirty="0">
+              <a:rPr lang="ko-KR" sz="3600" b="1" dirty="0">
                 <a:solidFill>
                   <a:schemeClr val="accent6"/>
                 </a:solidFill>
+                <a:latin typeface="Noto Sans KR"/>
+                <a:ea typeface="Noto Sans KR"/>
               </a:rPr>
               <a:t>0건</a:t>
             </a:r>
-            <a:endParaRPr lang="en-US" sz="3600" dirty="0"/>
+            <a:endParaRPr lang="ko-KR" sz="3600" dirty="0">
+              <a:latin typeface="Noto Sans KR"/>
+              <a:ea typeface="Noto Sans KR"/>
+            </a:endParaRPr>
           </a:p>
         </p:txBody>
       </p:sp>
@@ -16684,14 +17911,19 @@
               <a:buNone/>
             </a:pPr>
             <a:r>
-              <a:rPr lang="en-US" sz="1350" dirty="0">
+              <a:rPr lang="ko-KR" sz="1350" dirty="0">
                 <a:solidFill>
                   <a:schemeClr val="tx1"/>
                 </a:solidFill>
+                <a:latin typeface="Noto Sans KR"/>
+                <a:ea typeface="Noto Sans KR"/>
               </a:rPr>
               <a:t>조사 범위의 국내 공개 사례 중 고정 평가셋·Ablation 공개. 국외 수치도 대부분 '최대 몇 %' 업체 주장</a:t>
             </a:r>
-            <a:endParaRPr lang="en-US" sz="1350" dirty="0"/>
+            <a:endParaRPr lang="ko-KR" sz="1350" dirty="0">
+              <a:latin typeface="Noto Sans KR"/>
+              <a:ea typeface="Noto Sans KR"/>
+            </a:endParaRPr>
           </a:p>
         </p:txBody>
       </p:sp>
@@ -16750,14 +17982,19 @@
               <a:buNone/>
             </a:pPr>
             <a:r>
-              <a:rPr lang="en-US" sz="1400" b="1" dirty="0">
+              <a:rPr lang="ko-KR" sz="1400" b="1" dirty="0">
                 <a:solidFill>
                   <a:schemeClr val="tx1"/>
                 </a:solidFill>
+                <a:latin typeface="Noto Sans KR"/>
+                <a:ea typeface="Noto Sans KR"/>
               </a:rPr>
               <a:t>현업 구조는 우리와 같다: 런북 근거 + MCP 도구 연동 + 조치 전 사람 승인</a:t>
             </a:r>
-            <a:endParaRPr lang="en-US" sz="1400" dirty="0"/>
+            <a:endParaRPr lang="ko-KR" sz="1400" dirty="0">
+              <a:latin typeface="Noto Sans KR"/>
+              <a:ea typeface="Noto Sans KR"/>
+            </a:endParaRPr>
           </a:p>
           <a:p>
             <a:pPr marL="342900" indent="-342900">
@@ -16768,14 +18005,19 @@
               <a:buChar char="•"/>
             </a:pPr>
             <a:r>
-              <a:rPr lang="en-US" sz="1400" dirty="0">
+              <a:rPr lang="ko-KR" sz="1400" dirty="0">
                 <a:solidFill>
                   <a:schemeClr val="tx1"/>
                 </a:solidFill>
+                <a:latin typeface="Noto Sans KR"/>
+                <a:ea typeface="Noto Sans KR"/>
               </a:rPr>
               <a:t>Datadog: 기능 하나가 일부 조사는 개선하고 다른 조사는 나쁘게 만든 사례 공개 → 부품을 하나씩 켜고 끄며 재야 하는 이유</a:t>
             </a:r>
-            <a:endParaRPr lang="en-US" sz="1400" dirty="0"/>
+            <a:endParaRPr lang="ko-KR" sz="1400" dirty="0">
+              <a:latin typeface="Noto Sans KR"/>
+              <a:ea typeface="Noto Sans KR"/>
+            </a:endParaRPr>
           </a:p>
           <a:p>
             <a:pPr marL="342900" indent="-342900">
@@ -16786,14 +18028,19 @@
               <a:buChar char="•"/>
             </a:pPr>
             <a:r>
-              <a:rPr lang="en-US" sz="1400" dirty="0">
+              <a:rPr lang="ko-KR" sz="1400" dirty="0">
                 <a:solidFill>
                   <a:schemeClr val="tx1"/>
                 </a:solidFill>
+                <a:latin typeface="Noto Sans KR"/>
+                <a:ea typeface="Noto Sans KR"/>
               </a:rPr>
               <a:t>연구: SOP를 넣자 RCA 정확도 35.5% → 64.0% (Flow-of-Action, WWW'25) · 외부 피드백 없는 자기교정은 효과 없음 (Huang 외, ICLR'24)</a:t>
             </a:r>
-            <a:endParaRPr lang="en-US" sz="1400" dirty="0"/>
+            <a:endParaRPr lang="ko-KR" sz="1400" dirty="0">
+              <a:latin typeface="Noto Sans KR"/>
+              <a:ea typeface="Noto Sans KR"/>
+            </a:endParaRPr>
           </a:p>
           <a:p>
             <a:pPr marL="342900" indent="-342900">
@@ -16804,14 +18051,19 @@
               <a:buChar char="•"/>
             </a:pPr>
             <a:r>
-              <a:rPr lang="en-US" sz="1400" dirty="0">
+              <a:rPr lang="ko-KR" sz="1400" dirty="0">
                 <a:solidFill>
                   <a:schemeClr val="tx1"/>
                 </a:solidFill>
+                <a:latin typeface="Noto Sans KR"/>
+                <a:ea typeface="Noto Sans KR"/>
               </a:rPr>
               <a:t>국내 연구: RCA 에이전트 실패 1위는 데이터 해석 환각 71.2% (오케스트로·한양대, ASPLOS'26 AIOps 워크숍)</a:t>
             </a:r>
-            <a:endParaRPr lang="en-US" sz="1400" dirty="0"/>
+            <a:endParaRPr lang="ko-KR" sz="1400" dirty="0">
+              <a:latin typeface="Noto Sans KR"/>
+              <a:ea typeface="Noto Sans KR"/>
+            </a:endParaRPr>
           </a:p>
         </p:txBody>
       </p:sp>
@@ -16840,14 +18092,19 @@
               <a:buNone/>
             </a:pPr>
             <a:r>
-              <a:rPr lang="en-US" sz="1050" dirty="0">
+              <a:rPr lang="ko-KR" sz="1050" dirty="0">
                 <a:solidFill>
                   <a:schemeClr val="accent3"/>
                 </a:solidFill>
+                <a:latin typeface="Noto Sans KR"/>
+                <a:ea typeface="Noto Sans KR"/>
               </a:rPr>
               <a:t>출처 전체: docs/research/00_요약_실태현황.md (국외 18개 제품·국내 19건·논문 38건, 2026-10-22 확인, 업체 수치는 업체 주장)</a:t>
             </a:r>
-            <a:endParaRPr lang="en-US" sz="1050" dirty="0"/>
+            <a:endParaRPr lang="ko-KR" sz="1050" dirty="0">
+              <a:latin typeface="Noto Sans KR"/>
+              <a:ea typeface="Noto Sans KR"/>
+            </a:endParaRPr>
           </a:p>
         </p:txBody>
       </p:sp>
@@ -16883,16 +18140,24 @@
                 <a:solidFill>
                   <a:schemeClr val="accent3"/>
                 </a:solidFill>
+                <a:latin typeface="Noto Sans KR"/>
+                <a:ea typeface="Noto Sans KR"/>
               </a:defRPr>
             </a:lvl1pPr>
           </a:lstStyle>
           <a:p>
             <a:pPr algn="r"/>
             <a:fld id="{F7021451-1387-4CA6-816F-3879F97B5CBC}" type="slidenum">
-              <a:rPr b="0" lang="en-US"/>
+              <a:rPr b="0" lang="ko-KR">
+                <a:latin typeface="Noto Sans KR"/>
+                <a:ea typeface="Noto Sans KR"/>
+              </a:rPr>
               <a:t>3</a:t>
             </a:fld>
-            <a:endParaRPr lang="en-US"/>
+            <a:endParaRPr lang="ko-KR">
+              <a:latin typeface="Noto Sans KR"/>
+              <a:ea typeface="Noto Sans KR"/>
+            </a:endParaRPr>
           </a:p>
         </p:txBody>
       </p:sp>
@@ -16948,14 +18213,19 @@
               <a:buNone/>
             </a:pPr>
             <a:r>
-              <a:rPr lang="en-US" sz="2800" b="1" dirty="0">
+              <a:rPr lang="ko-KR" sz="2800" b="1" dirty="0">
                 <a:solidFill>
                   <a:schemeClr val="tx2"/>
                 </a:solidFill>
+                <a:latin typeface="Noto Sans KR"/>
+                <a:ea typeface="Noto Sans KR"/>
               </a:rPr>
               <a:t>결론: 조치 정확도는 RAG가, 비용은 캐스케이드가 낮췄다</a:t>
             </a:r>
-            <a:endParaRPr lang="en-US" sz="2800" dirty="0"/>
+            <a:endParaRPr lang="ko-KR" sz="2800" dirty="0">
+              <a:latin typeface="Noto Sans KR"/>
+              <a:ea typeface="Noto Sans KR"/>
+            </a:endParaRPr>
           </a:p>
         </p:txBody>
       </p:sp>
@@ -17011,14 +18281,19 @@
               <a:buNone/>
             </a:pPr>
             <a:r>
-              <a:rPr lang="en-US" sz="3600" b="1" dirty="0">
+              <a:rPr lang="ko-KR" sz="3600" b="1" dirty="0">
                 <a:solidFill>
                   <a:schemeClr val="accent2"/>
                 </a:solidFill>
+                <a:latin typeface="Noto Sans KR"/>
+                <a:ea typeface="Noto Sans KR"/>
               </a:rPr>
               <a:t>56% → 9%</a:t>
             </a:r>
-            <a:endParaRPr lang="en-US" sz="3600" dirty="0"/>
+            <a:endParaRPr lang="ko-KR" sz="3600" dirty="0">
+              <a:latin typeface="Noto Sans KR"/>
+              <a:ea typeface="Noto Sans KR"/>
+            </a:endParaRPr>
           </a:p>
         </p:txBody>
       </p:sp>
@@ -17047,28 +18322,38 @@
               <a:buNone/>
             </a:pPr>
             <a:r>
-              <a:rPr lang="en-US" sz="1350" dirty="0">
+              <a:rPr lang="ko-KR" sz="1350" dirty="0">
                 <a:solidFill>
                   <a:schemeClr val="tx1"/>
                 </a:solidFill>
+                <a:latin typeface="Noto Sans KR"/>
+                <a:ea typeface="Noto Sans KR"/>
               </a:rPr>
               <a:t>정답 런북 누락률 (base → final)</a:t>
             </a:r>
-            <a:endParaRPr lang="en-US" sz="1350" dirty="0"/>
+            <a:endParaRPr lang="ko-KR" sz="1350" dirty="0">
+              <a:latin typeface="Noto Sans KR"/>
+              <a:ea typeface="Noto Sans KR"/>
+            </a:endParaRPr>
           </a:p>
           <a:p>
             <a:pPr indent="0" marL="0">
               <a:buNone/>
             </a:pPr>
             <a:r>
-              <a:rPr lang="en-US" sz="1350" dirty="0">
+              <a:rPr lang="ko-KR" sz="1350" dirty="0">
                 <a:solidFill>
                   <a:schemeClr val="tx1"/>
                 </a:solidFill>
+                <a:latin typeface="Noto Sans KR"/>
+                <a:ea typeface="Noto Sans KR"/>
               </a:rPr>
               <a:t>= 맞는 조치를 권고하지 못할 위험</a:t>
             </a:r>
-            <a:endParaRPr lang="en-US" sz="1350" dirty="0"/>
+            <a:endParaRPr lang="ko-KR" sz="1350" dirty="0">
+              <a:latin typeface="Noto Sans KR"/>
+              <a:ea typeface="Noto Sans KR"/>
+            </a:endParaRPr>
           </a:p>
         </p:txBody>
       </p:sp>
@@ -17124,14 +18409,19 @@
               <a:buNone/>
             </a:pPr>
             <a:r>
-              <a:rPr lang="en-US" sz="3600" b="1" dirty="0">
+              <a:rPr lang="ko-KR" sz="3600" b="1" dirty="0">
                 <a:solidFill>
                   <a:schemeClr val="accent6"/>
                 </a:solidFill>
+                <a:latin typeface="Noto Sans KR"/>
+                <a:ea typeface="Noto Sans KR"/>
               </a:rPr>
               <a:t>-84%</a:t>
             </a:r>
-            <a:endParaRPr lang="en-US" sz="3600" dirty="0"/>
+            <a:endParaRPr lang="ko-KR" sz="3600" dirty="0">
+              <a:latin typeface="Noto Sans KR"/>
+              <a:ea typeface="Noto Sans KR"/>
+            </a:endParaRPr>
           </a:p>
         </p:txBody>
       </p:sp>
@@ -17160,28 +18450,38 @@
               <a:buNone/>
             </a:pPr>
             <a:r>
-              <a:rPr lang="en-US" sz="1350" dirty="0">
+              <a:rPr lang="ko-KR" sz="1350" dirty="0">
                 <a:solidFill>
                   <a:schemeClr val="tx1"/>
                 </a:solidFill>
+                <a:latin typeface="Noto Sans KR"/>
+                <a:ea typeface="Noto Sans KR"/>
               </a:rPr>
               <a:t>장애 1건당 처리 비용 $0.00343 → $0.00057</a:t>
             </a:r>
-            <a:endParaRPr lang="en-US" sz="1350" dirty="0"/>
+            <a:endParaRPr lang="ko-KR" sz="1350" dirty="0">
+              <a:latin typeface="Noto Sans KR"/>
+              <a:ea typeface="Noto Sans KR"/>
+            </a:endParaRPr>
           </a:p>
           <a:p>
             <a:pPr indent="0" marL="0">
               <a:buNone/>
             </a:pPr>
             <a:r>
-              <a:rPr lang="en-US" sz="1350" dirty="0">
+              <a:rPr lang="ko-KR" sz="1350" dirty="0">
                 <a:solidFill>
                   <a:schemeClr val="tx1"/>
                 </a:solidFill>
+                <a:latin typeface="Noto Sans KR"/>
+                <a:ea typeface="Noto Sans KR"/>
               </a:rPr>
               <a:t>(캐스케이드만 켜면 -73%)</a:t>
             </a:r>
-            <a:endParaRPr lang="en-US" sz="1350" dirty="0"/>
+            <a:endParaRPr lang="ko-KR" sz="1350" dirty="0">
+              <a:latin typeface="Noto Sans KR"/>
+              <a:ea typeface="Noto Sans KR"/>
+            </a:endParaRPr>
           </a:p>
         </p:txBody>
       </p:sp>
@@ -17237,14 +18537,19 @@
               <a:buNone/>
             </a:pPr>
             <a:r>
-              <a:rPr lang="en-US" sz="3600" b="1" dirty="0">
+              <a:rPr lang="ko-KR" sz="3600" b="1" dirty="0">
                 <a:solidFill>
                   <a:schemeClr val="accent1"/>
                 </a:solidFill>
+                <a:latin typeface="Noto Sans KR"/>
+                <a:ea typeface="Noto Sans KR"/>
               </a:rPr>
               <a:t>개선 미확인</a:t>
             </a:r>
-            <a:endParaRPr lang="en-US" sz="3600" dirty="0"/>
+            <a:endParaRPr lang="ko-KR" sz="3600" dirty="0">
+              <a:latin typeface="Noto Sans KR"/>
+              <a:ea typeface="Noto Sans KR"/>
+            </a:endParaRPr>
           </a:p>
         </p:txBody>
       </p:sp>
@@ -17273,28 +18578,38 @@
               <a:buNone/>
             </a:pPr>
             <a:r>
-              <a:rPr lang="en-US" sz="1350" dirty="0">
+              <a:rPr lang="ko-KR" sz="1350" dirty="0">
                 <a:solidFill>
                   <a:schemeClr val="tx1"/>
                 </a:solidFill>
+                <a:latin typeface="Noto Sans KR"/>
+                <a:ea typeface="Noto Sans KR"/>
               </a:rPr>
               <a:t>LLM Judge 단독: 품질 향상 확인 안 됨</a:t>
             </a:r>
-            <a:endParaRPr lang="en-US" sz="1350" dirty="0"/>
+            <a:endParaRPr lang="ko-KR" sz="1350" dirty="0">
+              <a:latin typeface="Noto Sans KR"/>
+              <a:ea typeface="Noto Sans KR"/>
+            </a:endParaRPr>
           </a:p>
           <a:p>
             <a:pPr indent="0" marL="0">
               <a:buNone/>
             </a:pPr>
             <a:r>
-              <a:rPr lang="en-US" sz="1350" dirty="0">
+              <a:rPr lang="ko-KR" sz="1350" dirty="0">
                 <a:solidFill>
                   <a:schemeClr val="tx1"/>
                 </a:solidFill>
+                <a:latin typeface="Noto Sans KR"/>
+                <a:ea typeface="Noto Sans KR"/>
               </a:rPr>
               <a:t>지연은 +2.3초 (유의)</a:t>
             </a:r>
-            <a:endParaRPr lang="en-US" sz="1350" dirty="0"/>
+            <a:endParaRPr lang="ko-KR" sz="1350" dirty="0">
+              <a:latin typeface="Noto Sans KR"/>
+              <a:ea typeface="Noto Sans KR"/>
+            </a:endParaRPr>
           </a:p>
         </p:txBody>
       </p:sp>
@@ -17353,14 +18668,19 @@
               <a:buNone/>
             </a:pPr>
             <a:r>
-              <a:rPr lang="en-US" sz="1600" b="1" dirty="0">
+              <a:rPr lang="ko-KR" sz="1600" b="1" dirty="0">
                 <a:solidFill>
                   <a:srgbClr val="16202C"/>
                 </a:solidFill>
+                <a:latin typeface="Noto Sans KR"/>
+                <a:ea typeface="Noto Sans KR"/>
               </a:rPr>
               <a:t>어떻게 증명했나</a:t>
             </a:r>
-            <a:endParaRPr lang="en-US" sz="1450" dirty="0"/>
+            <a:endParaRPr lang="ko-KR" sz="1450" dirty="0">
+              <a:latin typeface="Noto Sans KR"/>
+              <a:ea typeface="Noto Sans KR"/>
+            </a:endParaRPr>
           </a:p>
           <a:p>
             <a:pPr marL="342900" indent="-342900">
@@ -17371,14 +18691,19 @@
               <a:buChar char="•"/>
             </a:pPr>
             <a:r>
-              <a:rPr lang="en-US" sz="1450" dirty="0">
+              <a:rPr lang="ko-KR" sz="1450" dirty="0">
                 <a:solidFill>
                   <a:schemeClr val="tx1"/>
                 </a:solidFill>
+                <a:latin typeface="Noto Sans KR"/>
+                <a:ea typeface="Noto Sans KR"/>
               </a:rPr>
               <a:t>평가셋 60건을 dev 24건(기준값 조정용)과 holdout 36건(조정 전에 고정, 최종 보고용)으로 나눴다. 이 덱의 수치는 모두 holdout.</a:t>
             </a:r>
-            <a:endParaRPr lang="en-US" sz="1450" dirty="0"/>
+            <a:endParaRPr lang="ko-KR" sz="1450" dirty="0">
+              <a:latin typeface="Noto Sans KR"/>
+              <a:ea typeface="Noto Sans KR"/>
+            </a:endParaRPr>
           </a:p>
           <a:p>
             <a:pPr marL="342900" indent="-342900">
@@ -17389,14 +18714,19 @@
               <a:buChar char="•"/>
             </a:pPr>
             <a:r>
-              <a:rPr lang="en-US" sz="1450" dirty="0">
+              <a:rPr lang="ko-KR" sz="1450" dirty="0">
                 <a:solidFill>
                   <a:schemeClr val="tx1"/>
                 </a:solidFill>
+                <a:latin typeface="Noto Sans KR"/>
+                <a:ea typeface="Noto Sans KR"/>
               </a:rPr>
               <a:t>개선을 하나씩 켠 7구성을 각 3회 반복하고, 구성 간 차이는 같은 질의끼리 짝지은 bootstrap 95% 신뢰구간으로 판정했다.</a:t>
             </a:r>
-            <a:endParaRPr lang="en-US" sz="1450" dirty="0"/>
+            <a:endParaRPr lang="ko-KR" sz="1450" dirty="0">
+              <a:latin typeface="Noto Sans KR"/>
+              <a:ea typeface="Noto Sans KR"/>
+            </a:endParaRPr>
           </a:p>
           <a:p>
             <a:pPr marL="342900" indent="-342900">
@@ -17407,14 +18737,19 @@
               <a:buChar char="•"/>
             </a:pPr>
             <a:r>
-              <a:rPr lang="en-US" sz="1450" dirty="0">
+              <a:rPr lang="ko-KR" sz="1450" dirty="0">
                 <a:solidFill>
                   <a:schemeClr val="tx1"/>
                 </a:solidFill>
+                <a:latin typeface="Noto Sans KR"/>
+                <a:ea typeface="Noto Sans KR"/>
               </a:rPr>
               <a:t>평가자(LLM Judge)가 관대할 수 있어, Judge와 무관한 결정적 지표(정답 런북 누락·혼입, 런북 어구 포함)로 결론을 냈다.</a:t>
             </a:r>
-            <a:endParaRPr lang="en-US" sz="1450" dirty="0"/>
+            <a:endParaRPr lang="ko-KR" sz="1450" dirty="0">
+              <a:latin typeface="Noto Sans KR"/>
+              <a:ea typeface="Noto Sans KR"/>
+            </a:endParaRPr>
           </a:p>
         </p:txBody>
       </p:sp>
@@ -17443,14 +18778,19 @@
               <a:buNone/>
             </a:pPr>
             <a:r>
-              <a:rPr lang="en-US" sz="1050" dirty="0">
+              <a:rPr lang="ko-KR" sz="1050" dirty="0">
                 <a:solidFill>
                   <a:schemeClr val="accent3"/>
                 </a:solidFill>
+                <a:latin typeface="Noto Sans KR"/>
+                <a:ea typeface="Noto Sans KR"/>
               </a:rPr>
               <a:t>출처: results/*_latest.json (7구성 x 60건 x 3회 = 1,260회, 실행 오류 0), results/stats_holdout.json, eval/extra_metrics.py</a:t>
             </a:r>
-            <a:endParaRPr lang="en-US" sz="1050" dirty="0"/>
+            <a:endParaRPr lang="ko-KR" sz="1050" dirty="0">
+              <a:latin typeface="Noto Sans KR"/>
+              <a:ea typeface="Noto Sans KR"/>
+            </a:endParaRPr>
           </a:p>
         </p:txBody>
       </p:sp>
@@ -17486,16 +18826,24 @@
                 <a:solidFill>
                   <a:schemeClr val="accent3"/>
                 </a:solidFill>
+                <a:latin typeface="Noto Sans KR"/>
+                <a:ea typeface="Noto Sans KR"/>
               </a:defRPr>
             </a:lvl1pPr>
           </a:lstStyle>
           <a:p>
             <a:pPr algn="r"/>
             <a:fld id="{F7021451-1387-4CA6-816F-3879F97B5CBC}" type="slidenum">
-              <a:rPr b="0" lang="en-US"/>
+              <a:rPr b="0" lang="ko-KR">
+                <a:latin typeface="Noto Sans KR"/>
+                <a:ea typeface="Noto Sans KR"/>
+              </a:rPr>
               <a:t>4</a:t>
             </a:fld>
-            <a:endParaRPr lang="en-US"/>
+            <a:endParaRPr lang="ko-KR">
+              <a:latin typeface="Noto Sans KR"/>
+              <a:ea typeface="Noto Sans KR"/>
+            </a:endParaRPr>
           </a:p>
         </p:txBody>
       </p:sp>
@@ -17551,14 +18899,19 @@
               <a:buNone/>
             </a:pPr>
             <a:r>
-              <a:rPr lang="en-US" sz="2800" b="1" dirty="0">
+              <a:rPr lang="ko-KR" sz="2800" b="1" dirty="0">
                 <a:solidFill>
                   <a:schemeClr val="tx2"/>
                 </a:solidFill>
+                <a:latin typeface="Noto Sans KR"/>
+                <a:ea typeface="Noto Sans KR"/>
               </a:rPr>
               <a:t>운영팀이 AI 에이전트 도입을 결정하려면 세 가지를 알아야 한다</a:t>
             </a:r>
-            <a:endParaRPr lang="en-US" sz="2800" dirty="0"/>
+            <a:endParaRPr lang="ko-KR" sz="2800" dirty="0">
+              <a:latin typeface="Noto Sans KR"/>
+              <a:ea typeface="Noto Sans KR"/>
+            </a:endParaRPr>
           </a:p>
         </p:txBody>
       </p:sp>
@@ -17639,14 +18992,19 @@
               <a:buNone/>
             </a:pPr>
             <a:r>
-              <a:rPr lang="en-US" sz="1800" b="1" dirty="0">
+              <a:rPr lang="ko-KR" sz="1800" b="1" dirty="0">
                 <a:solidFill>
                   <a:schemeClr val="bg1"/>
                 </a:solidFill>
+                <a:latin typeface="Noto Sans KR"/>
+                <a:ea typeface="Noto Sans KR"/>
               </a:rPr>
               <a:t>1</a:t>
             </a:r>
-            <a:endParaRPr lang="en-US" sz="1800" dirty="0"/>
+            <a:endParaRPr lang="ko-KR" sz="1800" dirty="0">
+              <a:latin typeface="Noto Sans KR"/>
+              <a:ea typeface="Noto Sans KR"/>
+            </a:endParaRPr>
           </a:p>
         </p:txBody>
       </p:sp>
@@ -17675,14 +19033,19 @@
               <a:buNone/>
             </a:pPr>
             <a:r>
-              <a:rPr lang="en-US" sz="1700" b="1" dirty="0">
+              <a:rPr lang="ko-KR" sz="1700" b="1" dirty="0">
                 <a:solidFill>
                   <a:schemeClr val="tx2"/>
                 </a:solidFill>
+                <a:latin typeface="Noto Sans KR"/>
+                <a:ea typeface="Noto Sans KR"/>
               </a:rPr>
               <a:t>맞는 조치를 권고하나</a:t>
             </a:r>
-            <a:endParaRPr lang="en-US" sz="1700" dirty="0"/>
+            <a:endParaRPr lang="ko-KR" sz="1700" dirty="0">
+              <a:latin typeface="Noto Sans KR"/>
+              <a:ea typeface="Noto Sans KR"/>
+            </a:endParaRPr>
           </a:p>
         </p:txBody>
       </p:sp>
@@ -17711,14 +19074,19 @@
               <a:buNone/>
             </a:pPr>
             <a:r>
-              <a:rPr lang="en-US" sz="1400" dirty="0">
+              <a:rPr lang="ko-KR" sz="1400" dirty="0">
                 <a:solidFill>
                   <a:schemeClr val="tx1"/>
                 </a:solidFill>
+                <a:latin typeface="Noto Sans KR"/>
+                <a:ea typeface="Noto Sans KR"/>
               </a:rPr>
               <a:t>새벽 2시 당직자가 "DB 프라이머리가 죽었다"고 물었는데 응답 지연 절차를 주면, 그 답은 장애를 키운다.</a:t>
             </a:r>
-            <a:endParaRPr lang="en-US" sz="1400" dirty="0"/>
+            <a:endParaRPr lang="ko-KR" sz="1400" dirty="0">
+              <a:latin typeface="Noto Sans KR"/>
+              <a:ea typeface="Noto Sans KR"/>
+            </a:endParaRPr>
           </a:p>
         </p:txBody>
       </p:sp>
@@ -17747,14 +19115,19 @@
               <a:buNone/>
             </a:pPr>
             <a:r>
-              <a:rPr lang="en-US" sz="1300" b="1" dirty="0">
+              <a:rPr lang="ko-KR" sz="1300" b="1" dirty="0">
                 <a:solidFill>
                   <a:schemeClr val="accent6"/>
                 </a:solidFill>
+                <a:latin typeface="Noto Sans KR"/>
+                <a:ea typeface="Noto Sans KR"/>
               </a:rPr>
               <a:t>→ 정답 런북 누락률 · 무관 런북 혼입률</a:t>
             </a:r>
-            <a:endParaRPr lang="en-US" sz="1300" dirty="0"/>
+            <a:endParaRPr lang="ko-KR" sz="1300" dirty="0">
+              <a:latin typeface="Noto Sans KR"/>
+              <a:ea typeface="Noto Sans KR"/>
+            </a:endParaRPr>
           </a:p>
         </p:txBody>
       </p:sp>
@@ -17835,14 +19208,19 @@
               <a:buNone/>
             </a:pPr>
             <a:r>
-              <a:rPr lang="en-US" sz="1800" b="1" dirty="0">
+              <a:rPr lang="ko-KR" sz="1800" b="1" dirty="0">
                 <a:solidFill>
                   <a:schemeClr val="bg1"/>
                 </a:solidFill>
+                <a:latin typeface="Noto Sans KR"/>
+                <a:ea typeface="Noto Sans KR"/>
               </a:rPr>
               <a:t>2</a:t>
             </a:r>
-            <a:endParaRPr lang="en-US" sz="1800" dirty="0"/>
+            <a:endParaRPr lang="ko-KR" sz="1800" dirty="0">
+              <a:latin typeface="Noto Sans KR"/>
+              <a:ea typeface="Noto Sans KR"/>
+            </a:endParaRPr>
           </a:p>
         </p:txBody>
       </p:sp>
@@ -17871,14 +19249,19 @@
               <a:buNone/>
             </a:pPr>
             <a:r>
-              <a:rPr lang="en-US" sz="1700" b="1" dirty="0">
+              <a:rPr lang="ko-KR" sz="1700" b="1" dirty="0">
                 <a:solidFill>
                   <a:schemeClr val="tx2"/>
                 </a:solidFill>
+                <a:latin typeface="Noto Sans KR"/>
+                <a:ea typeface="Noto Sans KR"/>
               </a:rPr>
               <a:t>그 판정을 믿어도 되나</a:t>
             </a:r>
-            <a:endParaRPr lang="en-US" sz="1700" dirty="0"/>
+            <a:endParaRPr lang="ko-KR" sz="1700" dirty="0">
+              <a:latin typeface="Noto Sans KR"/>
+              <a:ea typeface="Noto Sans KR"/>
+            </a:endParaRPr>
           </a:p>
         </p:txBody>
       </p:sp>
@@ -17907,14 +19290,19 @@
               <a:buNone/>
             </a:pPr>
             <a:r>
-              <a:rPr lang="en-US" sz="1400" dirty="0">
+              <a:rPr lang="ko-KR" sz="1400" dirty="0">
                 <a:solidFill>
                   <a:schemeClr val="tx1"/>
                 </a:solidFill>
+                <a:latin typeface="Noto Sans KR"/>
+                <a:ea typeface="Noto Sans KR"/>
               </a:rPr>
               <a:t>"AI가 채점했더니 97점"은 채점한 AI가 관대하면 의미가 없다. 평가자 자체를 검증해야 한다.</a:t>
             </a:r>
-            <a:endParaRPr lang="en-US" sz="1400" dirty="0"/>
+            <a:endParaRPr lang="ko-KR" sz="1400" dirty="0">
+              <a:latin typeface="Noto Sans KR"/>
+              <a:ea typeface="Noto Sans KR"/>
+            </a:endParaRPr>
           </a:p>
         </p:txBody>
       </p:sp>
@@ -17943,14 +19331,19 @@
               <a:buNone/>
             </a:pPr>
             <a:r>
-              <a:rPr lang="en-US" sz="1300" b="1" dirty="0">
+              <a:rPr lang="ko-KR" sz="1300" b="1" dirty="0">
                 <a:solidFill>
                   <a:schemeClr val="accent6"/>
                 </a:solidFill>
+                <a:latin typeface="Noto Sans KR"/>
+                <a:ea typeface="Noto Sans KR"/>
               </a:rPr>
               <a:t>→ 독립 평가자와의 일치도 (kappa, 사람 표본은 예정) · Judge 무관 지표</a:t>
             </a:r>
-            <a:endParaRPr lang="en-US" sz="1300" dirty="0"/>
+            <a:endParaRPr lang="ko-KR" sz="1300" dirty="0">
+              <a:latin typeface="Noto Sans KR"/>
+              <a:ea typeface="Noto Sans KR"/>
+            </a:endParaRPr>
           </a:p>
         </p:txBody>
       </p:sp>
@@ -18031,14 +19424,19 @@
               <a:buNone/>
             </a:pPr>
             <a:r>
-              <a:rPr lang="en-US" sz="1800" b="1" dirty="0">
+              <a:rPr lang="ko-KR" sz="1800" b="1" dirty="0">
                 <a:solidFill>
                   <a:schemeClr val="bg1"/>
                 </a:solidFill>
+                <a:latin typeface="Noto Sans KR"/>
+                <a:ea typeface="Noto Sans KR"/>
               </a:rPr>
               <a:t>3</a:t>
             </a:r>
-            <a:endParaRPr lang="en-US" sz="1800" dirty="0"/>
+            <a:endParaRPr lang="ko-KR" sz="1800" dirty="0">
+              <a:latin typeface="Noto Sans KR"/>
+              <a:ea typeface="Noto Sans KR"/>
+            </a:endParaRPr>
           </a:p>
         </p:txBody>
       </p:sp>
@@ -18067,14 +19465,19 @@
               <a:buNone/>
             </a:pPr>
             <a:r>
-              <a:rPr lang="en-US" sz="1700" b="1" dirty="0">
+              <a:rPr lang="ko-KR" sz="1700" b="1" dirty="0">
                 <a:solidFill>
                   <a:schemeClr val="tx2"/>
                 </a:solidFill>
+                <a:latin typeface="Noto Sans KR"/>
+                <a:ea typeface="Noto Sans KR"/>
               </a:rPr>
               <a:t>얼마에, 얼마나 빨리</a:t>
             </a:r>
-            <a:endParaRPr lang="en-US" sz="1700" dirty="0"/>
+            <a:endParaRPr lang="ko-KR" sz="1700" dirty="0">
+              <a:latin typeface="Noto Sans KR"/>
+              <a:ea typeface="Noto Sans KR"/>
+            </a:endParaRPr>
           </a:p>
         </p:txBody>
       </p:sp>
@@ -18103,14 +19506,19 @@
               <a:buNone/>
             </a:pPr>
             <a:r>
-              <a:rPr lang="en-US" sz="1400" dirty="0">
+              <a:rPr lang="ko-KR" sz="1400" dirty="0">
                 <a:solidFill>
                   <a:schemeClr val="tx1"/>
                 </a:solidFill>
+                <a:latin typeface="Noto Sans KR"/>
+                <a:ea typeface="Noto Sans KR"/>
               </a:rPr>
               <a:t>품질을 올린 대가로 비용과 지연이 얼마나 늘었는지, 장애가 겹쳐 들어오거나 도구가 죽어도 버티는지.</a:t>
             </a:r>
-            <a:endParaRPr lang="en-US" sz="1400" dirty="0"/>
+            <a:endParaRPr lang="ko-KR" sz="1400" dirty="0">
+              <a:latin typeface="Noto Sans KR"/>
+              <a:ea typeface="Noto Sans KR"/>
+            </a:endParaRPr>
           </a:p>
         </p:txBody>
       </p:sp>
@@ -18139,14 +19547,19 @@
               <a:buNone/>
             </a:pPr>
             <a:r>
-              <a:rPr lang="en-US" sz="1300" b="1" dirty="0">
+              <a:rPr lang="ko-KR" sz="1300" b="1" dirty="0">
                 <a:solidFill>
                   <a:schemeClr val="accent6"/>
                 </a:solidFill>
+                <a:latin typeface="Noto Sans KR"/>
+                <a:ea typeface="Noto Sans KR"/>
               </a:rPr>
               <a:t>→ 장애 1건당 비용 · p95 지연 · 동시 처리 · 장애 주입</a:t>
             </a:r>
-            <a:endParaRPr lang="en-US" sz="1300" dirty="0"/>
+            <a:endParaRPr lang="ko-KR" sz="1300" dirty="0">
+              <a:latin typeface="Noto Sans KR"/>
+              <a:ea typeface="Noto Sans KR"/>
+            </a:endParaRPr>
           </a:p>
         </p:txBody>
       </p:sp>
@@ -18175,14 +19588,19 @@
               <a:buNone/>
             </a:pPr>
             <a:r>
-              <a:rPr lang="en-US" sz="1600" b="1" dirty="0">
+              <a:rPr lang="ko-KR" sz="1600" b="1" dirty="0">
                 <a:solidFill>
                   <a:schemeClr val="tx2"/>
                 </a:solidFill>
+                <a:latin typeface="Noto Sans KR"/>
+                <a:ea typeface="Noto Sans KR"/>
               </a:rPr>
               <a:t>이 프로젝트는 기능을 더하는 것보다, 도입 판단에 쓸 수 있는 평가 체계를 만드는 데 무게를 뒀다.</a:t>
             </a:r>
-            <a:endParaRPr lang="en-US" sz="1600" dirty="0"/>
+            <a:endParaRPr lang="ko-KR" sz="1600" dirty="0">
+              <a:latin typeface="Noto Sans KR"/>
+              <a:ea typeface="Noto Sans KR"/>
+            </a:endParaRPr>
           </a:p>
         </p:txBody>
       </p:sp>
@@ -18218,16 +19636,24 @@
                 <a:solidFill>
                   <a:schemeClr val="accent3"/>
                 </a:solidFill>
+                <a:latin typeface="Noto Sans KR"/>
+                <a:ea typeface="Noto Sans KR"/>
               </a:defRPr>
             </a:lvl1pPr>
           </a:lstStyle>
           <a:p>
             <a:pPr algn="r"/>
             <a:fld id="{F7021451-1387-4CA6-816F-3879F97B5CBC}" type="slidenum">
-              <a:rPr b="0" lang="en-US"/>
+              <a:rPr b="0" lang="ko-KR">
+                <a:latin typeface="Noto Sans KR"/>
+                <a:ea typeface="Noto Sans KR"/>
+              </a:rPr>
               <a:t>5</a:t>
             </a:fld>
-            <a:endParaRPr lang="en-US"/>
+            <a:endParaRPr lang="ko-KR">
+              <a:latin typeface="Noto Sans KR"/>
+              <a:ea typeface="Noto Sans KR"/>
+            </a:endParaRPr>
           </a:p>
         </p:txBody>
       </p:sp>
@@ -18283,14 +19709,19 @@
               <a:buNone/>
             </a:pPr>
             <a:r>
-              <a:rPr lang="en-US" sz="2800" b="1" dirty="0">
+              <a:rPr lang="ko-KR" sz="2800" b="1" dirty="0">
                 <a:solidFill>
                   <a:schemeClr val="tx2"/>
                 </a:solidFill>
+                <a:latin typeface="Noto Sans KR"/>
+                <a:ea typeface="Noto Sans KR"/>
               </a:rPr>
               <a:t>문제 1: base는 질문을 읽지 않고, 알림 키워드로 런북을 고른다</a:t>
             </a:r>
-            <a:endParaRPr lang="en-US" sz="2800" dirty="0"/>
+            <a:endParaRPr lang="ko-KR" sz="2800" dirty="0">
+              <a:latin typeface="Noto Sans KR"/>
+              <a:ea typeface="Noto Sans KR"/>
+            </a:endParaRPr>
           </a:p>
         </p:txBody>
       </p:sp>
@@ -18346,14 +19777,19 @@
               <a:buNone/>
             </a:pPr>
             <a:r>
-              <a:rPr lang="en-US" sz="1400" b="1" dirty="0">
+              <a:rPr lang="ko-KR" sz="1400" b="1" dirty="0">
                 <a:solidFill>
                   <a:schemeClr val="tx2"/>
                 </a:solidFill>
+                <a:latin typeface="Noto Sans KR"/>
+                <a:ea typeface="Noto Sans KR"/>
               </a:rPr>
               <a:t>사용자 질의</a:t>
             </a:r>
-            <a:endParaRPr lang="en-US" sz="1400" dirty="0"/>
+            <a:endParaRPr lang="ko-KR" sz="1400" dirty="0">
+              <a:latin typeface="Noto Sans KR"/>
+              <a:ea typeface="Noto Sans KR"/>
+            </a:endParaRPr>
           </a:p>
         </p:txBody>
       </p:sp>
@@ -18382,28 +19818,38 @@
               <a:buNone/>
             </a:pPr>
             <a:r>
-              <a:rPr lang="en-US" sz="1500" dirty="0">
+              <a:rPr lang="ko-KR" sz="1500" dirty="0">
                 <a:solidFill>
                   <a:schemeClr val="tx1"/>
                 </a:solidFill>
+                <a:latin typeface="Noto Sans KR"/>
+                <a:ea typeface="Noto Sans KR"/>
               </a:rPr>
               <a:t>"DB 프라이머리가</a:t>
             </a:r>
-            <a:endParaRPr lang="en-US" sz="1500" dirty="0"/>
+            <a:endParaRPr lang="ko-KR" sz="1500" dirty="0">
+              <a:latin typeface="Noto Sans KR"/>
+              <a:ea typeface="Noto Sans KR"/>
+            </a:endParaRPr>
           </a:p>
           <a:p>
             <a:pPr indent="0" marL="0">
               <a:buNone/>
             </a:pPr>
             <a:r>
-              <a:rPr lang="en-US" sz="1500" dirty="0">
+              <a:rPr lang="ko-KR" sz="1500" dirty="0">
                 <a:solidFill>
                   <a:schemeClr val="tx1"/>
                 </a:solidFill>
+                <a:latin typeface="Noto Sans KR"/>
+                <a:ea typeface="Noto Sans KR"/>
               </a:rPr>
               <a:t>다운됐습니다"</a:t>
             </a:r>
-            <a:endParaRPr lang="en-US" sz="1500" dirty="0"/>
+            <a:endParaRPr lang="ko-KR" sz="1500" dirty="0">
+              <a:latin typeface="Noto Sans KR"/>
+              <a:ea typeface="Noto Sans KR"/>
+            </a:endParaRPr>
           </a:p>
         </p:txBody>
       </p:sp>
@@ -18484,14 +19930,19 @@
               <a:buNone/>
             </a:pPr>
             <a:r>
-              <a:rPr lang="en-US" sz="1400" b="1" dirty="0">
+              <a:rPr lang="ko-KR" sz="1400" b="1" dirty="0">
                 <a:solidFill>
                   <a:schemeClr val="tx2"/>
                 </a:solidFill>
+                <a:latin typeface="Noto Sans KR"/>
+                <a:ea typeface="Noto Sans KR"/>
               </a:rPr>
               <a:t>planner</a:t>
             </a:r>
-            <a:endParaRPr lang="en-US" sz="1400" dirty="0"/>
+            <a:endParaRPr lang="ko-KR" sz="1400" dirty="0">
+              <a:latin typeface="Noto Sans KR"/>
+              <a:ea typeface="Noto Sans KR"/>
+            </a:endParaRPr>
           </a:p>
         </p:txBody>
       </p:sp>
@@ -18520,28 +19971,38 @@
               <a:buNone/>
             </a:pPr>
             <a:r>
-              <a:rPr lang="en-US" sz="1500" dirty="0">
+              <a:rPr lang="ko-KR" sz="1500" dirty="0">
                 <a:solidFill>
                   <a:schemeClr val="tx1"/>
                 </a:solidFill>
+                <a:latin typeface="Noto Sans KR"/>
+                <a:ea typeface="Noto Sans KR"/>
               </a:rPr>
               <a:t>시스템명 없음</a:t>
             </a:r>
-            <a:endParaRPr lang="en-US" sz="1500" dirty="0"/>
+            <a:endParaRPr lang="ko-KR" sz="1500" dirty="0">
+              <a:latin typeface="Noto Sans KR"/>
+              <a:ea typeface="Noto Sans KR"/>
+            </a:endParaRPr>
           </a:p>
           <a:p>
             <a:pPr indent="0" marL="0">
               <a:buNone/>
             </a:pPr>
             <a:r>
-              <a:rPr lang="en-US" sz="1500" dirty="0">
+              <a:rPr lang="ko-KR" sz="1500" dirty="0">
                 <a:solidFill>
                   <a:schemeClr val="tx1"/>
                 </a:solidFill>
+                <a:latin typeface="Noto Sans KR"/>
+                <a:ea typeface="Noto Sans KR"/>
               </a:rPr>
               <a:t>→ auth-service 폴백</a:t>
             </a:r>
-            <a:endParaRPr lang="en-US" sz="1500" dirty="0"/>
+            <a:endParaRPr lang="ko-KR" sz="1500" dirty="0">
+              <a:latin typeface="Noto Sans KR"/>
+              <a:ea typeface="Noto Sans KR"/>
+            </a:endParaRPr>
           </a:p>
         </p:txBody>
       </p:sp>
@@ -18622,14 +20083,19 @@
               <a:buNone/>
             </a:pPr>
             <a:r>
-              <a:rPr lang="en-US" sz="1400" b="1" dirty="0">
+              <a:rPr lang="ko-KR" sz="1400" b="1" dirty="0">
                 <a:solidFill>
                   <a:schemeClr val="tx2"/>
                 </a:solidFill>
+                <a:latin typeface="Noto Sans KR"/>
+                <a:ea typeface="Noto Sans KR"/>
               </a:rPr>
               <a:t>모니터링 알림</a:t>
             </a:r>
-            <a:endParaRPr lang="en-US" sz="1400" dirty="0"/>
+            <a:endParaRPr lang="ko-KR" sz="1400" dirty="0">
+              <a:latin typeface="Noto Sans KR"/>
+              <a:ea typeface="Noto Sans KR"/>
+            </a:endParaRPr>
           </a:p>
         </p:txBody>
       </p:sp>
@@ -18658,28 +20124,38 @@
               <a:buNone/>
             </a:pPr>
             <a:r>
-              <a:rPr lang="en-US" sz="1500" dirty="0">
+              <a:rPr lang="ko-KR" sz="1500" dirty="0">
                 <a:solidFill>
                   <a:schemeClr val="tx1"/>
                 </a:solidFill>
+                <a:latin typeface="Noto Sans KR"/>
+                <a:ea typeface="Noto Sans KR"/>
               </a:rPr>
               <a:t>"p95 latency 2.4s"</a:t>
             </a:r>
-            <a:endParaRPr lang="en-US" sz="1500" dirty="0"/>
+            <a:endParaRPr lang="ko-KR" sz="1500" dirty="0">
+              <a:latin typeface="Noto Sans KR"/>
+              <a:ea typeface="Noto Sans KR"/>
+            </a:endParaRPr>
           </a:p>
           <a:p>
             <a:pPr indent="0" marL="0">
               <a:buNone/>
             </a:pPr>
             <a:r>
-              <a:rPr lang="en-US" sz="1500" dirty="0">
+              <a:rPr lang="ko-KR" sz="1500" dirty="0">
                 <a:solidFill>
                   <a:schemeClr val="tx1"/>
                 </a:solidFill>
+                <a:latin typeface="Noto Sans KR"/>
+                <a:ea typeface="Noto Sans KR"/>
               </a:rPr>
               <a:t>키워드 'latency' 일치</a:t>
             </a:r>
-            <a:endParaRPr lang="en-US" sz="1500" dirty="0"/>
+            <a:endParaRPr lang="ko-KR" sz="1500" dirty="0">
+              <a:latin typeface="Noto Sans KR"/>
+              <a:ea typeface="Noto Sans KR"/>
+            </a:endParaRPr>
           </a:p>
         </p:txBody>
       </p:sp>
@@ -18760,14 +20236,19 @@
               <a:buNone/>
             </a:pPr>
             <a:r>
-              <a:rPr lang="en-US" sz="1400" b="1" dirty="0">
+              <a:rPr lang="ko-KR" sz="1400" b="1" dirty="0">
                 <a:solidFill>
                   <a:schemeClr val="bg1"/>
                 </a:solidFill>
+                <a:latin typeface="Noto Sans KR"/>
+                <a:ea typeface="Noto Sans KR"/>
               </a:rPr>
               <a:t>선택된 런북</a:t>
             </a:r>
-            <a:endParaRPr lang="en-US" sz="1400" dirty="0"/>
+            <a:endParaRPr lang="ko-KR" sz="1400" dirty="0">
+              <a:latin typeface="Noto Sans KR"/>
+              <a:ea typeface="Noto Sans KR"/>
+            </a:endParaRPr>
           </a:p>
         </p:txBody>
       </p:sp>
@@ -18796,28 +20277,38 @@
               <a:buNone/>
             </a:pPr>
             <a:r>
-              <a:rPr lang="en-US" sz="1500" dirty="0">
+              <a:rPr lang="ko-KR" sz="1500" dirty="0">
                 <a:solidFill>
                   <a:schemeClr val="bg1"/>
                 </a:solidFill>
+                <a:latin typeface="Noto Sans KR"/>
+                <a:ea typeface="Noto Sans KR"/>
               </a:rPr>
               <a:t>high-latency</a:t>
             </a:r>
-            <a:endParaRPr lang="en-US" sz="1500" dirty="0"/>
+            <a:endParaRPr lang="ko-KR" sz="1500" dirty="0">
+              <a:latin typeface="Noto Sans KR"/>
+              <a:ea typeface="Noto Sans KR"/>
+            </a:endParaRPr>
           </a:p>
           <a:p>
             <a:pPr indent="0" marL="0">
               <a:buNone/>
             </a:pPr>
             <a:r>
-              <a:rPr lang="en-US" sz="1500" dirty="0">
+              <a:rPr lang="ko-KR" sz="1500" dirty="0">
                 <a:solidFill>
                   <a:schemeClr val="bg1"/>
                 </a:solidFill>
+                <a:latin typeface="Noto Sans KR"/>
+                <a:ea typeface="Noto Sans KR"/>
               </a:rPr>
               <a:t>(응답 지연 절차)</a:t>
             </a:r>
-            <a:endParaRPr lang="en-US" sz="1500" dirty="0"/>
+            <a:endParaRPr lang="ko-KR" sz="1500" dirty="0">
+              <a:latin typeface="Noto Sans KR"/>
+              <a:ea typeface="Noto Sans KR"/>
+            </a:endParaRPr>
           </a:p>
         </p:txBody>
       </p:sp>
@@ -18873,14 +20364,19 @@
               <a:buNone/>
             </a:pPr>
             <a:r>
-              <a:rPr lang="en-US" sz="3600" b="1" dirty="0">
+              <a:rPr lang="ko-KR" sz="3600" b="1" dirty="0">
                 <a:solidFill>
                   <a:schemeClr val="accent1"/>
                 </a:solidFill>
+                <a:latin typeface="Noto Sans KR"/>
+                <a:ea typeface="Noto Sans KR"/>
               </a:rPr>
               <a:t>56%</a:t>
             </a:r>
-            <a:endParaRPr lang="en-US" sz="3600" dirty="0"/>
+            <a:endParaRPr lang="ko-KR" sz="3600" dirty="0">
+              <a:latin typeface="Noto Sans KR"/>
+              <a:ea typeface="Noto Sans KR"/>
+            </a:endParaRPr>
           </a:p>
         </p:txBody>
       </p:sp>
@@ -18909,28 +20405,38 @@
               <a:buNone/>
             </a:pPr>
             <a:r>
-              <a:rPr lang="en-US" sz="1350" dirty="0">
+              <a:rPr lang="ko-KR" sz="1350" dirty="0">
                 <a:solidFill>
                   <a:schemeClr val="tx1"/>
                 </a:solidFill>
+                <a:latin typeface="Noto Sans KR"/>
+                <a:ea typeface="Noto Sans KR"/>
               </a:rPr>
               <a:t>holdout에서 base가 정답 런북을</a:t>
             </a:r>
-            <a:endParaRPr lang="en-US" sz="1350" dirty="0"/>
+            <a:endParaRPr lang="ko-KR" sz="1350" dirty="0">
+              <a:latin typeface="Noto Sans KR"/>
+              <a:ea typeface="Noto Sans KR"/>
+            </a:endParaRPr>
           </a:p>
           <a:p>
             <a:pPr indent="0" marL="0">
               <a:buNone/>
             </a:pPr>
             <a:r>
-              <a:rPr lang="en-US" sz="1350" dirty="0">
+              <a:rPr lang="ko-KR" sz="1350" dirty="0">
                 <a:solidFill>
                   <a:schemeClr val="tx1"/>
                 </a:solidFill>
+                <a:latin typeface="Noto Sans KR"/>
+                <a:ea typeface="Noto Sans KR"/>
               </a:rPr>
               <a:t>근거에 못 넣은 비율</a:t>
             </a:r>
-            <a:endParaRPr lang="en-US" sz="1350" dirty="0"/>
+            <a:endParaRPr lang="ko-KR" sz="1350" dirty="0">
+              <a:latin typeface="Noto Sans KR"/>
+              <a:ea typeface="Noto Sans KR"/>
+            </a:endParaRPr>
           </a:p>
         </p:txBody>
       </p:sp>
@@ -18986,14 +20492,19 @@
               <a:buNone/>
             </a:pPr>
             <a:r>
-              <a:rPr lang="en-US" sz="3600" b="1" dirty="0">
+              <a:rPr lang="ko-KR" sz="3600" b="1" dirty="0">
                 <a:solidFill>
                   <a:schemeClr val="accent1"/>
                 </a:solidFill>
+                <a:latin typeface="Noto Sans KR"/>
+                <a:ea typeface="Noto Sans KR"/>
               </a:rPr>
               <a:t>78% vs 11%</a:t>
             </a:r>
-            <a:endParaRPr lang="en-US" sz="3600" dirty="0"/>
+            <a:endParaRPr lang="ko-KR" sz="3600" dirty="0">
+              <a:latin typeface="Noto Sans KR"/>
+              <a:ea typeface="Noto Sans KR"/>
+            </a:endParaRPr>
           </a:p>
         </p:txBody>
       </p:sp>
@@ -19022,28 +20533,38 @@
               <a:buNone/>
             </a:pPr>
             <a:r>
-              <a:rPr lang="en-US" sz="1350" dirty="0">
+              <a:rPr lang="ko-KR" sz="1350" dirty="0">
                 <a:solidFill>
                   <a:schemeClr val="tx1"/>
                 </a:solidFill>
+                <a:latin typeface="Noto Sans KR"/>
+                <a:ea typeface="Noto Sans KR"/>
               </a:rPr>
               <a:t>알림 문구대로 물을 때 vs 자기 말로</a:t>
             </a:r>
-            <a:endParaRPr lang="en-US" sz="1350" dirty="0"/>
+            <a:endParaRPr lang="ko-KR" sz="1350" dirty="0">
+              <a:latin typeface="Noto Sans KR"/>
+              <a:ea typeface="Noto Sans KR"/>
+            </a:endParaRPr>
           </a:p>
           <a:p>
             <a:pPr indent="0" marL="0">
               <a:buNone/>
             </a:pPr>
             <a:r>
-              <a:rPr lang="en-US" sz="1350" dirty="0">
+              <a:rPr lang="ko-KR" sz="1350" dirty="0">
                 <a:solidFill>
                   <a:schemeClr val="tx1"/>
                 </a:solidFill>
+                <a:latin typeface="Noto Sans KR"/>
+                <a:ea typeface="Noto Sans KR"/>
               </a:rPr>
               <a:t>물을 때 base Recall@1 (편향 검증)</a:t>
             </a:r>
-            <a:endParaRPr lang="en-US" sz="1350" dirty="0"/>
+            <a:endParaRPr lang="ko-KR" sz="1350" dirty="0">
+              <a:latin typeface="Noto Sans KR"/>
+              <a:ea typeface="Noto Sans KR"/>
+            </a:endParaRPr>
           </a:p>
         </p:txBody>
       </p:sp>
@@ -19075,14 +20596,19 @@
               <a:buNone/>
             </a:pPr>
             <a:r>
-              <a:rPr lang="en-US" sz="1350" b="1" dirty="0">
+              <a:rPr lang="ko-KR" sz="1350" b="1" dirty="0">
                 <a:solidFill>
                   <a:schemeClr val="tx1"/>
                 </a:solidFill>
+                <a:latin typeface="Noto Sans KR"/>
+                <a:ea typeface="Noto Sans KR"/>
               </a:rPr>
               <a:t>원인 (src/agent/graph.py:192-213)</a:t>
             </a:r>
-            <a:endParaRPr lang="en-US" sz="1350" dirty="0"/>
+            <a:endParaRPr lang="ko-KR" sz="1350" dirty="0">
+              <a:latin typeface="Noto Sans KR"/>
+              <a:ea typeface="Noto Sans KR"/>
+            </a:endParaRPr>
           </a:p>
           <a:p>
             <a:pPr marL="342900" indent="-342900">
@@ -19093,14 +20619,19 @@
               <a:buChar char="•"/>
             </a:pPr>
             <a:r>
-              <a:rPr lang="en-US" sz="1350" dirty="0">
+              <a:rPr lang="ko-KR" sz="1350" dirty="0">
                 <a:solidFill>
                   <a:schemeClr val="tx1"/>
                 </a:solidFill>
+                <a:latin typeface="Noto Sans KR"/>
+                <a:ea typeface="Noto Sans KR"/>
               </a:rPr>
               <a:t>조사한 시스템의 알림 문구에서 키워드를 순서대로 찾아 첫 일치로 런북 1개를 고른다.</a:t>
             </a:r>
-            <a:endParaRPr lang="en-US" sz="1350" dirty="0"/>
+            <a:endParaRPr lang="ko-KR" sz="1350" dirty="0">
+              <a:latin typeface="Noto Sans KR"/>
+              <a:ea typeface="Noto Sans KR"/>
+            </a:endParaRPr>
           </a:p>
           <a:p>
             <a:pPr marL="342900" indent="-342900">
@@ -19111,14 +20642,19 @@
               <a:buChar char="•"/>
             </a:pPr>
             <a:r>
-              <a:rPr lang="en-US" sz="1350" dirty="0">
+              <a:rPr lang="ko-KR" sz="1350" dirty="0">
                 <a:solidFill>
                   <a:schemeClr val="tx1"/>
                 </a:solidFill>
+                <a:latin typeface="Noto Sans KR"/>
+                <a:ea typeface="Noto Sans KR"/>
               </a:rPr>
               <a:t>질의 문장은 쓰지 않는다. 당직자가 알림과 다른 말로 물으면 거의 맞히지 못한다.</a:t>
             </a:r>
-            <a:endParaRPr lang="en-US" sz="1350" dirty="0"/>
+            <a:endParaRPr lang="ko-KR" sz="1350" dirty="0">
+              <a:latin typeface="Noto Sans KR"/>
+              <a:ea typeface="Noto Sans KR"/>
+            </a:endParaRPr>
           </a:p>
         </p:txBody>
       </p:sp>
@@ -19147,14 +20683,19 @@
               <a:buNone/>
             </a:pPr>
             <a:r>
-              <a:rPr lang="en-US" sz="1050" dirty="0">
+              <a:rPr lang="ko-KR" sz="1050" dirty="0">
                 <a:solidFill>
                   <a:schemeClr val="accent3"/>
                 </a:solidFill>
+                <a:latin typeface="Noto Sans KR"/>
+                <a:ea typeface="Noto Sans KR"/>
               </a:rPr>
               <a:t>holdout 정상 질의 aligned 9건 / paraphrased 9건, 3회 평균</a:t>
             </a:r>
-            <a:endParaRPr lang="en-US" sz="1050" dirty="0"/>
+            <a:endParaRPr lang="ko-KR" sz="1050" dirty="0">
+              <a:latin typeface="Noto Sans KR"/>
+              <a:ea typeface="Noto Sans KR"/>
+            </a:endParaRPr>
           </a:p>
         </p:txBody>
       </p:sp>
@@ -19190,16 +20731,24 @@
                 <a:solidFill>
                   <a:schemeClr val="accent3"/>
                 </a:solidFill>
+                <a:latin typeface="Noto Sans KR"/>
+                <a:ea typeface="Noto Sans KR"/>
               </a:defRPr>
             </a:lvl1pPr>
           </a:lstStyle>
           <a:p>
             <a:pPr algn="r"/>
             <a:fld id="{F7021451-1387-4CA6-816F-3879F97B5CBC}" type="slidenum">
-              <a:rPr b="0" lang="en-US"/>
+              <a:rPr b="0" lang="ko-KR">
+                <a:latin typeface="Noto Sans KR"/>
+                <a:ea typeface="Noto Sans KR"/>
+              </a:rPr>
               <a:t>6</a:t>
             </a:fld>
-            <a:endParaRPr lang="en-US"/>
+            <a:endParaRPr lang="ko-KR">
+              <a:latin typeface="Noto Sans KR"/>
+              <a:ea typeface="Noto Sans KR"/>
+            </a:endParaRPr>
           </a:p>
         </p:txBody>
       </p:sp>
@@ -19255,14 +20804,19 @@
               <a:buNone/>
             </a:pPr>
             <a:r>
-              <a:rPr lang="en-US" sz="2800" b="1" dirty="0">
+              <a:rPr lang="ko-KR" sz="2800" b="1" dirty="0">
                 <a:solidFill>
                   <a:schemeClr val="tx2"/>
                 </a:solidFill>
+                <a:latin typeface="Noto Sans KR"/>
+                <a:ea typeface="Noto Sans KR"/>
               </a:rPr>
               <a:t>문제 2: 검증은 형식만 보고, 모델 분리는 이미 돼 있었다</a:t>
             </a:r>
-            <a:endParaRPr lang="en-US" sz="2800" dirty="0"/>
+            <a:endParaRPr lang="ko-KR" sz="2800" dirty="0">
+              <a:latin typeface="Noto Sans KR"/>
+              <a:ea typeface="Noto Sans KR"/>
+            </a:endParaRPr>
           </a:p>
         </p:txBody>
       </p:sp>
@@ -19318,14 +20872,19 @@
               <a:buNone/>
             </a:pPr>
             <a:r>
-              <a:rPr lang="en-US" sz="2000" b="1" dirty="0">
+              <a:rPr lang="ko-KR" sz="2000" b="1" dirty="0">
                 <a:solidFill>
                   <a:schemeClr val="tx2"/>
                 </a:solidFill>
+                <a:latin typeface="Noto Sans KR"/>
+                <a:ea typeface="Noto Sans KR"/>
               </a:rPr>
               <a:t>규칙 Validator</a:t>
             </a:r>
-            <a:endParaRPr lang="en-US" sz="2000" dirty="0"/>
+            <a:endParaRPr lang="ko-KR" sz="2000" dirty="0">
+              <a:latin typeface="Noto Sans KR"/>
+              <a:ea typeface="Noto Sans KR"/>
+            </a:endParaRPr>
           </a:p>
         </p:txBody>
       </p:sp>
@@ -19354,7 +20913,7 @@
               <a:buNone/>
             </a:pPr>
             <a:r>
-              <a:rPr lang="en-US" sz="1500" dirty="0">
+              <a:rPr lang="ko-KR" sz="1500" dirty="0">
                 <a:solidFill>
                   <a:schemeClr val="accent1"/>
                 </a:solidFill>
@@ -19364,7 +20923,10 @@
               </a:rPr>
               <a:t>len(draft) &gt;= 30 and "1)" in draft</a:t>
             </a:r>
-            <a:endParaRPr lang="en-US" sz="1500" dirty="0"/>
+            <a:endParaRPr lang="ko-KR" sz="1500" dirty="0">
+              <a:latin typeface="Noto Sans KR"/>
+              <a:ea typeface="Noto Sans KR"/>
+            </a:endParaRPr>
           </a:p>
         </p:txBody>
       </p:sp>
@@ -19397,14 +20959,19 @@
               <a:buChar char="•"/>
             </a:pPr>
             <a:r>
-              <a:rPr lang="en-US" sz="1500" dirty="0">
+              <a:rPr lang="ko-KR" sz="1500" dirty="0">
                 <a:solidFill>
                   <a:schemeClr val="tx1"/>
                 </a:solidFill>
+                <a:latin typeface="Noto Sans KR"/>
+                <a:ea typeface="Noto Sans KR"/>
               </a:rPr>
               <a:t>질문과 맞는지, 근거에 있는지는 보지 않는다.</a:t>
             </a:r>
-            <a:endParaRPr lang="en-US" sz="1500" dirty="0"/>
+            <a:endParaRPr lang="ko-KR" sz="1500" dirty="0">
+              <a:latin typeface="Noto Sans KR"/>
+              <a:ea typeface="Noto Sans KR"/>
+            </a:endParaRPr>
           </a:p>
           <a:p>
             <a:pPr marL="342900" indent="-342900">
@@ -19415,14 +20982,19 @@
               <a:buChar char="•"/>
             </a:pPr>
             <a:r>
-              <a:rPr lang="en-US" sz="1500" dirty="0">
+              <a:rPr lang="ko-KR" sz="1500" dirty="0">
                 <a:solidFill>
                   <a:schemeClr val="tx1"/>
                 </a:solidFill>
+                <a:latin typeface="Noto Sans KR"/>
+                <a:ea typeface="Noto Sans KR"/>
               </a:rPr>
               <a:t>실측: base 60건 x 3회에서 반려 0회. 응답 지연 절차로 DB 다운에 답해도 통과한다.</a:t>
             </a:r>
-            <a:endParaRPr lang="en-US" sz="1500" dirty="0"/>
+            <a:endParaRPr lang="ko-KR" sz="1500" dirty="0">
+              <a:latin typeface="Noto Sans KR"/>
+              <a:ea typeface="Noto Sans KR"/>
+            </a:endParaRPr>
           </a:p>
         </p:txBody>
       </p:sp>
@@ -19478,14 +21050,19 @@
               <a:buNone/>
             </a:pPr>
             <a:r>
-              <a:rPr lang="en-US" sz="2000" b="1" dirty="0">
+              <a:rPr lang="ko-KR" sz="2000" b="1" dirty="0">
                 <a:solidFill>
                   <a:schemeClr val="tx2"/>
                 </a:solidFill>
+                <a:latin typeface="Noto Sans KR"/>
+                <a:ea typeface="Noto Sans KR"/>
               </a:rPr>
               <a:t>계획했던 비용 개선</a:t>
             </a:r>
-            <a:endParaRPr lang="en-US" sz="2000" dirty="0"/>
+            <a:endParaRPr lang="ko-KR" sz="2000" dirty="0">
+              <a:latin typeface="Noto Sans KR"/>
+              <a:ea typeface="Noto Sans KR"/>
+            </a:endParaRPr>
           </a:p>
         </p:txBody>
       </p:sp>
@@ -19514,7 +21091,7 @@
               <a:buNone/>
             </a:pPr>
             <a:r>
-              <a:rPr lang="en-US" sz="1500" dirty="0">
+              <a:rPr lang="ko-KR" sz="1500" dirty="0">
                 <a:solidFill>
                   <a:schemeClr val="accent2"/>
                 </a:solidFill>
@@ -19524,7 +21101,10 @@
               </a:rPr>
               <a:t>fast = gpt-4o-mini / quality = gpt-4o</a:t>
             </a:r>
-            <a:endParaRPr lang="en-US" sz="1500" dirty="0"/>
+            <a:endParaRPr lang="ko-KR" sz="1500" dirty="0">
+              <a:latin typeface="Noto Sans KR"/>
+              <a:ea typeface="Noto Sans KR"/>
+            </a:endParaRPr>
           </a:p>
         </p:txBody>
       </p:sp>
@@ -19557,14 +21137,19 @@
               <a:buChar char="•"/>
             </a:pPr>
             <a:r>
-              <a:rPr lang="en-US" sz="1500" dirty="0">
+              <a:rPr lang="ko-KR" sz="1500" dirty="0">
                 <a:solidFill>
                   <a:schemeClr val="tx1"/>
                 </a:solidFill>
+                <a:latin typeface="Noto Sans KR"/>
+                <a:ea typeface="Noto Sans KR"/>
               </a:rPr>
               <a:t>'역할별 모델 분리'는 base에 이미 있었다 (src/server.py:50-56).</a:t>
             </a:r>
-            <a:endParaRPr lang="en-US" sz="1500" dirty="0"/>
+            <a:endParaRPr lang="ko-KR" sz="1500" dirty="0">
+              <a:latin typeface="Noto Sans KR"/>
+              <a:ea typeface="Noto Sans KR"/>
+            </a:endParaRPr>
           </a:p>
           <a:p>
             <a:pPr marL="342900" indent="-342900">
@@ -19575,14 +21160,19 @@
               <a:buChar char="•"/>
             </a:pPr>
             <a:r>
-              <a:rPr lang="en-US" sz="1500" dirty="0">
+              <a:rPr lang="ko-KR" sz="1500" dirty="0">
                 <a:solidFill>
                   <a:schemeClr val="tx1"/>
                 </a:solidFill>
+                <a:latin typeface="Noto Sans KR"/>
+                <a:ea typeface="Noto Sans KR"/>
               </a:rPr>
               <a:t>그래서 비용 축을 다시 정했다: 1차 초안은 저가 모델, 반려될 때만 gpt-4o (캐스케이드) + 반복 질의 캐시.</a:t>
             </a:r>
-            <a:endParaRPr lang="en-US" sz="1500" dirty="0"/>
+            <a:endParaRPr lang="ko-KR" sz="1500" dirty="0">
+              <a:latin typeface="Noto Sans KR"/>
+              <a:ea typeface="Noto Sans KR"/>
+            </a:endParaRPr>
           </a:p>
         </p:txBody>
       </p:sp>
@@ -19611,14 +21201,19 @@
               <a:buNone/>
             </a:pPr>
             <a:r>
-              <a:rPr lang="en-US" sz="1600" b="1" dirty="0">
+              <a:rPr lang="ko-KR" sz="1600" b="1" dirty="0">
                 <a:solidFill>
                   <a:schemeClr val="accent6"/>
                 </a:solidFill>
+                <a:latin typeface="Noto Sans KR"/>
+                <a:ea typeface="Noto Sans KR"/>
               </a:rPr>
               <a:t>→ 개선 대상: 런북 선택(RAG) · 검증 기준(LLM Judge) · 비용(캐스케이드·캐시) · 운영 안정성(비동기·부분 실패)</a:t>
             </a:r>
-            <a:endParaRPr lang="en-US" sz="1600" dirty="0"/>
+            <a:endParaRPr lang="ko-KR" sz="1600" dirty="0">
+              <a:latin typeface="Noto Sans KR"/>
+              <a:ea typeface="Noto Sans KR"/>
+            </a:endParaRPr>
           </a:p>
         </p:txBody>
       </p:sp>
@@ -19654,16 +21249,24 @@
                 <a:solidFill>
                   <a:schemeClr val="accent3"/>
                 </a:solidFill>
+                <a:latin typeface="Noto Sans KR"/>
+                <a:ea typeface="Noto Sans KR"/>
               </a:defRPr>
             </a:lvl1pPr>
           </a:lstStyle>
           <a:p>
             <a:pPr algn="r"/>
             <a:fld id="{F7021451-1387-4CA6-816F-3879F97B5CBC}" type="slidenum">
-              <a:rPr b="0" lang="en-US"/>
+              <a:rPr b="0" lang="ko-KR">
+                <a:latin typeface="Noto Sans KR"/>
+                <a:ea typeface="Noto Sans KR"/>
+              </a:rPr>
               <a:t>7</a:t>
             </a:fld>
-            <a:endParaRPr lang="en-US"/>
+            <a:endParaRPr lang="ko-KR">
+              <a:latin typeface="Noto Sans KR"/>
+              <a:ea typeface="Noto Sans KR"/>
+            </a:endParaRPr>
           </a:p>
         </p:txBody>
       </p:sp>
@@ -19719,14 +21322,19 @@
               <a:buNone/>
             </a:pPr>
             <a:r>
-              <a:rPr lang="en-US" sz="2800" b="1" dirty="0">
+              <a:rPr lang="ko-KR" sz="2800" b="1" dirty="0">
                 <a:solidFill>
                   <a:schemeClr val="tx2"/>
                 </a:solidFill>
+                <a:latin typeface="Noto Sans KR"/>
+                <a:ea typeface="Noto Sans KR"/>
               </a:rPr>
               <a:t>개선: 원본 노드는 그대로, 플래그로 하나씩 켜는 7구성</a:t>
             </a:r>
-            <a:endParaRPr lang="en-US" sz="2800" dirty="0"/>
+            <a:endParaRPr lang="ko-KR" sz="2800" dirty="0">
+              <a:latin typeface="Noto Sans KR"/>
+              <a:ea typeface="Noto Sans KR"/>
+            </a:endParaRPr>
           </a:p>
         </p:txBody>
       </p:sp>
@@ -19771,14 +21379,19 @@
                         <a:buNone/>
                       </a:pPr>
                       <a:r>
-                        <a:rPr lang="en-US" sz="1200" b="1" dirty="0">
+                        <a:rPr lang="ko-KR" sz="1200" b="1" dirty="0">
                           <a:solidFill>
                             <a:srgbClr val="FFFFFF"/>
                           </a:solidFill>
+                          <a:latin typeface="Noto Sans KR"/>
+                          <a:ea typeface="Noto Sans KR"/>
                         </a:rPr>
                         <a:t>구성</a:t>
                       </a:r>
-                      <a:endParaRPr lang="en-US" sz="1200" dirty="0"/>
+                      <a:endParaRPr lang="ko-KR" sz="1200" dirty="0">
+                        <a:latin typeface="Noto Sans KR"/>
+                        <a:ea typeface="Noto Sans KR"/>
+                      </a:endParaRPr>
                     </a:p>
                   </a:txBody>
                   <a:tcPr marL="91440" marR="91440" marT="45720" marB="45720" anchor="ctr">
@@ -19832,14 +21445,19 @@
                         <a:buNone/>
                       </a:pPr>
                       <a:r>
-                        <a:rPr lang="en-US" sz="1200" b="1" dirty="0">
+                        <a:rPr lang="ko-KR" sz="1200" b="1" dirty="0">
                           <a:solidFill>
                             <a:srgbClr val="FFFFFF"/>
                           </a:solidFill>
+                          <a:latin typeface="Noto Sans KR"/>
+                          <a:ea typeface="Noto Sans KR"/>
                         </a:rPr>
                         <a:t>RAG</a:t>
                       </a:r>
-                      <a:endParaRPr lang="en-US" sz="1200" dirty="0"/>
+                      <a:endParaRPr lang="ko-KR" sz="1200" dirty="0">
+                        <a:latin typeface="Noto Sans KR"/>
+                        <a:ea typeface="Noto Sans KR"/>
+                      </a:endParaRPr>
                     </a:p>
                   </a:txBody>
                   <a:tcPr marL="91440" marR="91440" marT="45720" marB="45720" anchor="ctr">
@@ -19893,14 +21511,19 @@
                         <a:buNone/>
                       </a:pPr>
                       <a:r>
-                        <a:rPr lang="en-US" sz="1200" b="1" dirty="0">
+                        <a:rPr lang="ko-KR" sz="1200" b="1" dirty="0">
                           <a:solidFill>
                             <a:srgbClr val="FFFFFF"/>
                           </a:solidFill>
+                          <a:latin typeface="Noto Sans KR"/>
+                          <a:ea typeface="Noto Sans KR"/>
                         </a:rPr>
                         <a:t>Judge</a:t>
                       </a:r>
-                      <a:endParaRPr lang="en-US" sz="1200" dirty="0"/>
+                      <a:endParaRPr lang="ko-KR" sz="1200" dirty="0">
+                        <a:latin typeface="Noto Sans KR"/>
+                        <a:ea typeface="Noto Sans KR"/>
+                      </a:endParaRPr>
                     </a:p>
                   </a:txBody>
                   <a:tcPr marL="91440" marR="91440" marT="45720" marB="45720" anchor="ctr">
@@ -19954,14 +21577,19 @@
                         <a:buNone/>
                       </a:pPr>
                       <a:r>
-                        <a:rPr lang="en-US" sz="1200" b="1" dirty="0">
+                        <a:rPr lang="ko-KR" sz="1200" b="1" dirty="0">
                           <a:solidFill>
                             <a:srgbClr val="FFFFFF"/>
                           </a:solidFill>
+                          <a:latin typeface="Noto Sans KR"/>
+                          <a:ea typeface="Noto Sans KR"/>
                         </a:rPr>
                         <a:t>캐스케이드·캐시</a:t>
                       </a:r>
-                      <a:endParaRPr lang="en-US" sz="1200" dirty="0"/>
+                      <a:endParaRPr lang="ko-KR" sz="1200" dirty="0">
+                        <a:latin typeface="Noto Sans KR"/>
+                        <a:ea typeface="Noto Sans KR"/>
+                      </a:endParaRPr>
                     </a:p>
                   </a:txBody>
                   <a:tcPr marL="91440" marR="91440" marT="45720" marB="45720" anchor="ctr">
@@ -20015,14 +21643,19 @@
                         <a:buNone/>
                       </a:pPr>
                       <a:r>
-                        <a:rPr lang="en-US" sz="1200" b="1" dirty="0">
+                        <a:rPr lang="ko-KR" sz="1200" b="1" dirty="0">
                           <a:solidFill>
                             <a:srgbClr val="FFFFFF"/>
                           </a:solidFill>
+                          <a:latin typeface="Noto Sans KR"/>
+                          <a:ea typeface="Noto Sans KR"/>
                         </a:rPr>
                         <a:t>v2 보완</a:t>
                       </a:r>
-                      <a:endParaRPr lang="en-US" sz="1200" dirty="0"/>
+                      <a:endParaRPr lang="ko-KR" sz="1200" dirty="0">
+                        <a:latin typeface="Noto Sans KR"/>
+                        <a:ea typeface="Noto Sans KR"/>
+                      </a:endParaRPr>
                     </a:p>
                   </a:txBody>
                   <a:tcPr marL="91440" marR="91440" marT="45720" marB="45720" anchor="ctr">
@@ -20076,14 +21709,19 @@
                         <a:buNone/>
                       </a:pPr>
                       <a:r>
-                        <a:rPr lang="en-US" sz="1200" b="1" dirty="0">
+                        <a:rPr lang="ko-KR" sz="1200" b="1" dirty="0">
                           <a:solidFill>
                             <a:srgbClr val="FFFFFF"/>
                           </a:solidFill>
+                          <a:latin typeface="Noto Sans KR"/>
+                          <a:ea typeface="Noto Sans KR"/>
                         </a:rPr>
                         <a:t>런타임</a:t>
                       </a:r>
-                      <a:endParaRPr lang="en-US" sz="1200" dirty="0"/>
+                      <a:endParaRPr lang="ko-KR" sz="1200" dirty="0">
+                        <a:latin typeface="Noto Sans KR"/>
+                        <a:ea typeface="Noto Sans KR"/>
+                      </a:endParaRPr>
                     </a:p>
                   </a:txBody>
                   <a:tcPr marL="91440" marR="91440" marT="45720" marB="45720" anchor="ctr">
@@ -20137,14 +21775,19 @@
                         <a:buNone/>
                       </a:pPr>
                       <a:r>
-                        <a:rPr lang="en-US" sz="1200" b="1" dirty="0">
+                        <a:rPr lang="ko-KR" sz="1200" b="1" dirty="0">
                           <a:solidFill>
                             <a:srgbClr val="FFFFFF"/>
                           </a:solidFill>
+                          <a:latin typeface="Noto Sans KR"/>
+                          <a:ea typeface="Noto Sans KR"/>
                         </a:rPr>
                         <a:t>알 수 있는 것</a:t>
                       </a:r>
-                      <a:endParaRPr lang="en-US" sz="1200" dirty="0"/>
+                      <a:endParaRPr lang="ko-KR" sz="1200" dirty="0">
+                        <a:latin typeface="Noto Sans KR"/>
+                        <a:ea typeface="Noto Sans KR"/>
+                      </a:endParaRPr>
                     </a:p>
                   </a:txBody>
                   <a:tcPr marL="91440" marR="91440" marT="45720" marB="45720" anchor="ctr">
@@ -20200,14 +21843,19 @@
                         <a:buNone/>
                       </a:pPr>
                       <a:r>
-                        <a:rPr lang="en-US" sz="1200" dirty="0">
+                        <a:rPr lang="ko-KR" sz="1200" dirty="0">
                           <a:solidFill>
                             <a:srgbClr val="1A2230"/>
                           </a:solidFill>
+                          <a:latin typeface="Noto Sans KR"/>
+                          <a:ea typeface="Noto Sans KR"/>
                         </a:rPr>
                         <a:t>base</a:t>
                       </a:r>
-                      <a:endParaRPr lang="en-US" sz="1200" dirty="0"/>
+                      <a:endParaRPr lang="ko-KR" sz="1200" dirty="0">
+                        <a:latin typeface="Noto Sans KR"/>
+                        <a:ea typeface="Noto Sans KR"/>
+                      </a:endParaRPr>
                     </a:p>
                   </a:txBody>
                   <a:tcPr marL="91440" marR="91440" marT="45720" marB="45720" anchor="ctr">
@@ -20257,7 +21905,10 @@
                       <a:pPr algn="l" indent="0" marL="0">
                         <a:buNone/>
                       </a:pPr>
-                      <a:endParaRPr lang="en-US" sz="1200" dirty="0"/>
+                      <a:endParaRPr lang="ko-KR" sz="1200" dirty="0">
+                        <a:latin typeface="Noto Sans KR"/>
+                        <a:ea typeface="Noto Sans KR"/>
+                      </a:endParaRPr>
                     </a:p>
                   </a:txBody>
                   <a:tcPr marL="91440" marR="91440" marT="45720" marB="45720" anchor="ctr">
@@ -20307,7 +21958,10 @@
                       <a:pPr algn="l" indent="0" marL="0">
                         <a:buNone/>
                       </a:pPr>
-                      <a:endParaRPr lang="en-US" sz="1200" dirty="0"/>
+                      <a:endParaRPr lang="ko-KR" sz="1200" dirty="0">
+                        <a:latin typeface="Noto Sans KR"/>
+                        <a:ea typeface="Noto Sans KR"/>
+                      </a:endParaRPr>
                     </a:p>
                   </a:txBody>
                   <a:tcPr marL="91440" marR="91440" marT="45720" marB="45720" anchor="ctr">
@@ -20357,7 +22011,10 @@
                       <a:pPr algn="l" indent="0" marL="0">
                         <a:buNone/>
                       </a:pPr>
-                      <a:endParaRPr lang="en-US" sz="1200" dirty="0"/>
+                      <a:endParaRPr lang="ko-KR" sz="1200" dirty="0">
+                        <a:latin typeface="Noto Sans KR"/>
+                        <a:ea typeface="Noto Sans KR"/>
+                      </a:endParaRPr>
                     </a:p>
                   </a:txBody>
                   <a:tcPr marL="91440" marR="91440" marT="45720" marB="45720" anchor="ctr">
@@ -20407,7 +22064,10 @@
                       <a:pPr algn="l" indent="0" marL="0">
                         <a:buNone/>
                       </a:pPr>
-                      <a:endParaRPr lang="en-US" sz="1200" dirty="0"/>
+                      <a:endParaRPr lang="ko-KR" sz="1200" dirty="0">
+                        <a:latin typeface="Noto Sans KR"/>
+                        <a:ea typeface="Noto Sans KR"/>
+                      </a:endParaRPr>
                     </a:p>
                   </a:txBody>
                   <a:tcPr marL="91440" marR="91440" marT="45720" marB="45720" anchor="ctr">
@@ -20457,7 +22117,10 @@
                       <a:pPr algn="l" indent="0" marL="0">
                         <a:buNone/>
                       </a:pPr>
-                      <a:endParaRPr lang="en-US" sz="1200" dirty="0"/>
+                      <a:endParaRPr lang="ko-KR" sz="1200" dirty="0">
+                        <a:latin typeface="Noto Sans KR"/>
+                        <a:ea typeface="Noto Sans KR"/>
+                      </a:endParaRPr>
                     </a:p>
                   </a:txBody>
                   <a:tcPr marL="91440" marR="91440" marT="45720" marB="45720" anchor="ctr">
@@ -20508,14 +22171,19 @@
                         <a:buNone/>
                       </a:pPr>
                       <a:r>
-                        <a:rPr lang="en-US" sz="1200" dirty="0">
+                        <a:rPr lang="ko-KR" sz="1200" dirty="0">
                           <a:solidFill>
                             <a:srgbClr val="1A2230"/>
                           </a:solidFill>
+                          <a:latin typeface="Noto Sans KR"/>
+                          <a:ea typeface="Noto Sans KR"/>
                         </a:rPr>
                         <a:t>원본 (Before)</a:t>
                       </a:r>
-                      <a:endParaRPr lang="en-US" sz="1200" dirty="0"/>
+                      <a:endParaRPr lang="ko-KR" sz="1200" dirty="0">
+                        <a:latin typeface="Noto Sans KR"/>
+                        <a:ea typeface="Noto Sans KR"/>
+                      </a:endParaRPr>
                     </a:p>
                   </a:txBody>
                   <a:tcPr marL="91440" marR="91440" marT="45720" marB="45720" anchor="ctr">
@@ -20568,14 +22236,19 @@
                         <a:buNone/>
                       </a:pPr>
                       <a:r>
-                        <a:rPr lang="en-US" sz="1200" dirty="0">
+                        <a:rPr lang="ko-KR" sz="1200" dirty="0">
                           <a:solidFill>
                             <a:srgbClr val="1A2230"/>
                           </a:solidFill>
+                          <a:latin typeface="Noto Sans KR"/>
+                          <a:ea typeface="Noto Sans KR"/>
                         </a:rPr>
                         <a:t>+RAG</a:t>
                       </a:r>
-                      <a:endParaRPr lang="en-US" sz="1200" dirty="0"/>
+                      <a:endParaRPr lang="ko-KR" sz="1200" dirty="0">
+                        <a:latin typeface="Noto Sans KR"/>
+                        <a:ea typeface="Noto Sans KR"/>
+                      </a:endParaRPr>
                     </a:p>
                   </a:txBody>
                   <a:tcPr marL="91440" marR="91440" marT="45720" marB="45720" anchor="ctr">
@@ -20626,14 +22299,19 @@
                         <a:buNone/>
                       </a:pPr>
                       <a:r>
-                        <a:rPr lang="en-US" sz="1200" dirty="0">
+                        <a:rPr lang="ko-KR" sz="1200" dirty="0">
                           <a:solidFill>
                             <a:srgbClr val="1A2230"/>
                           </a:solidFill>
+                          <a:latin typeface="Noto Sans KR"/>
+                          <a:ea typeface="Noto Sans KR"/>
                         </a:rPr>
                         <a:t>O</a:t>
                       </a:r>
-                      <a:endParaRPr lang="en-US" sz="1200" dirty="0"/>
+                      <a:endParaRPr lang="ko-KR" sz="1200" dirty="0">
+                        <a:latin typeface="Noto Sans KR"/>
+                        <a:ea typeface="Noto Sans KR"/>
+                      </a:endParaRPr>
                     </a:p>
                   </a:txBody>
                   <a:tcPr marL="91440" marR="91440" marT="45720" marB="45720" anchor="ctr">
@@ -20683,7 +22361,10 @@
                       <a:pPr algn="l" indent="0" marL="0">
                         <a:buNone/>
                       </a:pPr>
-                      <a:endParaRPr lang="en-US" sz="1200" dirty="0"/>
+                      <a:endParaRPr lang="ko-KR" sz="1200" dirty="0">
+                        <a:latin typeface="Noto Sans KR"/>
+                        <a:ea typeface="Noto Sans KR"/>
+                      </a:endParaRPr>
                     </a:p>
                   </a:txBody>
                   <a:tcPr marL="91440" marR="91440" marT="45720" marB="45720" anchor="ctr">
@@ -20733,7 +22414,10 @@
                       <a:pPr algn="l" indent="0" marL="0">
                         <a:buNone/>
                       </a:pPr>
-                      <a:endParaRPr lang="en-US" sz="1200" dirty="0"/>
+                      <a:endParaRPr lang="ko-KR" sz="1200" dirty="0">
+                        <a:latin typeface="Noto Sans KR"/>
+                        <a:ea typeface="Noto Sans KR"/>
+                      </a:endParaRPr>
                     </a:p>
                   </a:txBody>
                   <a:tcPr marL="91440" marR="91440" marT="45720" marB="45720" anchor="ctr">
@@ -20783,7 +22467,10 @@
                       <a:pPr algn="l" indent="0" marL="0">
                         <a:buNone/>
                       </a:pPr>
-                      <a:endParaRPr lang="en-US" sz="1200" dirty="0"/>
+                      <a:endParaRPr lang="ko-KR" sz="1200" dirty="0">
+                        <a:latin typeface="Noto Sans KR"/>
+                        <a:ea typeface="Noto Sans KR"/>
+                      </a:endParaRPr>
                     </a:p>
                   </a:txBody>
                   <a:tcPr marL="91440" marR="91440" marT="45720" marB="45720" anchor="ctr">
@@ -20833,7 +22520,10 @@
                       <a:pPr algn="l" indent="0" marL="0">
                         <a:buNone/>
                       </a:pPr>
-                      <a:endParaRPr lang="en-US" sz="1200" dirty="0"/>
+                      <a:endParaRPr lang="ko-KR" sz="1200" dirty="0">
+                        <a:latin typeface="Noto Sans KR"/>
+                        <a:ea typeface="Noto Sans KR"/>
+                      </a:endParaRPr>
                     </a:p>
                   </a:txBody>
                   <a:tcPr marL="91440" marR="91440" marT="45720" marB="45720" anchor="ctr">
@@ -20884,14 +22574,19 @@
                         <a:buNone/>
                       </a:pPr>
                       <a:r>
-                        <a:rPr lang="en-US" sz="1200" dirty="0">
+                        <a:rPr lang="ko-KR" sz="1200" dirty="0">
                           <a:solidFill>
                             <a:srgbClr val="1A2230"/>
                           </a:solidFill>
+                          <a:latin typeface="Noto Sans KR"/>
+                          <a:ea typeface="Noto Sans KR"/>
                         </a:rPr>
                         <a:t>RAG 단독</a:t>
                       </a:r>
-                      <a:endParaRPr lang="en-US" sz="1200" dirty="0"/>
+                      <a:endParaRPr lang="ko-KR" sz="1200" dirty="0">
+                        <a:latin typeface="Noto Sans KR"/>
+                        <a:ea typeface="Noto Sans KR"/>
+                      </a:endParaRPr>
                     </a:p>
                   </a:txBody>
                   <a:tcPr marL="91440" marR="91440" marT="45720" marB="45720" anchor="ctr">
@@ -20944,14 +22639,19 @@
                         <a:buNone/>
                       </a:pPr>
                       <a:r>
-                        <a:rPr lang="en-US" sz="1200" dirty="0">
+                        <a:rPr lang="ko-KR" sz="1200" dirty="0">
                           <a:solidFill>
                             <a:srgbClr val="1A2230"/>
                           </a:solidFill>
+                          <a:latin typeface="Noto Sans KR"/>
+                          <a:ea typeface="Noto Sans KR"/>
                         </a:rPr>
                         <a:t>+Judge만</a:t>
                       </a:r>
-                      <a:endParaRPr lang="en-US" sz="1200" dirty="0"/>
+                      <a:endParaRPr lang="ko-KR" sz="1200" dirty="0">
+                        <a:latin typeface="Noto Sans KR"/>
+                        <a:ea typeface="Noto Sans KR"/>
+                      </a:endParaRPr>
                     </a:p>
                   </a:txBody>
                   <a:tcPr marL="91440" marR="91440" marT="45720" marB="45720" anchor="ctr">
@@ -21001,7 +22701,10 @@
                       <a:pPr algn="l" indent="0" marL="0">
                         <a:buNone/>
                       </a:pPr>
-                      <a:endParaRPr lang="en-US" sz="1200" dirty="0"/>
+                      <a:endParaRPr lang="ko-KR" sz="1200" dirty="0">
+                        <a:latin typeface="Noto Sans KR"/>
+                        <a:ea typeface="Noto Sans KR"/>
+                      </a:endParaRPr>
                     </a:p>
                   </a:txBody>
                   <a:tcPr marL="91440" marR="91440" marT="45720" marB="45720" anchor="ctr">
@@ -21052,14 +22755,19 @@
                         <a:buNone/>
                       </a:pPr>
                       <a:r>
-                        <a:rPr lang="en-US" sz="1200" dirty="0">
+                        <a:rPr lang="ko-KR" sz="1200" dirty="0">
                           <a:solidFill>
                             <a:srgbClr val="1A2230"/>
                           </a:solidFill>
+                          <a:latin typeface="Noto Sans KR"/>
+                          <a:ea typeface="Noto Sans KR"/>
                         </a:rPr>
                         <a:t>O</a:t>
                       </a:r>
-                      <a:endParaRPr lang="en-US" sz="1200" dirty="0"/>
+                      <a:endParaRPr lang="ko-KR" sz="1200" dirty="0">
+                        <a:latin typeface="Noto Sans KR"/>
+                        <a:ea typeface="Noto Sans KR"/>
+                      </a:endParaRPr>
                     </a:p>
                   </a:txBody>
                   <a:tcPr marL="91440" marR="91440" marT="45720" marB="45720" anchor="ctr">
@@ -21109,7 +22817,10 @@
                       <a:pPr algn="l" indent="0" marL="0">
                         <a:buNone/>
                       </a:pPr>
-                      <a:endParaRPr lang="en-US" sz="1200" dirty="0"/>
+                      <a:endParaRPr lang="ko-KR" sz="1200" dirty="0">
+                        <a:latin typeface="Noto Sans KR"/>
+                        <a:ea typeface="Noto Sans KR"/>
+                      </a:endParaRPr>
                     </a:p>
                   </a:txBody>
                   <a:tcPr marL="91440" marR="91440" marT="45720" marB="45720" anchor="ctr">
@@ -21159,7 +22870,10 @@
                       <a:pPr algn="l" indent="0" marL="0">
                         <a:buNone/>
                       </a:pPr>
-                      <a:endParaRPr lang="en-US" sz="1200" dirty="0"/>
+                      <a:endParaRPr lang="ko-KR" sz="1200" dirty="0">
+                        <a:latin typeface="Noto Sans KR"/>
+                        <a:ea typeface="Noto Sans KR"/>
+                      </a:endParaRPr>
                     </a:p>
                   </a:txBody>
                   <a:tcPr marL="91440" marR="91440" marT="45720" marB="45720" anchor="ctr">
@@ -21209,7 +22923,10 @@
                       <a:pPr algn="l" indent="0" marL="0">
                         <a:buNone/>
                       </a:pPr>
-                      <a:endParaRPr lang="en-US" sz="1200" dirty="0"/>
+                      <a:endParaRPr lang="ko-KR" sz="1200" dirty="0">
+                        <a:latin typeface="Noto Sans KR"/>
+                        <a:ea typeface="Noto Sans KR"/>
+                      </a:endParaRPr>
                     </a:p>
                   </a:txBody>
                   <a:tcPr marL="91440" marR="91440" marT="45720" marB="45720" anchor="ctr">
@@ -21260,14 +22977,19 @@
                         <a:buNone/>
                       </a:pPr>
                       <a:r>
-                        <a:rPr lang="en-US" sz="1200" dirty="0">
+                        <a:rPr lang="ko-KR" sz="1200" dirty="0">
                           <a:solidFill>
                             <a:srgbClr val="1A2230"/>
                           </a:solidFill>
+                          <a:latin typeface="Noto Sans KR"/>
+                          <a:ea typeface="Noto Sans KR"/>
                         </a:rPr>
                         <a:t>Judge 단독</a:t>
                       </a:r>
-                      <a:endParaRPr lang="en-US" sz="1200" dirty="0"/>
+                      <a:endParaRPr lang="ko-KR" sz="1200" dirty="0">
+                        <a:latin typeface="Noto Sans KR"/>
+                        <a:ea typeface="Noto Sans KR"/>
+                      </a:endParaRPr>
                     </a:p>
                   </a:txBody>
                   <a:tcPr marL="91440" marR="91440" marT="45720" marB="45720" anchor="ctr">
@@ -21320,14 +23042,19 @@
                         <a:buNone/>
                       </a:pPr>
                       <a:r>
-                        <a:rPr lang="en-US" sz="1200" dirty="0">
+                        <a:rPr lang="ko-KR" sz="1200" dirty="0">
                           <a:solidFill>
                             <a:srgbClr val="1A2230"/>
                           </a:solidFill>
+                          <a:latin typeface="Noto Sans KR"/>
+                          <a:ea typeface="Noto Sans KR"/>
                         </a:rPr>
                         <a:t>RAG+Judge</a:t>
                       </a:r>
-                      <a:endParaRPr lang="en-US" sz="1200" dirty="0"/>
+                      <a:endParaRPr lang="ko-KR" sz="1200" dirty="0">
+                        <a:latin typeface="Noto Sans KR"/>
+                        <a:ea typeface="Noto Sans KR"/>
+                      </a:endParaRPr>
                     </a:p>
                   </a:txBody>
                   <a:tcPr marL="91440" marR="91440" marT="45720" marB="45720" anchor="ctr">
@@ -21378,14 +23105,19 @@
                         <a:buNone/>
                       </a:pPr>
                       <a:r>
-                        <a:rPr lang="en-US" sz="1200" dirty="0">
+                        <a:rPr lang="ko-KR" sz="1200" dirty="0">
                           <a:solidFill>
                             <a:srgbClr val="1A2230"/>
                           </a:solidFill>
+                          <a:latin typeface="Noto Sans KR"/>
+                          <a:ea typeface="Noto Sans KR"/>
                         </a:rPr>
                         <a:t>O</a:t>
                       </a:r>
-                      <a:endParaRPr lang="en-US" sz="1200" dirty="0"/>
+                      <a:endParaRPr lang="ko-KR" sz="1200" dirty="0">
+                        <a:latin typeface="Noto Sans KR"/>
+                        <a:ea typeface="Noto Sans KR"/>
+                      </a:endParaRPr>
                     </a:p>
                   </a:txBody>
                   <a:tcPr marL="91440" marR="91440" marT="45720" marB="45720" anchor="ctr">
@@ -21436,14 +23168,19 @@
                         <a:buNone/>
                       </a:pPr>
                       <a:r>
-                        <a:rPr lang="en-US" sz="1200" dirty="0">
+                        <a:rPr lang="ko-KR" sz="1200" dirty="0">
                           <a:solidFill>
                             <a:srgbClr val="1A2230"/>
                           </a:solidFill>
+                          <a:latin typeface="Noto Sans KR"/>
+                          <a:ea typeface="Noto Sans KR"/>
                         </a:rPr>
                         <a:t>O</a:t>
                       </a:r>
-                      <a:endParaRPr lang="en-US" sz="1200" dirty="0"/>
+                      <a:endParaRPr lang="ko-KR" sz="1200" dirty="0">
+                        <a:latin typeface="Noto Sans KR"/>
+                        <a:ea typeface="Noto Sans KR"/>
+                      </a:endParaRPr>
                     </a:p>
                   </a:txBody>
                   <a:tcPr marL="91440" marR="91440" marT="45720" marB="45720" anchor="ctr">
@@ -21493,7 +23230,10 @@
                       <a:pPr algn="l" indent="0" marL="0">
                         <a:buNone/>
                       </a:pPr>
-                      <a:endParaRPr lang="en-US" sz="1200" dirty="0"/>
+                      <a:endParaRPr lang="ko-KR" sz="1200" dirty="0">
+                        <a:latin typeface="Noto Sans KR"/>
+                        <a:ea typeface="Noto Sans KR"/>
+                      </a:endParaRPr>
                     </a:p>
                   </a:txBody>
                   <a:tcPr marL="91440" marR="91440" marT="45720" marB="45720" anchor="ctr">
@@ -21543,7 +23283,10 @@
                       <a:pPr algn="l" indent="0" marL="0">
                         <a:buNone/>
                       </a:pPr>
-                      <a:endParaRPr lang="en-US" sz="1200" dirty="0"/>
+                      <a:endParaRPr lang="ko-KR" sz="1200" dirty="0">
+                        <a:latin typeface="Noto Sans KR"/>
+                        <a:ea typeface="Noto Sans KR"/>
+                      </a:endParaRPr>
                     </a:p>
                   </a:txBody>
                   <a:tcPr marL="91440" marR="91440" marT="45720" marB="45720" anchor="ctr">
@@ -21593,7 +23336,10 @@
                       <a:pPr algn="l" indent="0" marL="0">
                         <a:buNone/>
                       </a:pPr>
-                      <a:endParaRPr lang="en-US" sz="1200" dirty="0"/>
+                      <a:endParaRPr lang="ko-KR" sz="1200" dirty="0">
+                        <a:latin typeface="Noto Sans KR"/>
+                        <a:ea typeface="Noto Sans KR"/>
+                      </a:endParaRPr>
                     </a:p>
                   </a:txBody>
                   <a:tcPr marL="91440" marR="91440" marT="45720" marB="45720" anchor="ctr">
@@ -21644,14 +23390,19 @@
                         <a:buNone/>
                       </a:pPr>
                       <a:r>
-                        <a:rPr lang="en-US" sz="1200" dirty="0">
+                        <a:rPr lang="ko-KR" sz="1200" dirty="0">
                           <a:solidFill>
                             <a:srgbClr val="1A2230"/>
                           </a:solidFill>
+                          <a:latin typeface="Noto Sans KR"/>
+                          <a:ea typeface="Noto Sans KR"/>
                         </a:rPr>
                         <a:t>RAG 위 Judge</a:t>
                       </a:r>
-                      <a:endParaRPr lang="en-US" sz="1200" dirty="0"/>
+                      <a:endParaRPr lang="ko-KR" sz="1200" dirty="0">
+                        <a:latin typeface="Noto Sans KR"/>
+                        <a:ea typeface="Noto Sans KR"/>
+                      </a:endParaRPr>
                     </a:p>
                   </a:txBody>
                   <a:tcPr marL="91440" marR="91440" marT="45720" marB="45720" anchor="ctr">
@@ -21704,14 +23455,19 @@
                         <a:buNone/>
                       </a:pPr>
                       <a:r>
-                        <a:rPr lang="en-US" sz="1200" dirty="0">
+                        <a:rPr lang="ko-KR" sz="1200" dirty="0">
                           <a:solidFill>
                             <a:srgbClr val="1A2230"/>
                           </a:solidFill>
+                          <a:latin typeface="Noto Sans KR"/>
+                          <a:ea typeface="Noto Sans KR"/>
                         </a:rPr>
                         <a:t>+비용</a:t>
                       </a:r>
-                      <a:endParaRPr lang="en-US" sz="1200" dirty="0"/>
+                      <a:endParaRPr lang="ko-KR" sz="1200" dirty="0">
+                        <a:latin typeface="Noto Sans KR"/>
+                        <a:ea typeface="Noto Sans KR"/>
+                      </a:endParaRPr>
                     </a:p>
                   </a:txBody>
                   <a:tcPr marL="91440" marR="91440" marT="45720" marB="45720" anchor="ctr">
@@ -21762,14 +23518,19 @@
                         <a:buNone/>
                       </a:pPr>
                       <a:r>
-                        <a:rPr lang="en-US" sz="1200" dirty="0">
+                        <a:rPr lang="ko-KR" sz="1200" dirty="0">
                           <a:solidFill>
                             <a:srgbClr val="1A2230"/>
                           </a:solidFill>
+                          <a:latin typeface="Noto Sans KR"/>
+                          <a:ea typeface="Noto Sans KR"/>
                         </a:rPr>
                         <a:t>O</a:t>
                       </a:r>
-                      <a:endParaRPr lang="en-US" sz="1200" dirty="0"/>
+                      <a:endParaRPr lang="ko-KR" sz="1200" dirty="0">
+                        <a:latin typeface="Noto Sans KR"/>
+                        <a:ea typeface="Noto Sans KR"/>
+                      </a:endParaRPr>
                     </a:p>
                   </a:txBody>
                   <a:tcPr marL="91440" marR="91440" marT="45720" marB="45720" anchor="ctr">
@@ -21820,14 +23581,19 @@
                         <a:buNone/>
                       </a:pPr>
                       <a:r>
-                        <a:rPr lang="en-US" sz="1200" dirty="0">
+                        <a:rPr lang="ko-KR" sz="1200" dirty="0">
                           <a:solidFill>
                             <a:srgbClr val="1A2230"/>
                           </a:solidFill>
+                          <a:latin typeface="Noto Sans KR"/>
+                          <a:ea typeface="Noto Sans KR"/>
                         </a:rPr>
                         <a:t>O</a:t>
                       </a:r>
-                      <a:endParaRPr lang="en-US" sz="1200" dirty="0"/>
+                      <a:endParaRPr lang="ko-KR" sz="1200" dirty="0">
+                        <a:latin typeface="Noto Sans KR"/>
+                        <a:ea typeface="Noto Sans KR"/>
+                      </a:endParaRPr>
                     </a:p>
                   </a:txBody>
                   <a:tcPr marL="91440" marR="91440" marT="45720" marB="45720" anchor="ctr">
@@ -21878,14 +23644,19 @@
                         <a:buNone/>
                       </a:pPr>
                       <a:r>
-                        <a:rPr lang="en-US" sz="1200" dirty="0">
+                        <a:rPr lang="ko-KR" sz="1200" dirty="0">
                           <a:solidFill>
                             <a:srgbClr val="1A2230"/>
                           </a:solidFill>
+                          <a:latin typeface="Noto Sans KR"/>
+                          <a:ea typeface="Noto Sans KR"/>
                         </a:rPr>
                         <a:t>O</a:t>
                       </a:r>
-                      <a:endParaRPr lang="en-US" sz="1200" dirty="0"/>
+                      <a:endParaRPr lang="ko-KR" sz="1200" dirty="0">
+                        <a:latin typeface="Noto Sans KR"/>
+                        <a:ea typeface="Noto Sans KR"/>
+                      </a:endParaRPr>
                     </a:p>
                   </a:txBody>
                   <a:tcPr marL="91440" marR="91440" marT="45720" marB="45720" anchor="ctr">
@@ -21935,7 +23706,10 @@
                       <a:pPr algn="l" indent="0" marL="0">
                         <a:buNone/>
                       </a:pPr>
-                      <a:endParaRPr lang="en-US" sz="1200" dirty="0"/>
+                      <a:endParaRPr lang="ko-KR" sz="1200" dirty="0">
+                        <a:latin typeface="Noto Sans KR"/>
+                        <a:ea typeface="Noto Sans KR"/>
+                      </a:endParaRPr>
                     </a:p>
                   </a:txBody>
                   <a:tcPr marL="91440" marR="91440" marT="45720" marB="45720" anchor="ctr">
@@ -21985,7 +23759,10 @@
                       <a:pPr algn="l" indent="0" marL="0">
                         <a:buNone/>
                       </a:pPr>
-                      <a:endParaRPr lang="en-US" sz="1200" dirty="0"/>
+                      <a:endParaRPr lang="ko-KR" sz="1200" dirty="0">
+                        <a:latin typeface="Noto Sans KR"/>
+                        <a:ea typeface="Noto Sans KR"/>
+                      </a:endParaRPr>
                     </a:p>
                   </a:txBody>
                   <a:tcPr marL="91440" marR="91440" marT="45720" marB="45720" anchor="ctr">
@@ -22036,14 +23813,19 @@
                         <a:buNone/>
                       </a:pPr>
                       <a:r>
-                        <a:rPr lang="en-US" sz="1200" dirty="0">
+                        <a:rPr lang="ko-KR" sz="1200" dirty="0">
                           <a:solidFill>
                             <a:srgbClr val="1A2230"/>
                           </a:solidFill>
+                          <a:latin typeface="Noto Sans KR"/>
+                          <a:ea typeface="Noto Sans KR"/>
                         </a:rPr>
                         <a:t>절감의 품질 대가</a:t>
                       </a:r>
-                      <a:endParaRPr lang="en-US" sz="1200" dirty="0"/>
+                      <a:endParaRPr lang="ko-KR" sz="1200" dirty="0">
+                        <a:latin typeface="Noto Sans KR"/>
+                        <a:ea typeface="Noto Sans KR"/>
+                      </a:endParaRPr>
                     </a:p>
                   </a:txBody>
                   <a:tcPr marL="91440" marR="91440" marT="45720" marB="45720" anchor="ctr">
@@ -22096,14 +23878,19 @@
                         <a:buNone/>
                       </a:pPr>
                       <a:r>
-                        <a:rPr lang="en-US" sz="1200" dirty="0">
+                        <a:rPr lang="ko-KR" sz="1200" dirty="0">
                           <a:solidFill>
                             <a:srgbClr val="1A2230"/>
                           </a:solidFill>
+                          <a:latin typeface="Noto Sans KR"/>
+                          <a:ea typeface="Noto Sans KR"/>
                         </a:rPr>
                         <a:t>+v2 보완</a:t>
                       </a:r>
-                      <a:endParaRPr lang="en-US" sz="1200" dirty="0"/>
+                      <a:endParaRPr lang="ko-KR" sz="1200" dirty="0">
+                        <a:latin typeface="Noto Sans KR"/>
+                        <a:ea typeface="Noto Sans KR"/>
+                      </a:endParaRPr>
                     </a:p>
                   </a:txBody>
                   <a:tcPr marL="91440" marR="91440" marT="45720" marB="45720" anchor="ctr">
@@ -22154,14 +23941,19 @@
                         <a:buNone/>
                       </a:pPr>
                       <a:r>
-                        <a:rPr lang="en-US" sz="1200" dirty="0">
+                        <a:rPr lang="ko-KR" sz="1200" dirty="0">
                           <a:solidFill>
                             <a:srgbClr val="1A2230"/>
                           </a:solidFill>
+                          <a:latin typeface="Noto Sans KR"/>
+                          <a:ea typeface="Noto Sans KR"/>
                         </a:rPr>
                         <a:t>O</a:t>
                       </a:r>
-                      <a:endParaRPr lang="en-US" sz="1200" dirty="0"/>
+                      <a:endParaRPr lang="ko-KR" sz="1200" dirty="0">
+                        <a:latin typeface="Noto Sans KR"/>
+                        <a:ea typeface="Noto Sans KR"/>
+                      </a:endParaRPr>
                     </a:p>
                   </a:txBody>
                   <a:tcPr marL="91440" marR="91440" marT="45720" marB="45720" anchor="ctr">
@@ -22212,14 +24004,19 @@
                         <a:buNone/>
                       </a:pPr>
                       <a:r>
-                        <a:rPr lang="en-US" sz="1200" dirty="0">
+                        <a:rPr lang="ko-KR" sz="1200" dirty="0">
                           <a:solidFill>
                             <a:srgbClr val="1A2230"/>
                           </a:solidFill>
+                          <a:latin typeface="Noto Sans KR"/>
+                          <a:ea typeface="Noto Sans KR"/>
                         </a:rPr>
                         <a:t>O</a:t>
                       </a:r>
-                      <a:endParaRPr lang="en-US" sz="1200" dirty="0"/>
+                      <a:endParaRPr lang="ko-KR" sz="1200" dirty="0">
+                        <a:latin typeface="Noto Sans KR"/>
+                        <a:ea typeface="Noto Sans KR"/>
+                      </a:endParaRPr>
                     </a:p>
                   </a:txBody>
                   <a:tcPr marL="91440" marR="91440" marT="45720" marB="45720" anchor="ctr">
@@ -22269,7 +24066,10 @@
                       <a:pPr algn="l" indent="0" marL="0">
                         <a:buNone/>
                       </a:pPr>
-                      <a:endParaRPr lang="en-US" sz="1200" dirty="0"/>
+                      <a:endParaRPr lang="ko-KR" sz="1200" dirty="0">
+                        <a:latin typeface="Noto Sans KR"/>
+                        <a:ea typeface="Noto Sans KR"/>
+                      </a:endParaRPr>
                     </a:p>
                   </a:txBody>
                   <a:tcPr marL="91440" marR="91440" marT="45720" marB="45720" anchor="ctr">
@@ -22320,14 +24120,19 @@
                         <a:buNone/>
                       </a:pPr>
                       <a:r>
-                        <a:rPr lang="en-US" sz="1200" dirty="0">
+                        <a:rPr lang="ko-KR" sz="1200" dirty="0">
                           <a:solidFill>
                             <a:srgbClr val="1A2230"/>
                           </a:solidFill>
+                          <a:latin typeface="Noto Sans KR"/>
+                          <a:ea typeface="Noto Sans KR"/>
                         </a:rPr>
                         <a:t>O</a:t>
                       </a:r>
-                      <a:endParaRPr lang="en-US" sz="1200" dirty="0"/>
+                      <a:endParaRPr lang="ko-KR" sz="1200" dirty="0">
+                        <a:latin typeface="Noto Sans KR"/>
+                        <a:ea typeface="Noto Sans KR"/>
+                      </a:endParaRPr>
                     </a:p>
                   </a:txBody>
                   <a:tcPr marL="91440" marR="91440" marT="45720" marB="45720" anchor="ctr">
@@ -22377,7 +24182,10 @@
                       <a:pPr algn="l" indent="0" marL="0">
                         <a:buNone/>
                       </a:pPr>
-                      <a:endParaRPr lang="en-US" sz="1200" dirty="0"/>
+                      <a:endParaRPr lang="ko-KR" sz="1200" dirty="0">
+                        <a:latin typeface="Noto Sans KR"/>
+                        <a:ea typeface="Noto Sans KR"/>
+                      </a:endParaRPr>
                     </a:p>
                   </a:txBody>
                   <a:tcPr marL="91440" marR="91440" marT="45720" marB="45720" anchor="ctr">
@@ -22428,14 +24236,19 @@
                         <a:buNone/>
                       </a:pPr>
                       <a:r>
-                        <a:rPr lang="en-US" sz="1200" dirty="0">
+                        <a:rPr lang="ko-KR" sz="1200" dirty="0">
                           <a:solidFill>
                             <a:srgbClr val="1A2230"/>
                           </a:solidFill>
+                          <a:latin typeface="Noto Sans KR"/>
+                          <a:ea typeface="Noto Sans KR"/>
                         </a:rPr>
                         <a:t>약점 보완 효과</a:t>
                       </a:r>
-                      <a:endParaRPr lang="en-US" sz="1200" dirty="0"/>
+                      <a:endParaRPr lang="ko-KR" sz="1200" dirty="0">
+                        <a:latin typeface="Noto Sans KR"/>
+                        <a:ea typeface="Noto Sans KR"/>
+                      </a:endParaRPr>
                     </a:p>
                   </a:txBody>
                   <a:tcPr marL="91440" marR="91440" marT="45720" marB="45720" anchor="ctr">
@@ -22488,14 +24301,19 @@
                         <a:buNone/>
                       </a:pPr>
                       <a:r>
-                        <a:rPr lang="en-US" sz="1200" dirty="0">
+                        <a:rPr lang="ko-KR" sz="1200" dirty="0">
                           <a:solidFill>
                             <a:srgbClr val="1A2230"/>
                           </a:solidFill>
+                          <a:latin typeface="Noto Sans KR"/>
+                          <a:ea typeface="Noto Sans KR"/>
                         </a:rPr>
                         <a:t>final</a:t>
                       </a:r>
-                      <a:endParaRPr lang="en-US" sz="1200" dirty="0"/>
+                      <a:endParaRPr lang="ko-KR" sz="1200" dirty="0">
+                        <a:latin typeface="Noto Sans KR"/>
+                        <a:ea typeface="Noto Sans KR"/>
+                      </a:endParaRPr>
                     </a:p>
                   </a:txBody>
                   <a:tcPr marL="91440" marR="91440" marT="45720" marB="45720" anchor="ctr">
@@ -22546,14 +24364,19 @@
                         <a:buNone/>
                       </a:pPr>
                       <a:r>
-                        <a:rPr lang="en-US" sz="1200" dirty="0">
+                        <a:rPr lang="ko-KR" sz="1200" dirty="0">
                           <a:solidFill>
                             <a:srgbClr val="1A2230"/>
                           </a:solidFill>
+                          <a:latin typeface="Noto Sans KR"/>
+                          <a:ea typeface="Noto Sans KR"/>
                         </a:rPr>
                         <a:t>O</a:t>
                       </a:r>
-                      <a:endParaRPr lang="en-US" sz="1200" dirty="0"/>
+                      <a:endParaRPr lang="ko-KR" sz="1200" dirty="0">
+                        <a:latin typeface="Noto Sans KR"/>
+                        <a:ea typeface="Noto Sans KR"/>
+                      </a:endParaRPr>
                     </a:p>
                   </a:txBody>
                   <a:tcPr marL="91440" marR="91440" marT="45720" marB="45720" anchor="ctr">
@@ -22604,14 +24427,19 @@
                         <a:buNone/>
                       </a:pPr>
                       <a:r>
-                        <a:rPr lang="en-US" sz="1200" dirty="0">
+                        <a:rPr lang="ko-KR" sz="1200" dirty="0">
                           <a:solidFill>
                             <a:srgbClr val="1A2230"/>
                           </a:solidFill>
+                          <a:latin typeface="Noto Sans KR"/>
+                          <a:ea typeface="Noto Sans KR"/>
                         </a:rPr>
                         <a:t>O</a:t>
                       </a:r>
-                      <a:endParaRPr lang="en-US" sz="1200" dirty="0"/>
+                      <a:endParaRPr lang="ko-KR" sz="1200" dirty="0">
+                        <a:latin typeface="Noto Sans KR"/>
+                        <a:ea typeface="Noto Sans KR"/>
+                      </a:endParaRPr>
                     </a:p>
                   </a:txBody>
                   <a:tcPr marL="91440" marR="91440" marT="45720" marB="45720" anchor="ctr">
@@ -22662,14 +24490,19 @@
                         <a:buNone/>
                       </a:pPr>
                       <a:r>
-                        <a:rPr lang="en-US" sz="1200" dirty="0">
+                        <a:rPr lang="ko-KR" sz="1200" dirty="0">
                           <a:solidFill>
                             <a:srgbClr val="1A2230"/>
                           </a:solidFill>
+                          <a:latin typeface="Noto Sans KR"/>
+                          <a:ea typeface="Noto Sans KR"/>
                         </a:rPr>
                         <a:t>O</a:t>
                       </a:r>
-                      <a:endParaRPr lang="en-US" sz="1200" dirty="0"/>
+                      <a:endParaRPr lang="ko-KR" sz="1200" dirty="0">
+                        <a:latin typeface="Noto Sans KR"/>
+                        <a:ea typeface="Noto Sans KR"/>
+                      </a:endParaRPr>
                     </a:p>
                   </a:txBody>
                   <a:tcPr marL="91440" marR="91440" marT="45720" marB="45720" anchor="ctr">
@@ -22720,14 +24553,19 @@
                         <a:buNone/>
                       </a:pPr>
                       <a:r>
-                        <a:rPr lang="en-US" sz="1200" dirty="0">
+                        <a:rPr lang="ko-KR" sz="1200" dirty="0">
                           <a:solidFill>
                             <a:srgbClr val="1A2230"/>
                           </a:solidFill>
+                          <a:latin typeface="Noto Sans KR"/>
+                          <a:ea typeface="Noto Sans KR"/>
                         </a:rPr>
                         <a:t>O</a:t>
                       </a:r>
-                      <a:endParaRPr lang="en-US" sz="1200" dirty="0"/>
+                      <a:endParaRPr lang="ko-KR" sz="1200" dirty="0">
+                        <a:latin typeface="Noto Sans KR"/>
+                        <a:ea typeface="Noto Sans KR"/>
+                      </a:endParaRPr>
                     </a:p>
                   </a:txBody>
                   <a:tcPr marL="91440" marR="91440" marT="45720" marB="45720" anchor="ctr">
@@ -22778,14 +24616,19 @@
                         <a:buNone/>
                       </a:pPr>
                       <a:r>
-                        <a:rPr lang="en-US" sz="1200" dirty="0">
+                        <a:rPr lang="ko-KR" sz="1200" dirty="0">
                           <a:solidFill>
                             <a:srgbClr val="1A2230"/>
                           </a:solidFill>
+                          <a:latin typeface="Noto Sans KR"/>
+                          <a:ea typeface="Noto Sans KR"/>
                         </a:rPr>
                         <a:t>O</a:t>
                       </a:r>
-                      <a:endParaRPr lang="en-US" sz="1200" dirty="0"/>
+                      <a:endParaRPr lang="ko-KR" sz="1200" dirty="0">
+                        <a:latin typeface="Noto Sans KR"/>
+                        <a:ea typeface="Noto Sans KR"/>
+                      </a:endParaRPr>
                     </a:p>
                   </a:txBody>
                   <a:tcPr marL="91440" marR="91440" marT="45720" marB="45720" anchor="ctr">
@@ -22836,14 +24679,19 @@
                         <a:buNone/>
                       </a:pPr>
                       <a:r>
-                        <a:rPr lang="en-US" sz="1200" dirty="0">
+                        <a:rPr lang="ko-KR" sz="1200" dirty="0">
                           <a:solidFill>
                             <a:srgbClr val="1A2230"/>
                           </a:solidFill>
+                          <a:latin typeface="Noto Sans KR"/>
+                          <a:ea typeface="Noto Sans KR"/>
                         </a:rPr>
                         <a:t>최종 (After)</a:t>
                       </a:r>
-                      <a:endParaRPr lang="en-US" sz="1200" dirty="0"/>
+                      <a:endParaRPr lang="ko-KR" sz="1200" dirty="0">
+                        <a:latin typeface="Noto Sans KR"/>
+                        <a:ea typeface="Noto Sans KR"/>
+                      </a:endParaRPr>
                     </a:p>
                   </a:txBody>
                   <a:tcPr marL="91440" marR="91440" marT="45720" marB="45720" anchor="ctr">
@@ -22918,14 +24766,19 @@
               <a:buNone/>
             </a:pPr>
             <a:r>
-              <a:rPr lang="en-US" sz="1300" b="1" dirty="0">
+              <a:rPr lang="ko-KR" sz="1300" b="1" dirty="0">
                 <a:solidFill>
                   <a:schemeClr val="tx1"/>
                 </a:solidFill>
+                <a:latin typeface="Noto Sans KR"/>
+                <a:ea typeface="Noto Sans KR"/>
               </a:rPr>
               <a:t>v2 보완 = 1차 실측(24건)에서 찾은 약점</a:t>
             </a:r>
-            <a:endParaRPr lang="en-US" sz="1300" dirty="0"/>
+            <a:endParaRPr lang="ko-KR" sz="1300" dirty="0">
+              <a:latin typeface="Noto Sans KR"/>
+              <a:ea typeface="Noto Sans KR"/>
+            </a:endParaRPr>
           </a:p>
           <a:p>
             <a:pPr marL="342900" indent="-342900">
@@ -22936,14 +24789,19 @@
               <a:buChar char="•"/>
             </a:pPr>
             <a:r>
-              <a:rPr lang="en-US" sz="1300" dirty="0">
+              <a:rPr lang="ko-KR" sz="1300" dirty="0">
                 <a:solidFill>
                   <a:schemeClr val="tx1"/>
                 </a:solidFill>
+                <a:latin typeface="Noto Sans KR"/>
+                <a:ea typeface="Noto Sans KR"/>
               </a:rPr>
               <a:t>RAG 최소 유사도: 맞는 런북이 없으면 넣지 않고 '없음'을 알림</a:t>
             </a:r>
-            <a:endParaRPr lang="en-US" sz="1300" dirty="0"/>
+            <a:endParaRPr lang="ko-KR" sz="1300" dirty="0">
+              <a:latin typeface="Noto Sans KR"/>
+              <a:ea typeface="Noto Sans KR"/>
+            </a:endParaRPr>
           </a:p>
           <a:p>
             <a:pPr marL="342900" indent="-342900">
@@ -22954,14 +24812,19 @@
               <a:buChar char="•"/>
             </a:pPr>
             <a:r>
-              <a:rPr lang="en-US" sz="1300" dirty="0">
+              <a:rPr lang="ko-KR" sz="1300" dirty="0">
                 <a:solidFill>
                   <a:schemeClr val="tx1"/>
                 </a:solidFill>
+                <a:latin typeface="Noto Sans KR"/>
+                <a:ea typeface="Noto Sans KR"/>
               </a:rPr>
               <a:t>Judge v2: 근거 밖 요구 금지, 고칠 수 없는 반려는 재작성 생략</a:t>
             </a:r>
-            <a:endParaRPr lang="en-US" sz="1300" dirty="0"/>
+            <a:endParaRPr lang="ko-KR" sz="1300" dirty="0">
+              <a:latin typeface="Noto Sans KR"/>
+              <a:ea typeface="Noto Sans KR"/>
+            </a:endParaRPr>
           </a:p>
           <a:p>
             <a:pPr marL="342900" indent="-342900">
@@ -22972,14 +24835,19 @@
               <a:buChar char="•"/>
             </a:pPr>
             <a:r>
-              <a:rPr lang="en-US" sz="1300" dirty="0">
+              <a:rPr lang="ko-KR" sz="1300" dirty="0">
                 <a:solidFill>
                   <a:schemeClr val="tx1"/>
                 </a:solidFill>
+                <a:latin typeface="Noto Sans KR"/>
+                <a:ea typeface="Noto Sans KR"/>
               </a:rPr>
               <a:t>수치 코드 검증: 근거에 없는 수치는 Judge 호출 전에 반려</a:t>
             </a:r>
-            <a:endParaRPr lang="en-US" sz="1300" dirty="0"/>
+            <a:endParaRPr lang="ko-KR" sz="1300" dirty="0">
+              <a:latin typeface="Noto Sans KR"/>
+              <a:ea typeface="Noto Sans KR"/>
+            </a:endParaRPr>
           </a:p>
           <a:p>
             <a:pPr indent="0" marL="0">
@@ -22989,14 +24857,19 @@
               <a:buNone/>
             </a:pPr>
             <a:r>
-              <a:rPr lang="en-US" sz="600" dirty="0">
+              <a:rPr lang="ko-KR" sz="600" dirty="0">
                 <a:solidFill>
                   <a:schemeClr val="tx1"/>
                 </a:solidFill>
+                <a:latin typeface="Noto Sans KR"/>
+                <a:ea typeface="Noto Sans KR"/>
               </a:rPr>
               <a:t> </a:t>
             </a:r>
-            <a:endParaRPr lang="en-US" sz="1300" dirty="0"/>
+            <a:endParaRPr lang="ko-KR" sz="1300" dirty="0">
+              <a:latin typeface="Noto Sans KR"/>
+              <a:ea typeface="Noto Sans KR"/>
+            </a:endParaRPr>
           </a:p>
           <a:p>
             <a:pPr indent="0" marL="0">
@@ -23006,14 +24879,19 @@
               <a:buNone/>
             </a:pPr>
             <a:r>
-              <a:rPr lang="en-US" sz="1300" b="1" dirty="0">
+              <a:rPr lang="ko-KR" sz="1300" b="1" dirty="0">
                 <a:solidFill>
                   <a:schemeClr val="tx1"/>
                 </a:solidFill>
+                <a:latin typeface="Noto Sans KR"/>
+                <a:ea typeface="Noto Sans KR"/>
               </a:rPr>
               <a:t>런타임</a:t>
             </a:r>
-            <a:endParaRPr lang="en-US" sz="1300" dirty="0"/>
+            <a:endParaRPr lang="ko-KR" sz="1300" dirty="0">
+              <a:latin typeface="Noto Sans KR"/>
+              <a:ea typeface="Noto Sans KR"/>
+            </a:endParaRPr>
           </a:p>
           <a:p>
             <a:pPr marL="342900" indent="-342900">
@@ -23024,14 +24902,19 @@
               <a:buChar char="•"/>
             </a:pPr>
             <a:r>
-              <a:rPr lang="en-US" sz="1300" dirty="0">
+              <a:rPr lang="ko-KR" sz="1300" dirty="0">
                 <a:solidFill>
                   <a:schemeClr val="tx1"/>
                 </a:solidFill>
+                <a:latin typeface="Noto Sans KR"/>
+                <a:ea typeface="Noto Sans KR"/>
               </a:rPr>
               <a:t>비동기 I/O: 동기 LLM 호출을 스레드로 빼 이벤트 루프 블로킹 제거</a:t>
             </a:r>
-            <a:endParaRPr lang="en-US" sz="1300" dirty="0"/>
+            <a:endParaRPr lang="ko-KR" sz="1300" dirty="0">
+              <a:latin typeface="Noto Sans KR"/>
+              <a:ea typeface="Noto Sans KR"/>
+            </a:endParaRPr>
           </a:p>
           <a:p>
             <a:pPr marL="342900" indent="-342900">
@@ -23042,14 +24925,19 @@
               <a:buChar char="•"/>
             </a:pPr>
             <a:r>
-              <a:rPr lang="en-US" sz="1300" dirty="0">
+              <a:rPr lang="ko-KR" sz="1300" dirty="0">
                 <a:solidFill>
                   <a:schemeClr val="tx1"/>
                 </a:solidFill>
+                <a:latin typeface="Noto Sans KR"/>
+                <a:ea typeface="Noto Sans KR"/>
               </a:rPr>
               <a:t>부분 실패 허용: 도구 하나가 죽어도 나머지 결과로 답함</a:t>
             </a:r>
-            <a:endParaRPr lang="en-US" sz="1300" dirty="0"/>
+            <a:endParaRPr lang="ko-KR" sz="1300" dirty="0">
+              <a:latin typeface="Noto Sans KR"/>
+              <a:ea typeface="Noto Sans KR"/>
+            </a:endParaRPr>
           </a:p>
         </p:txBody>
       </p:sp>
@@ -23078,14 +24966,19 @@
               <a:buNone/>
             </a:pPr>
             <a:r>
-              <a:rPr lang="en-US" sz="1050" dirty="0">
+              <a:rPr lang="ko-KR" sz="1050" dirty="0">
                 <a:solidFill>
                   <a:schemeClr val="accent3"/>
                 </a:solidFill>
+                <a:latin typeface="Noto Sans KR"/>
+                <a:ea typeface="Noto Sans KR"/>
               </a:rPr>
               <a:t>원본 src/agent 는 이식 커밋(55e15f1) 이후 변경 0. base 는 원본 build_graph 를 그대로 호출. 개선은 src/ext/ 에 플래그로.</a:t>
             </a:r>
-            <a:endParaRPr lang="en-US" sz="1050" dirty="0"/>
+            <a:endParaRPr lang="ko-KR" sz="1050" dirty="0">
+              <a:latin typeface="Noto Sans KR"/>
+              <a:ea typeface="Noto Sans KR"/>
+            </a:endParaRPr>
           </a:p>
         </p:txBody>
       </p:sp>
@@ -23121,16 +25014,24 @@
                 <a:solidFill>
                   <a:schemeClr val="accent3"/>
                 </a:solidFill>
+                <a:latin typeface="Noto Sans KR"/>
+                <a:ea typeface="Noto Sans KR"/>
               </a:defRPr>
             </a:lvl1pPr>
           </a:lstStyle>
           <a:p>
             <a:pPr algn="r"/>
             <a:fld id="{F7021451-1387-4CA6-816F-3879F97B5CBC}" type="slidenum">
-              <a:rPr b="0" lang="en-US"/>
+              <a:rPr b="0" lang="ko-KR">
+                <a:latin typeface="Noto Sans KR"/>
+                <a:ea typeface="Noto Sans KR"/>
+              </a:rPr>
               <a:t>8</a:t>
             </a:fld>
-            <a:endParaRPr lang="en-US"/>
+            <a:endParaRPr lang="ko-KR">
+              <a:latin typeface="Noto Sans KR"/>
+              <a:ea typeface="Noto Sans KR"/>
+            </a:endParaRPr>
           </a:p>
         </p:txBody>
       </p:sp>
@@ -23186,14 +25087,19 @@
               <a:buNone/>
             </a:pPr>
             <a:r>
-              <a:rPr lang="en-US" sz="2800" b="1" dirty="0">
+              <a:rPr lang="ko-KR" sz="2800" b="1" dirty="0">
                 <a:solidFill>
                   <a:schemeClr val="tx2"/>
                 </a:solidFill>
+                <a:latin typeface="Noto Sans KR"/>
+                <a:ea typeface="Noto Sans KR"/>
               </a:rPr>
               <a:t>평가: 조정에 쓰지 않은 질의로, 반복해서, 짝지어 비교했다</a:t>
             </a:r>
-            <a:endParaRPr lang="en-US" sz="2800" dirty="0"/>
+            <a:endParaRPr lang="ko-KR" sz="2800" dirty="0">
+              <a:latin typeface="Noto Sans KR"/>
+              <a:ea typeface="Noto Sans KR"/>
+            </a:endParaRPr>
           </a:p>
         </p:txBody>
       </p:sp>
@@ -23249,14 +25155,19 @@
               <a:buNone/>
             </a:pPr>
             <a:r>
-              <a:rPr lang="en-US" sz="1700" b="1" dirty="0">
+              <a:rPr lang="ko-KR" sz="1700" b="1" dirty="0">
                 <a:solidFill>
                   <a:schemeClr val="tx2"/>
                 </a:solidFill>
+                <a:latin typeface="Noto Sans KR"/>
+                <a:ea typeface="Noto Sans KR"/>
               </a:rPr>
               <a:t>평가셋 60건</a:t>
             </a:r>
-            <a:endParaRPr lang="en-US" sz="1700" dirty="0"/>
+            <a:endParaRPr lang="ko-KR" sz="1700" dirty="0">
+              <a:latin typeface="Noto Sans KR"/>
+              <a:ea typeface="Noto Sans KR"/>
+            </a:endParaRPr>
           </a:p>
         </p:txBody>
       </p:sp>
@@ -23285,42 +25196,57 @@
               <a:buNone/>
             </a:pPr>
             <a:r>
-              <a:rPr lang="en-US" sz="1350" dirty="0">
+              <a:rPr lang="ko-KR" sz="1350" dirty="0">
                 <a:solidFill>
                   <a:schemeClr val="tx1"/>
                 </a:solidFill>
+                <a:latin typeface="Noto Sans KR"/>
+                <a:ea typeface="Noto Sans KR"/>
               </a:rPr>
               <a:t>dev 24건: v2 기준값(RAG 최소 유사도) 조정에만 사용</a:t>
             </a:r>
-            <a:endParaRPr lang="en-US" sz="1350" dirty="0"/>
+            <a:endParaRPr lang="ko-KR" sz="1350" dirty="0">
+              <a:latin typeface="Noto Sans KR"/>
+              <a:ea typeface="Noto Sans KR"/>
+            </a:endParaRPr>
           </a:p>
           <a:p>
             <a:pPr indent="0" marL="0">
               <a:buNone/>
             </a:pPr>
             <a:r>
-              <a:rPr lang="en-US" sz="1350" dirty="0">
+              <a:rPr lang="ko-KR" sz="1350" dirty="0">
                 <a:solidFill>
                   <a:schemeClr val="tx1"/>
                 </a:solidFill>
+                <a:latin typeface="Noto Sans KR"/>
+                <a:ea typeface="Noto Sans KR"/>
               </a:rPr>
               <a:t>holdout 36건: v2 구현 전에 고정해 커밋, 최종 보고에만 사용</a:t>
             </a:r>
-            <a:endParaRPr lang="en-US" sz="1350" dirty="0"/>
+            <a:endParaRPr lang="ko-KR" sz="1350" dirty="0">
+              <a:latin typeface="Noto Sans KR"/>
+              <a:ea typeface="Noto Sans KR"/>
+            </a:endParaRPr>
           </a:p>
           <a:p>
             <a:pPr indent="0" marL="0">
               <a:buNone/>
             </a:pPr>
             <a:r>
-              <a:rPr lang="en-US" sz="1350" dirty="0">
+              <a:rPr lang="ko-KR" sz="1350" dirty="0">
                 <a:solidFill>
                   <a:schemeClr val="tx1"/>
                 </a:solidFill>
+                <a:latin typeface="Noto Sans KR"/>
+                <a:ea typeface="Noto Sans KR"/>
               </a:rPr>
               <a:t>정상 30 · 형식 제약 8 · 복합 8 · 미등록 7 · 모호 7</a:t>
             </a:r>
-            <a:endParaRPr lang="en-US" sz="1350" dirty="0"/>
+            <a:endParaRPr lang="ko-KR" sz="1350" dirty="0">
+              <a:latin typeface="Noto Sans KR"/>
+              <a:ea typeface="Noto Sans KR"/>
+            </a:endParaRPr>
           </a:p>
         </p:txBody>
       </p:sp>
@@ -23376,14 +25302,19 @@
               <a:buNone/>
             </a:pPr>
             <a:r>
-              <a:rPr lang="en-US" sz="1700" b="1" dirty="0">
+              <a:rPr lang="ko-KR" sz="1700" b="1" dirty="0">
                 <a:solidFill>
                   <a:schemeClr val="tx2"/>
                 </a:solidFill>
+                <a:latin typeface="Noto Sans KR"/>
+                <a:ea typeface="Noto Sans KR"/>
               </a:rPr>
               <a:t>반복과 유의성</a:t>
             </a:r>
-            <a:endParaRPr lang="en-US" sz="1700" dirty="0"/>
+            <a:endParaRPr lang="ko-KR" sz="1700" dirty="0">
+              <a:latin typeface="Noto Sans KR"/>
+              <a:ea typeface="Noto Sans KR"/>
+            </a:endParaRPr>
           </a:p>
         </p:txBody>
       </p:sp>
@@ -23412,42 +25343,57 @@
               <a:buNone/>
             </a:pPr>
             <a:r>
-              <a:rPr lang="en-US" sz="1350" dirty="0">
+              <a:rPr lang="ko-KR" sz="1350" dirty="0">
                 <a:solidFill>
                   <a:schemeClr val="tx1"/>
                 </a:solidFill>
+                <a:latin typeface="Noto Sans KR"/>
+                <a:ea typeface="Noto Sans KR"/>
               </a:rPr>
               <a:t>7구성 x 60건 x 3회 = 1,260회 실행</a:t>
             </a:r>
-            <a:endParaRPr lang="en-US" sz="1350" dirty="0"/>
+            <a:endParaRPr lang="ko-KR" sz="1350" dirty="0">
+              <a:latin typeface="Noto Sans KR"/>
+              <a:ea typeface="Noto Sans KR"/>
+            </a:endParaRPr>
           </a:p>
           <a:p>
             <a:pPr indent="0" marL="0">
               <a:buNone/>
             </a:pPr>
             <a:r>
-              <a:rPr lang="en-US" sz="1350" dirty="0">
+              <a:rPr lang="ko-KR" sz="1350" dirty="0">
                 <a:solidFill>
                   <a:schemeClr val="tx1"/>
                 </a:solidFill>
+                <a:latin typeface="Noto Sans KR"/>
+                <a:ea typeface="Noto Sans KR"/>
               </a:rPr>
               <a:t>반복 간 95% CI (t 분포)</a:t>
             </a:r>
-            <a:endParaRPr lang="en-US" sz="1350" dirty="0"/>
+            <a:endParaRPr lang="ko-KR" sz="1350" dirty="0">
+              <a:latin typeface="Noto Sans KR"/>
+              <a:ea typeface="Noto Sans KR"/>
+            </a:endParaRPr>
           </a:p>
           <a:p>
             <a:pPr indent="0" marL="0">
               <a:buNone/>
             </a:pPr>
             <a:r>
-              <a:rPr lang="en-US" sz="1350" dirty="0">
+              <a:rPr lang="ko-KR" sz="1350" dirty="0">
                 <a:solidFill>
                   <a:schemeClr val="tx1"/>
                 </a:solidFill>
+                <a:latin typeface="Noto Sans KR"/>
+                <a:ea typeface="Noto Sans KR"/>
               </a:rPr>
               <a:t>구성 간 차이는 질의 단위 paired bootstrap 2,000회</a:t>
             </a:r>
-            <a:endParaRPr lang="en-US" sz="1350" dirty="0"/>
+            <a:endParaRPr lang="ko-KR" sz="1350" dirty="0">
+              <a:latin typeface="Noto Sans KR"/>
+              <a:ea typeface="Noto Sans KR"/>
+            </a:endParaRPr>
           </a:p>
         </p:txBody>
       </p:sp>
@@ -23503,14 +25449,19 @@
               <a:buNone/>
             </a:pPr>
             <a:r>
-              <a:rPr lang="en-US" sz="1700" b="1" dirty="0">
+              <a:rPr lang="ko-KR" sz="1700" b="1" dirty="0">
                 <a:solidFill>
                   <a:schemeClr val="tx2"/>
                 </a:solidFill>
+                <a:latin typeface="Noto Sans KR"/>
+                <a:ea typeface="Noto Sans KR"/>
               </a:rPr>
               <a:t>측정 축 분리</a:t>
             </a:r>
-            <a:endParaRPr lang="en-US" sz="1700" dirty="0"/>
+            <a:endParaRPr lang="ko-KR" sz="1700" dirty="0">
+              <a:latin typeface="Noto Sans KR"/>
+              <a:ea typeface="Noto Sans KR"/>
+            </a:endParaRPr>
           </a:p>
         </p:txBody>
       </p:sp>
@@ -23539,42 +25490,57 @@
               <a:buNone/>
             </a:pPr>
             <a:r>
-              <a:rPr lang="en-US" sz="1350" dirty="0">
+              <a:rPr lang="ko-KR" sz="1350" dirty="0">
                 <a:solidFill>
                   <a:schemeClr val="tx1"/>
                 </a:solidFill>
+                <a:latin typeface="Noto Sans KR"/>
+                <a:ea typeface="Noto Sans KR"/>
               </a:rPr>
               <a:t>검색: Recall@k, 정답 런북 누락·혼입</a:t>
             </a:r>
-            <a:endParaRPr lang="en-US" sz="1350" dirty="0"/>
+            <a:endParaRPr lang="ko-KR" sz="1350" dirty="0">
+              <a:latin typeface="Noto Sans KR"/>
+              <a:ea typeface="Noto Sans KR"/>
+            </a:endParaRPr>
           </a:p>
           <a:p>
             <a:pPr indent="0" marL="0">
               <a:buNone/>
             </a:pPr>
             <a:r>
-              <a:rPr lang="en-US" sz="1350" dirty="0">
+              <a:rPr lang="ko-KR" sz="1350" dirty="0">
                 <a:solidFill>
                   <a:schemeClr val="tx1"/>
                 </a:solidFill>
+                <a:latin typeface="Noto Sans KR"/>
+                <a:ea typeface="Noto Sans KR"/>
               </a:rPr>
               <a:t>답변: 평가 Judge 4지표 + 런북 어구 포함(결정적)</a:t>
             </a:r>
-            <a:endParaRPr lang="en-US" sz="1350" dirty="0"/>
+            <a:endParaRPr lang="ko-KR" sz="1350" dirty="0">
+              <a:latin typeface="Noto Sans KR"/>
+              <a:ea typeface="Noto Sans KR"/>
+            </a:endParaRPr>
           </a:p>
           <a:p>
             <a:pPr indent="0" marL="0">
               <a:buNone/>
             </a:pPr>
             <a:r>
-              <a:rPr lang="en-US" sz="1350" dirty="0">
+              <a:rPr lang="ko-KR" sz="1350" dirty="0">
                 <a:solidFill>
                   <a:schemeClr val="tx1"/>
                 </a:solidFill>
+                <a:latin typeface="Noto Sans KR"/>
+                <a:ea typeface="Noto Sans KR"/>
               </a:rPr>
               <a:t>운영: 건당 비용, p50/p95 지연, 재작성, 동시성, 장애 주입</a:t>
             </a:r>
-            <a:endParaRPr lang="en-US" sz="1350" dirty="0"/>
+            <a:endParaRPr lang="ko-KR" sz="1350" dirty="0">
+              <a:latin typeface="Noto Sans KR"/>
+              <a:ea typeface="Noto Sans KR"/>
+            </a:endParaRPr>
           </a:p>
         </p:txBody>
       </p:sp>
@@ -23630,14 +25596,19 @@
               <a:buNone/>
             </a:pPr>
             <a:r>
-              <a:rPr lang="en-US" sz="1700" b="1" dirty="0">
+              <a:rPr lang="ko-KR" sz="1700" b="1" dirty="0">
                 <a:solidFill>
                   <a:schemeClr val="tx2"/>
                 </a:solidFill>
+                <a:latin typeface="Noto Sans KR"/>
+                <a:ea typeface="Noto Sans KR"/>
               </a:rPr>
               <a:t>평가자 검증</a:t>
             </a:r>
-            <a:endParaRPr lang="en-US" sz="1700" dirty="0"/>
+            <a:endParaRPr lang="ko-KR" sz="1700" dirty="0">
+              <a:latin typeface="Noto Sans KR"/>
+              <a:ea typeface="Noto Sans KR"/>
+            </a:endParaRPr>
           </a:p>
         </p:txBody>
       </p:sp>
@@ -23666,42 +25637,57 @@
               <a:buNone/>
             </a:pPr>
             <a:r>
-              <a:rPr lang="en-US" sz="1350" dirty="0">
+              <a:rPr lang="ko-KR" sz="1350" dirty="0">
                 <a:solidFill>
                   <a:schemeClr val="tx1"/>
                 </a:solidFill>
+                <a:latin typeface="Noto Sans KR"/>
+                <a:ea typeface="Noto Sans KR"/>
               </a:rPr>
               <a:t>평가 Judge는 gpt-4o로 고정 (파이프라인 Judge gpt-4o-mini와 분리)</a:t>
             </a:r>
-            <a:endParaRPr lang="en-US" sz="1350" dirty="0"/>
+            <a:endParaRPr lang="ko-KR" sz="1350" dirty="0">
+              <a:latin typeface="Noto Sans KR"/>
+              <a:ea typeface="Noto Sans KR"/>
+            </a:endParaRPr>
           </a:p>
           <a:p>
             <a:pPr indent="0" marL="0">
               <a:buNone/>
             </a:pPr>
             <a:r>
-              <a:rPr lang="en-US" sz="1350" dirty="0">
+              <a:rPr lang="ko-KR" sz="1350" dirty="0">
                 <a:solidFill>
                   <a:schemeClr val="tx1"/>
                 </a:solidFill>
+                <a:latin typeface="Noto Sans KR"/>
+                <a:ea typeface="Noto Sans KR"/>
               </a:rPr>
               <a:t>독립 평가자(Claude, LLM) 블라인드 60건 → 지표별 kappa, 오판 유형</a:t>
             </a:r>
-            <a:endParaRPr lang="en-US" sz="1350" dirty="0"/>
+            <a:endParaRPr lang="ko-KR" sz="1350" dirty="0">
+              <a:latin typeface="Noto Sans KR"/>
+              <a:ea typeface="Noto Sans KR"/>
+            </a:endParaRPr>
           </a:p>
           <a:p>
             <a:pPr indent="0" marL="0">
               <a:buNone/>
             </a:pPr>
             <a:r>
-              <a:rPr lang="en-US" sz="1350" dirty="0">
+              <a:rPr lang="ko-KR" sz="1350" dirty="0">
                 <a:solidFill>
                   <a:schemeClr val="tx1"/>
                 </a:solidFill>
+                <a:latin typeface="Noto Sans KR"/>
+                <a:ea typeface="Noto Sans KR"/>
               </a:rPr>
               <a:t>사람 표본 20건 라벨은 아직 없음</a:t>
             </a:r>
-            <a:endParaRPr lang="en-US" sz="1350" dirty="0"/>
+            <a:endParaRPr lang="ko-KR" sz="1350" dirty="0">
+              <a:latin typeface="Noto Sans KR"/>
+              <a:ea typeface="Noto Sans KR"/>
+            </a:endParaRPr>
           </a:p>
         </p:txBody>
       </p:sp>
@@ -23737,16 +25723,24 @@
                 <a:solidFill>
                   <a:schemeClr val="accent3"/>
                 </a:solidFill>
+                <a:latin typeface="Noto Sans KR"/>
+                <a:ea typeface="Noto Sans KR"/>
               </a:defRPr>
             </a:lvl1pPr>
           </a:lstStyle>
           <a:p>
             <a:pPr algn="r"/>
             <a:fld id="{F7021451-1387-4CA6-816F-3879F97B5CBC}" type="slidenum">
-              <a:rPr b="0" lang="en-US"/>
+              <a:rPr b="0" lang="ko-KR">
+                <a:latin typeface="Noto Sans KR"/>
+                <a:ea typeface="Noto Sans KR"/>
+              </a:rPr>
               <a:t>9</a:t>
             </a:fld>
-            <a:endParaRPr lang="en-US"/>
+            <a:endParaRPr lang="ko-KR">
+              <a:latin typeface="Noto Sans KR"/>
+              <a:ea typeface="Noto Sans KR"/>
+            </a:endParaRPr>
           </a:p>
         </p:txBody>
       </p:sp>

--- a/deck/incident-agent-ablation_5min_canva.pptx
+++ b/deck/incident-agent-ablation_5min_canva.pptx
@@ -114,48 +114,48 @@
   <p:extLst>
     <p:ext uri="{521415D9-36F7-43E2-AB2F-B90AF26B5E84}">
       <p14:sectionLst xmlns:p14="http://schemas.microsoft.com/office/powerpoint/2010/main">
-        <p14:section name="표지" id="{e1deac56-f6dd-2f51-9ae3-b6b86dd9784b}">
+        <p14:section name="표지" id="{19c29b4e-82a5-3436-0e56-dce09f1bad94}">
           <p14:sldIdLst>
             <p14:sldId id="256"/>
           </p14:sldIdLst>
         </p14:section>
-        <p14:section name="요약" id="{9ca0b390-78f0-2119-827d-a29b108390b2}">
+        <p14:section name="요약" id="{4a837560-6a9c-d23b-1735-c6038dfd369b}">
           <p14:sldIdLst>
             <p14:sldId id="257"/>
             <p14:sldId id="258"/>
             <p14:sldId id="259"/>
           </p14:sldIdLst>
         </p14:section>
-        <p14:section name="문제" id="{91c33122-1865-e426-1bbb-a6161130ca7d}">
+        <p14:section name="문제" id="{bc235405-5406-c753-b862-ec2cf17b7749}">
           <p14:sldIdLst>
             <p14:sldId id="261"/>
           </p14:sldIdLst>
         </p14:section>
-        <p14:section name="개선" id="{15c4d3cd-abd8-9e5c-cb2d-c9ed3fd259f7}">
+        <p14:section name="개선" id="{0d7ba117-008e-03d9-3253-60a4eb252105}">
           <p14:sldIdLst/>
         </p14:section>
-        <p14:section name="평가 설계" id="{d2aa86db-52a7-8dae-b485-db36e4965d13}">
+        <p14:section name="평가 설계" id="{3b7e0835-c8f3-599d-4faa-ac84fe51446f}">
           <p14:sldIdLst/>
         </p14:section>
-        <p14:section name="Before/After" id="{0d8c8eb6-3055-46da-b327-b9d93b7ec0ab}">
+        <p14:section name="Before/After" id="{619ffe5c-ca51-ca01-0c2a-0c49e219c20d}">
           <p14:sldIdLst>
             <p14:sldId id="266"/>
           </p14:sldIdLst>
         </p14:section>
-        <p14:section name="평가자 검증" id="{56abb5f2-8f5b-96d2-786a-2a957098d0c8}">
+        <p14:section name="평가자 검증" id="{4dc08d4c-f131-0b72-b887-eaca3af8b4ac}">
           <p14:sldIdLst/>
         </p14:section>
-        <p14:section name="시연" id="{1c25a6ce-fdc9-6e57-17e3-c540054adc3f}">
+        <p14:section name="시연" id="{266e765d-6055-9d97-63f5-6fab8aba4b35}">
           <p14:sldIdLst>
             <p14:sldId id="271"/>
           </p14:sldIdLst>
         </p14:section>
-        <p14:section name="한계" id="{31fadf58-a821-486a-ef6a-796a9677be7d}">
+        <p14:section name="한계" id="{6fcc838a-7d6f-7714-a634-455c28425d63}">
           <p14:sldIdLst>
             <p14:sldId id="272"/>
           </p14:sldIdLst>
         </p14:section>
-        <p14:section name="마무리" id="{bc933ba9-fa96-8908-1c26-fdfca7d83db8}">
+        <p14:section name="마무리" id="{e5f57896-3ab2-b85b-41d8-f06d44ce175f}">
           <p14:sldIdLst/>
         </p14:section>
       </p14:sectionLst>
@@ -2981,7 +2981,7 @@
           <a:p>
             <a:r>
               <a:rPr lang="en-US" dirty="0"/>
-              <a:t>시장은 이미 AI SRE로 가고 있고 구조도 우리와 같습니다. 그런데 공개된 수치는 대부분 업체 주장이고, 효과를 부품별로 잰 공개 사례는 찾지 못했습니다. 이 과제는 그 빈칸을 채웠습니다.</a:t>
+              <a:t>시장은 AI SRE로 가고 있고, 런북 근거와 MCP 연동이 흔합니다. 그런데 공개된 수치는 대부분 업체 주장이고, 조사한 국내 기업 사례에서는 부품별 효과를 잰 공개 자료를 찾지 못했습니다. 이 과제는 합성 평가셋과 AI 평가자라는 한계 안에서 부품별 기여를 분리해 보였습니다.</a:t>
             </a:r>
             <a:endParaRPr lang="en-US" dirty="0"/>
           </a:p>
@@ -17700,7 +17700,7 @@
                 <a:latin typeface="Noto Sans KR"/>
                 <a:ea typeface="Noto Sans KR"/>
               </a:rPr>
-              <a:t>최근 중대 장애 비용이 10만 달러를 넘었다는 응답 (Uptime Institute 2025). 절차 미준수 장애도 늘었다</a:t>
+              <a:t>최근 중대 장애 비용이 10만 달러를 넘었다는 응답 (Uptime Institute 2025). 같은 보고서에서 절차 미준수 장애도 늘었다</a:t>
             </a:r>
             <a:endParaRPr lang="ko-KR" sz="1350" dirty="0">
               <a:latin typeface="Noto Sans KR"/>
@@ -17809,7 +17809,7 @@
                 <a:latin typeface="Noto Sans KR"/>
                 <a:ea typeface="Noto Sans KR"/>
               </a:rPr>
-              <a:t>국외 정식 출시 AI SRE: PagerDuty·Datadog·Azure·AWS·Grafana. 국내도 SK AX·삼성계정·롯데ON·현대오토에버·GS리테일</a:t>
+              <a:t>확인한 국외 정식 출시 AI SRE: PagerDuty·Datadog·Azure·AWS·Grafana. 국내도 SK AX·삼성계정·롯데ON·GS리테일 등</a:t>
             </a:r>
             <a:endParaRPr lang="ko-KR" sz="1350" dirty="0">
               <a:latin typeface="Noto Sans KR"/>
@@ -17918,7 +17918,7 @@
                 <a:latin typeface="Noto Sans KR"/>
                 <a:ea typeface="Noto Sans KR"/>
               </a:rPr>
-              <a:t>조사 범위의 국내 공개 사례 중 고정 평가셋·Ablation 공개. 국외 수치도 대부분 '최대 몇 %' 업체 주장</a:t>
+              <a:t>조사한 국내 기업·제품 공개 사례 중 고정 평가셋·Ablation 공개. 국외 수치도 대부분 '최대 몇 %' 업체 주장</a:t>
             </a:r>
             <a:endParaRPr lang="ko-KR" sz="1350" dirty="0">
               <a:latin typeface="Noto Sans KR"/>
@@ -17989,7 +17989,7 @@
                 <a:latin typeface="Noto Sans KR"/>
                 <a:ea typeface="Noto Sans KR"/>
               </a:rPr>
-              <a:t>현업 구조는 우리와 같다: 런북 근거 + MCP 도구 연동 + 조치 전 사람 승인</a:t>
+              <a:t>런북·과거 장애 근거, MCP 도구 연동이 흔하다. 실행을 맡기는 정도는 제품마다 다르다 (우리는 제안만)</a:t>
             </a:r>
             <a:endParaRPr lang="ko-KR" sz="1400" dirty="0">
               <a:latin typeface="Noto Sans KR"/>
@@ -18012,7 +18012,7 @@
                 <a:latin typeface="Noto Sans KR"/>
                 <a:ea typeface="Noto Sans KR"/>
               </a:rPr>
-              <a:t>Datadog: 기능 하나가 일부 조사는 개선하고 다른 조사는 나쁘게 만든 사례 공개 → 부품을 하나씩 켜고 끄며 재야 하는 이유</a:t>
+              <a:t>Datadog: 기능 하나가 무관한 신호를 끌어와 다른 조사를 나쁘게 만든 사례 공개 → 부품을 하나씩 켜고 끄며 재야 하는 이유</a:t>
             </a:r>
             <a:endParaRPr lang="ko-KR" sz="1400" dirty="0">
               <a:latin typeface="Noto Sans KR"/>
@@ -18035,7 +18035,7 @@
                 <a:latin typeface="Noto Sans KR"/>
                 <a:ea typeface="Noto Sans KR"/>
               </a:rPr>
-              <a:t>연구: SOP를 넣자 RCA 정확도 35.5% → 64.0% (Flow-of-Action, WWW'25) · 외부 피드백 없는 자기교정은 효과 없음 (Huang 외, ICLR'24)</a:t>
+              <a:t>연구: SOP 기반 멀티에이전트가 ReAct 대비 RCA 정확도 35.5% → 64.0% (Flow-of-Action) · 추론 과제에서 외부 피드백 없는 자기교정은 효과 없음 (Huang 외, ICLR'24)</a:t>
             </a:r>
             <a:endParaRPr lang="ko-KR" sz="1400" dirty="0">
               <a:latin typeface="Noto Sans KR"/>
@@ -18058,7 +18058,7 @@
                 <a:latin typeface="Noto Sans KR"/>
                 <a:ea typeface="Noto Sans KR"/>
               </a:rPr>
-              <a:t>국내 연구: RCA 에이전트 실패 1위는 데이터 해석 환각 71.2% (오케스트로·한양대, ASPLOS'26 AIOps 워크숍)</a:t>
+              <a:t>국내 연구: RCA 에이전트 실패 1위는 데이터 해석 환각 71.2% (오케스트로·한양대, ASPLOS'26 AIOps 워크숍, 보도 기준)</a:t>
             </a:r>
             <a:endParaRPr lang="ko-KR" sz="1400" dirty="0">
               <a:latin typeface="Noto Sans KR"/>
@@ -18099,7 +18099,7 @@
                 <a:latin typeface="Noto Sans KR"/>
                 <a:ea typeface="Noto Sans KR"/>
               </a:rPr>
-              <a:t>출처 전체: docs/research/00_요약_실태현황.md (국외 18개 제품·국내 19건·논문 38건, 2026-10-22 확인, 업체 수치는 업체 주장)</a:t>
+              <a:t>출처 전체: docs/research/00_요약_실태현황.md (국외 18개 제품·국내 20건·논문 37건, 2026-10-22 확인, 업체 수치는 업체 주장)</a:t>
             </a:r>
             <a:endParaRPr lang="ko-KR" sz="1050" dirty="0">
               <a:latin typeface="Noto Sans KR"/>
@@ -25796,10 +25796,10 @@
     <a:fontScheme name="Incident Ablation">
       <a:majorFont>
         <a:latin typeface="Noto Sans KR"/>
-        <a:ea typeface="Noto Sans KR"/>
+        <a:ea typeface=""/>
         <a:cs typeface=""/>
         <a:font script="Jpan" typeface="游ゴシック Light"/>
-        <a:font script="Hang" typeface="Noto Sans KR"/>
+        <a:font script="Hang" typeface="맑은 고딕"/>
         <a:font script="Hans" typeface="等线 Light"/>
         <a:font script="Hant" typeface="新細明體"/>
         <a:font script="Arab" typeface="Times New Roman"/>
@@ -25848,10 +25848,10 @@
       </a:majorFont>
       <a:minorFont>
         <a:latin typeface="Noto Sans KR"/>
-        <a:ea typeface="Noto Sans KR"/>
+        <a:ea typeface=""/>
         <a:cs typeface=""/>
         <a:font script="Jpan" typeface="游ゴシック"/>
-        <a:font script="Hang" typeface="Noto Sans KR"/>
+        <a:font script="Hang" typeface="맑은 고딕"/>
         <a:font script="Hans" typeface="等线"/>
         <a:font script="Hant" typeface="新細明體"/>
         <a:font script="Arab" typeface="Arial"/>

--- a/deck/incident-agent-ablation_5min_canva.pptx
+++ b/deck/incident-agent-ablation_5min_canva.pptx
@@ -114,48 +114,48 @@
   <p:extLst>
     <p:ext uri="{521415D9-36F7-43E2-AB2F-B90AF26B5E84}">
       <p14:sectionLst xmlns:p14="http://schemas.microsoft.com/office/powerpoint/2010/main">
-        <p14:section name="표지" id="{19c29b4e-82a5-3436-0e56-dce09f1bad94}">
+        <p14:section name="표지" id="{685b3c14-a99a-fa9f-17d0-2d736ba95169}">
           <p14:sldIdLst>
             <p14:sldId id="256"/>
           </p14:sldIdLst>
         </p14:section>
-        <p14:section name="요약" id="{4a837560-6a9c-d23b-1735-c6038dfd369b}">
+        <p14:section name="요약" id="{38abf3f0-10a4-bd3c-183a-188d73447a3f}">
           <p14:sldIdLst>
             <p14:sldId id="257"/>
             <p14:sldId id="258"/>
             <p14:sldId id="259"/>
           </p14:sldIdLst>
         </p14:section>
-        <p14:section name="문제" id="{bc235405-5406-c753-b862-ec2cf17b7749}">
+        <p14:section name="문제" id="{a3581a91-dfea-fdb5-26cd-19d66e6acb43}">
           <p14:sldIdLst>
             <p14:sldId id="261"/>
           </p14:sldIdLst>
         </p14:section>
-        <p14:section name="개선" id="{0d7ba117-008e-03d9-3253-60a4eb252105}">
+        <p14:section name="개선" id="{67ba1c38-761b-8d69-3745-0d6626f531bc}">
           <p14:sldIdLst/>
         </p14:section>
-        <p14:section name="평가 설계" id="{3b7e0835-c8f3-599d-4faa-ac84fe51446f}">
+        <p14:section name="평가 설계" id="{f9823ef1-1e5b-2752-b466-dec291452115}">
           <p14:sldIdLst/>
         </p14:section>
-        <p14:section name="Before/After" id="{619ffe5c-ca51-ca01-0c2a-0c49e219c20d}">
+        <p14:section name="Before/After" id="{516871cb-8bfc-6eb8-2d24-3d6df11a86c6}">
           <p14:sldIdLst>
             <p14:sldId id="266"/>
           </p14:sldIdLst>
         </p14:section>
-        <p14:section name="평가자 검증" id="{4dc08d4c-f131-0b72-b887-eaca3af8b4ac}">
+        <p14:section name="평가자 검증" id="{613061f1-82e3-ecc2-f209-f145a32b3a01}">
           <p14:sldIdLst/>
         </p14:section>
-        <p14:section name="시연" id="{266e765d-6055-9d97-63f5-6fab8aba4b35}">
+        <p14:section name="시연" id="{cc01d0e5-333c-01f9-8b72-8e2d11c1aad3}">
           <p14:sldIdLst>
             <p14:sldId id="271"/>
           </p14:sldIdLst>
         </p14:section>
-        <p14:section name="한계" id="{6fcc838a-7d6f-7714-a634-455c28425d63}">
+        <p14:section name="한계" id="{173451e2-09c7-ee4b-fc9b-3e6f3149bc6e}">
           <p14:sldIdLst>
             <p14:sldId id="272"/>
           </p14:sldIdLst>
         </p14:section>
-        <p14:section name="마무리" id="{e5f57896-3ab2-b85b-41d8-f06d44ce175f}">
+        <p14:section name="마무리" id="{62a896b7-1e28-b701-d997-e032a0c4fd28}">
           <p14:sldIdLst/>
         </p14:section>
       </p14:sectionLst>
@@ -5941,7 +5941,7 @@
                           <a:latin typeface="Noto Sans KR"/>
                           <a:ea typeface="Noto Sans KR"/>
                         </a:rPr>
-                        <a:t>+2.3초 ★</a:t>
+                        <a:t>+2.7초 ★</a:t>
                       </a:r>
                       <a:endParaRPr lang="ko-KR" sz="1250" dirty="0">
                         <a:latin typeface="Noto Sans KR"/>
@@ -6832,14 +6832,14 @@
                         <a:buNone/>
                       </a:pPr>
                       <a:r>
-                        <a:rPr lang="ko-KR" sz="1250" b="1" dirty="0">
+                        <a:rPr lang="ko-KR" sz="1250" dirty="0">
                           <a:solidFill>
                             <a:srgbClr val="1A2230"/>
                           </a:solidFill>
                           <a:latin typeface="Noto Sans KR"/>
                           <a:ea typeface="Noto Sans KR"/>
                         </a:rPr>
-                        <a:t>-0.7초 ★</a:t>
+                        <a:t>+0.1초</a:t>
                       </a:r>
                       <a:endParaRPr lang="ko-KR" sz="1250" dirty="0">
                         <a:latin typeface="Noto Sans KR"/>
@@ -6884,9 +6884,6 @@
                       <a:headEnd type="none" w="med" len="med"/>
                       <a:tailEnd type="none" w="med" len="med"/>
                     </a:lnB>
-                    <a:solidFill>
-                      <a:srgbClr val="D7EFE6"/>
-                    </a:solidFill>
                   </a:tcPr>
                 </a:tc>
               </a:tr>
@@ -7288,7 +7285,7 @@
                           <a:latin typeface="Noto Sans KR"/>
                           <a:ea typeface="Noto Sans KR"/>
                         </a:rPr>
-                        <a:t>+0.1초</a:t>
+                        <a:t>+0.0초</a:t>
                       </a:r>
                       <a:endParaRPr lang="ko-KR" sz="1250" dirty="0">
                         <a:latin typeface="Noto Sans KR"/>
@@ -7734,7 +7731,7 @@
                           <a:latin typeface="Noto Sans KR"/>
                           <a:ea typeface="Noto Sans KR"/>
                         </a:rPr>
-                        <a:t>-0.9초 ★</a:t>
+                        <a:t>+0.3초 ★</a:t>
                       </a:r>
                       <a:endParaRPr lang="ko-KR" sz="1250" dirty="0">
                         <a:latin typeface="Noto Sans KR"/>
@@ -7780,7 +7777,7 @@
                       <a:tailEnd type="none" w="med" len="med"/>
                     </a:lnB>
                     <a:solidFill>
-                      <a:srgbClr val="D7EFE6"/>
+                      <a:srgbClr val="FBE3D3"/>
                     </a:solidFill>
                   </a:tcPr>
                 </a:tc>
@@ -8195,7 +8192,7 @@
                           <a:latin typeface="Noto Sans KR"/>
                           <a:ea typeface="Noto Sans KR"/>
                         </a:rPr>
-                        <a:t>+1.4초 ★</a:t>
+                        <a:t>+2.5초 ★</a:t>
                       </a:r>
                       <a:endParaRPr lang="ko-KR" sz="1250" dirty="0">
                         <a:latin typeface="Noto Sans KR"/>
@@ -8282,7 +8279,7 @@
                 <a:latin typeface="Noto Sans KR"/>
                 <a:ea typeface="Noto Sans KR"/>
               </a:rPr>
-              <a:t>★ = 95% 신뢰구간이 0을 포함하지 않음 (holdout 36건, 질의 단위 paired bootstrap 2,000회). 초록 = 좋아짐, 주황 = 나빠짐. 표시 없는 칸은 차이가 있다고 말할 수 없음. 캐스케이드·v2 위 비용·전체 행의 지연은 재측정 부하(2프로세스 vs 7프로세스) 차이가 섞였을 수 있음.</a:t>
+              <a:t>★ = 95% 신뢰구간이 0을 포함하지 않음 (holdout 36건, 질의 단위 paired bootstrap 2,000회). 초록 = 좋아짐, 주황 = 나빠짐. 표시 없는 칸은 차이가 있다고 말할 수 없음. 지연은 7구성을 같은 부하로 다시 잰 값(평가 Judge 생략, scripts/run_latency_ctrl.sh).</a:t>
             </a:r>
             <a:endParaRPr lang="ko-KR" sz="1150" dirty="0">
               <a:latin typeface="Noto Sans KR"/>
@@ -9410,7 +9407,7 @@
                           <a:latin typeface="Noto Sans KR"/>
                           <a:ea typeface="Noto Sans KR"/>
                         </a:rPr>
-                        <a:t>8.3초</a:t>
+                        <a:t>8.6초</a:t>
                       </a:r>
                       <a:endParaRPr lang="ko-KR" sz="1300" dirty="0">
                         <a:latin typeface="Noto Sans KR"/>
@@ -9916,7 +9913,7 @@
                           <a:latin typeface="Noto Sans KR"/>
                           <a:ea typeface="Noto Sans KR"/>
                         </a:rPr>
-                        <a:t>8.9초</a:t>
+                        <a:t>9.2초</a:t>
                       </a:r>
                       <a:endParaRPr lang="ko-KR" sz="1300" dirty="0">
                         <a:latin typeface="Noto Sans KR"/>
@@ -10422,7 +10419,7 @@
                           <a:latin typeface="Noto Sans KR"/>
                           <a:ea typeface="Noto Sans KR"/>
                         </a:rPr>
-                        <a:t>17.1초</a:t>
+                        <a:t>16.1초</a:t>
                       </a:r>
                       <a:endParaRPr lang="ko-KR" sz="1300" dirty="0">
                         <a:latin typeface="Noto Sans KR"/>
@@ -10928,7 +10925,7 @@
                           <a:latin typeface="Noto Sans KR"/>
                           <a:ea typeface="Noto Sans KR"/>
                         </a:rPr>
-                        <a:t>12.0초</a:t>
+                        <a:t>12.3초</a:t>
                       </a:r>
                       <a:endParaRPr lang="ko-KR" sz="1300" dirty="0">
                         <a:latin typeface="Noto Sans KR"/>
@@ -11434,7 +11431,7 @@
                           <a:latin typeface="Noto Sans KR"/>
                           <a:ea typeface="Noto Sans KR"/>
                         </a:rPr>
-                        <a:t>10.6초</a:t>
+                        <a:t>12.2초</a:t>
                       </a:r>
                       <a:endParaRPr lang="ko-KR" sz="1300" dirty="0">
                         <a:latin typeface="Noto Sans KR"/>
@@ -11940,7 +11937,7 @@
                           <a:latin typeface="Noto Sans KR"/>
                           <a:ea typeface="Noto Sans KR"/>
                         </a:rPr>
-                        <a:t>11.8초</a:t>
+                        <a:t>12.1초</a:t>
                       </a:r>
                       <a:endParaRPr lang="ko-KR" sz="1300" dirty="0">
                         <a:latin typeface="Noto Sans KR"/>
@@ -12446,7 +12443,7 @@
                           <a:latin typeface="Noto Sans KR"/>
                           <a:ea typeface="Noto Sans KR"/>
                         </a:rPr>
-                        <a:t>9.8초</a:t>
+                        <a:t>12.1초</a:t>
                       </a:r>
                       <a:endParaRPr lang="ko-KR" sz="1300" dirty="0">
                         <a:latin typeface="Noto Sans KR"/>
@@ -12683,7 +12680,7 @@
                 <a:latin typeface="Noto Sans KR"/>
                 <a:ea typeface="Noto Sans KR"/>
               </a:rPr>
-              <a:t>holdout 36건, 3회 평균. 비용은 OpenAI 공개 단가 x 실측 토큰 추정치 (평가 Judge 제외). 지연: 5구성은 7프로세스 동시 부하, +비용·final은 캐시 버그 수정 뒤 2프로세스로 재측정 → 두 구성의 지연 차이엔 부하 차이가 섞였을 수 있음</a:t>
+              <a:t>holdout 36건, 3회 평균. 비용은 OpenAI 공개 단가 x 실측 토큰 추정치 (평가 Judge 제외). p95 지연은 7구성을 같은 부하(동시 7프로세스 x 2)로 다시 잰 값</a:t>
             </a:r>
             <a:endParaRPr lang="ko-KR" sz="1050" dirty="0">
               <a:latin typeface="Noto Sans KR"/>
@@ -18604,7 +18601,7 @@
                 <a:latin typeface="Noto Sans KR"/>
                 <a:ea typeface="Noto Sans KR"/>
               </a:rPr>
-              <a:t>지연은 +2.3초 (유의)</a:t>
+              <a:t>지연은 +2.7초 (유의)</a:t>
             </a:r>
             <a:endParaRPr lang="ko-KR" sz="1350" dirty="0">
               <a:latin typeface="Noto Sans KR"/>

--- a/deck/incident-agent-ablation_5min_canva.pptx
+++ b/deck/incident-agent-ablation_5min_canva.pptx
@@ -114,48 +114,48 @@
   <p:extLst>
     <p:ext uri="{521415D9-36F7-43E2-AB2F-B90AF26B5E84}">
       <p14:sectionLst xmlns:p14="http://schemas.microsoft.com/office/powerpoint/2010/main">
-        <p14:section name="표지" id="{685b3c14-a99a-fa9f-17d0-2d736ba95169}">
+        <p14:section name="표지" id="{31f4d77a-f818-1cf0-75a2-9d6f518b16a7}">
           <p14:sldIdLst>
             <p14:sldId id="256"/>
           </p14:sldIdLst>
         </p14:section>
-        <p14:section name="요약" id="{38abf3f0-10a4-bd3c-183a-188d73447a3f}">
+        <p14:section name="요약" id="{122ca238-5c13-4481-a58d-6e12bde3b931}">
           <p14:sldIdLst>
             <p14:sldId id="257"/>
             <p14:sldId id="258"/>
             <p14:sldId id="259"/>
           </p14:sldIdLst>
         </p14:section>
-        <p14:section name="문제" id="{a3581a91-dfea-fdb5-26cd-19d66e6acb43}">
+        <p14:section name="문제" id="{68accf3e-d099-9b28-434b-ff43e59ff1ab}">
           <p14:sldIdLst>
             <p14:sldId id="261"/>
           </p14:sldIdLst>
         </p14:section>
-        <p14:section name="개선" id="{67ba1c38-761b-8d69-3745-0d6626f531bc}">
+        <p14:section name="개선" id="{c409db7f-3e83-1108-548c-a9a00e4b607b}">
           <p14:sldIdLst/>
         </p14:section>
-        <p14:section name="평가 설계" id="{f9823ef1-1e5b-2752-b466-dec291452115}">
+        <p14:section name="평가 설계" id="{d9a8af09-24f8-d9ea-f02d-cba78130d55c}">
           <p14:sldIdLst/>
         </p14:section>
-        <p14:section name="Before/After" id="{516871cb-8bfc-6eb8-2d24-3d6df11a86c6}">
+        <p14:section name="Before/After" id="{03e8c66c-86a8-b3cb-5ab2-a01ad0ecfeb0}">
           <p14:sldIdLst>
             <p14:sldId id="266"/>
           </p14:sldIdLst>
         </p14:section>
-        <p14:section name="평가자 검증" id="{613061f1-82e3-ecc2-f209-f145a32b3a01}">
+        <p14:section name="평가자 검증" id="{4bb9fa04-447e-9244-04df-113b56231d0d}">
           <p14:sldIdLst/>
         </p14:section>
-        <p14:section name="시연" id="{cc01d0e5-333c-01f9-8b72-8e2d11c1aad3}">
+        <p14:section name="시연" id="{66a02e69-a24f-3cf8-6e0c-00abfd4258b2}">
           <p14:sldIdLst>
             <p14:sldId id="271"/>
           </p14:sldIdLst>
         </p14:section>
-        <p14:section name="한계" id="{173451e2-09c7-ee4b-fc9b-3e6f3149bc6e}">
+        <p14:section name="한계" id="{77445cdf-971d-7082-3530-e354f5b1feac}">
           <p14:sldIdLst>
             <p14:sldId id="272"/>
           </p14:sldIdLst>
         </p14:section>
-        <p14:section name="마무리" id="{62a896b7-1e28-b701-d997-e032a0c4fd28}">
+        <p14:section name="마무리" id="{e6d4fd1e-3781-85cd-4bb4-bf4699f4c636}">
           <p14:sldIdLst/>
         </p14:section>
       </p14:sectionLst>
@@ -4581,7 +4581,26 @@
                 <a:latin typeface="Noto Sans KR"/>
                 <a:ea typeface="Noto Sans KR"/>
               </a:rPr>
-              <a:t>Before/After 2: 개선별 기여도 — 같은 질의끼리 짝지어 비교했다</a:t>
+              <a:t>Before/After 2: 개선별 기여도</a:t>
+            </a:r>
+            <a:endParaRPr lang="ko-KR" sz="2800" dirty="0">
+              <a:latin typeface="Noto Sans KR"/>
+              <a:ea typeface="Noto Sans KR"/>
+            </a:endParaRPr>
+          </a:p>
+          <a:p>
+            <a:pPr algn="l" indent="0" marL="0">
+              <a:buNone/>
+            </a:pPr>
+            <a:r>
+              <a:rPr lang="ko-KR" sz="2800" b="1" dirty="0">
+                <a:solidFill>
+                  <a:schemeClr val="tx2"/>
+                </a:solidFill>
+                <a:latin typeface="Noto Sans KR"/>
+                <a:ea typeface="Noto Sans KR"/>
+              </a:rPr>
+              <a:t>같은 질의끼리 짝지어 비교했다</a:t>
             </a:r>
             <a:endParaRPr lang="ko-KR" sz="2800" dirty="0">
               <a:latin typeface="Noto Sans KR"/>
@@ -8441,7 +8460,26 @@
                 <a:latin typeface="Noto Sans KR"/>
                 <a:ea typeface="Noto Sans KR"/>
               </a:rPr>
-              <a:t>Before/After 3: 품질을 얻은 대가 — 트레이드오프 한 장</a:t>
+              <a:t>Before/After 3: 품질을 얻은 대가</a:t>
+            </a:r>
+            <a:endParaRPr lang="ko-KR" sz="2800" dirty="0">
+              <a:latin typeface="Noto Sans KR"/>
+              <a:ea typeface="Noto Sans KR"/>
+            </a:endParaRPr>
+          </a:p>
+          <a:p>
+            <a:pPr algn="l" indent="0" marL="0">
+              <a:buNone/>
+            </a:pPr>
+            <a:r>
+              <a:rPr lang="ko-KR" sz="2800" b="1" dirty="0">
+                <a:solidFill>
+                  <a:schemeClr val="tx2"/>
+                </a:solidFill>
+                <a:latin typeface="Noto Sans KR"/>
+                <a:ea typeface="Noto Sans KR"/>
+              </a:rPr>
+              <a:t>트레이드오프 한 장</a:t>
             </a:r>
             <a:endParaRPr lang="ko-KR" sz="2800" dirty="0">
               <a:latin typeface="Noto Sans KR"/>
